--- a/pptx/Lecture0.pptx
+++ b/pptx/Lecture0.pptx
@@ -213,7 +213,7 @@
           <a:p>
             <a:fld id="{D77EEDEE-9F25-1248-8553-BC05D4D1E003}" type="datetimeFigureOut">
               <a:rPr lang="en-US" smtClean="0"/>
-              <a:t>8/19/26</a:t>
+              <a:t>8/20/26</a:t>
             </a:fld>
             <a:endParaRPr lang="en-US"/>
           </a:p>
@@ -1372,7 +1372,7 @@
           <a:p>
             <a:fld id="{1BF61C71-767E-B84C-BFB3-7B18856D27F4}" type="datetimeFigureOut">
               <a:rPr lang="en-US" smtClean="0"/>
-              <a:t>8/19/26</a:t>
+              <a:t>8/20/26</a:t>
             </a:fld>
             <a:endParaRPr lang="en-US"/>
           </a:p>
@@ -1580,7 +1580,7 @@
           <a:p>
             <a:fld id="{1BF61C71-767E-B84C-BFB3-7B18856D27F4}" type="datetimeFigureOut">
               <a:rPr lang="en-US" smtClean="0"/>
-              <a:t>8/19/26</a:t>
+              <a:t>8/20/26</a:t>
             </a:fld>
             <a:endParaRPr lang="en-US"/>
           </a:p>
@@ -1798,7 +1798,7 @@
           <a:p>
             <a:fld id="{1BF61C71-767E-B84C-BFB3-7B18856D27F4}" type="datetimeFigureOut">
               <a:rPr lang="en-US" smtClean="0"/>
-              <a:t>8/19/26</a:t>
+              <a:t>8/20/26</a:t>
             </a:fld>
             <a:endParaRPr lang="en-US"/>
           </a:p>
@@ -2006,7 +2006,7 @@
           <a:p>
             <a:fld id="{1BF61C71-767E-B84C-BFB3-7B18856D27F4}" type="datetimeFigureOut">
               <a:rPr lang="en-US" smtClean="0"/>
-              <a:t>8/19/26</a:t>
+              <a:t>8/20/26</a:t>
             </a:fld>
             <a:endParaRPr lang="en-US"/>
           </a:p>
@@ -2290,7 +2290,7 @@
           <a:p>
             <a:fld id="{1BF61C71-767E-B84C-BFB3-7B18856D27F4}" type="datetimeFigureOut">
               <a:rPr lang="en-US" smtClean="0"/>
-              <a:t>8/19/26</a:t>
+              <a:t>8/20/26</a:t>
             </a:fld>
             <a:endParaRPr lang="en-US"/>
           </a:p>
@@ -2566,7 +2566,7 @@
           <a:p>
             <a:fld id="{1BF61C71-767E-B84C-BFB3-7B18856D27F4}" type="datetimeFigureOut">
               <a:rPr lang="en-US" smtClean="0"/>
-              <a:t>8/19/26</a:t>
+              <a:t>8/20/26</a:t>
             </a:fld>
             <a:endParaRPr lang="en-US"/>
           </a:p>
@@ -2989,7 +2989,7 @@
           <a:p>
             <a:fld id="{1BF61C71-767E-B84C-BFB3-7B18856D27F4}" type="datetimeFigureOut">
               <a:rPr lang="en-US" smtClean="0"/>
-              <a:t>8/19/26</a:t>
+              <a:t>8/20/26</a:t>
             </a:fld>
             <a:endParaRPr lang="en-US"/>
           </a:p>
@@ -3139,7 +3139,7 @@
           <a:p>
             <a:fld id="{1BF61C71-767E-B84C-BFB3-7B18856D27F4}" type="datetimeFigureOut">
               <a:rPr lang="en-US" smtClean="0"/>
-              <a:t>8/19/26</a:t>
+              <a:t>8/20/26</a:t>
             </a:fld>
             <a:endParaRPr lang="en-US"/>
           </a:p>
@@ -3260,7 +3260,7 @@
           <a:p>
             <a:fld id="{1BF61C71-767E-B84C-BFB3-7B18856D27F4}" type="datetimeFigureOut">
               <a:rPr lang="en-US" smtClean="0"/>
-              <a:t>8/19/26</a:t>
+              <a:t>8/20/26</a:t>
             </a:fld>
             <a:endParaRPr lang="en-US"/>
           </a:p>
@@ -3581,7 +3581,7 @@
           <a:p>
             <a:fld id="{1BF61C71-767E-B84C-BFB3-7B18856D27F4}" type="datetimeFigureOut">
               <a:rPr lang="en-US" smtClean="0"/>
-              <a:t>8/19/26</a:t>
+              <a:t>8/20/26</a:t>
             </a:fld>
             <a:endParaRPr lang="en-US"/>
           </a:p>
@@ -3878,7 +3878,7 @@
           <a:p>
             <a:fld id="{1BF61C71-767E-B84C-BFB3-7B18856D27F4}" type="datetimeFigureOut">
               <a:rPr lang="en-US" smtClean="0"/>
-              <a:t>8/19/26</a:t>
+              <a:t>8/20/26</a:t>
             </a:fld>
             <a:endParaRPr lang="en-US"/>
           </a:p>
@@ -4132,7 +4132,7 @@
           <a:p>
             <a:fld id="{1BF61C71-767E-B84C-BFB3-7B18856D27F4}" type="datetimeFigureOut">
               <a:rPr lang="en-US" smtClean="0"/>
-              <a:t>8/19/26</a:t>
+              <a:t>8/20/26</a:t>
             </a:fld>
             <a:endParaRPr lang="en-US"/>
           </a:p>
@@ -4827,7 +4827,7 @@
           <a:p>
             <a:r>
               <a:rPr lang="en-GB" dirty="0"/>
-              <a:t>TBC</a:t>
+              <a:t>Brainstorming Activity</a:t>
             </a:r>
             <a:endParaRPr lang="en-US" dirty="0"/>
           </a:p>
@@ -4890,7 +4890,7 @@
           <a:p>
             <a:r>
               <a:rPr lang="en-GB" dirty="0"/>
-              <a:t>Throughout the semester, we will develop a framework for investigating them more </a:t>
+              <a:t>Throughout the semester, we will develop a framework for investigating them </a:t>
             </a:r>
             <a:r>
               <a:rPr lang="en-GB" b="1" dirty="0"/>
@@ -4913,6 +4913,261 @@
   <p:clrMapOvr>
     <a:masterClrMapping/>
   </p:clrMapOvr>
+  <p:timing>
+    <p:tnLst>
+      <p:par>
+        <p:cTn id="1" dur="indefinite" restart="never" nodeType="tmRoot">
+          <p:childTnLst>
+            <p:seq concurrent="1" nextAc="seek">
+              <p:cTn id="2" dur="indefinite" nodeType="mainSeq">
+                <p:childTnLst>
+                  <p:par>
+                    <p:cTn id="3" fill="hold">
+                      <p:stCondLst>
+                        <p:cond delay="indefinite"/>
+                      </p:stCondLst>
+                      <p:childTnLst>
+                        <p:par>
+                          <p:cTn id="4" fill="hold">
+                            <p:stCondLst>
+                              <p:cond delay="0"/>
+                            </p:stCondLst>
+                            <p:childTnLst>
+                              <p:par>
+                                <p:cTn id="5" presetID="1" presetClass="entr" presetSubtype="0" fill="hold" grpId="0" nodeType="clickEffect">
+                                  <p:stCondLst>
+                                    <p:cond delay="0"/>
+                                  </p:stCondLst>
+                                  <p:childTnLst>
+                                    <p:set>
+                                      <p:cBhvr>
+                                        <p:cTn id="6" dur="1" fill="hold">
+                                          <p:stCondLst>
+                                            <p:cond delay="0"/>
+                                          </p:stCondLst>
+                                        </p:cTn>
+                                        <p:tgtEl>
+                                          <p:spTgt spid="3">
+                                            <p:txEl>
+                                              <p:pRg st="0" end="0"/>
+                                            </p:txEl>
+                                          </p:spTgt>
+                                        </p:tgtEl>
+                                        <p:attrNameLst>
+                                          <p:attrName>style.visibility</p:attrName>
+                                        </p:attrNameLst>
+                                      </p:cBhvr>
+                                      <p:to>
+                                        <p:strVal val="visible"/>
+                                      </p:to>
+                                    </p:set>
+                                  </p:childTnLst>
+                                </p:cTn>
+                              </p:par>
+                              <p:par>
+                                <p:cTn id="7" presetID="1" presetClass="entr" presetSubtype="0" fill="hold" grpId="0" nodeType="withEffect">
+                                  <p:stCondLst>
+                                    <p:cond delay="0"/>
+                                  </p:stCondLst>
+                                  <p:childTnLst>
+                                    <p:set>
+                                      <p:cBhvr>
+                                        <p:cTn id="8" dur="1" fill="hold">
+                                          <p:stCondLst>
+                                            <p:cond delay="0"/>
+                                          </p:stCondLst>
+                                        </p:cTn>
+                                        <p:tgtEl>
+                                          <p:spTgt spid="3">
+                                            <p:txEl>
+                                              <p:pRg st="1" end="1"/>
+                                            </p:txEl>
+                                          </p:spTgt>
+                                        </p:tgtEl>
+                                        <p:attrNameLst>
+                                          <p:attrName>style.visibility</p:attrName>
+                                        </p:attrNameLst>
+                                      </p:cBhvr>
+                                      <p:to>
+                                        <p:strVal val="visible"/>
+                                      </p:to>
+                                    </p:set>
+                                  </p:childTnLst>
+                                </p:cTn>
+                              </p:par>
+                              <p:par>
+                                <p:cTn id="9" presetID="1" presetClass="entr" presetSubtype="0" fill="hold" grpId="0" nodeType="withEffect">
+                                  <p:stCondLst>
+                                    <p:cond delay="0"/>
+                                  </p:stCondLst>
+                                  <p:childTnLst>
+                                    <p:set>
+                                      <p:cBhvr>
+                                        <p:cTn id="10" dur="1" fill="hold">
+                                          <p:stCondLst>
+                                            <p:cond delay="0"/>
+                                          </p:stCondLst>
+                                        </p:cTn>
+                                        <p:tgtEl>
+                                          <p:spTgt spid="3">
+                                            <p:txEl>
+                                              <p:pRg st="2" end="2"/>
+                                            </p:txEl>
+                                          </p:spTgt>
+                                        </p:tgtEl>
+                                        <p:attrNameLst>
+                                          <p:attrName>style.visibility</p:attrName>
+                                        </p:attrNameLst>
+                                      </p:cBhvr>
+                                      <p:to>
+                                        <p:strVal val="visible"/>
+                                      </p:to>
+                                    </p:set>
+                                  </p:childTnLst>
+                                </p:cTn>
+                              </p:par>
+                              <p:par>
+                                <p:cTn id="11" presetID="1" presetClass="entr" presetSubtype="0" fill="hold" grpId="0" nodeType="withEffect">
+                                  <p:stCondLst>
+                                    <p:cond delay="0"/>
+                                  </p:stCondLst>
+                                  <p:childTnLst>
+                                    <p:set>
+                                      <p:cBhvr>
+                                        <p:cTn id="12" dur="1" fill="hold">
+                                          <p:stCondLst>
+                                            <p:cond delay="0"/>
+                                          </p:stCondLst>
+                                        </p:cTn>
+                                        <p:tgtEl>
+                                          <p:spTgt spid="3">
+                                            <p:txEl>
+                                              <p:pRg st="3" end="3"/>
+                                            </p:txEl>
+                                          </p:spTgt>
+                                        </p:tgtEl>
+                                        <p:attrNameLst>
+                                          <p:attrName>style.visibility</p:attrName>
+                                        </p:attrNameLst>
+                                      </p:cBhvr>
+                                      <p:to>
+                                        <p:strVal val="visible"/>
+                                      </p:to>
+                                    </p:set>
+                                  </p:childTnLst>
+                                </p:cTn>
+                              </p:par>
+                              <p:par>
+                                <p:cTn id="13" presetID="1" presetClass="entr" presetSubtype="0" fill="hold" grpId="0" nodeType="withEffect">
+                                  <p:stCondLst>
+                                    <p:cond delay="0"/>
+                                  </p:stCondLst>
+                                  <p:childTnLst>
+                                    <p:set>
+                                      <p:cBhvr>
+                                        <p:cTn id="14" dur="1" fill="hold">
+                                          <p:stCondLst>
+                                            <p:cond delay="0"/>
+                                          </p:stCondLst>
+                                        </p:cTn>
+                                        <p:tgtEl>
+                                          <p:spTgt spid="3">
+                                            <p:txEl>
+                                              <p:pRg st="4" end="4"/>
+                                            </p:txEl>
+                                          </p:spTgt>
+                                        </p:tgtEl>
+                                        <p:attrNameLst>
+                                          <p:attrName>style.visibility</p:attrName>
+                                        </p:attrNameLst>
+                                      </p:cBhvr>
+                                      <p:to>
+                                        <p:strVal val="visible"/>
+                                      </p:to>
+                                    </p:set>
+                                  </p:childTnLst>
+                                </p:cTn>
+                              </p:par>
+                            </p:childTnLst>
+                          </p:cTn>
+                        </p:par>
+                      </p:childTnLst>
+                    </p:cTn>
+                  </p:par>
+                  <p:par>
+                    <p:cTn id="15" fill="hold">
+                      <p:stCondLst>
+                        <p:cond delay="indefinite"/>
+                      </p:stCondLst>
+                      <p:childTnLst>
+                        <p:par>
+                          <p:cTn id="16" fill="hold">
+                            <p:stCondLst>
+                              <p:cond delay="0"/>
+                            </p:stCondLst>
+                            <p:childTnLst>
+                              <p:par>
+                                <p:cTn id="17" presetID="1" presetClass="entr" presetSubtype="0" fill="hold" grpId="0" nodeType="clickEffect">
+                                  <p:stCondLst>
+                                    <p:cond delay="0"/>
+                                  </p:stCondLst>
+                                  <p:childTnLst>
+                                    <p:set>
+                                      <p:cBhvr>
+                                        <p:cTn id="18" dur="1" fill="hold">
+                                          <p:stCondLst>
+                                            <p:cond delay="0"/>
+                                          </p:stCondLst>
+                                        </p:cTn>
+                                        <p:tgtEl>
+                                          <p:spTgt spid="3">
+                                            <p:txEl>
+                                              <p:pRg st="5" end="5"/>
+                                            </p:txEl>
+                                          </p:spTgt>
+                                        </p:tgtEl>
+                                        <p:attrNameLst>
+                                          <p:attrName>style.visibility</p:attrName>
+                                        </p:attrNameLst>
+                                      </p:cBhvr>
+                                      <p:to>
+                                        <p:strVal val="visible"/>
+                                      </p:to>
+                                    </p:set>
+                                  </p:childTnLst>
+                                </p:cTn>
+                              </p:par>
+                            </p:childTnLst>
+                          </p:cTn>
+                        </p:par>
+                      </p:childTnLst>
+                    </p:cTn>
+                  </p:par>
+                </p:childTnLst>
+              </p:cTn>
+              <p:prevCondLst>
+                <p:cond evt="onPrev" delay="0">
+                  <p:tgtEl>
+                    <p:sldTgt/>
+                  </p:tgtEl>
+                </p:cond>
+              </p:prevCondLst>
+              <p:nextCondLst>
+                <p:cond evt="onNext" delay="0">
+                  <p:tgtEl>
+                    <p:sldTgt/>
+                  </p:tgtEl>
+                </p:cond>
+              </p:nextCondLst>
+            </p:seq>
+          </p:childTnLst>
+        </p:cTn>
+      </p:par>
+    </p:tnLst>
+    <p:bldLst>
+      <p:bldP spid="3" grpId="0" build="p"/>
+    </p:bldLst>
+  </p:timing>
 </p:sld>
 </file>
 
@@ -4980,18 +5235,25 @@
         <p:spPr/>
         <p:txBody>
           <a:bodyPr>
-            <a:normAutofit/>
+            <a:normAutofit fontScale="85000" lnSpcReduction="20000"/>
           </a:bodyPr>
           <a:lstStyle/>
           <a:p>
             <a:pPr lvl="0"/>
             <a:r>
               <a:rPr lang="en-GB" b="1" dirty="0"/>
-              <a:t>Foundations:</a:t>
+              <a:t>Analytics foundations:</a:t>
             </a:r>
             <a:r>
               <a:rPr lang="en-GB" dirty="0"/>
-              <a:t> What sport analytics is and formulating good questions we can answer</a:t>
+              <a:t> </a:t>
+            </a:r>
+          </a:p>
+          <a:p>
+            <a:pPr lvl="1"/>
+            <a:r>
+              <a:rPr lang="en-GB" dirty="0"/>
+              <a:t>What sport analytics is and formulating good questions we can answer</a:t>
             </a:r>
           </a:p>
           <a:p>
@@ -5002,19 +5264,29 @@
             </a:r>
             <a:r>
               <a:rPr lang="en-GB" dirty="0"/>
-              <a:t> Sources, structure, quality, validity, reliability, and ethics</a:t>
+              <a:t> </a:t>
+            </a:r>
+          </a:p>
+          <a:p>
+            <a:pPr lvl="1"/>
+            <a:r>
+              <a:rPr lang="en-GB" dirty="0"/>
+              <a:t>Sources, structure, quality, validity, reliability, and ethics</a:t>
             </a:r>
           </a:p>
           <a:p>
             <a:pPr lvl="0"/>
             <a:r>
               <a:rPr lang="en-GB" b="1" dirty="0"/>
-              <a:t>Description:</a:t>
+              <a:t>Describe data:</a:t>
             </a:r>
             <a:r>
               <a:rPr lang="en-GB" dirty="0"/>
               <a:t> </a:t>
             </a:r>
+          </a:p>
+          <a:p>
+            <a:pPr lvl="1"/>
             <a:r>
               <a:rPr lang="en-GB" dirty="0" err="1"/>
               <a:t>Center</a:t>
@@ -5028,33 +5300,54 @@
             <a:pPr lvl="0"/>
             <a:r>
               <a:rPr lang="en-GB" b="1" dirty="0"/>
-              <a:t>Visualization:</a:t>
+              <a:t>Visualize data:</a:t>
             </a:r>
             <a:r>
               <a:rPr lang="en-GB" dirty="0"/>
-              <a:t> Showing patterns clearly and honestly</a:t>
+              <a:t> </a:t>
+            </a:r>
+          </a:p>
+          <a:p>
+            <a:pPr lvl="1"/>
+            <a:r>
+              <a:rPr lang="en-GB" dirty="0"/>
+              <a:t>Showing patterns clearly and honestly</a:t>
             </a:r>
           </a:p>
           <a:p>
             <a:pPr lvl="0"/>
             <a:r>
               <a:rPr lang="en-GB" b="1" dirty="0"/>
-              <a:t>Relationships:</a:t>
+              <a:t>Explore relationships:</a:t>
             </a:r>
             <a:r>
               <a:rPr lang="en-GB" dirty="0"/>
-              <a:t> Association, regression, and interpretation</a:t>
+              <a:t> </a:t>
+            </a:r>
+          </a:p>
+          <a:p>
+            <a:pPr lvl="1"/>
+            <a:r>
+              <a:rPr lang="en-GB" dirty="0"/>
+              <a:t>Association, regression, and interpretation</a:t>
             </a:r>
           </a:p>
           <a:p>
             <a:pPr lvl="0"/>
             <a:r>
               <a:rPr lang="en-GB" b="1" dirty="0"/>
-              <a:t>Decisions:</a:t>
+              <a:t>Making decisions:</a:t>
             </a:r>
             <a:r>
               <a:rPr lang="en-GB" dirty="0"/>
-              <a:t> Thresholds, probabilities, models, and communication</a:t>
+              <a:t> </a:t>
+            </a:r>
+          </a:p>
+          <a:p>
+            <a:pPr lvl="1"/>
+            <a:r>
+              <a:rPr lang="en-GB" dirty="0"/>
+              <a:t>Thresholds, probabilities, models, and communication</a:t>
             </a:r>
           </a:p>
           <a:p>
@@ -5065,7 +5358,14 @@
             </a:r>
             <a:r>
               <a:rPr lang="en-GB" dirty="0"/>
-              <a:t> A semester-long group project</a:t>
+              <a:t> </a:t>
+            </a:r>
+          </a:p>
+          <a:p>
+            <a:pPr lvl="1"/>
+            <a:r>
+              <a:rPr lang="en-GB" dirty="0"/>
+              <a:t>A semester-long group project</a:t>
             </a:r>
           </a:p>
         </p:txBody>
@@ -5110,6 +5410,599 @@
   <p:clrMapOvr>
     <a:masterClrMapping/>
   </p:clrMapOvr>
+  <p:timing>
+    <p:tnLst>
+      <p:par>
+        <p:cTn id="1" dur="indefinite" restart="never" nodeType="tmRoot">
+          <p:childTnLst>
+            <p:seq concurrent="1" nextAc="seek">
+              <p:cTn id="2" dur="indefinite" nodeType="mainSeq">
+                <p:childTnLst>
+                  <p:par>
+                    <p:cTn id="3" fill="hold">
+                      <p:stCondLst>
+                        <p:cond delay="indefinite"/>
+                      </p:stCondLst>
+                      <p:childTnLst>
+                        <p:par>
+                          <p:cTn id="4" fill="hold">
+                            <p:stCondLst>
+                              <p:cond delay="0"/>
+                            </p:stCondLst>
+                            <p:childTnLst>
+                              <p:par>
+                                <p:cTn id="5" presetID="1" presetClass="entr" presetSubtype="0" fill="hold" grpId="0" nodeType="clickEffect">
+                                  <p:stCondLst>
+                                    <p:cond delay="0"/>
+                                  </p:stCondLst>
+                                  <p:childTnLst>
+                                    <p:set>
+                                      <p:cBhvr>
+                                        <p:cTn id="6" dur="1" fill="hold">
+                                          <p:stCondLst>
+                                            <p:cond delay="0"/>
+                                          </p:stCondLst>
+                                        </p:cTn>
+                                        <p:tgtEl>
+                                          <p:spTgt spid="3">
+                                            <p:txEl>
+                                              <p:pRg st="0" end="0"/>
+                                            </p:txEl>
+                                          </p:spTgt>
+                                        </p:tgtEl>
+                                        <p:attrNameLst>
+                                          <p:attrName>style.visibility</p:attrName>
+                                        </p:attrNameLst>
+                                      </p:cBhvr>
+                                      <p:to>
+                                        <p:strVal val="visible"/>
+                                      </p:to>
+                                    </p:set>
+                                  </p:childTnLst>
+                                </p:cTn>
+                              </p:par>
+                              <p:par>
+                                <p:cTn id="7" presetID="1" presetClass="entr" presetSubtype="0" fill="hold" grpId="0" nodeType="withEffect">
+                                  <p:stCondLst>
+                                    <p:cond delay="0"/>
+                                  </p:stCondLst>
+                                  <p:childTnLst>
+                                    <p:set>
+                                      <p:cBhvr>
+                                        <p:cTn id="8" dur="1" fill="hold">
+                                          <p:stCondLst>
+                                            <p:cond delay="0"/>
+                                          </p:stCondLst>
+                                        </p:cTn>
+                                        <p:tgtEl>
+                                          <p:spTgt spid="3">
+                                            <p:txEl>
+                                              <p:pRg st="1" end="1"/>
+                                            </p:txEl>
+                                          </p:spTgt>
+                                        </p:tgtEl>
+                                        <p:attrNameLst>
+                                          <p:attrName>style.visibility</p:attrName>
+                                        </p:attrNameLst>
+                                      </p:cBhvr>
+                                      <p:to>
+                                        <p:strVal val="visible"/>
+                                      </p:to>
+                                    </p:set>
+                                  </p:childTnLst>
+                                </p:cTn>
+                              </p:par>
+                            </p:childTnLst>
+                          </p:cTn>
+                        </p:par>
+                      </p:childTnLst>
+                    </p:cTn>
+                  </p:par>
+                  <p:par>
+                    <p:cTn id="9" fill="hold">
+                      <p:stCondLst>
+                        <p:cond delay="indefinite"/>
+                      </p:stCondLst>
+                      <p:childTnLst>
+                        <p:par>
+                          <p:cTn id="10" fill="hold">
+                            <p:stCondLst>
+                              <p:cond delay="0"/>
+                            </p:stCondLst>
+                            <p:childTnLst>
+                              <p:par>
+                                <p:cTn id="11" presetID="1" presetClass="entr" presetSubtype="0" fill="hold" grpId="0" nodeType="clickEffect">
+                                  <p:stCondLst>
+                                    <p:cond delay="0"/>
+                                  </p:stCondLst>
+                                  <p:childTnLst>
+                                    <p:set>
+                                      <p:cBhvr>
+                                        <p:cTn id="12" dur="1" fill="hold">
+                                          <p:stCondLst>
+                                            <p:cond delay="0"/>
+                                          </p:stCondLst>
+                                        </p:cTn>
+                                        <p:tgtEl>
+                                          <p:spTgt spid="3">
+                                            <p:txEl>
+                                              <p:pRg st="2" end="2"/>
+                                            </p:txEl>
+                                          </p:spTgt>
+                                        </p:tgtEl>
+                                        <p:attrNameLst>
+                                          <p:attrName>style.visibility</p:attrName>
+                                        </p:attrNameLst>
+                                      </p:cBhvr>
+                                      <p:to>
+                                        <p:strVal val="visible"/>
+                                      </p:to>
+                                    </p:set>
+                                  </p:childTnLst>
+                                </p:cTn>
+                              </p:par>
+                              <p:par>
+                                <p:cTn id="13" presetID="1" presetClass="entr" presetSubtype="0" fill="hold" grpId="0" nodeType="withEffect">
+                                  <p:stCondLst>
+                                    <p:cond delay="0"/>
+                                  </p:stCondLst>
+                                  <p:childTnLst>
+                                    <p:set>
+                                      <p:cBhvr>
+                                        <p:cTn id="14" dur="1" fill="hold">
+                                          <p:stCondLst>
+                                            <p:cond delay="0"/>
+                                          </p:stCondLst>
+                                        </p:cTn>
+                                        <p:tgtEl>
+                                          <p:spTgt spid="3">
+                                            <p:txEl>
+                                              <p:pRg st="3" end="3"/>
+                                            </p:txEl>
+                                          </p:spTgt>
+                                        </p:tgtEl>
+                                        <p:attrNameLst>
+                                          <p:attrName>style.visibility</p:attrName>
+                                        </p:attrNameLst>
+                                      </p:cBhvr>
+                                      <p:to>
+                                        <p:strVal val="visible"/>
+                                      </p:to>
+                                    </p:set>
+                                  </p:childTnLst>
+                                </p:cTn>
+                              </p:par>
+                            </p:childTnLst>
+                          </p:cTn>
+                        </p:par>
+                      </p:childTnLst>
+                    </p:cTn>
+                  </p:par>
+                  <p:par>
+                    <p:cTn id="15" fill="hold">
+                      <p:stCondLst>
+                        <p:cond delay="indefinite"/>
+                      </p:stCondLst>
+                      <p:childTnLst>
+                        <p:par>
+                          <p:cTn id="16" fill="hold">
+                            <p:stCondLst>
+                              <p:cond delay="0"/>
+                            </p:stCondLst>
+                            <p:childTnLst>
+                              <p:par>
+                                <p:cTn id="17" presetID="1" presetClass="entr" presetSubtype="0" fill="hold" grpId="0" nodeType="clickEffect">
+                                  <p:stCondLst>
+                                    <p:cond delay="0"/>
+                                  </p:stCondLst>
+                                  <p:childTnLst>
+                                    <p:set>
+                                      <p:cBhvr>
+                                        <p:cTn id="18" dur="1" fill="hold">
+                                          <p:stCondLst>
+                                            <p:cond delay="0"/>
+                                          </p:stCondLst>
+                                        </p:cTn>
+                                        <p:tgtEl>
+                                          <p:spTgt spid="3">
+                                            <p:txEl>
+                                              <p:pRg st="4" end="4"/>
+                                            </p:txEl>
+                                          </p:spTgt>
+                                        </p:tgtEl>
+                                        <p:attrNameLst>
+                                          <p:attrName>style.visibility</p:attrName>
+                                        </p:attrNameLst>
+                                      </p:cBhvr>
+                                      <p:to>
+                                        <p:strVal val="visible"/>
+                                      </p:to>
+                                    </p:set>
+                                  </p:childTnLst>
+                                </p:cTn>
+                              </p:par>
+                              <p:par>
+                                <p:cTn id="19" presetID="1" presetClass="entr" presetSubtype="0" fill="hold" grpId="0" nodeType="withEffect">
+                                  <p:stCondLst>
+                                    <p:cond delay="0"/>
+                                  </p:stCondLst>
+                                  <p:childTnLst>
+                                    <p:set>
+                                      <p:cBhvr>
+                                        <p:cTn id="20" dur="1" fill="hold">
+                                          <p:stCondLst>
+                                            <p:cond delay="0"/>
+                                          </p:stCondLst>
+                                        </p:cTn>
+                                        <p:tgtEl>
+                                          <p:spTgt spid="3">
+                                            <p:txEl>
+                                              <p:pRg st="5" end="5"/>
+                                            </p:txEl>
+                                          </p:spTgt>
+                                        </p:tgtEl>
+                                        <p:attrNameLst>
+                                          <p:attrName>style.visibility</p:attrName>
+                                        </p:attrNameLst>
+                                      </p:cBhvr>
+                                      <p:to>
+                                        <p:strVal val="visible"/>
+                                      </p:to>
+                                    </p:set>
+                                  </p:childTnLst>
+                                </p:cTn>
+                              </p:par>
+                            </p:childTnLst>
+                          </p:cTn>
+                        </p:par>
+                      </p:childTnLst>
+                    </p:cTn>
+                  </p:par>
+                  <p:par>
+                    <p:cTn id="21" fill="hold">
+                      <p:stCondLst>
+                        <p:cond delay="indefinite"/>
+                      </p:stCondLst>
+                      <p:childTnLst>
+                        <p:par>
+                          <p:cTn id="22" fill="hold">
+                            <p:stCondLst>
+                              <p:cond delay="0"/>
+                            </p:stCondLst>
+                            <p:childTnLst>
+                              <p:par>
+                                <p:cTn id="23" presetID="1" presetClass="entr" presetSubtype="0" fill="hold" grpId="0" nodeType="clickEffect">
+                                  <p:stCondLst>
+                                    <p:cond delay="0"/>
+                                  </p:stCondLst>
+                                  <p:childTnLst>
+                                    <p:set>
+                                      <p:cBhvr>
+                                        <p:cTn id="24" dur="1" fill="hold">
+                                          <p:stCondLst>
+                                            <p:cond delay="0"/>
+                                          </p:stCondLst>
+                                        </p:cTn>
+                                        <p:tgtEl>
+                                          <p:spTgt spid="3">
+                                            <p:txEl>
+                                              <p:pRg st="6" end="6"/>
+                                            </p:txEl>
+                                          </p:spTgt>
+                                        </p:tgtEl>
+                                        <p:attrNameLst>
+                                          <p:attrName>style.visibility</p:attrName>
+                                        </p:attrNameLst>
+                                      </p:cBhvr>
+                                      <p:to>
+                                        <p:strVal val="visible"/>
+                                      </p:to>
+                                    </p:set>
+                                  </p:childTnLst>
+                                </p:cTn>
+                              </p:par>
+                              <p:par>
+                                <p:cTn id="25" presetID="1" presetClass="entr" presetSubtype="0" fill="hold" grpId="0" nodeType="withEffect">
+                                  <p:stCondLst>
+                                    <p:cond delay="0"/>
+                                  </p:stCondLst>
+                                  <p:childTnLst>
+                                    <p:set>
+                                      <p:cBhvr>
+                                        <p:cTn id="26" dur="1" fill="hold">
+                                          <p:stCondLst>
+                                            <p:cond delay="0"/>
+                                          </p:stCondLst>
+                                        </p:cTn>
+                                        <p:tgtEl>
+                                          <p:spTgt spid="3">
+                                            <p:txEl>
+                                              <p:pRg st="7" end="7"/>
+                                            </p:txEl>
+                                          </p:spTgt>
+                                        </p:tgtEl>
+                                        <p:attrNameLst>
+                                          <p:attrName>style.visibility</p:attrName>
+                                        </p:attrNameLst>
+                                      </p:cBhvr>
+                                      <p:to>
+                                        <p:strVal val="visible"/>
+                                      </p:to>
+                                    </p:set>
+                                  </p:childTnLst>
+                                </p:cTn>
+                              </p:par>
+                            </p:childTnLst>
+                          </p:cTn>
+                        </p:par>
+                      </p:childTnLst>
+                    </p:cTn>
+                  </p:par>
+                  <p:par>
+                    <p:cTn id="27" fill="hold">
+                      <p:stCondLst>
+                        <p:cond delay="indefinite"/>
+                      </p:stCondLst>
+                      <p:childTnLst>
+                        <p:par>
+                          <p:cTn id="28" fill="hold">
+                            <p:stCondLst>
+                              <p:cond delay="0"/>
+                            </p:stCondLst>
+                            <p:childTnLst>
+                              <p:par>
+                                <p:cTn id="29" presetID="1" presetClass="entr" presetSubtype="0" fill="hold" grpId="0" nodeType="clickEffect">
+                                  <p:stCondLst>
+                                    <p:cond delay="0"/>
+                                  </p:stCondLst>
+                                  <p:childTnLst>
+                                    <p:set>
+                                      <p:cBhvr>
+                                        <p:cTn id="30" dur="1" fill="hold">
+                                          <p:stCondLst>
+                                            <p:cond delay="0"/>
+                                          </p:stCondLst>
+                                        </p:cTn>
+                                        <p:tgtEl>
+                                          <p:spTgt spid="3">
+                                            <p:txEl>
+                                              <p:pRg st="8" end="8"/>
+                                            </p:txEl>
+                                          </p:spTgt>
+                                        </p:tgtEl>
+                                        <p:attrNameLst>
+                                          <p:attrName>style.visibility</p:attrName>
+                                        </p:attrNameLst>
+                                      </p:cBhvr>
+                                      <p:to>
+                                        <p:strVal val="visible"/>
+                                      </p:to>
+                                    </p:set>
+                                  </p:childTnLst>
+                                </p:cTn>
+                              </p:par>
+                              <p:par>
+                                <p:cTn id="31" presetID="1" presetClass="entr" presetSubtype="0" fill="hold" grpId="0" nodeType="withEffect">
+                                  <p:stCondLst>
+                                    <p:cond delay="0"/>
+                                  </p:stCondLst>
+                                  <p:childTnLst>
+                                    <p:set>
+                                      <p:cBhvr>
+                                        <p:cTn id="32" dur="1" fill="hold">
+                                          <p:stCondLst>
+                                            <p:cond delay="0"/>
+                                          </p:stCondLst>
+                                        </p:cTn>
+                                        <p:tgtEl>
+                                          <p:spTgt spid="3">
+                                            <p:txEl>
+                                              <p:pRg st="9" end="9"/>
+                                            </p:txEl>
+                                          </p:spTgt>
+                                        </p:tgtEl>
+                                        <p:attrNameLst>
+                                          <p:attrName>style.visibility</p:attrName>
+                                        </p:attrNameLst>
+                                      </p:cBhvr>
+                                      <p:to>
+                                        <p:strVal val="visible"/>
+                                      </p:to>
+                                    </p:set>
+                                  </p:childTnLst>
+                                </p:cTn>
+                              </p:par>
+                            </p:childTnLst>
+                          </p:cTn>
+                        </p:par>
+                      </p:childTnLst>
+                    </p:cTn>
+                  </p:par>
+                  <p:par>
+                    <p:cTn id="33" fill="hold">
+                      <p:stCondLst>
+                        <p:cond delay="indefinite"/>
+                      </p:stCondLst>
+                      <p:childTnLst>
+                        <p:par>
+                          <p:cTn id="34" fill="hold">
+                            <p:stCondLst>
+                              <p:cond delay="0"/>
+                            </p:stCondLst>
+                            <p:childTnLst>
+                              <p:par>
+                                <p:cTn id="35" presetID="1" presetClass="entr" presetSubtype="0" fill="hold" grpId="0" nodeType="clickEffect">
+                                  <p:stCondLst>
+                                    <p:cond delay="0"/>
+                                  </p:stCondLst>
+                                  <p:childTnLst>
+                                    <p:set>
+                                      <p:cBhvr>
+                                        <p:cTn id="36" dur="1" fill="hold">
+                                          <p:stCondLst>
+                                            <p:cond delay="0"/>
+                                          </p:stCondLst>
+                                        </p:cTn>
+                                        <p:tgtEl>
+                                          <p:spTgt spid="3">
+                                            <p:txEl>
+                                              <p:pRg st="10" end="10"/>
+                                            </p:txEl>
+                                          </p:spTgt>
+                                        </p:tgtEl>
+                                        <p:attrNameLst>
+                                          <p:attrName>style.visibility</p:attrName>
+                                        </p:attrNameLst>
+                                      </p:cBhvr>
+                                      <p:to>
+                                        <p:strVal val="visible"/>
+                                      </p:to>
+                                    </p:set>
+                                  </p:childTnLst>
+                                </p:cTn>
+                              </p:par>
+                              <p:par>
+                                <p:cTn id="37" presetID="1" presetClass="entr" presetSubtype="0" fill="hold" grpId="0" nodeType="withEffect">
+                                  <p:stCondLst>
+                                    <p:cond delay="0"/>
+                                  </p:stCondLst>
+                                  <p:childTnLst>
+                                    <p:set>
+                                      <p:cBhvr>
+                                        <p:cTn id="38" dur="1" fill="hold">
+                                          <p:stCondLst>
+                                            <p:cond delay="0"/>
+                                          </p:stCondLst>
+                                        </p:cTn>
+                                        <p:tgtEl>
+                                          <p:spTgt spid="3">
+                                            <p:txEl>
+                                              <p:pRg st="11" end="11"/>
+                                            </p:txEl>
+                                          </p:spTgt>
+                                        </p:tgtEl>
+                                        <p:attrNameLst>
+                                          <p:attrName>style.visibility</p:attrName>
+                                        </p:attrNameLst>
+                                      </p:cBhvr>
+                                      <p:to>
+                                        <p:strVal val="visible"/>
+                                      </p:to>
+                                    </p:set>
+                                  </p:childTnLst>
+                                </p:cTn>
+                              </p:par>
+                            </p:childTnLst>
+                          </p:cTn>
+                        </p:par>
+                      </p:childTnLst>
+                    </p:cTn>
+                  </p:par>
+                  <p:par>
+                    <p:cTn id="39" fill="hold">
+                      <p:stCondLst>
+                        <p:cond delay="indefinite"/>
+                      </p:stCondLst>
+                      <p:childTnLst>
+                        <p:par>
+                          <p:cTn id="40" fill="hold">
+                            <p:stCondLst>
+                              <p:cond delay="0"/>
+                            </p:stCondLst>
+                            <p:childTnLst>
+                              <p:par>
+                                <p:cTn id="41" presetID="1" presetClass="entr" presetSubtype="0" fill="hold" grpId="0" nodeType="clickEffect">
+                                  <p:stCondLst>
+                                    <p:cond delay="0"/>
+                                  </p:stCondLst>
+                                  <p:childTnLst>
+                                    <p:set>
+                                      <p:cBhvr>
+                                        <p:cTn id="42" dur="1" fill="hold">
+                                          <p:stCondLst>
+                                            <p:cond delay="0"/>
+                                          </p:stCondLst>
+                                        </p:cTn>
+                                        <p:tgtEl>
+                                          <p:spTgt spid="3">
+                                            <p:txEl>
+                                              <p:pRg st="12" end="12"/>
+                                            </p:txEl>
+                                          </p:spTgt>
+                                        </p:tgtEl>
+                                        <p:attrNameLst>
+                                          <p:attrName>style.visibility</p:attrName>
+                                        </p:attrNameLst>
+                                      </p:cBhvr>
+                                      <p:to>
+                                        <p:strVal val="visible"/>
+                                      </p:to>
+                                    </p:set>
+                                  </p:childTnLst>
+                                </p:cTn>
+                              </p:par>
+                              <p:par>
+                                <p:cTn id="43" presetID="1" presetClass="entr" presetSubtype="0" fill="hold" grpId="0" nodeType="withEffect">
+                                  <p:stCondLst>
+                                    <p:cond delay="0"/>
+                                  </p:stCondLst>
+                                  <p:childTnLst>
+                                    <p:set>
+                                      <p:cBhvr>
+                                        <p:cTn id="44" dur="1" fill="hold">
+                                          <p:stCondLst>
+                                            <p:cond delay="0"/>
+                                          </p:stCondLst>
+                                        </p:cTn>
+                                        <p:tgtEl>
+                                          <p:spTgt spid="3">
+                                            <p:txEl>
+                                              <p:pRg st="13" end="13"/>
+                                            </p:txEl>
+                                          </p:spTgt>
+                                        </p:tgtEl>
+                                        <p:attrNameLst>
+                                          <p:attrName>style.visibility</p:attrName>
+                                        </p:attrNameLst>
+                                      </p:cBhvr>
+                                      <p:to>
+                                        <p:strVal val="visible"/>
+                                      </p:to>
+                                    </p:set>
+                                  </p:childTnLst>
+                                </p:cTn>
+                              </p:par>
+                            </p:childTnLst>
+                          </p:cTn>
+                        </p:par>
+                      </p:childTnLst>
+                    </p:cTn>
+                  </p:par>
+                </p:childTnLst>
+              </p:cTn>
+              <p:prevCondLst>
+                <p:cond evt="onPrev" delay="0">
+                  <p:tgtEl>
+                    <p:sldTgt/>
+                  </p:tgtEl>
+                </p:cond>
+              </p:prevCondLst>
+              <p:nextCondLst>
+                <p:cond evt="onNext" delay="0">
+                  <p:tgtEl>
+                    <p:sldTgt/>
+                  </p:tgtEl>
+                </p:cond>
+              </p:nextCondLst>
+            </p:seq>
+          </p:childTnLst>
+        </p:cTn>
+      </p:par>
+    </p:tnLst>
+    <p:bldLst>
+      <p:bldP spid="3" grpId="0" build="p"/>
+    </p:bldLst>
+  </p:timing>
 </p:sld>
 </file>
 
@@ -5183,21 +6076,35 @@
         <p:spPr/>
         <p:txBody>
           <a:bodyPr>
-            <a:normAutofit lnSpcReduction="10000"/>
+            <a:normAutofit fontScale="92500" lnSpcReduction="10000"/>
           </a:bodyPr>
           <a:lstStyle/>
           <a:p>
             <a:pPr lvl="0"/>
             <a:r>
               <a:rPr lang="en-GB" dirty="0"/>
-              <a:t>12 quizzes: Review the previous week's material; the two lowest scores are dropped.</a:t>
+              <a:t>12 quizzes: </a:t>
+            </a:r>
+          </a:p>
+          <a:p>
+            <a:pPr lvl="1"/>
+            <a:r>
+              <a:rPr lang="en-GB" dirty="0"/>
+              <a:t>Review the previous week's material; the two lowest scores are dropped.</a:t>
             </a:r>
           </a:p>
           <a:p>
             <a:pPr lvl="0"/>
             <a:r>
               <a:rPr lang="en-GB" dirty="0"/>
-              <a:t>In-class activities: Apply concepts to sports problems and earn participation credit.</a:t>
+              <a:t>In-class activities: </a:t>
+            </a:r>
+          </a:p>
+          <a:p>
+            <a:pPr lvl="1"/>
+            <a:r>
+              <a:rPr lang="en-GB" dirty="0"/>
+              <a:t>Apply concepts to sports problems and earn participation credit.</a:t>
             </a:r>
           </a:p>
           <a:p>
@@ -5212,21 +6119,42 @@
             <a:pPr lvl="0"/>
             <a:r>
               <a:rPr lang="en-GB" dirty="0"/>
-              <a:t>4 case studies: Interpret data, evaluate methods, visualize findings, and reflect on analytical choices.</a:t>
+              <a:t>4 case studies: </a:t>
+            </a:r>
+          </a:p>
+          <a:p>
+            <a:pPr lvl="1"/>
+            <a:r>
+              <a:rPr lang="en-GB" dirty="0"/>
+              <a:t>Interpret data, evaluate methods, visualize findings, and reflect on analytical choices.</a:t>
             </a:r>
           </a:p>
           <a:p>
             <a:pPr lvl="0"/>
             <a:r>
               <a:rPr lang="en-GB" dirty="0"/>
-              <a:t>Journal article discussion: Present and discuss peer-reviewed sport analytics research.</a:t>
+              <a:t>Journal article discussion: </a:t>
+            </a:r>
+          </a:p>
+          <a:p>
+            <a:pPr lvl="1"/>
+            <a:r>
+              <a:rPr lang="en-GB" dirty="0"/>
+              <a:t>Present and discuss peer-reviewed sport analytics research.</a:t>
             </a:r>
           </a:p>
           <a:p>
             <a:pPr lvl="0"/>
             <a:r>
               <a:rPr lang="en-GB" dirty="0"/>
-              <a:t>2 exam: Demonstrate your understanding of concepts, applications, and the final project.</a:t>
+              <a:t>2 exam: </a:t>
+            </a:r>
+          </a:p>
+          <a:p>
+            <a:pPr lvl="1"/>
+            <a:r>
+              <a:rPr lang="en-GB" dirty="0"/>
+              <a:t>Demonstrate your understanding of concepts, applications, and the final project.</a:t>
             </a:r>
           </a:p>
         </p:txBody>
@@ -5271,6 +6199,470 @@
   <p:clrMapOvr>
     <a:masterClrMapping/>
   </p:clrMapOvr>
+  <p:timing>
+    <p:tnLst>
+      <p:par>
+        <p:cTn id="1" dur="indefinite" restart="never" nodeType="tmRoot">
+          <p:childTnLst>
+            <p:seq concurrent="1" nextAc="seek">
+              <p:cTn id="2" dur="indefinite" nodeType="mainSeq">
+                <p:childTnLst>
+                  <p:par>
+                    <p:cTn id="3" fill="hold">
+                      <p:stCondLst>
+                        <p:cond delay="indefinite"/>
+                      </p:stCondLst>
+                      <p:childTnLst>
+                        <p:par>
+                          <p:cTn id="4" fill="hold">
+                            <p:stCondLst>
+                              <p:cond delay="0"/>
+                            </p:stCondLst>
+                            <p:childTnLst>
+                              <p:par>
+                                <p:cTn id="5" presetID="1" presetClass="entr" presetSubtype="0" fill="hold" grpId="0" nodeType="clickEffect">
+                                  <p:stCondLst>
+                                    <p:cond delay="0"/>
+                                  </p:stCondLst>
+                                  <p:childTnLst>
+                                    <p:set>
+                                      <p:cBhvr>
+                                        <p:cTn id="6" dur="1" fill="hold">
+                                          <p:stCondLst>
+                                            <p:cond delay="0"/>
+                                          </p:stCondLst>
+                                        </p:cTn>
+                                        <p:tgtEl>
+                                          <p:spTgt spid="3">
+                                            <p:txEl>
+                                              <p:pRg st="0" end="0"/>
+                                            </p:txEl>
+                                          </p:spTgt>
+                                        </p:tgtEl>
+                                        <p:attrNameLst>
+                                          <p:attrName>style.visibility</p:attrName>
+                                        </p:attrNameLst>
+                                      </p:cBhvr>
+                                      <p:to>
+                                        <p:strVal val="visible"/>
+                                      </p:to>
+                                    </p:set>
+                                  </p:childTnLst>
+                                </p:cTn>
+                              </p:par>
+                              <p:par>
+                                <p:cTn id="7" presetID="1" presetClass="entr" presetSubtype="0" fill="hold" grpId="0" nodeType="withEffect">
+                                  <p:stCondLst>
+                                    <p:cond delay="0"/>
+                                  </p:stCondLst>
+                                  <p:childTnLst>
+                                    <p:set>
+                                      <p:cBhvr>
+                                        <p:cTn id="8" dur="1" fill="hold">
+                                          <p:stCondLst>
+                                            <p:cond delay="0"/>
+                                          </p:stCondLst>
+                                        </p:cTn>
+                                        <p:tgtEl>
+                                          <p:spTgt spid="3">
+                                            <p:txEl>
+                                              <p:pRg st="1" end="1"/>
+                                            </p:txEl>
+                                          </p:spTgt>
+                                        </p:tgtEl>
+                                        <p:attrNameLst>
+                                          <p:attrName>style.visibility</p:attrName>
+                                        </p:attrNameLst>
+                                      </p:cBhvr>
+                                      <p:to>
+                                        <p:strVal val="visible"/>
+                                      </p:to>
+                                    </p:set>
+                                  </p:childTnLst>
+                                </p:cTn>
+                              </p:par>
+                            </p:childTnLst>
+                          </p:cTn>
+                        </p:par>
+                      </p:childTnLst>
+                    </p:cTn>
+                  </p:par>
+                  <p:par>
+                    <p:cTn id="9" fill="hold">
+                      <p:stCondLst>
+                        <p:cond delay="indefinite"/>
+                      </p:stCondLst>
+                      <p:childTnLst>
+                        <p:par>
+                          <p:cTn id="10" fill="hold">
+                            <p:stCondLst>
+                              <p:cond delay="0"/>
+                            </p:stCondLst>
+                            <p:childTnLst>
+                              <p:par>
+                                <p:cTn id="11" presetID="1" presetClass="entr" presetSubtype="0" fill="hold" grpId="0" nodeType="clickEffect">
+                                  <p:stCondLst>
+                                    <p:cond delay="0"/>
+                                  </p:stCondLst>
+                                  <p:childTnLst>
+                                    <p:set>
+                                      <p:cBhvr>
+                                        <p:cTn id="12" dur="1" fill="hold">
+                                          <p:stCondLst>
+                                            <p:cond delay="0"/>
+                                          </p:stCondLst>
+                                        </p:cTn>
+                                        <p:tgtEl>
+                                          <p:spTgt spid="3">
+                                            <p:txEl>
+                                              <p:pRg st="2" end="2"/>
+                                            </p:txEl>
+                                          </p:spTgt>
+                                        </p:tgtEl>
+                                        <p:attrNameLst>
+                                          <p:attrName>style.visibility</p:attrName>
+                                        </p:attrNameLst>
+                                      </p:cBhvr>
+                                      <p:to>
+                                        <p:strVal val="visible"/>
+                                      </p:to>
+                                    </p:set>
+                                  </p:childTnLst>
+                                </p:cTn>
+                              </p:par>
+                              <p:par>
+                                <p:cTn id="13" presetID="1" presetClass="entr" presetSubtype="0" fill="hold" grpId="0" nodeType="withEffect">
+                                  <p:stCondLst>
+                                    <p:cond delay="0"/>
+                                  </p:stCondLst>
+                                  <p:childTnLst>
+                                    <p:set>
+                                      <p:cBhvr>
+                                        <p:cTn id="14" dur="1" fill="hold">
+                                          <p:stCondLst>
+                                            <p:cond delay="0"/>
+                                          </p:stCondLst>
+                                        </p:cTn>
+                                        <p:tgtEl>
+                                          <p:spTgt spid="3">
+                                            <p:txEl>
+                                              <p:pRg st="3" end="3"/>
+                                            </p:txEl>
+                                          </p:spTgt>
+                                        </p:tgtEl>
+                                        <p:attrNameLst>
+                                          <p:attrName>style.visibility</p:attrName>
+                                        </p:attrNameLst>
+                                      </p:cBhvr>
+                                      <p:to>
+                                        <p:strVal val="visible"/>
+                                      </p:to>
+                                    </p:set>
+                                  </p:childTnLst>
+                                </p:cTn>
+                              </p:par>
+                              <p:par>
+                                <p:cTn id="15" presetID="1" presetClass="entr" presetSubtype="0" fill="hold" grpId="0" nodeType="withEffect">
+                                  <p:stCondLst>
+                                    <p:cond delay="0"/>
+                                  </p:stCondLst>
+                                  <p:childTnLst>
+                                    <p:set>
+                                      <p:cBhvr>
+                                        <p:cTn id="16" dur="1" fill="hold">
+                                          <p:stCondLst>
+                                            <p:cond delay="0"/>
+                                          </p:stCondLst>
+                                        </p:cTn>
+                                        <p:tgtEl>
+                                          <p:spTgt spid="3">
+                                            <p:txEl>
+                                              <p:pRg st="4" end="4"/>
+                                            </p:txEl>
+                                          </p:spTgt>
+                                        </p:tgtEl>
+                                        <p:attrNameLst>
+                                          <p:attrName>style.visibility</p:attrName>
+                                        </p:attrNameLst>
+                                      </p:cBhvr>
+                                      <p:to>
+                                        <p:strVal val="visible"/>
+                                      </p:to>
+                                    </p:set>
+                                  </p:childTnLst>
+                                </p:cTn>
+                              </p:par>
+                            </p:childTnLst>
+                          </p:cTn>
+                        </p:par>
+                      </p:childTnLst>
+                    </p:cTn>
+                  </p:par>
+                  <p:par>
+                    <p:cTn id="17" fill="hold">
+                      <p:stCondLst>
+                        <p:cond delay="indefinite"/>
+                      </p:stCondLst>
+                      <p:childTnLst>
+                        <p:par>
+                          <p:cTn id="18" fill="hold">
+                            <p:stCondLst>
+                              <p:cond delay="0"/>
+                            </p:stCondLst>
+                            <p:childTnLst>
+                              <p:par>
+                                <p:cTn id="19" presetID="1" presetClass="entr" presetSubtype="0" fill="hold" grpId="0" nodeType="clickEffect">
+                                  <p:stCondLst>
+                                    <p:cond delay="0"/>
+                                  </p:stCondLst>
+                                  <p:childTnLst>
+                                    <p:set>
+                                      <p:cBhvr>
+                                        <p:cTn id="20" dur="1" fill="hold">
+                                          <p:stCondLst>
+                                            <p:cond delay="0"/>
+                                          </p:stCondLst>
+                                        </p:cTn>
+                                        <p:tgtEl>
+                                          <p:spTgt spid="3">
+                                            <p:txEl>
+                                              <p:pRg st="5" end="5"/>
+                                            </p:txEl>
+                                          </p:spTgt>
+                                        </p:tgtEl>
+                                        <p:attrNameLst>
+                                          <p:attrName>style.visibility</p:attrName>
+                                        </p:attrNameLst>
+                                      </p:cBhvr>
+                                      <p:to>
+                                        <p:strVal val="visible"/>
+                                      </p:to>
+                                    </p:set>
+                                  </p:childTnLst>
+                                </p:cTn>
+                              </p:par>
+                              <p:par>
+                                <p:cTn id="21" presetID="1" presetClass="entr" presetSubtype="0" fill="hold" grpId="0" nodeType="withEffect">
+                                  <p:stCondLst>
+                                    <p:cond delay="0"/>
+                                  </p:stCondLst>
+                                  <p:childTnLst>
+                                    <p:set>
+                                      <p:cBhvr>
+                                        <p:cTn id="22" dur="1" fill="hold">
+                                          <p:stCondLst>
+                                            <p:cond delay="0"/>
+                                          </p:stCondLst>
+                                        </p:cTn>
+                                        <p:tgtEl>
+                                          <p:spTgt spid="3">
+                                            <p:txEl>
+                                              <p:pRg st="6" end="6"/>
+                                            </p:txEl>
+                                          </p:spTgt>
+                                        </p:tgtEl>
+                                        <p:attrNameLst>
+                                          <p:attrName>style.visibility</p:attrName>
+                                        </p:attrNameLst>
+                                      </p:cBhvr>
+                                      <p:to>
+                                        <p:strVal val="visible"/>
+                                      </p:to>
+                                    </p:set>
+                                  </p:childTnLst>
+                                </p:cTn>
+                              </p:par>
+                            </p:childTnLst>
+                          </p:cTn>
+                        </p:par>
+                      </p:childTnLst>
+                    </p:cTn>
+                  </p:par>
+                  <p:par>
+                    <p:cTn id="23" fill="hold">
+                      <p:stCondLst>
+                        <p:cond delay="indefinite"/>
+                      </p:stCondLst>
+                      <p:childTnLst>
+                        <p:par>
+                          <p:cTn id="24" fill="hold">
+                            <p:stCondLst>
+                              <p:cond delay="0"/>
+                            </p:stCondLst>
+                            <p:childTnLst>
+                              <p:par>
+                                <p:cTn id="25" presetID="1" presetClass="entr" presetSubtype="0" fill="hold" grpId="0" nodeType="clickEffect">
+                                  <p:stCondLst>
+                                    <p:cond delay="0"/>
+                                  </p:stCondLst>
+                                  <p:childTnLst>
+                                    <p:set>
+                                      <p:cBhvr>
+                                        <p:cTn id="26" dur="1" fill="hold">
+                                          <p:stCondLst>
+                                            <p:cond delay="0"/>
+                                          </p:stCondLst>
+                                        </p:cTn>
+                                        <p:tgtEl>
+                                          <p:spTgt spid="3">
+                                            <p:txEl>
+                                              <p:pRg st="7" end="7"/>
+                                            </p:txEl>
+                                          </p:spTgt>
+                                        </p:tgtEl>
+                                        <p:attrNameLst>
+                                          <p:attrName>style.visibility</p:attrName>
+                                        </p:attrNameLst>
+                                      </p:cBhvr>
+                                      <p:to>
+                                        <p:strVal val="visible"/>
+                                      </p:to>
+                                    </p:set>
+                                  </p:childTnLst>
+                                </p:cTn>
+                              </p:par>
+                              <p:par>
+                                <p:cTn id="27" presetID="1" presetClass="entr" presetSubtype="0" fill="hold" grpId="0" nodeType="withEffect">
+                                  <p:stCondLst>
+                                    <p:cond delay="0"/>
+                                  </p:stCondLst>
+                                  <p:childTnLst>
+                                    <p:set>
+                                      <p:cBhvr>
+                                        <p:cTn id="28" dur="1" fill="hold">
+                                          <p:stCondLst>
+                                            <p:cond delay="0"/>
+                                          </p:stCondLst>
+                                        </p:cTn>
+                                        <p:tgtEl>
+                                          <p:spTgt spid="3">
+                                            <p:txEl>
+                                              <p:pRg st="8" end="8"/>
+                                            </p:txEl>
+                                          </p:spTgt>
+                                        </p:tgtEl>
+                                        <p:attrNameLst>
+                                          <p:attrName>style.visibility</p:attrName>
+                                        </p:attrNameLst>
+                                      </p:cBhvr>
+                                      <p:to>
+                                        <p:strVal val="visible"/>
+                                      </p:to>
+                                    </p:set>
+                                  </p:childTnLst>
+                                </p:cTn>
+                              </p:par>
+                            </p:childTnLst>
+                          </p:cTn>
+                        </p:par>
+                      </p:childTnLst>
+                    </p:cTn>
+                  </p:par>
+                  <p:par>
+                    <p:cTn id="29" fill="hold">
+                      <p:stCondLst>
+                        <p:cond delay="indefinite"/>
+                      </p:stCondLst>
+                      <p:childTnLst>
+                        <p:par>
+                          <p:cTn id="30" fill="hold">
+                            <p:stCondLst>
+                              <p:cond delay="0"/>
+                            </p:stCondLst>
+                            <p:childTnLst>
+                              <p:par>
+                                <p:cTn id="31" presetID="1" presetClass="entr" presetSubtype="0" fill="hold" grpId="0" nodeType="clickEffect">
+                                  <p:stCondLst>
+                                    <p:cond delay="0"/>
+                                  </p:stCondLst>
+                                  <p:childTnLst>
+                                    <p:set>
+                                      <p:cBhvr>
+                                        <p:cTn id="32" dur="1" fill="hold">
+                                          <p:stCondLst>
+                                            <p:cond delay="0"/>
+                                          </p:stCondLst>
+                                        </p:cTn>
+                                        <p:tgtEl>
+                                          <p:spTgt spid="3">
+                                            <p:txEl>
+                                              <p:pRg st="9" end="9"/>
+                                            </p:txEl>
+                                          </p:spTgt>
+                                        </p:tgtEl>
+                                        <p:attrNameLst>
+                                          <p:attrName>style.visibility</p:attrName>
+                                        </p:attrNameLst>
+                                      </p:cBhvr>
+                                      <p:to>
+                                        <p:strVal val="visible"/>
+                                      </p:to>
+                                    </p:set>
+                                  </p:childTnLst>
+                                </p:cTn>
+                              </p:par>
+                              <p:par>
+                                <p:cTn id="33" presetID="1" presetClass="entr" presetSubtype="0" fill="hold" grpId="0" nodeType="withEffect">
+                                  <p:stCondLst>
+                                    <p:cond delay="0"/>
+                                  </p:stCondLst>
+                                  <p:childTnLst>
+                                    <p:set>
+                                      <p:cBhvr>
+                                        <p:cTn id="34" dur="1" fill="hold">
+                                          <p:stCondLst>
+                                            <p:cond delay="0"/>
+                                          </p:stCondLst>
+                                        </p:cTn>
+                                        <p:tgtEl>
+                                          <p:spTgt spid="3">
+                                            <p:txEl>
+                                              <p:pRg st="10" end="10"/>
+                                            </p:txEl>
+                                          </p:spTgt>
+                                        </p:tgtEl>
+                                        <p:attrNameLst>
+                                          <p:attrName>style.visibility</p:attrName>
+                                        </p:attrNameLst>
+                                      </p:cBhvr>
+                                      <p:to>
+                                        <p:strVal val="visible"/>
+                                      </p:to>
+                                    </p:set>
+                                  </p:childTnLst>
+                                </p:cTn>
+                              </p:par>
+                            </p:childTnLst>
+                          </p:cTn>
+                        </p:par>
+                      </p:childTnLst>
+                    </p:cTn>
+                  </p:par>
+                </p:childTnLst>
+              </p:cTn>
+              <p:prevCondLst>
+                <p:cond evt="onPrev" delay="0">
+                  <p:tgtEl>
+                    <p:sldTgt/>
+                  </p:tgtEl>
+                </p:cond>
+              </p:prevCondLst>
+              <p:nextCondLst>
+                <p:cond evt="onNext" delay="0">
+                  <p:tgtEl>
+                    <p:sldTgt/>
+                  </p:tgtEl>
+                </p:cond>
+              </p:nextCondLst>
+            </p:seq>
+          </p:childTnLst>
+        </p:cTn>
+      </p:par>
+    </p:tnLst>
+    <p:bldLst>
+      <p:bldP spid="3" grpId="0" build="p"/>
+    </p:bldLst>
+  </p:timing>
 </p:sld>
 </file>
 
@@ -6294,6 +7686,261 @@
   <p:clrMapOvr>
     <a:masterClrMapping/>
   </p:clrMapOvr>
+  <p:timing>
+    <p:tnLst>
+      <p:par>
+        <p:cTn id="1" dur="indefinite" restart="never" nodeType="tmRoot">
+          <p:childTnLst>
+            <p:seq concurrent="1" nextAc="seek">
+              <p:cTn id="2" dur="indefinite" nodeType="mainSeq">
+                <p:childTnLst>
+                  <p:par>
+                    <p:cTn id="3" fill="hold">
+                      <p:stCondLst>
+                        <p:cond delay="indefinite"/>
+                      </p:stCondLst>
+                      <p:childTnLst>
+                        <p:par>
+                          <p:cTn id="4" fill="hold">
+                            <p:stCondLst>
+                              <p:cond delay="0"/>
+                            </p:stCondLst>
+                            <p:childTnLst>
+                              <p:par>
+                                <p:cTn id="5" presetID="1" presetClass="entr" presetSubtype="0" fill="hold" grpId="0" nodeType="clickEffect">
+                                  <p:stCondLst>
+                                    <p:cond delay="0"/>
+                                  </p:stCondLst>
+                                  <p:childTnLst>
+                                    <p:set>
+                                      <p:cBhvr>
+                                        <p:cTn id="6" dur="1" fill="hold">
+                                          <p:stCondLst>
+                                            <p:cond delay="0"/>
+                                          </p:stCondLst>
+                                        </p:cTn>
+                                        <p:tgtEl>
+                                          <p:spTgt spid="3">
+                                            <p:txEl>
+                                              <p:pRg st="0" end="0"/>
+                                            </p:txEl>
+                                          </p:spTgt>
+                                        </p:tgtEl>
+                                        <p:attrNameLst>
+                                          <p:attrName>style.visibility</p:attrName>
+                                        </p:attrNameLst>
+                                      </p:cBhvr>
+                                      <p:to>
+                                        <p:strVal val="visible"/>
+                                      </p:to>
+                                    </p:set>
+                                  </p:childTnLst>
+                                </p:cTn>
+                              </p:par>
+                              <p:par>
+                                <p:cTn id="7" presetID="1" presetClass="entr" presetSubtype="0" fill="hold" grpId="0" nodeType="withEffect">
+                                  <p:stCondLst>
+                                    <p:cond delay="0"/>
+                                  </p:stCondLst>
+                                  <p:childTnLst>
+                                    <p:set>
+                                      <p:cBhvr>
+                                        <p:cTn id="8" dur="1" fill="hold">
+                                          <p:stCondLst>
+                                            <p:cond delay="0"/>
+                                          </p:stCondLst>
+                                        </p:cTn>
+                                        <p:tgtEl>
+                                          <p:spTgt spid="3">
+                                            <p:txEl>
+                                              <p:pRg st="1" end="1"/>
+                                            </p:txEl>
+                                          </p:spTgt>
+                                        </p:tgtEl>
+                                        <p:attrNameLst>
+                                          <p:attrName>style.visibility</p:attrName>
+                                        </p:attrNameLst>
+                                      </p:cBhvr>
+                                      <p:to>
+                                        <p:strVal val="visible"/>
+                                      </p:to>
+                                    </p:set>
+                                  </p:childTnLst>
+                                </p:cTn>
+                              </p:par>
+                              <p:par>
+                                <p:cTn id="9" presetID="1" presetClass="entr" presetSubtype="0" fill="hold" grpId="0" nodeType="withEffect">
+                                  <p:stCondLst>
+                                    <p:cond delay="0"/>
+                                  </p:stCondLst>
+                                  <p:childTnLst>
+                                    <p:set>
+                                      <p:cBhvr>
+                                        <p:cTn id="10" dur="1" fill="hold">
+                                          <p:stCondLst>
+                                            <p:cond delay="0"/>
+                                          </p:stCondLst>
+                                        </p:cTn>
+                                        <p:tgtEl>
+                                          <p:spTgt spid="3">
+                                            <p:txEl>
+                                              <p:pRg st="2" end="2"/>
+                                            </p:txEl>
+                                          </p:spTgt>
+                                        </p:tgtEl>
+                                        <p:attrNameLst>
+                                          <p:attrName>style.visibility</p:attrName>
+                                        </p:attrNameLst>
+                                      </p:cBhvr>
+                                      <p:to>
+                                        <p:strVal val="visible"/>
+                                      </p:to>
+                                    </p:set>
+                                  </p:childTnLst>
+                                </p:cTn>
+                              </p:par>
+                            </p:childTnLst>
+                          </p:cTn>
+                        </p:par>
+                      </p:childTnLst>
+                    </p:cTn>
+                  </p:par>
+                  <p:par>
+                    <p:cTn id="11" fill="hold">
+                      <p:stCondLst>
+                        <p:cond delay="indefinite"/>
+                      </p:stCondLst>
+                      <p:childTnLst>
+                        <p:par>
+                          <p:cTn id="12" fill="hold">
+                            <p:stCondLst>
+                              <p:cond delay="0"/>
+                            </p:stCondLst>
+                            <p:childTnLst>
+                              <p:par>
+                                <p:cTn id="13" presetID="1" presetClass="entr" presetSubtype="0" fill="hold" grpId="0" nodeType="clickEffect">
+                                  <p:stCondLst>
+                                    <p:cond delay="0"/>
+                                  </p:stCondLst>
+                                  <p:childTnLst>
+                                    <p:set>
+                                      <p:cBhvr>
+                                        <p:cTn id="14" dur="1" fill="hold">
+                                          <p:stCondLst>
+                                            <p:cond delay="0"/>
+                                          </p:stCondLst>
+                                        </p:cTn>
+                                        <p:tgtEl>
+                                          <p:spTgt spid="3">
+                                            <p:txEl>
+                                              <p:pRg st="3" end="3"/>
+                                            </p:txEl>
+                                          </p:spTgt>
+                                        </p:tgtEl>
+                                        <p:attrNameLst>
+                                          <p:attrName>style.visibility</p:attrName>
+                                        </p:attrNameLst>
+                                      </p:cBhvr>
+                                      <p:to>
+                                        <p:strVal val="visible"/>
+                                      </p:to>
+                                    </p:set>
+                                  </p:childTnLst>
+                                </p:cTn>
+                              </p:par>
+                              <p:par>
+                                <p:cTn id="15" presetID="1" presetClass="entr" presetSubtype="0" fill="hold" grpId="0" nodeType="withEffect">
+                                  <p:stCondLst>
+                                    <p:cond delay="0"/>
+                                  </p:stCondLst>
+                                  <p:childTnLst>
+                                    <p:set>
+                                      <p:cBhvr>
+                                        <p:cTn id="16" dur="1" fill="hold">
+                                          <p:stCondLst>
+                                            <p:cond delay="0"/>
+                                          </p:stCondLst>
+                                        </p:cTn>
+                                        <p:tgtEl>
+                                          <p:spTgt spid="3">
+                                            <p:txEl>
+                                              <p:pRg st="4" end="4"/>
+                                            </p:txEl>
+                                          </p:spTgt>
+                                        </p:tgtEl>
+                                        <p:attrNameLst>
+                                          <p:attrName>style.visibility</p:attrName>
+                                        </p:attrNameLst>
+                                      </p:cBhvr>
+                                      <p:to>
+                                        <p:strVal val="visible"/>
+                                      </p:to>
+                                    </p:set>
+                                  </p:childTnLst>
+                                </p:cTn>
+                              </p:par>
+                              <p:par>
+                                <p:cTn id="17" presetID="1" presetClass="entr" presetSubtype="0" fill="hold" grpId="0" nodeType="withEffect">
+                                  <p:stCondLst>
+                                    <p:cond delay="0"/>
+                                  </p:stCondLst>
+                                  <p:childTnLst>
+                                    <p:set>
+                                      <p:cBhvr>
+                                        <p:cTn id="18" dur="1" fill="hold">
+                                          <p:stCondLst>
+                                            <p:cond delay="0"/>
+                                          </p:stCondLst>
+                                        </p:cTn>
+                                        <p:tgtEl>
+                                          <p:spTgt spid="3">
+                                            <p:txEl>
+                                              <p:pRg st="5" end="5"/>
+                                            </p:txEl>
+                                          </p:spTgt>
+                                        </p:tgtEl>
+                                        <p:attrNameLst>
+                                          <p:attrName>style.visibility</p:attrName>
+                                        </p:attrNameLst>
+                                      </p:cBhvr>
+                                      <p:to>
+                                        <p:strVal val="visible"/>
+                                      </p:to>
+                                    </p:set>
+                                  </p:childTnLst>
+                                </p:cTn>
+                              </p:par>
+                            </p:childTnLst>
+                          </p:cTn>
+                        </p:par>
+                      </p:childTnLst>
+                    </p:cTn>
+                  </p:par>
+                </p:childTnLst>
+              </p:cTn>
+              <p:prevCondLst>
+                <p:cond evt="onPrev" delay="0">
+                  <p:tgtEl>
+                    <p:sldTgt/>
+                  </p:tgtEl>
+                </p:cond>
+              </p:prevCondLst>
+              <p:nextCondLst>
+                <p:cond evt="onNext" delay="0">
+                  <p:tgtEl>
+                    <p:sldTgt/>
+                  </p:tgtEl>
+                </p:cond>
+              </p:nextCondLst>
+            </p:seq>
+          </p:childTnLst>
+        </p:cTn>
+      </p:par>
+    </p:tnLst>
+    <p:bldLst>
+      <p:bldP spid="3" grpId="0" build="p"/>
+    </p:bldLst>
+  </p:timing>
 </p:sld>
 </file>
 
@@ -6524,6 +8171,403 @@
   <p:clrMapOvr>
     <a:masterClrMapping/>
   </p:clrMapOvr>
+  <p:timing>
+    <p:tnLst>
+      <p:par>
+        <p:cTn id="1" dur="indefinite" restart="never" nodeType="tmRoot">
+          <p:childTnLst>
+            <p:seq concurrent="1" nextAc="seek">
+              <p:cTn id="2" dur="indefinite" nodeType="mainSeq">
+                <p:childTnLst>
+                  <p:par>
+                    <p:cTn id="3" fill="hold">
+                      <p:stCondLst>
+                        <p:cond delay="indefinite"/>
+                      </p:stCondLst>
+                      <p:childTnLst>
+                        <p:par>
+                          <p:cTn id="4" fill="hold">
+                            <p:stCondLst>
+                              <p:cond delay="0"/>
+                            </p:stCondLst>
+                            <p:childTnLst>
+                              <p:par>
+                                <p:cTn id="5" presetID="1" presetClass="entr" presetSubtype="0" fill="hold" grpId="0" nodeType="clickEffect">
+                                  <p:stCondLst>
+                                    <p:cond delay="0"/>
+                                  </p:stCondLst>
+                                  <p:childTnLst>
+                                    <p:set>
+                                      <p:cBhvr>
+                                        <p:cTn id="6" dur="1" fill="hold">
+                                          <p:stCondLst>
+                                            <p:cond delay="0"/>
+                                          </p:stCondLst>
+                                        </p:cTn>
+                                        <p:tgtEl>
+                                          <p:spTgt spid="3">
+                                            <p:txEl>
+                                              <p:pRg st="0" end="0"/>
+                                            </p:txEl>
+                                          </p:spTgt>
+                                        </p:tgtEl>
+                                        <p:attrNameLst>
+                                          <p:attrName>style.visibility</p:attrName>
+                                        </p:attrNameLst>
+                                      </p:cBhvr>
+                                      <p:to>
+                                        <p:strVal val="visible"/>
+                                      </p:to>
+                                    </p:set>
+                                  </p:childTnLst>
+                                </p:cTn>
+                              </p:par>
+                              <p:par>
+                                <p:cTn id="7" presetID="1" presetClass="entr" presetSubtype="0" fill="hold" grpId="0" nodeType="withEffect">
+                                  <p:stCondLst>
+                                    <p:cond delay="0"/>
+                                  </p:stCondLst>
+                                  <p:childTnLst>
+                                    <p:set>
+                                      <p:cBhvr>
+                                        <p:cTn id="8" dur="1" fill="hold">
+                                          <p:stCondLst>
+                                            <p:cond delay="0"/>
+                                          </p:stCondLst>
+                                        </p:cTn>
+                                        <p:tgtEl>
+                                          <p:spTgt spid="3">
+                                            <p:txEl>
+                                              <p:pRg st="1" end="1"/>
+                                            </p:txEl>
+                                          </p:spTgt>
+                                        </p:tgtEl>
+                                        <p:attrNameLst>
+                                          <p:attrName>style.visibility</p:attrName>
+                                        </p:attrNameLst>
+                                      </p:cBhvr>
+                                      <p:to>
+                                        <p:strVal val="visible"/>
+                                      </p:to>
+                                    </p:set>
+                                  </p:childTnLst>
+                                </p:cTn>
+                              </p:par>
+                              <p:par>
+                                <p:cTn id="9" presetID="1" presetClass="entr" presetSubtype="0" fill="hold" grpId="0" nodeType="withEffect">
+                                  <p:stCondLst>
+                                    <p:cond delay="0"/>
+                                  </p:stCondLst>
+                                  <p:childTnLst>
+                                    <p:set>
+                                      <p:cBhvr>
+                                        <p:cTn id="10" dur="1" fill="hold">
+                                          <p:stCondLst>
+                                            <p:cond delay="0"/>
+                                          </p:stCondLst>
+                                        </p:cTn>
+                                        <p:tgtEl>
+                                          <p:spTgt spid="3">
+                                            <p:txEl>
+                                              <p:pRg st="2" end="2"/>
+                                            </p:txEl>
+                                          </p:spTgt>
+                                        </p:tgtEl>
+                                        <p:attrNameLst>
+                                          <p:attrName>style.visibility</p:attrName>
+                                        </p:attrNameLst>
+                                      </p:cBhvr>
+                                      <p:to>
+                                        <p:strVal val="visible"/>
+                                      </p:to>
+                                    </p:set>
+                                  </p:childTnLst>
+                                </p:cTn>
+                              </p:par>
+                            </p:childTnLst>
+                          </p:cTn>
+                        </p:par>
+                      </p:childTnLst>
+                    </p:cTn>
+                  </p:par>
+                  <p:par>
+                    <p:cTn id="11" fill="hold">
+                      <p:stCondLst>
+                        <p:cond delay="indefinite"/>
+                      </p:stCondLst>
+                      <p:childTnLst>
+                        <p:par>
+                          <p:cTn id="12" fill="hold">
+                            <p:stCondLst>
+                              <p:cond delay="0"/>
+                            </p:stCondLst>
+                            <p:childTnLst>
+                              <p:par>
+                                <p:cTn id="13" presetID="1" presetClass="entr" presetSubtype="0" fill="hold" grpId="0" nodeType="clickEffect">
+                                  <p:stCondLst>
+                                    <p:cond delay="0"/>
+                                  </p:stCondLst>
+                                  <p:childTnLst>
+                                    <p:set>
+                                      <p:cBhvr>
+                                        <p:cTn id="14" dur="1" fill="hold">
+                                          <p:stCondLst>
+                                            <p:cond delay="0"/>
+                                          </p:stCondLst>
+                                        </p:cTn>
+                                        <p:tgtEl>
+                                          <p:spTgt spid="3">
+                                            <p:txEl>
+                                              <p:pRg st="3" end="3"/>
+                                            </p:txEl>
+                                          </p:spTgt>
+                                        </p:tgtEl>
+                                        <p:attrNameLst>
+                                          <p:attrName>style.visibility</p:attrName>
+                                        </p:attrNameLst>
+                                      </p:cBhvr>
+                                      <p:to>
+                                        <p:strVal val="visible"/>
+                                      </p:to>
+                                    </p:set>
+                                  </p:childTnLst>
+                                </p:cTn>
+                              </p:par>
+                              <p:par>
+                                <p:cTn id="15" presetID="1" presetClass="entr" presetSubtype="0" fill="hold" grpId="0" nodeType="withEffect">
+                                  <p:stCondLst>
+                                    <p:cond delay="0"/>
+                                  </p:stCondLst>
+                                  <p:childTnLst>
+                                    <p:set>
+                                      <p:cBhvr>
+                                        <p:cTn id="16" dur="1" fill="hold">
+                                          <p:stCondLst>
+                                            <p:cond delay="0"/>
+                                          </p:stCondLst>
+                                        </p:cTn>
+                                        <p:tgtEl>
+                                          <p:spTgt spid="3">
+                                            <p:txEl>
+                                              <p:pRg st="4" end="4"/>
+                                            </p:txEl>
+                                          </p:spTgt>
+                                        </p:tgtEl>
+                                        <p:attrNameLst>
+                                          <p:attrName>style.visibility</p:attrName>
+                                        </p:attrNameLst>
+                                      </p:cBhvr>
+                                      <p:to>
+                                        <p:strVal val="visible"/>
+                                      </p:to>
+                                    </p:set>
+                                  </p:childTnLst>
+                                </p:cTn>
+                              </p:par>
+                              <p:par>
+                                <p:cTn id="17" presetID="1" presetClass="entr" presetSubtype="0" fill="hold" grpId="0" nodeType="withEffect">
+                                  <p:stCondLst>
+                                    <p:cond delay="0"/>
+                                  </p:stCondLst>
+                                  <p:childTnLst>
+                                    <p:set>
+                                      <p:cBhvr>
+                                        <p:cTn id="18" dur="1" fill="hold">
+                                          <p:stCondLst>
+                                            <p:cond delay="0"/>
+                                          </p:stCondLst>
+                                        </p:cTn>
+                                        <p:tgtEl>
+                                          <p:spTgt spid="3">
+                                            <p:txEl>
+                                              <p:pRg st="5" end="5"/>
+                                            </p:txEl>
+                                          </p:spTgt>
+                                        </p:tgtEl>
+                                        <p:attrNameLst>
+                                          <p:attrName>style.visibility</p:attrName>
+                                        </p:attrNameLst>
+                                      </p:cBhvr>
+                                      <p:to>
+                                        <p:strVal val="visible"/>
+                                      </p:to>
+                                    </p:set>
+                                  </p:childTnLst>
+                                </p:cTn>
+                              </p:par>
+                              <p:par>
+                                <p:cTn id="19" presetID="1" presetClass="entr" presetSubtype="0" fill="hold" grpId="0" nodeType="withEffect">
+                                  <p:stCondLst>
+                                    <p:cond delay="0"/>
+                                  </p:stCondLst>
+                                  <p:childTnLst>
+                                    <p:set>
+                                      <p:cBhvr>
+                                        <p:cTn id="20" dur="1" fill="hold">
+                                          <p:stCondLst>
+                                            <p:cond delay="0"/>
+                                          </p:stCondLst>
+                                        </p:cTn>
+                                        <p:tgtEl>
+                                          <p:spTgt spid="3">
+                                            <p:txEl>
+                                              <p:pRg st="6" end="6"/>
+                                            </p:txEl>
+                                          </p:spTgt>
+                                        </p:tgtEl>
+                                        <p:attrNameLst>
+                                          <p:attrName>style.visibility</p:attrName>
+                                        </p:attrNameLst>
+                                      </p:cBhvr>
+                                      <p:to>
+                                        <p:strVal val="visible"/>
+                                      </p:to>
+                                    </p:set>
+                                  </p:childTnLst>
+                                </p:cTn>
+                              </p:par>
+                            </p:childTnLst>
+                          </p:cTn>
+                        </p:par>
+                      </p:childTnLst>
+                    </p:cTn>
+                  </p:par>
+                  <p:par>
+                    <p:cTn id="21" fill="hold">
+                      <p:stCondLst>
+                        <p:cond delay="indefinite"/>
+                      </p:stCondLst>
+                      <p:childTnLst>
+                        <p:par>
+                          <p:cTn id="22" fill="hold">
+                            <p:stCondLst>
+                              <p:cond delay="0"/>
+                            </p:stCondLst>
+                            <p:childTnLst>
+                              <p:par>
+                                <p:cTn id="23" presetID="1" presetClass="entr" presetSubtype="0" fill="hold" grpId="0" nodeType="clickEffect">
+                                  <p:stCondLst>
+                                    <p:cond delay="0"/>
+                                  </p:stCondLst>
+                                  <p:childTnLst>
+                                    <p:set>
+                                      <p:cBhvr>
+                                        <p:cTn id="24" dur="1" fill="hold">
+                                          <p:stCondLst>
+                                            <p:cond delay="0"/>
+                                          </p:stCondLst>
+                                        </p:cTn>
+                                        <p:tgtEl>
+                                          <p:spTgt spid="3">
+                                            <p:txEl>
+                                              <p:pRg st="7" end="7"/>
+                                            </p:txEl>
+                                          </p:spTgt>
+                                        </p:tgtEl>
+                                        <p:attrNameLst>
+                                          <p:attrName>style.visibility</p:attrName>
+                                        </p:attrNameLst>
+                                      </p:cBhvr>
+                                      <p:to>
+                                        <p:strVal val="visible"/>
+                                      </p:to>
+                                    </p:set>
+                                  </p:childTnLst>
+                                </p:cTn>
+                              </p:par>
+                              <p:par>
+                                <p:cTn id="25" presetID="1" presetClass="entr" presetSubtype="0" fill="hold" grpId="0" nodeType="withEffect">
+                                  <p:stCondLst>
+                                    <p:cond delay="0"/>
+                                  </p:stCondLst>
+                                  <p:childTnLst>
+                                    <p:set>
+                                      <p:cBhvr>
+                                        <p:cTn id="26" dur="1" fill="hold">
+                                          <p:stCondLst>
+                                            <p:cond delay="0"/>
+                                          </p:stCondLst>
+                                        </p:cTn>
+                                        <p:tgtEl>
+                                          <p:spTgt spid="3">
+                                            <p:txEl>
+                                              <p:pRg st="8" end="8"/>
+                                            </p:txEl>
+                                          </p:spTgt>
+                                        </p:tgtEl>
+                                        <p:attrNameLst>
+                                          <p:attrName>style.visibility</p:attrName>
+                                        </p:attrNameLst>
+                                      </p:cBhvr>
+                                      <p:to>
+                                        <p:strVal val="visible"/>
+                                      </p:to>
+                                    </p:set>
+                                  </p:childTnLst>
+                                </p:cTn>
+                              </p:par>
+                              <p:par>
+                                <p:cTn id="27" presetID="1" presetClass="entr" presetSubtype="0" fill="hold" grpId="0" nodeType="withEffect">
+                                  <p:stCondLst>
+                                    <p:cond delay="0"/>
+                                  </p:stCondLst>
+                                  <p:childTnLst>
+                                    <p:set>
+                                      <p:cBhvr>
+                                        <p:cTn id="28" dur="1" fill="hold">
+                                          <p:stCondLst>
+                                            <p:cond delay="0"/>
+                                          </p:stCondLst>
+                                        </p:cTn>
+                                        <p:tgtEl>
+                                          <p:spTgt spid="3">
+                                            <p:txEl>
+                                              <p:pRg st="9" end="9"/>
+                                            </p:txEl>
+                                          </p:spTgt>
+                                        </p:tgtEl>
+                                        <p:attrNameLst>
+                                          <p:attrName>style.visibility</p:attrName>
+                                        </p:attrNameLst>
+                                      </p:cBhvr>
+                                      <p:to>
+                                        <p:strVal val="visible"/>
+                                      </p:to>
+                                    </p:set>
+                                  </p:childTnLst>
+                                </p:cTn>
+                              </p:par>
+                            </p:childTnLst>
+                          </p:cTn>
+                        </p:par>
+                      </p:childTnLst>
+                    </p:cTn>
+                  </p:par>
+                </p:childTnLst>
+              </p:cTn>
+              <p:prevCondLst>
+                <p:cond evt="onPrev" delay="0">
+                  <p:tgtEl>
+                    <p:sldTgt/>
+                  </p:tgtEl>
+                </p:cond>
+              </p:prevCondLst>
+              <p:nextCondLst>
+                <p:cond evt="onNext" delay="0">
+                  <p:tgtEl>
+                    <p:sldTgt/>
+                  </p:tgtEl>
+                </p:cond>
+              </p:nextCondLst>
+            </p:seq>
+          </p:childTnLst>
+        </p:cTn>
+      </p:par>
+    </p:tnLst>
+    <p:bldLst>
+      <p:bldP spid="3" grpId="0" build="p"/>
+    </p:bldLst>
+  </p:timing>
 </p:sld>
 </file>
 
@@ -6848,7 +8892,7 @@
             </a:r>
             <a:r>
               <a:rPr lang="en-GB" b="1" dirty="0"/>
-              <a:t>sports problems </a:t>
+              <a:t>sports data </a:t>
             </a:r>
             <a:r>
               <a:rPr lang="en-GB" dirty="0"/>
@@ -6856,7 +8900,23 @@
             </a:r>
             <a:r>
               <a:rPr lang="en-GB" b="1" dirty="0"/>
-              <a:t>evidence-informed decisions</a:t>
+              <a:t>knowledge and insights </a:t>
+            </a:r>
+            <a:r>
+              <a:rPr lang="en-GB" dirty="0"/>
+              <a:t>that can </a:t>
+            </a:r>
+            <a:r>
+              <a:rPr lang="en-GB" b="1" dirty="0"/>
+              <a:t>guide</a:t>
+            </a:r>
+            <a:r>
+              <a:rPr lang="en-GB" dirty="0"/>
+              <a:t> </a:t>
+            </a:r>
+            <a:r>
+              <a:rPr lang="en-GB" b="1" dirty="0"/>
+              <a:t>decisions</a:t>
             </a:r>
             <a:r>
               <a:rPr lang="en-GB" dirty="0"/>
@@ -7003,6 +9063,284 @@
   <p:clrMapOvr>
     <a:masterClrMapping/>
   </p:clrMapOvr>
+  <p:timing>
+    <p:tnLst>
+      <p:par>
+        <p:cTn id="1" dur="indefinite" restart="never" nodeType="tmRoot">
+          <p:childTnLst>
+            <p:seq concurrent="1" nextAc="seek">
+              <p:cTn id="2" dur="indefinite" nodeType="mainSeq">
+                <p:childTnLst>
+                  <p:par>
+                    <p:cTn id="3" fill="hold">
+                      <p:stCondLst>
+                        <p:cond delay="indefinite"/>
+                      </p:stCondLst>
+                      <p:childTnLst>
+                        <p:par>
+                          <p:cTn id="4" fill="hold">
+                            <p:stCondLst>
+                              <p:cond delay="0"/>
+                            </p:stCondLst>
+                            <p:childTnLst>
+                              <p:par>
+                                <p:cTn id="5" presetID="1" presetClass="entr" presetSubtype="0" fill="hold" grpId="0" nodeType="clickEffect">
+                                  <p:stCondLst>
+                                    <p:cond delay="0"/>
+                                  </p:stCondLst>
+                                  <p:childTnLst>
+                                    <p:set>
+                                      <p:cBhvr>
+                                        <p:cTn id="6" dur="1" fill="hold">
+                                          <p:stCondLst>
+                                            <p:cond delay="0"/>
+                                          </p:stCondLst>
+                                        </p:cTn>
+                                        <p:tgtEl>
+                                          <p:spTgt spid="3">
+                                            <p:txEl>
+                                              <p:pRg st="0" end="0"/>
+                                            </p:txEl>
+                                          </p:spTgt>
+                                        </p:tgtEl>
+                                        <p:attrNameLst>
+                                          <p:attrName>style.visibility</p:attrName>
+                                        </p:attrNameLst>
+                                      </p:cBhvr>
+                                      <p:to>
+                                        <p:strVal val="visible"/>
+                                      </p:to>
+                                    </p:set>
+                                  </p:childTnLst>
+                                </p:cTn>
+                              </p:par>
+                            </p:childTnLst>
+                          </p:cTn>
+                        </p:par>
+                      </p:childTnLst>
+                    </p:cTn>
+                  </p:par>
+                  <p:par>
+                    <p:cTn id="7" fill="hold">
+                      <p:stCondLst>
+                        <p:cond delay="indefinite"/>
+                      </p:stCondLst>
+                      <p:childTnLst>
+                        <p:par>
+                          <p:cTn id="8" fill="hold">
+                            <p:stCondLst>
+                              <p:cond delay="0"/>
+                            </p:stCondLst>
+                            <p:childTnLst>
+                              <p:par>
+                                <p:cTn id="9" presetID="1" presetClass="entr" presetSubtype="0" fill="hold" grpId="0" nodeType="clickEffect">
+                                  <p:stCondLst>
+                                    <p:cond delay="0"/>
+                                  </p:stCondLst>
+                                  <p:childTnLst>
+                                    <p:set>
+                                      <p:cBhvr>
+                                        <p:cTn id="10" dur="1" fill="hold">
+                                          <p:stCondLst>
+                                            <p:cond delay="0"/>
+                                          </p:stCondLst>
+                                        </p:cTn>
+                                        <p:tgtEl>
+                                          <p:spTgt spid="3">
+                                            <p:txEl>
+                                              <p:pRg st="1" end="1"/>
+                                            </p:txEl>
+                                          </p:spTgt>
+                                        </p:tgtEl>
+                                        <p:attrNameLst>
+                                          <p:attrName>style.visibility</p:attrName>
+                                        </p:attrNameLst>
+                                      </p:cBhvr>
+                                      <p:to>
+                                        <p:strVal val="visible"/>
+                                      </p:to>
+                                    </p:set>
+                                  </p:childTnLst>
+                                </p:cTn>
+                              </p:par>
+                            </p:childTnLst>
+                          </p:cTn>
+                        </p:par>
+                      </p:childTnLst>
+                    </p:cTn>
+                  </p:par>
+                  <p:par>
+                    <p:cTn id="11" fill="hold">
+                      <p:stCondLst>
+                        <p:cond delay="indefinite"/>
+                      </p:stCondLst>
+                      <p:childTnLst>
+                        <p:par>
+                          <p:cTn id="12" fill="hold">
+                            <p:stCondLst>
+                              <p:cond delay="0"/>
+                            </p:stCondLst>
+                            <p:childTnLst>
+                              <p:par>
+                                <p:cTn id="13" presetID="1" presetClass="entr" presetSubtype="0" fill="hold" grpId="0" nodeType="clickEffect">
+                                  <p:stCondLst>
+                                    <p:cond delay="0"/>
+                                  </p:stCondLst>
+                                  <p:childTnLst>
+                                    <p:set>
+                                      <p:cBhvr>
+                                        <p:cTn id="14" dur="1" fill="hold">
+                                          <p:stCondLst>
+                                            <p:cond delay="0"/>
+                                          </p:stCondLst>
+                                        </p:cTn>
+                                        <p:tgtEl>
+                                          <p:spTgt spid="3">
+                                            <p:txEl>
+                                              <p:pRg st="2" end="2"/>
+                                            </p:txEl>
+                                          </p:spTgt>
+                                        </p:tgtEl>
+                                        <p:attrNameLst>
+                                          <p:attrName>style.visibility</p:attrName>
+                                        </p:attrNameLst>
+                                      </p:cBhvr>
+                                      <p:to>
+                                        <p:strVal val="visible"/>
+                                      </p:to>
+                                    </p:set>
+                                  </p:childTnLst>
+                                </p:cTn>
+                              </p:par>
+                            </p:childTnLst>
+                          </p:cTn>
+                        </p:par>
+                      </p:childTnLst>
+                    </p:cTn>
+                  </p:par>
+                  <p:par>
+                    <p:cTn id="15" fill="hold">
+                      <p:stCondLst>
+                        <p:cond delay="indefinite"/>
+                      </p:stCondLst>
+                      <p:childTnLst>
+                        <p:par>
+                          <p:cTn id="16" fill="hold">
+                            <p:stCondLst>
+                              <p:cond delay="0"/>
+                            </p:stCondLst>
+                            <p:childTnLst>
+                              <p:par>
+                                <p:cTn id="17" presetID="1" presetClass="entr" presetSubtype="0" fill="hold" grpId="0" nodeType="clickEffect">
+                                  <p:stCondLst>
+                                    <p:cond delay="0"/>
+                                  </p:stCondLst>
+                                  <p:childTnLst>
+                                    <p:set>
+                                      <p:cBhvr>
+                                        <p:cTn id="18" dur="1" fill="hold">
+                                          <p:stCondLst>
+                                            <p:cond delay="0"/>
+                                          </p:stCondLst>
+                                        </p:cTn>
+                                        <p:tgtEl>
+                                          <p:spTgt spid="3">
+                                            <p:txEl>
+                                              <p:pRg st="3" end="3"/>
+                                            </p:txEl>
+                                          </p:spTgt>
+                                        </p:tgtEl>
+                                        <p:attrNameLst>
+                                          <p:attrName>style.visibility</p:attrName>
+                                        </p:attrNameLst>
+                                      </p:cBhvr>
+                                      <p:to>
+                                        <p:strVal val="visible"/>
+                                      </p:to>
+                                    </p:set>
+                                  </p:childTnLst>
+                                </p:cTn>
+                              </p:par>
+                            </p:childTnLst>
+                          </p:cTn>
+                        </p:par>
+                      </p:childTnLst>
+                    </p:cTn>
+                  </p:par>
+                  <p:par>
+                    <p:cTn id="19" fill="hold">
+                      <p:stCondLst>
+                        <p:cond delay="indefinite"/>
+                      </p:stCondLst>
+                      <p:childTnLst>
+                        <p:par>
+                          <p:cTn id="20" fill="hold">
+                            <p:stCondLst>
+                              <p:cond delay="0"/>
+                            </p:stCondLst>
+                            <p:childTnLst>
+                              <p:par>
+                                <p:cTn id="21" presetID="1" presetClass="entr" presetSubtype="0" fill="hold" grpId="0" nodeType="clickEffect">
+                                  <p:stCondLst>
+                                    <p:cond delay="0"/>
+                                  </p:stCondLst>
+                                  <p:childTnLst>
+                                    <p:set>
+                                      <p:cBhvr>
+                                        <p:cTn id="22" dur="1" fill="hold">
+                                          <p:stCondLst>
+                                            <p:cond delay="0"/>
+                                          </p:stCondLst>
+                                        </p:cTn>
+                                        <p:tgtEl>
+                                          <p:spTgt spid="3">
+                                            <p:txEl>
+                                              <p:pRg st="4" end="4"/>
+                                            </p:txEl>
+                                          </p:spTgt>
+                                        </p:tgtEl>
+                                        <p:attrNameLst>
+                                          <p:attrName>style.visibility</p:attrName>
+                                        </p:attrNameLst>
+                                      </p:cBhvr>
+                                      <p:to>
+                                        <p:strVal val="visible"/>
+                                      </p:to>
+                                    </p:set>
+                                  </p:childTnLst>
+                                </p:cTn>
+                              </p:par>
+                            </p:childTnLst>
+                          </p:cTn>
+                        </p:par>
+                      </p:childTnLst>
+                    </p:cTn>
+                  </p:par>
+                </p:childTnLst>
+              </p:cTn>
+              <p:prevCondLst>
+                <p:cond evt="onPrev" delay="0">
+                  <p:tgtEl>
+                    <p:sldTgt/>
+                  </p:tgtEl>
+                </p:cond>
+              </p:prevCondLst>
+              <p:nextCondLst>
+                <p:cond evt="onNext" delay="0">
+                  <p:tgtEl>
+                    <p:sldTgt/>
+                  </p:tgtEl>
+                </p:cond>
+              </p:nextCondLst>
+            </p:seq>
+          </p:childTnLst>
+        </p:cTn>
+      </p:par>
+    </p:tnLst>
+    <p:bldLst>
+      <p:bldP spid="3" grpId="0" build="p"/>
+    </p:bldLst>
+  </p:timing>
 </p:sld>
 </file>
 
@@ -7113,10 +9451,29 @@
             </a:r>
             <a:r>
               <a:rPr lang="en-GB" dirty="0"/>
-              <a:t> focusing on ticketing, marketing, sponsorship, or other business operations.</a:t>
-            </a:r>
-          </a:p>
-          <a:p>
+              <a:t> working on sports business problems</a:t>
+            </a:r>
+          </a:p>
+          <a:p>
+            <a:pPr lvl="1"/>
+            <a:r>
+              <a:rPr lang="en-GB" dirty="0"/>
+              <a:t>Ticketing </a:t>
+            </a:r>
+          </a:p>
+          <a:p>
+            <a:pPr lvl="1"/>
+            <a:r>
+              <a:rPr lang="en-GB" dirty="0"/>
+              <a:t>Marketing and sponsorship</a:t>
+            </a:r>
+          </a:p>
+          <a:p>
+            <a:pPr lvl="1"/>
+            <a:r>
+              <a:rPr lang="en-GB" dirty="0"/>
+              <a:t>Operations </a:t>
+            </a:r>
             <a:endParaRPr lang="en-US" dirty="0"/>
           </a:p>
         </p:txBody>
@@ -7131,6 +9488,323 @@
   <p:clrMapOvr>
     <a:masterClrMapping/>
   </p:clrMapOvr>
+  <p:timing>
+    <p:tnLst>
+      <p:par>
+        <p:cTn id="1" dur="indefinite" restart="never" nodeType="tmRoot">
+          <p:childTnLst>
+            <p:seq concurrent="1" nextAc="seek">
+              <p:cTn id="2" dur="indefinite" nodeType="mainSeq">
+                <p:childTnLst>
+                  <p:par>
+                    <p:cTn id="3" fill="hold">
+                      <p:stCondLst>
+                        <p:cond delay="indefinite"/>
+                      </p:stCondLst>
+                      <p:childTnLst>
+                        <p:par>
+                          <p:cTn id="4" fill="hold">
+                            <p:stCondLst>
+                              <p:cond delay="0"/>
+                            </p:stCondLst>
+                            <p:childTnLst>
+                              <p:par>
+                                <p:cTn id="5" presetID="1" presetClass="entr" presetSubtype="0" fill="hold" grpId="0" nodeType="clickEffect">
+                                  <p:stCondLst>
+                                    <p:cond delay="0"/>
+                                  </p:stCondLst>
+                                  <p:childTnLst>
+                                    <p:set>
+                                      <p:cBhvr>
+                                        <p:cTn id="6" dur="1" fill="hold">
+                                          <p:stCondLst>
+                                            <p:cond delay="0"/>
+                                          </p:stCondLst>
+                                        </p:cTn>
+                                        <p:tgtEl>
+                                          <p:spTgt spid="3">
+                                            <p:txEl>
+                                              <p:pRg st="0" end="0"/>
+                                            </p:txEl>
+                                          </p:spTgt>
+                                        </p:tgtEl>
+                                        <p:attrNameLst>
+                                          <p:attrName>style.visibility</p:attrName>
+                                        </p:attrNameLst>
+                                      </p:cBhvr>
+                                      <p:to>
+                                        <p:strVal val="visible"/>
+                                      </p:to>
+                                    </p:set>
+                                  </p:childTnLst>
+                                </p:cTn>
+                              </p:par>
+                              <p:par>
+                                <p:cTn id="7" presetID="1" presetClass="entr" presetSubtype="0" fill="hold" grpId="0" nodeType="withEffect">
+                                  <p:stCondLst>
+                                    <p:cond delay="0"/>
+                                  </p:stCondLst>
+                                  <p:childTnLst>
+                                    <p:set>
+                                      <p:cBhvr>
+                                        <p:cTn id="8" dur="1" fill="hold">
+                                          <p:stCondLst>
+                                            <p:cond delay="0"/>
+                                          </p:stCondLst>
+                                        </p:cTn>
+                                        <p:tgtEl>
+                                          <p:spTgt spid="3">
+                                            <p:txEl>
+                                              <p:pRg st="1" end="1"/>
+                                            </p:txEl>
+                                          </p:spTgt>
+                                        </p:tgtEl>
+                                        <p:attrNameLst>
+                                          <p:attrName>style.visibility</p:attrName>
+                                        </p:attrNameLst>
+                                      </p:cBhvr>
+                                      <p:to>
+                                        <p:strVal val="visible"/>
+                                      </p:to>
+                                    </p:set>
+                                  </p:childTnLst>
+                                </p:cTn>
+                              </p:par>
+                              <p:par>
+                                <p:cTn id="9" presetID="1" presetClass="entr" presetSubtype="0" fill="hold" grpId="0" nodeType="withEffect">
+                                  <p:stCondLst>
+                                    <p:cond delay="0"/>
+                                  </p:stCondLst>
+                                  <p:childTnLst>
+                                    <p:set>
+                                      <p:cBhvr>
+                                        <p:cTn id="10" dur="1" fill="hold">
+                                          <p:stCondLst>
+                                            <p:cond delay="0"/>
+                                          </p:stCondLst>
+                                        </p:cTn>
+                                        <p:tgtEl>
+                                          <p:spTgt spid="3">
+                                            <p:txEl>
+                                              <p:pRg st="2" end="2"/>
+                                            </p:txEl>
+                                          </p:spTgt>
+                                        </p:tgtEl>
+                                        <p:attrNameLst>
+                                          <p:attrName>style.visibility</p:attrName>
+                                        </p:attrNameLst>
+                                      </p:cBhvr>
+                                      <p:to>
+                                        <p:strVal val="visible"/>
+                                      </p:to>
+                                    </p:set>
+                                  </p:childTnLst>
+                                </p:cTn>
+                              </p:par>
+                              <p:par>
+                                <p:cTn id="11" presetID="1" presetClass="entr" presetSubtype="0" fill="hold" grpId="0" nodeType="withEffect">
+                                  <p:stCondLst>
+                                    <p:cond delay="0"/>
+                                  </p:stCondLst>
+                                  <p:childTnLst>
+                                    <p:set>
+                                      <p:cBhvr>
+                                        <p:cTn id="12" dur="1" fill="hold">
+                                          <p:stCondLst>
+                                            <p:cond delay="0"/>
+                                          </p:stCondLst>
+                                        </p:cTn>
+                                        <p:tgtEl>
+                                          <p:spTgt spid="3">
+                                            <p:txEl>
+                                              <p:pRg st="3" end="3"/>
+                                            </p:txEl>
+                                          </p:spTgt>
+                                        </p:tgtEl>
+                                        <p:attrNameLst>
+                                          <p:attrName>style.visibility</p:attrName>
+                                        </p:attrNameLst>
+                                      </p:cBhvr>
+                                      <p:to>
+                                        <p:strVal val="visible"/>
+                                      </p:to>
+                                    </p:set>
+                                  </p:childTnLst>
+                                </p:cTn>
+                              </p:par>
+                            </p:childTnLst>
+                          </p:cTn>
+                        </p:par>
+                      </p:childTnLst>
+                    </p:cTn>
+                  </p:par>
+                  <p:par>
+                    <p:cTn id="13" fill="hold">
+                      <p:stCondLst>
+                        <p:cond delay="indefinite"/>
+                      </p:stCondLst>
+                      <p:childTnLst>
+                        <p:par>
+                          <p:cTn id="14" fill="hold">
+                            <p:stCondLst>
+                              <p:cond delay="0"/>
+                            </p:stCondLst>
+                            <p:childTnLst>
+                              <p:par>
+                                <p:cTn id="15" presetID="1" presetClass="entr" presetSubtype="0" fill="hold" grpId="0" nodeType="clickEffect">
+                                  <p:stCondLst>
+                                    <p:cond delay="0"/>
+                                  </p:stCondLst>
+                                  <p:childTnLst>
+                                    <p:set>
+                                      <p:cBhvr>
+                                        <p:cTn id="16" dur="1" fill="hold">
+                                          <p:stCondLst>
+                                            <p:cond delay="0"/>
+                                          </p:stCondLst>
+                                        </p:cTn>
+                                        <p:tgtEl>
+                                          <p:spTgt spid="3">
+                                            <p:txEl>
+                                              <p:pRg st="5" end="5"/>
+                                            </p:txEl>
+                                          </p:spTgt>
+                                        </p:tgtEl>
+                                        <p:attrNameLst>
+                                          <p:attrName>style.visibility</p:attrName>
+                                        </p:attrNameLst>
+                                      </p:cBhvr>
+                                      <p:to>
+                                        <p:strVal val="visible"/>
+                                      </p:to>
+                                    </p:set>
+                                  </p:childTnLst>
+                                </p:cTn>
+                              </p:par>
+                              <p:par>
+                                <p:cTn id="17" presetID="1" presetClass="entr" presetSubtype="0" fill="hold" grpId="0" nodeType="withEffect">
+                                  <p:stCondLst>
+                                    <p:cond delay="0"/>
+                                  </p:stCondLst>
+                                  <p:childTnLst>
+                                    <p:set>
+                                      <p:cBhvr>
+                                        <p:cTn id="18" dur="1" fill="hold">
+                                          <p:stCondLst>
+                                            <p:cond delay="0"/>
+                                          </p:stCondLst>
+                                        </p:cTn>
+                                        <p:tgtEl>
+                                          <p:spTgt spid="3">
+                                            <p:txEl>
+                                              <p:pRg st="6" end="6"/>
+                                            </p:txEl>
+                                          </p:spTgt>
+                                        </p:tgtEl>
+                                        <p:attrNameLst>
+                                          <p:attrName>style.visibility</p:attrName>
+                                        </p:attrNameLst>
+                                      </p:cBhvr>
+                                      <p:to>
+                                        <p:strVal val="visible"/>
+                                      </p:to>
+                                    </p:set>
+                                  </p:childTnLst>
+                                </p:cTn>
+                              </p:par>
+                              <p:par>
+                                <p:cTn id="19" presetID="1" presetClass="entr" presetSubtype="0" fill="hold" grpId="0" nodeType="withEffect">
+                                  <p:stCondLst>
+                                    <p:cond delay="0"/>
+                                  </p:stCondLst>
+                                  <p:childTnLst>
+                                    <p:set>
+                                      <p:cBhvr>
+                                        <p:cTn id="20" dur="1" fill="hold">
+                                          <p:stCondLst>
+                                            <p:cond delay="0"/>
+                                          </p:stCondLst>
+                                        </p:cTn>
+                                        <p:tgtEl>
+                                          <p:spTgt spid="3">
+                                            <p:txEl>
+                                              <p:pRg st="7" end="7"/>
+                                            </p:txEl>
+                                          </p:spTgt>
+                                        </p:tgtEl>
+                                        <p:attrNameLst>
+                                          <p:attrName>style.visibility</p:attrName>
+                                        </p:attrNameLst>
+                                      </p:cBhvr>
+                                      <p:to>
+                                        <p:strVal val="visible"/>
+                                      </p:to>
+                                    </p:set>
+                                  </p:childTnLst>
+                                </p:cTn>
+                              </p:par>
+                              <p:par>
+                                <p:cTn id="21" presetID="1" presetClass="entr" presetSubtype="0" fill="hold" grpId="0" nodeType="withEffect">
+                                  <p:stCondLst>
+                                    <p:cond delay="0"/>
+                                  </p:stCondLst>
+                                  <p:childTnLst>
+                                    <p:set>
+                                      <p:cBhvr>
+                                        <p:cTn id="22" dur="1" fill="hold">
+                                          <p:stCondLst>
+                                            <p:cond delay="0"/>
+                                          </p:stCondLst>
+                                        </p:cTn>
+                                        <p:tgtEl>
+                                          <p:spTgt spid="3">
+                                            <p:txEl>
+                                              <p:pRg st="8" end="8"/>
+                                            </p:txEl>
+                                          </p:spTgt>
+                                        </p:tgtEl>
+                                        <p:attrNameLst>
+                                          <p:attrName>style.visibility</p:attrName>
+                                        </p:attrNameLst>
+                                      </p:cBhvr>
+                                      <p:to>
+                                        <p:strVal val="visible"/>
+                                      </p:to>
+                                    </p:set>
+                                  </p:childTnLst>
+                                </p:cTn>
+                              </p:par>
+                            </p:childTnLst>
+                          </p:cTn>
+                        </p:par>
+                      </p:childTnLst>
+                    </p:cTn>
+                  </p:par>
+                </p:childTnLst>
+              </p:cTn>
+              <p:prevCondLst>
+                <p:cond evt="onPrev" delay="0">
+                  <p:tgtEl>
+                    <p:sldTgt/>
+                  </p:tgtEl>
+                </p:cond>
+              </p:prevCondLst>
+              <p:nextCondLst>
+                <p:cond evt="onNext" delay="0">
+                  <p:tgtEl>
+                    <p:sldTgt/>
+                  </p:tgtEl>
+                </p:cond>
+              </p:nextCondLst>
+            </p:seq>
+          </p:childTnLst>
+        </p:cTn>
+      </p:par>
+    </p:tnLst>
+    <p:bldLst>
+      <p:bldP spid="3" grpId="0" build="p"/>
+    </p:bldLst>
+  </p:timing>
 </p:sld>
 </file>
 
@@ -7286,25 +9960,25 @@
           <a:lstStyle/>
           <a:p>
             <a:r>
-              <a:rPr lang="en-US" dirty="0"/>
+              <a:rPr lang="en-US" sz="2400" dirty="0"/>
               <a:t>Sports Data Analytics MSc</a:t>
             </a:r>
           </a:p>
           <a:p>
             <a:r>
-              <a:rPr lang="en-US" dirty="0"/>
+              <a:rPr lang="en-US" sz="2400" dirty="0"/>
               <a:t>Exercise Physiology PhD candidate</a:t>
             </a:r>
           </a:p>
           <a:p>
             <a:r>
-              <a:rPr lang="en-US" dirty="0"/>
+              <a:rPr lang="en-US" sz="2400" dirty="0"/>
               <a:t>Sport science, Oklahoma Basketball</a:t>
             </a:r>
           </a:p>
           <a:p>
             <a:r>
-              <a:rPr lang="en-US" dirty="0"/>
+              <a:rPr lang="en-US" sz="2400" dirty="0"/>
               <a:t>Performance Intern, Vegas Golden Knights</a:t>
             </a:r>
           </a:p>
@@ -7369,7 +10043,7 @@
         </p:blipFill>
         <p:spPr bwMode="auto">
           <a:xfrm>
-            <a:off x="7837714" y="3429000"/>
+            <a:off x="7661658" y="3961505"/>
             <a:ext cx="3785476" cy="2522483"/>
           </a:xfrm>
           <a:prstGeom prst="rect">
@@ -7404,7 +10078,7 @@
         <p:spPr>
           <a:xfrm>
             <a:off x="838200" y="3805881"/>
-            <a:ext cx="6833259" cy="2065670"/>
+            <a:ext cx="6304005" cy="2065670"/>
           </a:xfrm>
           <a:prstGeom prst="rect">
             <a:avLst/>
@@ -7580,26 +10254,117 @@
           </a:lstStyle>
           <a:p>
             <a:r>
-              <a:rPr lang="en-US" dirty="0"/>
+              <a:rPr lang="en-US" sz="2400" dirty="0"/>
               <a:t>What I work on</a:t>
             </a:r>
           </a:p>
           <a:p>
             <a:pPr lvl="1"/>
             <a:r>
-              <a:rPr lang="en-US" dirty="0"/>
+              <a:rPr lang="en-US" sz="2000" dirty="0"/>
               <a:t>Load management using wearable technology</a:t>
             </a:r>
           </a:p>
           <a:p>
             <a:pPr lvl="1"/>
             <a:r>
-              <a:rPr lang="en-US" dirty="0"/>
+              <a:rPr lang="en-US" sz="2000" dirty="0"/>
               <a:t>Translating data into actionable coaching insight</a:t>
             </a:r>
           </a:p>
         </p:txBody>
       </p:sp>
+      <p:pic>
+        <p:nvPicPr>
+          <p:cNvPr id="6" name="Picture 5" descr="No photo description available.">
+            <a:extLst>
+              <a:ext uri="{FF2B5EF4-FFF2-40B4-BE49-F238E27FC236}">
+                <a16:creationId xmlns:a16="http://schemas.microsoft.com/office/drawing/2014/main" id="{EABC1EEA-7BAE-018F-6002-3E9647678D04}"/>
+              </a:ext>
+            </a:extLst>
+          </p:cNvPr>
+          <p:cNvPicPr>
+            <a:picLocks noChangeAspect="1"/>
+          </p:cNvPicPr>
+          <p:nvPr/>
+        </p:nvPicPr>
+        <p:blipFill>
+          <a:blip r:embed="rId3"/>
+          <a:srcRect t="26461" b="29447"/>
+          <a:stretch>
+            <a:fillRect/>
+          </a:stretch>
+        </p:blipFill>
+        <p:spPr>
+          <a:xfrm>
+            <a:off x="7438301" y="2518750"/>
+            <a:ext cx="4232190" cy="1049637"/>
+          </a:xfrm>
+          <a:prstGeom prst="rect">
+            <a:avLst/>
+          </a:prstGeom>
+        </p:spPr>
+      </p:pic>
+      <p:pic>
+        <p:nvPicPr>
+          <p:cNvPr id="7" name="Picture 6" descr="Oklahoma men's basketball gets biggest win of season at perfect time">
+            <a:extLst>
+              <a:ext uri="{FF2B5EF4-FFF2-40B4-BE49-F238E27FC236}">
+                <a16:creationId xmlns:a16="http://schemas.microsoft.com/office/drawing/2014/main" id="{E674796D-C9BF-A177-4523-6EFE20095B65}"/>
+              </a:ext>
+            </a:extLst>
+          </p:cNvPr>
+          <p:cNvPicPr>
+            <a:picLocks noChangeAspect="1"/>
+          </p:cNvPicPr>
+          <p:nvPr/>
+        </p:nvPicPr>
+        <p:blipFill>
+          <a:blip r:embed="rId4"/>
+          <a:stretch>
+            <a:fillRect/>
+          </a:stretch>
+        </p:blipFill>
+        <p:spPr>
+          <a:xfrm>
+            <a:off x="6252345" y="672151"/>
+            <a:ext cx="2737021" cy="1539574"/>
+          </a:xfrm>
+          <a:prstGeom prst="rect">
+            <a:avLst/>
+          </a:prstGeom>
+        </p:spPr>
+      </p:pic>
+      <p:pic>
+        <p:nvPicPr>
+          <p:cNvPr id="8" name="Picture 7" descr="The Vegas Golden Knights unveil their new centre ice logo for the teams  tenth season👀🎰">
+            <a:extLst>
+              <a:ext uri="{FF2B5EF4-FFF2-40B4-BE49-F238E27FC236}">
+                <a16:creationId xmlns:a16="http://schemas.microsoft.com/office/drawing/2014/main" id="{E13F793F-1275-E0D5-E891-7A17E4237B89}"/>
+              </a:ext>
+            </a:extLst>
+          </p:cNvPr>
+          <p:cNvPicPr>
+            <a:picLocks noChangeAspect="1"/>
+          </p:cNvPicPr>
+          <p:nvPr/>
+        </p:nvPicPr>
+        <p:blipFill>
+          <a:blip r:embed="rId5"/>
+          <a:stretch>
+            <a:fillRect/>
+          </a:stretch>
+        </p:blipFill>
+        <p:spPr>
+          <a:xfrm>
+            <a:off x="9297965" y="690553"/>
+            <a:ext cx="2689216" cy="1521172"/>
+          </a:xfrm>
+          <a:prstGeom prst="rect">
+            <a:avLst/>
+          </a:prstGeom>
+        </p:spPr>
+      </p:pic>
     </p:spTree>
     <p:extLst>
       <p:ext uri="{BB962C8B-B14F-4D97-AF65-F5344CB8AC3E}">
@@ -7802,7 +10567,7 @@
           <a:p>
             <a:r>
               <a:rPr lang="en-GB" dirty="0"/>
-              <a:t>Start with your own curiosity about sport.</a:t>
+              <a:t>your sports analytics questions</a:t>
             </a:r>
             <a:endParaRPr lang="en-US" dirty="0"/>
           </a:p>
@@ -7836,7 +10601,7 @@
             </a:pPr>
             <a:r>
               <a:rPr lang="en-GB" dirty="0"/>
-              <a:t>Think about something you have wondered while:</a:t>
+              <a:t>Jot down a few questions you have had about sports performance:</a:t>
             </a:r>
           </a:p>
           <a:p>
@@ -7890,8 +10655,8 @@
         </p:nvSpPr>
         <p:spPr>
           <a:xfrm>
-            <a:off x="5255822" y="4176415"/>
-            <a:ext cx="6097978" cy="2000548"/>
+            <a:off x="5255822" y="4484192"/>
+            <a:ext cx="6097978" cy="1692771"/>
           </a:xfrm>
           <a:prstGeom prst="rect">
             <a:avLst/>
@@ -7905,41 +10670,41 @@
           <a:lstStyle/>
           <a:p>
             <a:r>
-              <a:rPr lang="en-GB" sz="2800" dirty="0"/>
+              <a:rPr lang="en-GB" sz="2400" dirty="0"/>
               <a:t>Possible starting phrases:</a:t>
             </a:r>
           </a:p>
           <a:p>
             <a:pPr lvl="1"/>
             <a:r>
-              <a:rPr lang="en-GB" sz="2400" i="1" dirty="0"/>
+              <a:rPr lang="en-GB" sz="2000" i="1" dirty="0"/>
               <a:t>“I have always wondered why…”</a:t>
             </a:r>
-            <a:endParaRPr lang="en-GB" sz="2400" dirty="0"/>
+            <a:endParaRPr lang="en-GB" sz="2000" dirty="0"/>
           </a:p>
           <a:p>
             <a:pPr lvl="1"/>
             <a:r>
-              <a:rPr lang="en-GB" sz="2400" i="1" dirty="0"/>
+              <a:rPr lang="en-GB" sz="2000" i="1" dirty="0"/>
               <a:t>“How could a team determine whether…”</a:t>
             </a:r>
-            <a:endParaRPr lang="en-GB" sz="2400" dirty="0"/>
+            <a:endParaRPr lang="en-GB" sz="2000" dirty="0"/>
           </a:p>
           <a:p>
             <a:pPr lvl="1"/>
             <a:r>
-              <a:rPr lang="en-GB" sz="2400" i="1" dirty="0"/>
+              <a:rPr lang="en-GB" sz="2000" i="1" dirty="0"/>
               <a:t>“How would we know if…”</a:t>
             </a:r>
-            <a:endParaRPr lang="en-GB" sz="2400" dirty="0"/>
+            <a:endParaRPr lang="en-GB" sz="2000" dirty="0"/>
           </a:p>
           <a:p>
             <a:pPr lvl="1"/>
             <a:r>
-              <a:rPr lang="en-GB" sz="2400" i="1" dirty="0"/>
+              <a:rPr lang="en-GB" sz="2000" i="1" dirty="0"/>
               <a:t>“Should a coach…”</a:t>
             </a:r>
-            <a:endParaRPr lang="en-GB" sz="2400" dirty="0"/>
+            <a:endParaRPr lang="en-GB" sz="2000" dirty="0"/>
           </a:p>
         </p:txBody>
       </p:sp>
@@ -7953,6 +10718,335 @@
   <p:clrMapOvr>
     <a:masterClrMapping/>
   </p:clrMapOvr>
+  <p:timing>
+    <p:tnLst>
+      <p:par>
+        <p:cTn id="1" dur="indefinite" restart="never" nodeType="tmRoot">
+          <p:childTnLst>
+            <p:seq concurrent="1" nextAc="seek">
+              <p:cTn id="2" dur="indefinite" nodeType="mainSeq">
+                <p:childTnLst>
+                  <p:par>
+                    <p:cTn id="3" fill="hold">
+                      <p:stCondLst>
+                        <p:cond delay="indefinite"/>
+                      </p:stCondLst>
+                      <p:childTnLst>
+                        <p:par>
+                          <p:cTn id="4" fill="hold">
+                            <p:stCondLst>
+                              <p:cond delay="0"/>
+                            </p:stCondLst>
+                            <p:childTnLst>
+                              <p:par>
+                                <p:cTn id="5" presetID="1" presetClass="entr" presetSubtype="0" fill="hold" grpId="0" nodeType="clickEffect">
+                                  <p:stCondLst>
+                                    <p:cond delay="0"/>
+                                  </p:stCondLst>
+                                  <p:childTnLst>
+                                    <p:set>
+                                      <p:cBhvr>
+                                        <p:cTn id="6" dur="1" fill="hold">
+                                          <p:stCondLst>
+                                            <p:cond delay="0"/>
+                                          </p:stCondLst>
+                                        </p:cTn>
+                                        <p:tgtEl>
+                                          <p:spTgt spid="3">
+                                            <p:txEl>
+                                              <p:pRg st="0" end="0"/>
+                                            </p:txEl>
+                                          </p:spTgt>
+                                        </p:tgtEl>
+                                        <p:attrNameLst>
+                                          <p:attrName>style.visibility</p:attrName>
+                                        </p:attrNameLst>
+                                      </p:cBhvr>
+                                      <p:to>
+                                        <p:strVal val="visible"/>
+                                      </p:to>
+                                    </p:set>
+                                  </p:childTnLst>
+                                </p:cTn>
+                              </p:par>
+                              <p:par>
+                                <p:cTn id="7" presetID="1" presetClass="entr" presetSubtype="0" fill="hold" grpId="0" nodeType="withEffect">
+                                  <p:stCondLst>
+                                    <p:cond delay="0"/>
+                                  </p:stCondLst>
+                                  <p:childTnLst>
+                                    <p:set>
+                                      <p:cBhvr>
+                                        <p:cTn id="8" dur="1" fill="hold">
+                                          <p:stCondLst>
+                                            <p:cond delay="0"/>
+                                          </p:stCondLst>
+                                        </p:cTn>
+                                        <p:tgtEl>
+                                          <p:spTgt spid="3">
+                                            <p:txEl>
+                                              <p:pRg st="1" end="1"/>
+                                            </p:txEl>
+                                          </p:spTgt>
+                                        </p:tgtEl>
+                                        <p:attrNameLst>
+                                          <p:attrName>style.visibility</p:attrName>
+                                        </p:attrNameLst>
+                                      </p:cBhvr>
+                                      <p:to>
+                                        <p:strVal val="visible"/>
+                                      </p:to>
+                                    </p:set>
+                                  </p:childTnLst>
+                                </p:cTn>
+                              </p:par>
+                              <p:par>
+                                <p:cTn id="9" presetID="1" presetClass="entr" presetSubtype="0" fill="hold" grpId="0" nodeType="withEffect">
+                                  <p:stCondLst>
+                                    <p:cond delay="0"/>
+                                  </p:stCondLst>
+                                  <p:childTnLst>
+                                    <p:set>
+                                      <p:cBhvr>
+                                        <p:cTn id="10" dur="1" fill="hold">
+                                          <p:stCondLst>
+                                            <p:cond delay="0"/>
+                                          </p:stCondLst>
+                                        </p:cTn>
+                                        <p:tgtEl>
+                                          <p:spTgt spid="3">
+                                            <p:txEl>
+                                              <p:pRg st="2" end="2"/>
+                                            </p:txEl>
+                                          </p:spTgt>
+                                        </p:tgtEl>
+                                        <p:attrNameLst>
+                                          <p:attrName>style.visibility</p:attrName>
+                                        </p:attrNameLst>
+                                      </p:cBhvr>
+                                      <p:to>
+                                        <p:strVal val="visible"/>
+                                      </p:to>
+                                    </p:set>
+                                  </p:childTnLst>
+                                </p:cTn>
+                              </p:par>
+                              <p:par>
+                                <p:cTn id="11" presetID="1" presetClass="entr" presetSubtype="0" fill="hold" grpId="0" nodeType="withEffect">
+                                  <p:stCondLst>
+                                    <p:cond delay="0"/>
+                                  </p:stCondLst>
+                                  <p:childTnLst>
+                                    <p:set>
+                                      <p:cBhvr>
+                                        <p:cTn id="12" dur="1" fill="hold">
+                                          <p:stCondLst>
+                                            <p:cond delay="0"/>
+                                          </p:stCondLst>
+                                        </p:cTn>
+                                        <p:tgtEl>
+                                          <p:spTgt spid="3">
+                                            <p:txEl>
+                                              <p:pRg st="3" end="3"/>
+                                            </p:txEl>
+                                          </p:spTgt>
+                                        </p:tgtEl>
+                                        <p:attrNameLst>
+                                          <p:attrName>style.visibility</p:attrName>
+                                        </p:attrNameLst>
+                                      </p:cBhvr>
+                                      <p:to>
+                                        <p:strVal val="visible"/>
+                                      </p:to>
+                                    </p:set>
+                                  </p:childTnLst>
+                                </p:cTn>
+                              </p:par>
+                              <p:par>
+                                <p:cTn id="13" presetID="1" presetClass="entr" presetSubtype="0" fill="hold" grpId="0" nodeType="withEffect">
+                                  <p:stCondLst>
+                                    <p:cond delay="0"/>
+                                  </p:stCondLst>
+                                  <p:childTnLst>
+                                    <p:set>
+                                      <p:cBhvr>
+                                        <p:cTn id="14" dur="1" fill="hold">
+                                          <p:stCondLst>
+                                            <p:cond delay="0"/>
+                                          </p:stCondLst>
+                                        </p:cTn>
+                                        <p:tgtEl>
+                                          <p:spTgt spid="3">
+                                            <p:txEl>
+                                              <p:pRg st="4" end="4"/>
+                                            </p:txEl>
+                                          </p:spTgt>
+                                        </p:tgtEl>
+                                        <p:attrNameLst>
+                                          <p:attrName>style.visibility</p:attrName>
+                                        </p:attrNameLst>
+                                      </p:cBhvr>
+                                      <p:to>
+                                        <p:strVal val="visible"/>
+                                      </p:to>
+                                    </p:set>
+                                  </p:childTnLst>
+                                </p:cTn>
+                              </p:par>
+                              <p:par>
+                                <p:cTn id="15" presetID="1" presetClass="entr" presetSubtype="0" fill="hold" grpId="0" nodeType="withEffect">
+                                  <p:stCondLst>
+                                    <p:cond delay="0"/>
+                                  </p:stCondLst>
+                                  <p:childTnLst>
+                                    <p:set>
+                                      <p:cBhvr>
+                                        <p:cTn id="16" dur="1" fill="hold">
+                                          <p:stCondLst>
+                                            <p:cond delay="0"/>
+                                          </p:stCondLst>
+                                        </p:cTn>
+                                        <p:tgtEl>
+                                          <p:spTgt spid="3">
+                                            <p:txEl>
+                                              <p:pRg st="5" end="5"/>
+                                            </p:txEl>
+                                          </p:spTgt>
+                                        </p:tgtEl>
+                                        <p:attrNameLst>
+                                          <p:attrName>style.visibility</p:attrName>
+                                        </p:attrNameLst>
+                                      </p:cBhvr>
+                                      <p:to>
+                                        <p:strVal val="visible"/>
+                                      </p:to>
+                                    </p:set>
+                                  </p:childTnLst>
+                                </p:cTn>
+                              </p:par>
+                            </p:childTnLst>
+                          </p:cTn>
+                        </p:par>
+                      </p:childTnLst>
+                    </p:cTn>
+                  </p:par>
+                  <p:par>
+                    <p:cTn id="17" fill="hold">
+                      <p:stCondLst>
+                        <p:cond delay="indefinite"/>
+                      </p:stCondLst>
+                      <p:childTnLst>
+                        <p:par>
+                          <p:cTn id="18" fill="hold">
+                            <p:stCondLst>
+                              <p:cond delay="0"/>
+                            </p:stCondLst>
+                            <p:childTnLst>
+                              <p:par>
+                                <p:cTn id="19" presetID="1" presetClass="entr" presetSubtype="0" fill="hold" grpId="0" nodeType="clickEffect">
+                                  <p:stCondLst>
+                                    <p:cond delay="0"/>
+                                  </p:stCondLst>
+                                  <p:childTnLst>
+                                    <p:set>
+                                      <p:cBhvr>
+                                        <p:cTn id="20" dur="1" fill="hold">
+                                          <p:stCondLst>
+                                            <p:cond delay="0"/>
+                                          </p:stCondLst>
+                                        </p:cTn>
+                                        <p:tgtEl>
+                                          <p:spTgt spid="5"/>
+                                        </p:tgtEl>
+                                        <p:attrNameLst>
+                                          <p:attrName>style.visibility</p:attrName>
+                                        </p:attrNameLst>
+                                      </p:cBhvr>
+                                      <p:to>
+                                        <p:strVal val="visible"/>
+                                      </p:to>
+                                    </p:set>
+                                  </p:childTnLst>
+                                </p:cTn>
+                              </p:par>
+                            </p:childTnLst>
+                          </p:cTn>
+                        </p:par>
+                      </p:childTnLst>
+                    </p:cTn>
+                  </p:par>
+                  <p:par>
+                    <p:cTn id="21" fill="hold">
+                      <p:stCondLst>
+                        <p:cond delay="indefinite"/>
+                      </p:stCondLst>
+                      <p:childTnLst>
+                        <p:par>
+                          <p:cTn id="22" fill="hold">
+                            <p:stCondLst>
+                              <p:cond delay="0"/>
+                            </p:stCondLst>
+                            <p:childTnLst>
+                              <p:par>
+                                <p:cTn id="23" presetID="1" presetClass="entr" presetSubtype="0" fill="hold" grpId="1" nodeType="clickEffect">
+                                  <p:stCondLst>
+                                    <p:cond delay="0"/>
+                                  </p:stCondLst>
+                                  <p:childTnLst>
+                                    <p:set>
+                                      <p:cBhvr>
+                                        <p:cTn id="24" dur="1" fill="hold">
+                                          <p:stCondLst>
+                                            <p:cond delay="0"/>
+                                          </p:stCondLst>
+                                        </p:cTn>
+                                        <p:tgtEl>
+                                          <p:spTgt spid="5"/>
+                                        </p:tgtEl>
+                                        <p:attrNameLst>
+                                          <p:attrName>style.visibility</p:attrName>
+                                        </p:attrNameLst>
+                                      </p:cBhvr>
+                                      <p:to>
+                                        <p:strVal val="visible"/>
+                                      </p:to>
+                                    </p:set>
+                                  </p:childTnLst>
+                                </p:cTn>
+                              </p:par>
+                            </p:childTnLst>
+                          </p:cTn>
+                        </p:par>
+                      </p:childTnLst>
+                    </p:cTn>
+                  </p:par>
+                </p:childTnLst>
+              </p:cTn>
+              <p:prevCondLst>
+                <p:cond evt="onPrev" delay="0">
+                  <p:tgtEl>
+                    <p:sldTgt/>
+                  </p:tgtEl>
+                </p:cond>
+              </p:prevCondLst>
+              <p:nextCondLst>
+                <p:cond evt="onNext" delay="0">
+                  <p:tgtEl>
+                    <p:sldTgt/>
+                  </p:tgtEl>
+                </p:cond>
+              </p:nextCondLst>
+            </p:seq>
+          </p:childTnLst>
+        </p:cTn>
+      </p:par>
+    </p:tnLst>
+    <p:bldLst>
+      <p:bldP spid="3" grpId="0" build="p"/>
+      <p:bldP spid="5" grpId="0"/>
+      <p:bldP spid="5" grpId="1"/>
+    </p:bldLst>
+  </p:timing>
 </p:sld>
 </file>
 

--- a/pptx/Lecture0.pptx
+++ b/pptx/Lecture0.pptx
@@ -213,7 +213,7 @@
           <a:p>
             <a:fld id="{D77EEDEE-9F25-1248-8553-BC05D4D1E003}" type="datetimeFigureOut">
               <a:rPr lang="en-US" smtClean="0"/>
-              <a:t>8/20/26</a:t>
+              <a:t>8/22/26</a:t>
             </a:fld>
             <a:endParaRPr lang="en-US"/>
           </a:p>
@@ -1372,7 +1372,7 @@
           <a:p>
             <a:fld id="{1BF61C71-767E-B84C-BFB3-7B18856D27F4}" type="datetimeFigureOut">
               <a:rPr lang="en-US" smtClean="0"/>
-              <a:t>8/20/26</a:t>
+              <a:t>8/22/26</a:t>
             </a:fld>
             <a:endParaRPr lang="en-US"/>
           </a:p>
@@ -1580,7 +1580,7 @@
           <a:p>
             <a:fld id="{1BF61C71-767E-B84C-BFB3-7B18856D27F4}" type="datetimeFigureOut">
               <a:rPr lang="en-US" smtClean="0"/>
-              <a:t>8/20/26</a:t>
+              <a:t>8/22/26</a:t>
             </a:fld>
             <a:endParaRPr lang="en-US"/>
           </a:p>
@@ -1798,7 +1798,7 @@
           <a:p>
             <a:fld id="{1BF61C71-767E-B84C-BFB3-7B18856D27F4}" type="datetimeFigureOut">
               <a:rPr lang="en-US" smtClean="0"/>
-              <a:t>8/20/26</a:t>
+              <a:t>8/22/26</a:t>
             </a:fld>
             <a:endParaRPr lang="en-US"/>
           </a:p>
@@ -2006,7 +2006,7 @@
           <a:p>
             <a:fld id="{1BF61C71-767E-B84C-BFB3-7B18856D27F4}" type="datetimeFigureOut">
               <a:rPr lang="en-US" smtClean="0"/>
-              <a:t>8/20/26</a:t>
+              <a:t>8/22/26</a:t>
             </a:fld>
             <a:endParaRPr lang="en-US"/>
           </a:p>
@@ -2290,7 +2290,7 @@
           <a:p>
             <a:fld id="{1BF61C71-767E-B84C-BFB3-7B18856D27F4}" type="datetimeFigureOut">
               <a:rPr lang="en-US" smtClean="0"/>
-              <a:t>8/20/26</a:t>
+              <a:t>8/22/26</a:t>
             </a:fld>
             <a:endParaRPr lang="en-US"/>
           </a:p>
@@ -2566,7 +2566,7 @@
           <a:p>
             <a:fld id="{1BF61C71-767E-B84C-BFB3-7B18856D27F4}" type="datetimeFigureOut">
               <a:rPr lang="en-US" smtClean="0"/>
-              <a:t>8/20/26</a:t>
+              <a:t>8/22/26</a:t>
             </a:fld>
             <a:endParaRPr lang="en-US"/>
           </a:p>
@@ -2989,7 +2989,7 @@
           <a:p>
             <a:fld id="{1BF61C71-767E-B84C-BFB3-7B18856D27F4}" type="datetimeFigureOut">
               <a:rPr lang="en-US" smtClean="0"/>
-              <a:t>8/20/26</a:t>
+              <a:t>8/22/26</a:t>
             </a:fld>
             <a:endParaRPr lang="en-US"/>
           </a:p>
@@ -3139,7 +3139,7 @@
           <a:p>
             <a:fld id="{1BF61C71-767E-B84C-BFB3-7B18856D27F4}" type="datetimeFigureOut">
               <a:rPr lang="en-US" smtClean="0"/>
-              <a:t>8/20/26</a:t>
+              <a:t>8/22/26</a:t>
             </a:fld>
             <a:endParaRPr lang="en-US"/>
           </a:p>
@@ -3260,7 +3260,7 @@
           <a:p>
             <a:fld id="{1BF61C71-767E-B84C-BFB3-7B18856D27F4}" type="datetimeFigureOut">
               <a:rPr lang="en-US" smtClean="0"/>
-              <a:t>8/20/26</a:t>
+              <a:t>8/22/26</a:t>
             </a:fld>
             <a:endParaRPr lang="en-US"/>
           </a:p>
@@ -3581,7 +3581,7 @@
           <a:p>
             <a:fld id="{1BF61C71-767E-B84C-BFB3-7B18856D27F4}" type="datetimeFigureOut">
               <a:rPr lang="en-US" smtClean="0"/>
-              <a:t>8/20/26</a:t>
+              <a:t>8/22/26</a:t>
             </a:fld>
             <a:endParaRPr lang="en-US"/>
           </a:p>
@@ -3878,7 +3878,7 @@
           <a:p>
             <a:fld id="{1BF61C71-767E-B84C-BFB3-7B18856D27F4}" type="datetimeFigureOut">
               <a:rPr lang="en-US" smtClean="0"/>
-              <a:t>8/20/26</a:t>
+              <a:t>8/22/26</a:t>
             </a:fld>
             <a:endParaRPr lang="en-US"/>
           </a:p>
@@ -4132,7 +4132,7 @@
           <a:p>
             <a:fld id="{1BF61C71-767E-B84C-BFB3-7B18856D27F4}" type="datetimeFigureOut">
               <a:rPr lang="en-US" smtClean="0"/>
-              <a:t>8/20/26</a:t>
+              <a:t>8/22/26</a:t>
             </a:fld>
             <a:endParaRPr lang="en-US"/>
           </a:p>
@@ -10567,7 +10567,7 @@
           <a:p>
             <a:r>
               <a:rPr lang="en-GB" dirty="0"/>
-              <a:t>your sports analytics questions</a:t>
+              <a:t>Brainstorming Activity</a:t>
             </a:r>
             <a:endParaRPr lang="en-US" dirty="0"/>
           </a:p>

--- a/pptx/Lecture0.pptx
+++ b/pptx/Lecture0.pptx
@@ -5,26 +5,27 @@
     <p:sldMasterId id="2147483648" r:id="rId1"/>
   </p:sldMasterIdLst>
   <p:notesMasterIdLst>
-    <p:notesMasterId r:id="rId19"/>
+    <p:notesMasterId r:id="rId20"/>
   </p:notesMasterIdLst>
   <p:sldIdLst>
     <p:sldId id="256" r:id="rId2"/>
-    <p:sldId id="290" r:id="rId3"/>
-    <p:sldId id="283" r:id="rId4"/>
-    <p:sldId id="284" r:id="rId5"/>
-    <p:sldId id="286" r:id="rId6"/>
-    <p:sldId id="287" r:id="rId7"/>
-    <p:sldId id="268" r:id="rId8"/>
-    <p:sldId id="280" r:id="rId9"/>
+    <p:sldId id="268" r:id="rId3"/>
+    <p:sldId id="293" r:id="rId4"/>
+    <p:sldId id="280" r:id="rId5"/>
+    <p:sldId id="294" r:id="rId6"/>
+    <p:sldId id="295" r:id="rId7"/>
+    <p:sldId id="258" r:id="rId8"/>
+    <p:sldId id="286" r:id="rId9"/>
     <p:sldId id="285" r:id="rId10"/>
-    <p:sldId id="289" r:id="rId11"/>
-    <p:sldId id="291" r:id="rId12"/>
-    <p:sldId id="258" r:id="rId13"/>
-    <p:sldId id="282" r:id="rId14"/>
-    <p:sldId id="263" r:id="rId15"/>
-    <p:sldId id="279" r:id="rId16"/>
-    <p:sldId id="267" r:id="rId17"/>
-    <p:sldId id="292" r:id="rId18"/>
+    <p:sldId id="291" r:id="rId11"/>
+    <p:sldId id="296" r:id="rId12"/>
+    <p:sldId id="282" r:id="rId13"/>
+    <p:sldId id="263" r:id="rId14"/>
+    <p:sldId id="279" r:id="rId15"/>
+    <p:sldId id="267" r:id="rId16"/>
+    <p:sldId id="292" r:id="rId17"/>
+    <p:sldId id="283" r:id="rId18"/>
+    <p:sldId id="284" r:id="rId19"/>
   </p:sldIdLst>
   <p:sldSz cx="12192000" cy="6858000"/>
   <p:notesSz cx="6858000" cy="9144000"/>
@@ -213,7 +214,7 @@
           <a:p>
             <a:fld id="{D77EEDEE-9F25-1248-8553-BC05D4D1E003}" type="datetimeFigureOut">
               <a:rPr lang="en-US" smtClean="0"/>
-              <a:t>8/22/26</a:t>
+              <a:t>8/25/26</a:t>
             </a:fld>
             <a:endParaRPr lang="en-US"/>
           </a:p>
@@ -565,6 +566,183 @@
 </p:notes>
 </file>
 
+<file path=ppt/notesSlides/notesSlide10.xml><?xml version="1.0" encoding="utf-8"?>
+<p:notes xmlns:a="http://schemas.openxmlformats.org/drawingml/2006/main" xmlns:r="http://schemas.openxmlformats.org/officeDocument/2006/relationships" xmlns:p="http://schemas.openxmlformats.org/presentationml/2006/main">
+  <p:cSld>
+    <p:spTree>
+      <p:nvGrpSpPr>
+        <p:cNvPr id="1" name=""/>
+        <p:cNvGrpSpPr/>
+        <p:nvPr/>
+      </p:nvGrpSpPr>
+      <p:grpSpPr>
+        <a:xfrm>
+          <a:off x="0" y="0"/>
+          <a:ext cx="0" cy="0"/>
+          <a:chOff x="0" y="0"/>
+          <a:chExt cx="0" cy="0"/>
+        </a:xfrm>
+      </p:grpSpPr>
+      <p:sp>
+        <p:nvSpPr>
+          <p:cNvPr id="2" name="Slide Image Placeholder 1"/>
+          <p:cNvSpPr>
+            <a:spLocks noGrp="1" noRot="1" noChangeAspect="1"/>
+          </p:cNvSpPr>
+          <p:nvPr>
+            <p:ph type="sldImg"/>
+          </p:nvPr>
+        </p:nvSpPr>
+        <p:spPr/>
+      </p:sp>
+      <p:sp>
+        <p:nvSpPr>
+          <p:cNvPr id="3" name="Notes Placeholder 2"/>
+          <p:cNvSpPr>
+            <a:spLocks noGrp="1"/>
+          </p:cNvSpPr>
+          <p:nvPr>
+            <p:ph type="body" idx="1"/>
+          </p:nvPr>
+        </p:nvSpPr>
+        <p:spPr/>
+        <p:txBody>
+          <a:bodyPr/>
+          <a:lstStyle/>
+          <a:p>
+            <a:r>
+              <a:rPr lang="en-US" dirty="0"/>
+              <a:t>Groups: If there are issues, please speak to me asap</a:t>
+            </a:r>
+          </a:p>
+          <a:p>
+            <a:endParaRPr lang="en-US" dirty="0"/>
+          </a:p>
+        </p:txBody>
+      </p:sp>
+      <p:sp>
+        <p:nvSpPr>
+          <p:cNvPr id="4" name="Slide Number Placeholder 3"/>
+          <p:cNvSpPr>
+            <a:spLocks noGrp="1"/>
+          </p:cNvSpPr>
+          <p:nvPr>
+            <p:ph type="sldNum" sz="quarter" idx="5"/>
+          </p:nvPr>
+        </p:nvSpPr>
+        <p:spPr/>
+        <p:txBody>
+          <a:bodyPr/>
+          <a:lstStyle/>
+          <a:p>
+            <a:fld id="{1560C251-82B7-4253-A774-38D73C276BCE}" type="slidenum">
+              <a:rPr lang="en-US" smtClean="0"/>
+              <a:t>14</a:t>
+            </a:fld>
+            <a:endParaRPr lang="en-US" dirty="0"/>
+          </a:p>
+        </p:txBody>
+      </p:sp>
+    </p:spTree>
+    <p:extLst>
+      <p:ext uri="{BB962C8B-B14F-4D97-AF65-F5344CB8AC3E}">
+        <p14:creationId xmlns:p14="http://schemas.microsoft.com/office/powerpoint/2010/main" val="634966825"/>
+      </p:ext>
+    </p:extLst>
+  </p:cSld>
+  <p:clrMapOvr>
+    <a:masterClrMapping/>
+  </p:clrMapOvr>
+</p:notes>
+</file>
+
+<file path=ppt/notesSlides/notesSlide11.xml><?xml version="1.0" encoding="utf-8"?>
+<p:notes xmlns:a="http://schemas.openxmlformats.org/drawingml/2006/main" xmlns:r="http://schemas.openxmlformats.org/officeDocument/2006/relationships" xmlns:p="http://schemas.openxmlformats.org/presentationml/2006/main">
+  <p:cSld>
+    <p:spTree>
+      <p:nvGrpSpPr>
+        <p:cNvPr id="1" name=""/>
+        <p:cNvGrpSpPr/>
+        <p:nvPr/>
+      </p:nvGrpSpPr>
+      <p:grpSpPr>
+        <a:xfrm>
+          <a:off x="0" y="0"/>
+          <a:ext cx="0" cy="0"/>
+          <a:chOff x="0" y="0"/>
+          <a:chExt cx="0" cy="0"/>
+        </a:xfrm>
+      </p:grpSpPr>
+      <p:sp>
+        <p:nvSpPr>
+          <p:cNvPr id="2" name="Slide Image Placeholder 1"/>
+          <p:cNvSpPr>
+            <a:spLocks noGrp="1" noRot="1" noChangeAspect="1"/>
+          </p:cNvSpPr>
+          <p:nvPr>
+            <p:ph type="sldImg"/>
+          </p:nvPr>
+        </p:nvSpPr>
+        <p:spPr/>
+      </p:sp>
+      <p:sp>
+        <p:nvSpPr>
+          <p:cNvPr id="3" name="Notes Placeholder 2"/>
+          <p:cNvSpPr>
+            <a:spLocks noGrp="1"/>
+          </p:cNvSpPr>
+          <p:nvPr>
+            <p:ph type="body" idx="1"/>
+          </p:nvPr>
+        </p:nvSpPr>
+        <p:spPr/>
+        <p:txBody>
+          <a:bodyPr/>
+          <a:lstStyle/>
+          <a:p>
+            <a:r>
+              <a:rPr lang="en-US" dirty="0"/>
+              <a:t>I do not get a sense of your understanding until the exams. Hence it is critical for you to reach out if you need help. If the slides look wrong or need clarification on anything, PLEASE email me or let me know in class. This is the only way I can help you</a:t>
+            </a:r>
+          </a:p>
+        </p:txBody>
+      </p:sp>
+      <p:sp>
+        <p:nvSpPr>
+          <p:cNvPr id="4" name="Slide Number Placeholder 3"/>
+          <p:cNvSpPr>
+            <a:spLocks noGrp="1"/>
+          </p:cNvSpPr>
+          <p:nvPr>
+            <p:ph type="sldNum" sz="quarter" idx="5"/>
+          </p:nvPr>
+        </p:nvSpPr>
+        <p:spPr/>
+        <p:txBody>
+          <a:bodyPr/>
+          <a:lstStyle/>
+          <a:p>
+            <a:fld id="{1560C251-82B7-4253-A774-38D73C276BCE}" type="slidenum">
+              <a:rPr lang="en-US" smtClean="0"/>
+              <a:t>15</a:t>
+            </a:fld>
+            <a:endParaRPr lang="en-US" dirty="0"/>
+          </a:p>
+        </p:txBody>
+      </p:sp>
+    </p:spTree>
+    <p:extLst>
+      <p:ext uri="{BB962C8B-B14F-4D97-AF65-F5344CB8AC3E}">
+        <p14:creationId xmlns:p14="http://schemas.microsoft.com/office/powerpoint/2010/main" val="983792798"/>
+      </p:ext>
+    </p:extLst>
+  </p:cSld>
+  <p:clrMapOvr>
+    <a:masterClrMapping/>
+  </p:clrMapOvr>
+</p:notes>
+</file>
+
 <file path=ppt/notesSlides/notesSlide2.xml><?xml version="1.0" encoding="utf-8"?>
 <p:notes xmlns:a="http://schemas.openxmlformats.org/drawingml/2006/main" xmlns:r="http://schemas.openxmlformats.org/officeDocument/2006/relationships" xmlns:p="http://schemas.openxmlformats.org/presentationml/2006/main">
   <p:cSld>
@@ -609,9 +787,39 @@
           <a:bodyPr/>
           <a:lstStyle/>
           <a:p>
-            <a:r>
-              <a:rPr lang="en-US" dirty="0"/>
-              <a:t>To help me remember you</a:t>
+            <a:pPr lvl="0"/>
+            <a:r>
+              <a:rPr lang="en-GB" dirty="0"/>
+              <a:t>What do you love about teaching the course? How long have you been teaching? What is your </a:t>
+            </a:r>
+            <a:r>
+              <a:rPr lang="en-GB" dirty="0" err="1"/>
+              <a:t>favorite</a:t>
+            </a:r>
+            <a:r>
+              <a:rPr lang="en-GB" dirty="0"/>
+              <a:t> thing about teaching?</a:t>
+            </a:r>
+          </a:p>
+          <a:p>
+            <a:pPr lvl="0"/>
+            <a:r>
+              <a:rPr lang="en-GB" dirty="0"/>
+              <a:t>Why did you choose to study and work in your discipline? What do you love about the discipline? How you see the discipline affecting the world and vice versa?</a:t>
+            </a:r>
+          </a:p>
+          <a:p>
+            <a:pPr lvl="0"/>
+            <a:r>
+              <a:rPr lang="en-GB" dirty="0"/>
+              <a:t>What is your research agenda and how does it relate to the course? (if applicable)</a:t>
+            </a:r>
+          </a:p>
+          <a:p>
+            <a:pPr lvl="0"/>
+            <a:r>
+              <a:rPr lang="en-GB" dirty="0"/>
+              <a:t>Personal details that you feel comfortable sharing, such as place of birth, family details, hobbies and interests, future plans.</a:t>
             </a:r>
           </a:p>
           <a:p>
@@ -634,18 +842,18 @@
           <a:bodyPr/>
           <a:lstStyle/>
           <a:p>
-            <a:fld id="{1560C251-82B7-4253-A774-38D73C276BCE}" type="slidenum">
+            <a:fld id="{76F32F1C-470B-324F-8158-FBD837D2FC84}" type="slidenum">
               <a:rPr lang="en-US" smtClean="0"/>
-              <a:t>8</a:t>
+              <a:t>2</a:t>
             </a:fld>
-            <a:endParaRPr lang="en-US" dirty="0"/>
+            <a:endParaRPr lang="en-US"/>
           </a:p>
         </p:txBody>
       </p:sp>
     </p:spTree>
     <p:extLst>
       <p:ext uri="{BB962C8B-B14F-4D97-AF65-F5344CB8AC3E}">
-        <p14:creationId xmlns:p14="http://schemas.microsoft.com/office/powerpoint/2010/main" val="4186133854"/>
+        <p14:creationId xmlns:p14="http://schemas.microsoft.com/office/powerpoint/2010/main" val="2544883352"/>
       </p:ext>
     </p:extLst>
   </p:cSld>
@@ -656,6 +864,150 @@
 </file>
 
 <file path=ppt/notesSlides/notesSlide3.xml><?xml version="1.0" encoding="utf-8"?>
+<p:notes xmlns:a="http://schemas.openxmlformats.org/drawingml/2006/main" xmlns:r="http://schemas.openxmlformats.org/officeDocument/2006/relationships" xmlns:p="http://schemas.openxmlformats.org/presentationml/2006/main">
+  <p:cSld>
+    <p:spTree>
+      <p:nvGrpSpPr>
+        <p:cNvPr id="1" name="">
+          <a:extLst>
+            <a:ext uri="{FF2B5EF4-FFF2-40B4-BE49-F238E27FC236}">
+              <a16:creationId xmlns:a16="http://schemas.microsoft.com/office/drawing/2014/main" id="{E08DBC5F-C7E1-3F74-3FCF-585F96070AB3}"/>
+            </a:ext>
+          </a:extLst>
+        </p:cNvPr>
+        <p:cNvGrpSpPr/>
+        <p:nvPr/>
+      </p:nvGrpSpPr>
+      <p:grpSpPr>
+        <a:xfrm>
+          <a:off x="0" y="0"/>
+          <a:ext cx="0" cy="0"/>
+          <a:chOff x="0" y="0"/>
+          <a:chExt cx="0" cy="0"/>
+        </a:xfrm>
+      </p:grpSpPr>
+      <p:sp>
+        <p:nvSpPr>
+          <p:cNvPr id="2" name="Slide Image Placeholder 1">
+            <a:extLst>
+              <a:ext uri="{FF2B5EF4-FFF2-40B4-BE49-F238E27FC236}">
+                <a16:creationId xmlns:a16="http://schemas.microsoft.com/office/drawing/2014/main" id="{D2103F47-E2AC-9C59-27A9-B2A36304771F}"/>
+              </a:ext>
+            </a:extLst>
+          </p:cNvPr>
+          <p:cNvSpPr>
+            <a:spLocks noGrp="1" noRot="1" noChangeAspect="1"/>
+          </p:cNvSpPr>
+          <p:nvPr>
+            <p:ph type="sldImg"/>
+          </p:nvPr>
+        </p:nvSpPr>
+        <p:spPr/>
+      </p:sp>
+      <p:sp>
+        <p:nvSpPr>
+          <p:cNvPr id="3" name="Notes Placeholder 2">
+            <a:extLst>
+              <a:ext uri="{FF2B5EF4-FFF2-40B4-BE49-F238E27FC236}">
+                <a16:creationId xmlns:a16="http://schemas.microsoft.com/office/drawing/2014/main" id="{08E7129F-BB14-40FB-3030-93C1C86DD255}"/>
+              </a:ext>
+            </a:extLst>
+          </p:cNvPr>
+          <p:cNvSpPr>
+            <a:spLocks noGrp="1"/>
+          </p:cNvSpPr>
+          <p:nvPr>
+            <p:ph type="body" idx="1"/>
+          </p:nvPr>
+        </p:nvSpPr>
+        <p:spPr/>
+        <p:txBody>
+          <a:bodyPr/>
+          <a:lstStyle/>
+          <a:p>
+            <a:pPr lvl="0"/>
+            <a:r>
+              <a:rPr lang="en-GB" dirty="0"/>
+              <a:t>What do you love about teaching the course? How long have you been teaching? What is your </a:t>
+            </a:r>
+            <a:r>
+              <a:rPr lang="en-GB" dirty="0" err="1"/>
+              <a:t>favorite</a:t>
+            </a:r>
+            <a:r>
+              <a:rPr lang="en-GB" dirty="0"/>
+              <a:t> thing about teaching?</a:t>
+            </a:r>
+          </a:p>
+          <a:p>
+            <a:pPr lvl="0"/>
+            <a:r>
+              <a:rPr lang="en-GB" dirty="0"/>
+              <a:t>Why did you choose to study and work in your discipline? What do you love about the discipline? How you see the discipline affecting the world and vice versa?</a:t>
+            </a:r>
+          </a:p>
+          <a:p>
+            <a:pPr lvl="0"/>
+            <a:r>
+              <a:rPr lang="en-GB" dirty="0"/>
+              <a:t>What is your research agenda and how does it relate to the course? (if applicable)</a:t>
+            </a:r>
+          </a:p>
+          <a:p>
+            <a:pPr lvl="0"/>
+            <a:r>
+              <a:rPr lang="en-GB" dirty="0"/>
+              <a:t>Personal details that you feel comfortable sharing, such as place of birth, family details, hobbies and interests, future plans.</a:t>
+            </a:r>
+          </a:p>
+          <a:p>
+            <a:endParaRPr lang="en-US" dirty="0"/>
+          </a:p>
+        </p:txBody>
+      </p:sp>
+      <p:sp>
+        <p:nvSpPr>
+          <p:cNvPr id="4" name="Slide Number Placeholder 3">
+            <a:extLst>
+              <a:ext uri="{FF2B5EF4-FFF2-40B4-BE49-F238E27FC236}">
+                <a16:creationId xmlns:a16="http://schemas.microsoft.com/office/drawing/2014/main" id="{074172CE-E4A9-A187-4C83-808BA216180F}"/>
+              </a:ext>
+            </a:extLst>
+          </p:cNvPr>
+          <p:cNvSpPr>
+            <a:spLocks noGrp="1"/>
+          </p:cNvSpPr>
+          <p:nvPr>
+            <p:ph type="sldNum" sz="quarter" idx="5"/>
+          </p:nvPr>
+        </p:nvSpPr>
+        <p:spPr/>
+        <p:txBody>
+          <a:bodyPr/>
+          <a:lstStyle/>
+          <a:p>
+            <a:fld id="{76F32F1C-470B-324F-8158-FBD837D2FC84}" type="slidenum">
+              <a:rPr lang="en-US" smtClean="0"/>
+              <a:t>3</a:t>
+            </a:fld>
+            <a:endParaRPr lang="en-US"/>
+          </a:p>
+        </p:txBody>
+      </p:sp>
+    </p:spTree>
+    <p:extLst>
+      <p:ext uri="{BB962C8B-B14F-4D97-AF65-F5344CB8AC3E}">
+        <p14:creationId xmlns:p14="http://schemas.microsoft.com/office/powerpoint/2010/main" val="84557156"/>
+      </p:ext>
+    </p:extLst>
+  </p:cSld>
+  <p:clrMapOvr>
+    <a:masterClrMapping/>
+  </p:clrMapOvr>
+</p:notes>
+</file>
+
+<file path=ppt/notesSlides/notesSlide4.xml><?xml version="1.0" encoding="utf-8"?>
 <p:notes xmlns:a="http://schemas.openxmlformats.org/drawingml/2006/main" xmlns:r="http://schemas.openxmlformats.org/officeDocument/2006/relationships" xmlns:p="http://schemas.openxmlformats.org/presentationml/2006/main">
   <p:cSld>
     <p:spTree>
@@ -701,39 +1053,8 @@
           <a:p>
             <a:r>
               <a:rPr lang="en-US" dirty="0"/>
-              <a:t>This is general structure</a:t>
-            </a:r>
-          </a:p>
-          <a:p>
-            <a:r>
-              <a:rPr lang="en-US" dirty="0"/>
-              <a:t>Personal story: Similar class immediately started with case studies</a:t>
-            </a:r>
-          </a:p>
-          <a:p>
-            <a:r>
-              <a:rPr lang="en-US" dirty="0"/>
-              <a:t>Interesting but did not </a:t>
-            </a:r>
-            <a:r>
-              <a:rPr lang="en-US" dirty="0" err="1"/>
-              <a:t>equipt</a:t>
-            </a:r>
-            <a:r>
-              <a:rPr lang="en-US" dirty="0"/>
-              <a:t> me with the knowledge of how its done</a:t>
-            </a:r>
-          </a:p>
-          <a:p>
-            <a:r>
-              <a:rPr lang="en-US" dirty="0"/>
-              <a:t>My aim is to go over the steps and then later discuss how this is applied </a:t>
-            </a:r>
-            <a:r>
-              <a:rPr lang="en-US" dirty="0" err="1"/>
-              <a:t>irl</a:t>
-            </a:r>
-            <a:endParaRPr lang="en-US" dirty="0"/>
+              <a:t>To help me remember you</a:t>
+            </a:r>
           </a:p>
           <a:p>
             <a:endParaRPr lang="en-US" dirty="0"/>
@@ -757,7 +1078,7 @@
           <a:p>
             <a:fld id="{1560C251-82B7-4253-A774-38D73C276BCE}" type="slidenum">
               <a:rPr lang="en-US" smtClean="0"/>
-              <a:t>12</a:t>
+              <a:t>4</a:t>
             </a:fld>
             <a:endParaRPr lang="en-US" dirty="0"/>
           </a:p>
@@ -766,7 +1087,7 @@
     </p:spTree>
     <p:extLst>
       <p:ext uri="{BB962C8B-B14F-4D97-AF65-F5344CB8AC3E}">
-        <p14:creationId xmlns:p14="http://schemas.microsoft.com/office/powerpoint/2010/main" val="1267898858"/>
+        <p14:creationId xmlns:p14="http://schemas.microsoft.com/office/powerpoint/2010/main" val="4186133854"/>
       </p:ext>
     </p:extLst>
   </p:cSld>
@@ -776,7 +1097,7 @@
 </p:notes>
 </file>
 
-<file path=ppt/notesSlides/notesSlide4.xml><?xml version="1.0" encoding="utf-8"?>
+<file path=ppt/notesSlides/notesSlide5.xml><?xml version="1.0" encoding="utf-8"?>
 <p:notes xmlns:a="http://schemas.openxmlformats.org/drawingml/2006/main" xmlns:r="http://schemas.openxmlformats.org/officeDocument/2006/relationships" xmlns:p="http://schemas.openxmlformats.org/presentationml/2006/main">
   <p:cSld>
     <p:spTree>
@@ -784,7 +1105,7 @@
         <p:cNvPr id="1" name="">
           <a:extLst>
             <a:ext uri="{FF2B5EF4-FFF2-40B4-BE49-F238E27FC236}">
-              <a16:creationId xmlns:a16="http://schemas.microsoft.com/office/drawing/2014/main" id="{668D1F75-B8DF-96D5-5EE1-9F39B7042BDA}"/>
+              <a16:creationId xmlns:a16="http://schemas.microsoft.com/office/drawing/2014/main" id="{E6A11F57-3BBA-E813-BAD9-21810BA7E03D}"/>
             </a:ext>
           </a:extLst>
         </p:cNvPr>
@@ -804,7 +1125,7 @@
           <p:cNvPr id="2" name="Slide Image Placeholder 1">
             <a:extLst>
               <a:ext uri="{FF2B5EF4-FFF2-40B4-BE49-F238E27FC236}">
-                <a16:creationId xmlns:a16="http://schemas.microsoft.com/office/drawing/2014/main" id="{242B3694-E59E-4056-5249-514C4B0AAED7}"/>
+                <a16:creationId xmlns:a16="http://schemas.microsoft.com/office/drawing/2014/main" id="{517B3713-F41D-53C3-7070-CC33275BF107}"/>
               </a:ext>
             </a:extLst>
           </p:cNvPr>
@@ -822,7 +1143,7 @@
           <p:cNvPr id="3" name="Notes Placeholder 2">
             <a:extLst>
               <a:ext uri="{FF2B5EF4-FFF2-40B4-BE49-F238E27FC236}">
-                <a16:creationId xmlns:a16="http://schemas.microsoft.com/office/drawing/2014/main" id="{3E64B469-4FFF-CE9C-4D07-8C78F1C4F458}"/>
+                <a16:creationId xmlns:a16="http://schemas.microsoft.com/office/drawing/2014/main" id="{D46E4B29-EFEC-3A82-C95E-376DC6F6F99E}"/>
               </a:ext>
             </a:extLst>
           </p:cNvPr>
@@ -838,59 +1159,39 @@
           <a:bodyPr/>
           <a:lstStyle/>
           <a:p>
-            <a:r>
-              <a:rPr lang="en-US" b="1" dirty="0"/>
-              <a:t>Quizzes: due </a:t>
-            </a:r>
-            <a:r>
-              <a:rPr lang="en-US" dirty="0"/>
-              <a:t>each Sunday </a:t>
-            </a:r>
-          </a:p>
-          <a:p>
-            <a:r>
-              <a:rPr lang="en-US" b="1" dirty="0"/>
-              <a:t>In-class activities:</a:t>
-            </a:r>
-            <a:r>
-              <a:rPr lang="en-US" dirty="0"/>
-              <a:t> </a:t>
-            </a:r>
-          </a:p>
-          <a:p>
-            <a:r>
-              <a:rPr lang="en-US" b="1" dirty="0"/>
-              <a:t>Case studies:</a:t>
-            </a:r>
-            <a:r>
-              <a:rPr lang="en-US" dirty="0"/>
-              <a:t> </a:t>
-            </a:r>
-          </a:p>
-          <a:p>
-            <a:r>
-              <a:rPr lang="en-US" b="1" dirty="0"/>
-              <a:t>Journal article presentation</a:t>
-            </a:r>
-          </a:p>
-          <a:p>
-            <a:r>
-              <a:rPr lang="en-US" b="1" dirty="0"/>
-              <a:t>Analytics project:</a:t>
-            </a:r>
-            <a:r>
-              <a:rPr lang="en-US" dirty="0"/>
-              <a:t> think about a topic as we go through content</a:t>
-            </a:r>
-          </a:p>
-          <a:p>
-            <a:r>
-              <a:rPr lang="en-US" b="1" dirty="0"/>
-              <a:t>Exams:</a:t>
-            </a:r>
-            <a:r>
-              <a:rPr lang="en-US" dirty="0"/>
-              <a:t> requires lockdown browser</a:t>
+            <a:pPr lvl="0"/>
+            <a:r>
+              <a:rPr lang="en-GB" dirty="0"/>
+              <a:t>What do you love about teaching the course? How long have you been teaching? What is your </a:t>
+            </a:r>
+            <a:r>
+              <a:rPr lang="en-GB" dirty="0" err="1"/>
+              <a:t>favorite</a:t>
+            </a:r>
+            <a:r>
+              <a:rPr lang="en-GB" dirty="0"/>
+              <a:t> thing about teaching?</a:t>
+            </a:r>
+          </a:p>
+          <a:p>
+            <a:pPr lvl="0"/>
+            <a:r>
+              <a:rPr lang="en-GB" dirty="0"/>
+              <a:t>Why did you choose to study and work in your discipline? What do you love about the discipline? How you see the discipline affecting the world and vice versa?</a:t>
+            </a:r>
+          </a:p>
+          <a:p>
+            <a:pPr lvl="0"/>
+            <a:r>
+              <a:rPr lang="en-GB" dirty="0"/>
+              <a:t>What is your research agenda and how does it relate to the course? (if applicable)</a:t>
+            </a:r>
+          </a:p>
+          <a:p>
+            <a:pPr lvl="0"/>
+            <a:r>
+              <a:rPr lang="en-GB" dirty="0"/>
+              <a:t>Personal details that you feel comfortable sharing, such as place of birth, family details, hobbies and interests, future plans.</a:t>
             </a:r>
           </a:p>
           <a:p>
@@ -903,7 +1204,7 @@
           <p:cNvPr id="4" name="Slide Number Placeholder 3">
             <a:extLst>
               <a:ext uri="{FF2B5EF4-FFF2-40B4-BE49-F238E27FC236}">
-                <a16:creationId xmlns:a16="http://schemas.microsoft.com/office/drawing/2014/main" id="{AE0AF4CF-4F18-C887-828B-68FA74F20C30}"/>
+                <a16:creationId xmlns:a16="http://schemas.microsoft.com/office/drawing/2014/main" id="{5E961357-A55B-D9EC-8C87-1487DC03B80D}"/>
               </a:ext>
             </a:extLst>
           </p:cNvPr>
@@ -919,116 +1220,18 @@
           <a:bodyPr/>
           <a:lstStyle/>
           <a:p>
-            <a:fld id="{1560C251-82B7-4253-A774-38D73C276BCE}" type="slidenum">
+            <a:fld id="{76F32F1C-470B-324F-8158-FBD837D2FC84}" type="slidenum">
               <a:rPr lang="en-US" smtClean="0"/>
-              <a:t>13</a:t>
+              <a:t>5</a:t>
             </a:fld>
-            <a:endParaRPr lang="en-US" dirty="0"/>
+            <a:endParaRPr lang="en-US"/>
           </a:p>
         </p:txBody>
       </p:sp>
     </p:spTree>
     <p:extLst>
       <p:ext uri="{BB962C8B-B14F-4D97-AF65-F5344CB8AC3E}">
-        <p14:creationId xmlns:p14="http://schemas.microsoft.com/office/powerpoint/2010/main" val="3038081930"/>
-      </p:ext>
-    </p:extLst>
-  </p:cSld>
-  <p:clrMapOvr>
-    <a:masterClrMapping/>
-  </p:clrMapOvr>
-</p:notes>
-</file>
-
-<file path=ppt/notesSlides/notesSlide5.xml><?xml version="1.0" encoding="utf-8"?>
-<p:notes xmlns:a="http://schemas.openxmlformats.org/drawingml/2006/main" xmlns:r="http://schemas.openxmlformats.org/officeDocument/2006/relationships" xmlns:p="http://schemas.openxmlformats.org/presentationml/2006/main">
-  <p:cSld>
-    <p:spTree>
-      <p:nvGrpSpPr>
-        <p:cNvPr id="1" name=""/>
-        <p:cNvGrpSpPr/>
-        <p:nvPr/>
-      </p:nvGrpSpPr>
-      <p:grpSpPr>
-        <a:xfrm>
-          <a:off x="0" y="0"/>
-          <a:ext cx="0" cy="0"/>
-          <a:chOff x="0" y="0"/>
-          <a:chExt cx="0" cy="0"/>
-        </a:xfrm>
-      </p:grpSpPr>
-      <p:sp>
-        <p:nvSpPr>
-          <p:cNvPr id="2" name="Slide Image Placeholder 1"/>
-          <p:cNvSpPr>
-            <a:spLocks noGrp="1" noRot="1" noChangeAspect="1"/>
-          </p:cNvSpPr>
-          <p:nvPr>
-            <p:ph type="sldImg"/>
-          </p:nvPr>
-        </p:nvSpPr>
-        <p:spPr/>
-      </p:sp>
-      <p:sp>
-        <p:nvSpPr>
-          <p:cNvPr id="3" name="Notes Placeholder 2"/>
-          <p:cNvSpPr>
-            <a:spLocks noGrp="1"/>
-          </p:cNvSpPr>
-          <p:nvPr>
-            <p:ph type="body" idx="1"/>
-          </p:nvPr>
-        </p:nvSpPr>
-        <p:spPr/>
-        <p:txBody>
-          <a:bodyPr/>
-          <a:lstStyle/>
-          <a:p>
-            <a:r>
-              <a:rPr lang="en-US" dirty="0"/>
-              <a:t>Point </a:t>
-            </a:r>
-            <a:r>
-              <a:rPr lang="en-US" dirty="0" err="1"/>
-              <a:t>disctibution</a:t>
-            </a:r>
-            <a:endParaRPr lang="en-US" dirty="0"/>
-          </a:p>
-          <a:p>
-            <a:r>
-              <a:rPr lang="en-US" dirty="0"/>
-              <a:t>Available in syllabus</a:t>
-            </a:r>
-          </a:p>
-        </p:txBody>
-      </p:sp>
-      <p:sp>
-        <p:nvSpPr>
-          <p:cNvPr id="4" name="Slide Number Placeholder 3"/>
-          <p:cNvSpPr>
-            <a:spLocks noGrp="1"/>
-          </p:cNvSpPr>
-          <p:nvPr>
-            <p:ph type="sldNum" sz="quarter" idx="5"/>
-          </p:nvPr>
-        </p:nvSpPr>
-        <p:spPr/>
-        <p:txBody>
-          <a:bodyPr/>
-          <a:lstStyle/>
-          <a:p>
-            <a:fld id="{1560C251-82B7-4253-A774-38D73C276BCE}" type="slidenum">
-              <a:rPr lang="en-US" smtClean="0"/>
-              <a:t>14</a:t>
-            </a:fld>
-            <a:endParaRPr lang="en-US" dirty="0"/>
-          </a:p>
-        </p:txBody>
-      </p:sp>
-    </p:spTree>
-    <p:extLst>
-      <p:ext uri="{BB962C8B-B14F-4D97-AF65-F5344CB8AC3E}">
-        <p14:creationId xmlns:p14="http://schemas.microsoft.com/office/powerpoint/2010/main" val="2870696525"/>
+        <p14:creationId xmlns:p14="http://schemas.microsoft.com/office/powerpoint/2010/main" val="1442013274"/>
       </p:ext>
     </p:extLst>
   </p:cSld>
@@ -1043,7 +1246,13 @@
   <p:cSld>
     <p:spTree>
       <p:nvGrpSpPr>
-        <p:cNvPr id="1" name=""/>
+        <p:cNvPr id="1" name="">
+          <a:extLst>
+            <a:ext uri="{FF2B5EF4-FFF2-40B4-BE49-F238E27FC236}">
+              <a16:creationId xmlns:a16="http://schemas.microsoft.com/office/drawing/2014/main" id="{488A1D97-DD45-D598-F753-E80DC69CECC4}"/>
+            </a:ext>
+          </a:extLst>
+        </p:cNvPr>
         <p:cNvGrpSpPr/>
         <p:nvPr/>
       </p:nvGrpSpPr>
@@ -1057,7 +1266,13 @@
       </p:grpSpPr>
       <p:sp>
         <p:nvSpPr>
-          <p:cNvPr id="2" name="Slide Image Placeholder 1"/>
+          <p:cNvPr id="2" name="Slide Image Placeholder 1">
+            <a:extLst>
+              <a:ext uri="{FF2B5EF4-FFF2-40B4-BE49-F238E27FC236}">
+                <a16:creationId xmlns:a16="http://schemas.microsoft.com/office/drawing/2014/main" id="{AB7E189B-98FF-B625-1960-AB08AE7CF5AE}"/>
+              </a:ext>
+            </a:extLst>
+          </p:cNvPr>
           <p:cNvSpPr>
             <a:spLocks noGrp="1" noRot="1" noChangeAspect="1"/>
           </p:cNvSpPr>
@@ -1069,7 +1284,13 @@
       </p:sp>
       <p:sp>
         <p:nvSpPr>
-          <p:cNvPr id="3" name="Notes Placeholder 2"/>
+          <p:cNvPr id="3" name="Notes Placeholder 2">
+            <a:extLst>
+              <a:ext uri="{FF2B5EF4-FFF2-40B4-BE49-F238E27FC236}">
+                <a16:creationId xmlns:a16="http://schemas.microsoft.com/office/drawing/2014/main" id="{FDF95225-99B4-5EAC-F9CD-652BB8ACD873}"/>
+              </a:ext>
+            </a:extLst>
+          </p:cNvPr>
           <p:cNvSpPr>
             <a:spLocks noGrp="1"/>
           </p:cNvSpPr>
@@ -1082,9 +1303,39 @@
           <a:bodyPr/>
           <a:lstStyle/>
           <a:p>
-            <a:r>
-              <a:rPr lang="en-US" dirty="0"/>
-              <a:t>Groups: If there are issues, please speak to me asap</a:t>
+            <a:pPr lvl="0"/>
+            <a:r>
+              <a:rPr lang="en-GB" dirty="0"/>
+              <a:t>What do you love about teaching the course? How long have you been teaching? What is your </a:t>
+            </a:r>
+            <a:r>
+              <a:rPr lang="en-GB" dirty="0" err="1"/>
+              <a:t>favorite</a:t>
+            </a:r>
+            <a:r>
+              <a:rPr lang="en-GB" dirty="0"/>
+              <a:t> thing about teaching?</a:t>
+            </a:r>
+          </a:p>
+          <a:p>
+            <a:pPr lvl="0"/>
+            <a:r>
+              <a:rPr lang="en-GB" dirty="0"/>
+              <a:t>Why did you choose to study and work in your discipline? What do you love about the discipline? How you see the discipline affecting the world and vice versa?</a:t>
+            </a:r>
+          </a:p>
+          <a:p>
+            <a:pPr lvl="0"/>
+            <a:r>
+              <a:rPr lang="en-GB" dirty="0"/>
+              <a:t>What is your research agenda and how does it relate to the course? (if applicable)</a:t>
+            </a:r>
+          </a:p>
+          <a:p>
+            <a:pPr lvl="0"/>
+            <a:r>
+              <a:rPr lang="en-GB" dirty="0"/>
+              <a:t>Personal details that you feel comfortable sharing, such as place of birth, family details, hobbies and interests, future plans.</a:t>
             </a:r>
           </a:p>
           <a:p>
@@ -1094,7 +1345,13 @@
       </p:sp>
       <p:sp>
         <p:nvSpPr>
-          <p:cNvPr id="4" name="Slide Number Placeholder 3"/>
+          <p:cNvPr id="4" name="Slide Number Placeholder 3">
+            <a:extLst>
+              <a:ext uri="{FF2B5EF4-FFF2-40B4-BE49-F238E27FC236}">
+                <a16:creationId xmlns:a16="http://schemas.microsoft.com/office/drawing/2014/main" id="{2F8E959F-B2A7-4347-4806-8EEDAAEDB03C}"/>
+              </a:ext>
+            </a:extLst>
+          </p:cNvPr>
           <p:cNvSpPr>
             <a:spLocks noGrp="1"/>
           </p:cNvSpPr>
@@ -1107,18 +1364,18 @@
           <a:bodyPr/>
           <a:lstStyle/>
           <a:p>
-            <a:fld id="{1560C251-82B7-4253-A774-38D73C276BCE}" type="slidenum">
+            <a:fld id="{76F32F1C-470B-324F-8158-FBD837D2FC84}" type="slidenum">
               <a:rPr lang="en-US" smtClean="0"/>
-              <a:t>15</a:t>
+              <a:t>6</a:t>
             </a:fld>
-            <a:endParaRPr lang="en-US" dirty="0"/>
+            <a:endParaRPr lang="en-US"/>
           </a:p>
         </p:txBody>
       </p:sp>
     </p:spTree>
     <p:extLst>
       <p:ext uri="{BB962C8B-B14F-4D97-AF65-F5344CB8AC3E}">
-        <p14:creationId xmlns:p14="http://schemas.microsoft.com/office/powerpoint/2010/main" val="634966825"/>
+        <p14:creationId xmlns:p14="http://schemas.microsoft.com/office/powerpoint/2010/main" val="3991501648"/>
       </p:ext>
     </p:extLst>
   </p:cSld>
@@ -1174,8 +1431,42 @@
           <a:p>
             <a:r>
               <a:rPr lang="en-US" dirty="0"/>
-              <a:t>I do not get a sense of your understanding until the exams. Hence it is critical for you to reach out if you need help. If the slides look wrong or need clarification on anything, PLEASE email me or let me know in class. This is the only way I can help you</a:t>
-            </a:r>
+              <a:t>This is general structure</a:t>
+            </a:r>
+          </a:p>
+          <a:p>
+            <a:r>
+              <a:rPr lang="en-US" dirty="0"/>
+              <a:t>Personal story: Similar class immediately started with case studies</a:t>
+            </a:r>
+          </a:p>
+          <a:p>
+            <a:r>
+              <a:rPr lang="en-US" dirty="0"/>
+              <a:t>Interesting but did not </a:t>
+            </a:r>
+            <a:r>
+              <a:rPr lang="en-US" dirty="0" err="1"/>
+              <a:t>equipt</a:t>
+            </a:r>
+            <a:r>
+              <a:rPr lang="en-US" dirty="0"/>
+              <a:t> me with the knowledge of how its done</a:t>
+            </a:r>
+          </a:p>
+          <a:p>
+            <a:r>
+              <a:rPr lang="en-US" dirty="0"/>
+              <a:t>My aim is to go over the steps and then later discuss how this is applied </a:t>
+            </a:r>
+            <a:r>
+              <a:rPr lang="en-US" dirty="0" err="1"/>
+              <a:t>irl</a:t>
+            </a:r>
+            <a:endParaRPr lang="en-US" dirty="0"/>
+          </a:p>
+          <a:p>
+            <a:endParaRPr lang="en-US" dirty="0"/>
           </a:p>
         </p:txBody>
       </p:sp>
@@ -1196,7 +1487,7 @@
           <a:p>
             <a:fld id="{1560C251-82B7-4253-A774-38D73C276BCE}" type="slidenum">
               <a:rPr lang="en-US" smtClean="0"/>
-              <a:t>16</a:t>
+              <a:t>7</a:t>
             </a:fld>
             <a:endParaRPr lang="en-US" dirty="0"/>
           </a:p>
@@ -1205,7 +1496,269 @@
     </p:spTree>
     <p:extLst>
       <p:ext uri="{BB962C8B-B14F-4D97-AF65-F5344CB8AC3E}">
-        <p14:creationId xmlns:p14="http://schemas.microsoft.com/office/powerpoint/2010/main" val="983792798"/>
+        <p14:creationId xmlns:p14="http://schemas.microsoft.com/office/powerpoint/2010/main" val="1267898858"/>
+      </p:ext>
+    </p:extLst>
+  </p:cSld>
+  <p:clrMapOvr>
+    <a:masterClrMapping/>
+  </p:clrMapOvr>
+</p:notes>
+</file>
+
+<file path=ppt/notesSlides/notesSlide8.xml><?xml version="1.0" encoding="utf-8"?>
+<p:notes xmlns:a="http://schemas.openxmlformats.org/drawingml/2006/main" xmlns:r="http://schemas.openxmlformats.org/officeDocument/2006/relationships" xmlns:p="http://schemas.openxmlformats.org/presentationml/2006/main">
+  <p:cSld>
+    <p:spTree>
+      <p:nvGrpSpPr>
+        <p:cNvPr id="1" name="">
+          <a:extLst>
+            <a:ext uri="{FF2B5EF4-FFF2-40B4-BE49-F238E27FC236}">
+              <a16:creationId xmlns:a16="http://schemas.microsoft.com/office/drawing/2014/main" id="{668D1F75-B8DF-96D5-5EE1-9F39B7042BDA}"/>
+            </a:ext>
+          </a:extLst>
+        </p:cNvPr>
+        <p:cNvGrpSpPr/>
+        <p:nvPr/>
+      </p:nvGrpSpPr>
+      <p:grpSpPr>
+        <a:xfrm>
+          <a:off x="0" y="0"/>
+          <a:ext cx="0" cy="0"/>
+          <a:chOff x="0" y="0"/>
+          <a:chExt cx="0" cy="0"/>
+        </a:xfrm>
+      </p:grpSpPr>
+      <p:sp>
+        <p:nvSpPr>
+          <p:cNvPr id="2" name="Slide Image Placeholder 1">
+            <a:extLst>
+              <a:ext uri="{FF2B5EF4-FFF2-40B4-BE49-F238E27FC236}">
+                <a16:creationId xmlns:a16="http://schemas.microsoft.com/office/drawing/2014/main" id="{242B3694-E59E-4056-5249-514C4B0AAED7}"/>
+              </a:ext>
+            </a:extLst>
+          </p:cNvPr>
+          <p:cNvSpPr>
+            <a:spLocks noGrp="1" noRot="1" noChangeAspect="1"/>
+          </p:cNvSpPr>
+          <p:nvPr>
+            <p:ph type="sldImg"/>
+          </p:nvPr>
+        </p:nvSpPr>
+        <p:spPr/>
+      </p:sp>
+      <p:sp>
+        <p:nvSpPr>
+          <p:cNvPr id="3" name="Notes Placeholder 2">
+            <a:extLst>
+              <a:ext uri="{FF2B5EF4-FFF2-40B4-BE49-F238E27FC236}">
+                <a16:creationId xmlns:a16="http://schemas.microsoft.com/office/drawing/2014/main" id="{3E64B469-4FFF-CE9C-4D07-8C78F1C4F458}"/>
+              </a:ext>
+            </a:extLst>
+          </p:cNvPr>
+          <p:cNvSpPr>
+            <a:spLocks noGrp="1"/>
+          </p:cNvSpPr>
+          <p:nvPr>
+            <p:ph type="body" idx="1"/>
+          </p:nvPr>
+        </p:nvSpPr>
+        <p:spPr/>
+        <p:txBody>
+          <a:bodyPr/>
+          <a:lstStyle/>
+          <a:p>
+            <a:r>
+              <a:rPr lang="en-US" b="1" dirty="0"/>
+              <a:t>Quizzes: due </a:t>
+            </a:r>
+            <a:r>
+              <a:rPr lang="en-US" dirty="0"/>
+              <a:t>each Sunday </a:t>
+            </a:r>
+          </a:p>
+          <a:p>
+            <a:r>
+              <a:rPr lang="en-US" b="1" dirty="0"/>
+              <a:t>In-class activities:</a:t>
+            </a:r>
+            <a:r>
+              <a:rPr lang="en-US" dirty="0"/>
+              <a:t> </a:t>
+            </a:r>
+          </a:p>
+          <a:p>
+            <a:r>
+              <a:rPr lang="en-US" b="1" dirty="0"/>
+              <a:t>Case studies:</a:t>
+            </a:r>
+            <a:r>
+              <a:rPr lang="en-US" dirty="0"/>
+              <a:t> </a:t>
+            </a:r>
+          </a:p>
+          <a:p>
+            <a:r>
+              <a:rPr lang="en-US" b="1" dirty="0"/>
+              <a:t>Journal article presentation</a:t>
+            </a:r>
+          </a:p>
+          <a:p>
+            <a:r>
+              <a:rPr lang="en-US" b="1" dirty="0"/>
+              <a:t>Analytics project:</a:t>
+            </a:r>
+            <a:r>
+              <a:rPr lang="en-US" dirty="0"/>
+              <a:t> think about a topic as we go through content</a:t>
+            </a:r>
+          </a:p>
+          <a:p>
+            <a:r>
+              <a:rPr lang="en-US" b="1" dirty="0"/>
+              <a:t>Exams:</a:t>
+            </a:r>
+            <a:r>
+              <a:rPr lang="en-US" dirty="0"/>
+              <a:t> requires lockdown browser</a:t>
+            </a:r>
+          </a:p>
+          <a:p>
+            <a:endParaRPr lang="en-US" dirty="0"/>
+          </a:p>
+        </p:txBody>
+      </p:sp>
+      <p:sp>
+        <p:nvSpPr>
+          <p:cNvPr id="4" name="Slide Number Placeholder 3">
+            <a:extLst>
+              <a:ext uri="{FF2B5EF4-FFF2-40B4-BE49-F238E27FC236}">
+                <a16:creationId xmlns:a16="http://schemas.microsoft.com/office/drawing/2014/main" id="{AE0AF4CF-4F18-C887-828B-68FA74F20C30}"/>
+              </a:ext>
+            </a:extLst>
+          </p:cNvPr>
+          <p:cNvSpPr>
+            <a:spLocks noGrp="1"/>
+          </p:cNvSpPr>
+          <p:nvPr>
+            <p:ph type="sldNum" sz="quarter" idx="5"/>
+          </p:nvPr>
+        </p:nvSpPr>
+        <p:spPr/>
+        <p:txBody>
+          <a:bodyPr/>
+          <a:lstStyle/>
+          <a:p>
+            <a:fld id="{1560C251-82B7-4253-A774-38D73C276BCE}" type="slidenum">
+              <a:rPr lang="en-US" smtClean="0"/>
+              <a:t>12</a:t>
+            </a:fld>
+            <a:endParaRPr lang="en-US" dirty="0"/>
+          </a:p>
+        </p:txBody>
+      </p:sp>
+    </p:spTree>
+    <p:extLst>
+      <p:ext uri="{BB962C8B-B14F-4D97-AF65-F5344CB8AC3E}">
+        <p14:creationId xmlns:p14="http://schemas.microsoft.com/office/powerpoint/2010/main" val="3038081930"/>
+      </p:ext>
+    </p:extLst>
+  </p:cSld>
+  <p:clrMapOvr>
+    <a:masterClrMapping/>
+  </p:clrMapOvr>
+</p:notes>
+</file>
+
+<file path=ppt/notesSlides/notesSlide9.xml><?xml version="1.0" encoding="utf-8"?>
+<p:notes xmlns:a="http://schemas.openxmlformats.org/drawingml/2006/main" xmlns:r="http://schemas.openxmlformats.org/officeDocument/2006/relationships" xmlns:p="http://schemas.openxmlformats.org/presentationml/2006/main">
+  <p:cSld>
+    <p:spTree>
+      <p:nvGrpSpPr>
+        <p:cNvPr id="1" name=""/>
+        <p:cNvGrpSpPr/>
+        <p:nvPr/>
+      </p:nvGrpSpPr>
+      <p:grpSpPr>
+        <a:xfrm>
+          <a:off x="0" y="0"/>
+          <a:ext cx="0" cy="0"/>
+          <a:chOff x="0" y="0"/>
+          <a:chExt cx="0" cy="0"/>
+        </a:xfrm>
+      </p:grpSpPr>
+      <p:sp>
+        <p:nvSpPr>
+          <p:cNvPr id="2" name="Slide Image Placeholder 1"/>
+          <p:cNvSpPr>
+            <a:spLocks noGrp="1" noRot="1" noChangeAspect="1"/>
+          </p:cNvSpPr>
+          <p:nvPr>
+            <p:ph type="sldImg"/>
+          </p:nvPr>
+        </p:nvSpPr>
+        <p:spPr/>
+      </p:sp>
+      <p:sp>
+        <p:nvSpPr>
+          <p:cNvPr id="3" name="Notes Placeholder 2"/>
+          <p:cNvSpPr>
+            <a:spLocks noGrp="1"/>
+          </p:cNvSpPr>
+          <p:nvPr>
+            <p:ph type="body" idx="1"/>
+          </p:nvPr>
+        </p:nvSpPr>
+        <p:spPr/>
+        <p:txBody>
+          <a:bodyPr/>
+          <a:lstStyle/>
+          <a:p>
+            <a:r>
+              <a:rPr lang="en-US" dirty="0"/>
+              <a:t>Point </a:t>
+            </a:r>
+            <a:r>
+              <a:rPr lang="en-US" dirty="0" err="1"/>
+              <a:t>disctibution</a:t>
+            </a:r>
+            <a:endParaRPr lang="en-US" dirty="0"/>
+          </a:p>
+          <a:p>
+            <a:r>
+              <a:rPr lang="en-US" dirty="0"/>
+              <a:t>Available in syllabus</a:t>
+            </a:r>
+          </a:p>
+        </p:txBody>
+      </p:sp>
+      <p:sp>
+        <p:nvSpPr>
+          <p:cNvPr id="4" name="Slide Number Placeholder 3"/>
+          <p:cNvSpPr>
+            <a:spLocks noGrp="1"/>
+          </p:cNvSpPr>
+          <p:nvPr>
+            <p:ph type="sldNum" sz="quarter" idx="5"/>
+          </p:nvPr>
+        </p:nvSpPr>
+        <p:spPr/>
+        <p:txBody>
+          <a:bodyPr/>
+          <a:lstStyle/>
+          <a:p>
+            <a:fld id="{1560C251-82B7-4253-A774-38D73C276BCE}" type="slidenum">
+              <a:rPr lang="en-US" smtClean="0"/>
+              <a:t>13</a:t>
+            </a:fld>
+            <a:endParaRPr lang="en-US" dirty="0"/>
+          </a:p>
+        </p:txBody>
+      </p:sp>
+    </p:spTree>
+    <p:extLst>
+      <p:ext uri="{BB962C8B-B14F-4D97-AF65-F5344CB8AC3E}">
+        <p14:creationId xmlns:p14="http://schemas.microsoft.com/office/powerpoint/2010/main" val="2870696525"/>
       </p:ext>
     </p:extLst>
   </p:cSld>
@@ -1372,7 +1925,7 @@
           <a:p>
             <a:fld id="{1BF61C71-767E-B84C-BFB3-7B18856D27F4}" type="datetimeFigureOut">
               <a:rPr lang="en-US" smtClean="0"/>
-              <a:t>8/22/26</a:t>
+              <a:t>8/25/26</a:t>
             </a:fld>
             <a:endParaRPr lang="en-US"/>
           </a:p>
@@ -1580,7 +2133,7 @@
           <a:p>
             <a:fld id="{1BF61C71-767E-B84C-BFB3-7B18856D27F4}" type="datetimeFigureOut">
               <a:rPr lang="en-US" smtClean="0"/>
-              <a:t>8/22/26</a:t>
+              <a:t>8/25/26</a:t>
             </a:fld>
             <a:endParaRPr lang="en-US"/>
           </a:p>
@@ -1798,7 +2351,7 @@
           <a:p>
             <a:fld id="{1BF61C71-767E-B84C-BFB3-7B18856D27F4}" type="datetimeFigureOut">
               <a:rPr lang="en-US" smtClean="0"/>
-              <a:t>8/22/26</a:t>
+              <a:t>8/25/26</a:t>
             </a:fld>
             <a:endParaRPr lang="en-US"/>
           </a:p>
@@ -2006,7 +2559,7 @@
           <a:p>
             <a:fld id="{1BF61C71-767E-B84C-BFB3-7B18856D27F4}" type="datetimeFigureOut">
               <a:rPr lang="en-US" smtClean="0"/>
-              <a:t>8/22/26</a:t>
+              <a:t>8/25/26</a:t>
             </a:fld>
             <a:endParaRPr lang="en-US"/>
           </a:p>
@@ -2290,7 +2843,7 @@
           <a:p>
             <a:fld id="{1BF61C71-767E-B84C-BFB3-7B18856D27F4}" type="datetimeFigureOut">
               <a:rPr lang="en-US" smtClean="0"/>
-              <a:t>8/22/26</a:t>
+              <a:t>8/25/26</a:t>
             </a:fld>
             <a:endParaRPr lang="en-US"/>
           </a:p>
@@ -2566,7 +3119,7 @@
           <a:p>
             <a:fld id="{1BF61C71-767E-B84C-BFB3-7B18856D27F4}" type="datetimeFigureOut">
               <a:rPr lang="en-US" smtClean="0"/>
-              <a:t>8/22/26</a:t>
+              <a:t>8/25/26</a:t>
             </a:fld>
             <a:endParaRPr lang="en-US"/>
           </a:p>
@@ -2989,7 +3542,7 @@
           <a:p>
             <a:fld id="{1BF61C71-767E-B84C-BFB3-7B18856D27F4}" type="datetimeFigureOut">
               <a:rPr lang="en-US" smtClean="0"/>
-              <a:t>8/22/26</a:t>
+              <a:t>8/25/26</a:t>
             </a:fld>
             <a:endParaRPr lang="en-US"/>
           </a:p>
@@ -3139,7 +3692,7 @@
           <a:p>
             <a:fld id="{1BF61C71-767E-B84C-BFB3-7B18856D27F4}" type="datetimeFigureOut">
               <a:rPr lang="en-US" smtClean="0"/>
-              <a:t>8/22/26</a:t>
+              <a:t>8/25/26</a:t>
             </a:fld>
             <a:endParaRPr lang="en-US"/>
           </a:p>
@@ -3260,7 +3813,7 @@
           <a:p>
             <a:fld id="{1BF61C71-767E-B84C-BFB3-7B18856D27F4}" type="datetimeFigureOut">
               <a:rPr lang="en-US" smtClean="0"/>
-              <a:t>8/22/26</a:t>
+              <a:t>8/25/26</a:t>
             </a:fld>
             <a:endParaRPr lang="en-US"/>
           </a:p>
@@ -3581,7 +4134,7 @@
           <a:p>
             <a:fld id="{1BF61C71-767E-B84C-BFB3-7B18856D27F4}" type="datetimeFigureOut">
               <a:rPr lang="en-US" smtClean="0"/>
-              <a:t>8/22/26</a:t>
+              <a:t>8/25/26</a:t>
             </a:fld>
             <a:endParaRPr lang="en-US"/>
           </a:p>
@@ -3878,7 +4431,7 @@
           <a:p>
             <a:fld id="{1BF61C71-767E-B84C-BFB3-7B18856D27F4}" type="datetimeFigureOut">
               <a:rPr lang="en-US" smtClean="0"/>
-              <a:t>8/22/26</a:t>
+              <a:t>8/25/26</a:t>
             </a:fld>
             <a:endParaRPr lang="en-US"/>
           </a:p>
@@ -4132,7 +4685,7 @@
           <a:p>
             <a:fld id="{1BF61C71-767E-B84C-BFB3-7B18856D27F4}" type="datetimeFigureOut">
               <a:rPr lang="en-US" smtClean="0"/>
-              <a:t>8/22/26</a:t>
+              <a:t>8/25/26</a:t>
             </a:fld>
             <a:endParaRPr lang="en-US"/>
           </a:p>
@@ -4581,10 +5134,10 @@
           <a:lstStyle/>
           <a:p>
             <a:r>
-              <a:rPr lang="en-US" dirty="0"/>
-              <a:t>Sports Performance Analytics</a:t>
-            </a:r>
-            <a:endParaRPr lang="en-GB" dirty="0"/>
+              <a:rPr lang="en-US" sz="4800" dirty="0"/>
+              <a:t>Special Topics in Health and Exercise Science: Sports Performance Analytics</a:t>
+            </a:r>
+            <a:endParaRPr lang="en-GB" sz="4800" dirty="0"/>
           </a:p>
         </p:txBody>
       </p:sp>
@@ -4657,156 +5210,6 @@
           <p:cNvPr id="2" name="Title 1">
             <a:extLst>
               <a:ext uri="{FF2B5EF4-FFF2-40B4-BE49-F238E27FC236}">
-                <a16:creationId xmlns:a16="http://schemas.microsoft.com/office/drawing/2014/main" id="{943CDF74-7A78-AB50-1025-2FFA782783E3}"/>
-              </a:ext>
-            </a:extLst>
-          </p:cNvPr>
-          <p:cNvSpPr>
-            <a:spLocks noGrp="1"/>
-          </p:cNvSpPr>
-          <p:nvPr>
-            <p:ph type="title"/>
-          </p:nvPr>
-        </p:nvSpPr>
-        <p:spPr/>
-        <p:txBody>
-          <a:bodyPr/>
-          <a:lstStyle/>
-          <a:p>
-            <a:r>
-              <a:rPr lang="en-US" dirty="0"/>
-              <a:t>Pair and Share</a:t>
-            </a:r>
-          </a:p>
-        </p:txBody>
-      </p:sp>
-      <p:sp>
-        <p:nvSpPr>
-          <p:cNvPr id="3" name="Content Placeholder 2">
-            <a:extLst>
-              <a:ext uri="{FF2B5EF4-FFF2-40B4-BE49-F238E27FC236}">
-                <a16:creationId xmlns:a16="http://schemas.microsoft.com/office/drawing/2014/main" id="{8CDCA40E-180C-AB54-DA6C-4961067D881A}"/>
-              </a:ext>
-            </a:extLst>
-          </p:cNvPr>
-          <p:cNvSpPr>
-            <a:spLocks noGrp="1"/>
-          </p:cNvSpPr>
-          <p:nvPr>
-            <p:ph idx="1"/>
-          </p:nvPr>
-        </p:nvSpPr>
-        <p:spPr/>
-        <p:txBody>
-          <a:bodyPr/>
-          <a:lstStyle/>
-          <a:p>
-            <a:pPr marL="0" indent="0">
-              <a:buNone/>
-            </a:pPr>
-            <a:r>
-              <a:rPr lang="en-GB" dirty="0"/>
-              <a:t>In groups of 3:</a:t>
-            </a:r>
-          </a:p>
-          <a:p>
-            <a:pPr marL="514350" lvl="0" indent="-514350">
-              <a:buFont typeface="+mj-lt"/>
-              <a:buAutoNum type="arabicPeriod"/>
-            </a:pPr>
-            <a:r>
-              <a:rPr lang="en-GB" dirty="0"/>
-              <a:t>Give each person an opportunity to share.</a:t>
-            </a:r>
-          </a:p>
-          <a:p>
-            <a:pPr marL="514350" lvl="0" indent="-514350">
-              <a:buFont typeface="+mj-lt"/>
-              <a:buAutoNum type="arabicPeriod"/>
-            </a:pPr>
-            <a:r>
-              <a:rPr lang="en-GB" dirty="0"/>
-              <a:t>Select one or two ideas to discuss further.</a:t>
-            </a:r>
-          </a:p>
-          <a:p>
-            <a:pPr marL="514350" lvl="0" indent="-514350">
-              <a:buFont typeface="+mj-lt"/>
-              <a:buAutoNum type="arabicPeriod"/>
-            </a:pPr>
-            <a:r>
-              <a:rPr lang="en-GB" dirty="0"/>
-              <a:t>For each selected idea, consider:</a:t>
-            </a:r>
-          </a:p>
-          <a:p>
-            <a:pPr lvl="2"/>
-            <a:r>
-              <a:rPr lang="en-GB" dirty="0"/>
-              <a:t>What information do we need to answer your question?</a:t>
-            </a:r>
-          </a:p>
-          <a:p>
-            <a:pPr lvl="2"/>
-            <a:r>
-              <a:rPr lang="en-GB" dirty="0"/>
-              <a:t>What decisions would the answer effect?</a:t>
-            </a:r>
-          </a:p>
-          <a:p>
-            <a:pPr lvl="2"/>
-            <a:r>
-              <a:rPr lang="en-GB" dirty="0"/>
-              <a:t>What are some possible answers to your questions?</a:t>
-            </a:r>
-          </a:p>
-          <a:p>
-            <a:pPr lvl="2"/>
-            <a:r>
-              <a:rPr lang="en-GB" dirty="0"/>
-              <a:t>What are the risks and benefits of change?</a:t>
-            </a:r>
-          </a:p>
-          <a:p>
-            <a:endParaRPr lang="en-US" dirty="0"/>
-          </a:p>
-        </p:txBody>
-      </p:sp>
-    </p:spTree>
-    <p:extLst>
-      <p:ext uri="{BB962C8B-B14F-4D97-AF65-F5344CB8AC3E}">
-        <p14:creationId xmlns:p14="http://schemas.microsoft.com/office/powerpoint/2010/main" val="4126481287"/>
-      </p:ext>
-    </p:extLst>
-  </p:cSld>
-  <p:clrMapOvr>
-    <a:masterClrMapping/>
-  </p:clrMapOvr>
-</p:sld>
-</file>
-
-<file path=ppt/slides/slide11.xml><?xml version="1.0" encoding="utf-8"?>
-<p:sld xmlns:a="http://schemas.openxmlformats.org/drawingml/2006/main" xmlns:r="http://schemas.openxmlformats.org/officeDocument/2006/relationships" xmlns:p="http://schemas.openxmlformats.org/presentationml/2006/main">
-  <p:cSld>
-    <p:spTree>
-      <p:nvGrpSpPr>
-        <p:cNvPr id="1" name=""/>
-        <p:cNvGrpSpPr/>
-        <p:nvPr/>
-      </p:nvGrpSpPr>
-      <p:grpSpPr>
-        <a:xfrm>
-          <a:off x="0" y="0"/>
-          <a:ext cx="0" cy="0"/>
-          <a:chOff x="0" y="0"/>
-          <a:chExt cx="0" cy="0"/>
-        </a:xfrm>
-      </p:grpSpPr>
-      <p:sp>
-        <p:nvSpPr>
-          <p:cNvPr id="2" name="Title 1">
-            <a:extLst>
-              <a:ext uri="{FF2B5EF4-FFF2-40B4-BE49-F238E27FC236}">
                 <a16:creationId xmlns:a16="http://schemas.microsoft.com/office/drawing/2014/main" id="{B17A3450-844C-8DC4-E986-2ACD49B2FB8D}"/>
               </a:ext>
             </a:extLst>
@@ -4856,7 +5259,7 @@
           <a:p>
             <a:r>
               <a:rPr lang="en-GB" dirty="0"/>
-              <a:t>The questions you generated today involve different:</a:t>
+              <a:t>The examples generated today involve different:</a:t>
             </a:r>
           </a:p>
           <a:p>
@@ -4890,15 +5293,15 @@
           <a:p>
             <a:r>
               <a:rPr lang="en-GB" dirty="0"/>
-              <a:t>Throughout the semester, we will develop a framework for investigating them </a:t>
+              <a:t>Throughout the semester, we will develop a </a:t>
             </a:r>
             <a:r>
               <a:rPr lang="en-GB" b="1" dirty="0"/>
-              <a:t>systematically</a:t>
+              <a:t>systematic </a:t>
             </a:r>
             <a:r>
               <a:rPr lang="en-GB" dirty="0"/>
-              <a:t>.</a:t>
+              <a:t>method to understand and/or investigate.</a:t>
             </a:r>
           </a:p>
         </p:txBody>
@@ -5171,7 +5574,7 @@
 </p:sld>
 </file>
 
-<file path=ppt/slides/slide12.xml><?xml version="1.0" encoding="utf-8"?>
+<file path=ppt/slides/slide11.xml><?xml version="1.0" encoding="utf-8"?>
 <p:sld xmlns:a="http://schemas.openxmlformats.org/drawingml/2006/main" xmlns:r="http://schemas.openxmlformats.org/officeDocument/2006/relationships" xmlns:p="http://schemas.openxmlformats.org/presentationml/2006/main">
   <p:cSld>
     <p:spTree>
@@ -5193,7 +5596,7 @@
           <p:cNvPr id="2" name="Title 1">
             <a:extLst>
               <a:ext uri="{FF2B5EF4-FFF2-40B4-BE49-F238E27FC236}">
-                <a16:creationId xmlns:a16="http://schemas.microsoft.com/office/drawing/2014/main" id="{1B9BBDF3-3F2B-46C8-EBB9-E76680C30537}"/>
+                <a16:creationId xmlns:a16="http://schemas.microsoft.com/office/drawing/2014/main" id="{4B7C0FC3-5B4D-EFA6-B3D9-598E0AC4D90F}"/>
               </a:ext>
             </a:extLst>
           </p:cNvPr>
@@ -5210,180 +5613,26 @@
           <a:lstStyle/>
           <a:p>
             <a:r>
-              <a:rPr lang="en-GB" dirty="0"/>
-              <a:t>Skills to Build during this semester</a:t>
-            </a:r>
-          </a:p>
-        </p:txBody>
-      </p:sp>
-      <p:sp>
-        <p:nvSpPr>
-          <p:cNvPr id="3" name="Content Placeholder 2">
-            <a:extLst>
-              <a:ext uri="{FF2B5EF4-FFF2-40B4-BE49-F238E27FC236}">
-                <a16:creationId xmlns:a16="http://schemas.microsoft.com/office/drawing/2014/main" id="{F47673A8-7F5B-DC3C-10BB-FE0C6EAFCA30}"/>
-              </a:ext>
-            </a:extLst>
-          </p:cNvPr>
-          <p:cNvSpPr>
-            <a:spLocks noGrp="1"/>
-          </p:cNvSpPr>
-          <p:nvPr>
-            <p:ph idx="1"/>
-          </p:nvPr>
-        </p:nvSpPr>
-        <p:spPr/>
-        <p:txBody>
-          <a:bodyPr>
-            <a:normAutofit fontScale="85000" lnSpcReduction="20000"/>
-          </a:bodyPr>
-          <a:lstStyle/>
-          <a:p>
-            <a:pPr lvl="0"/>
-            <a:r>
-              <a:rPr lang="en-GB" b="1" dirty="0"/>
-              <a:t>Analytics foundations:</a:t>
-            </a:r>
-            <a:r>
-              <a:rPr lang="en-GB" dirty="0"/>
-              <a:t> </a:t>
-            </a:r>
-          </a:p>
-          <a:p>
-            <a:pPr lvl="1"/>
-            <a:r>
-              <a:rPr lang="en-GB" dirty="0"/>
-              <a:t>What sport analytics is and formulating good questions we can answer</a:t>
-            </a:r>
-          </a:p>
-          <a:p>
-            <a:pPr lvl="0"/>
-            <a:r>
-              <a:rPr lang="en-GB" b="1" dirty="0"/>
-              <a:t>Data:</a:t>
-            </a:r>
-            <a:r>
-              <a:rPr lang="en-GB" dirty="0"/>
-              <a:t> </a:t>
-            </a:r>
-          </a:p>
-          <a:p>
-            <a:pPr lvl="1"/>
-            <a:r>
-              <a:rPr lang="en-GB" dirty="0"/>
-              <a:t>Sources, structure, quality, validity, reliability, and ethics</a:t>
-            </a:r>
-          </a:p>
-          <a:p>
-            <a:pPr lvl="0"/>
-            <a:r>
-              <a:rPr lang="en-GB" b="1" dirty="0"/>
-              <a:t>Describe data:</a:t>
-            </a:r>
-            <a:r>
-              <a:rPr lang="en-GB" dirty="0"/>
-              <a:t> </a:t>
-            </a:r>
-          </a:p>
-          <a:p>
-            <a:pPr lvl="1"/>
-            <a:r>
-              <a:rPr lang="en-GB" dirty="0" err="1"/>
-              <a:t>Center</a:t>
-            </a:r>
-            <a:r>
-              <a:rPr lang="en-GB" dirty="0"/>
-              <a:t>, spread, distributions, and athlete profiling</a:t>
-            </a:r>
-          </a:p>
-          <a:p>
-            <a:pPr lvl="0"/>
-            <a:r>
-              <a:rPr lang="en-GB" b="1" dirty="0"/>
-              <a:t>Visualize data:</a:t>
-            </a:r>
-            <a:r>
-              <a:rPr lang="en-GB" dirty="0"/>
-              <a:t> </a:t>
-            </a:r>
-          </a:p>
-          <a:p>
-            <a:pPr lvl="1"/>
-            <a:r>
-              <a:rPr lang="en-GB" dirty="0"/>
-              <a:t>Showing patterns clearly and honestly</a:t>
-            </a:r>
-          </a:p>
-          <a:p>
-            <a:pPr lvl="0"/>
-            <a:r>
-              <a:rPr lang="en-GB" b="1" dirty="0"/>
-              <a:t>Explore relationships:</a:t>
-            </a:r>
-            <a:r>
-              <a:rPr lang="en-GB" dirty="0"/>
-              <a:t> </a:t>
-            </a:r>
-          </a:p>
-          <a:p>
-            <a:pPr lvl="1"/>
-            <a:r>
-              <a:rPr lang="en-GB" dirty="0"/>
-              <a:t>Association, regression, and interpretation</a:t>
-            </a:r>
-          </a:p>
-          <a:p>
-            <a:pPr lvl="0"/>
-            <a:r>
-              <a:rPr lang="en-GB" b="1" dirty="0"/>
-              <a:t>Making decisions:</a:t>
-            </a:r>
-            <a:r>
-              <a:rPr lang="en-GB" dirty="0"/>
-              <a:t> </a:t>
-            </a:r>
-          </a:p>
-          <a:p>
-            <a:pPr lvl="1"/>
-            <a:r>
-              <a:rPr lang="en-GB" dirty="0"/>
-              <a:t>Thresholds, probabilities, models, and communication</a:t>
-            </a:r>
-          </a:p>
-          <a:p>
-            <a:pPr lvl="0"/>
-            <a:r>
-              <a:rPr lang="en-GB" b="1" dirty="0"/>
-              <a:t>Application:</a:t>
-            </a:r>
-            <a:r>
-              <a:rPr lang="en-GB" dirty="0"/>
-              <a:t> </a:t>
-            </a:r>
-          </a:p>
-          <a:p>
-            <a:pPr lvl="1"/>
-            <a:r>
-              <a:rPr lang="en-GB" dirty="0"/>
-              <a:t>A semester-long group project</a:t>
-            </a:r>
-          </a:p>
-        </p:txBody>
-      </p:sp>
-      <p:sp>
-        <p:nvSpPr>
-          <p:cNvPr id="4" name="Slide Number Placeholder 3">
-            <a:extLst>
-              <a:ext uri="{FF2B5EF4-FFF2-40B4-BE49-F238E27FC236}">
-                <a16:creationId xmlns:a16="http://schemas.microsoft.com/office/drawing/2014/main" id="{33898ED9-935E-620F-FAF1-607D0AF58D5D}"/>
-              </a:ext>
-            </a:extLst>
-          </p:cNvPr>
-          <p:cNvSpPr>
-            <a:spLocks noGrp="1"/>
-          </p:cNvSpPr>
-          <p:nvPr>
-            <p:ph type="sldNum" sz="quarter" idx="12"/>
+              <a:rPr lang="en-US" dirty="0"/>
+              <a:t>Syllabus</a:t>
+            </a:r>
+          </a:p>
+        </p:txBody>
+      </p:sp>
+      <p:sp>
+        <p:nvSpPr>
+          <p:cNvPr id="3" name="Text Placeholder 2">
+            <a:extLst>
+              <a:ext uri="{FF2B5EF4-FFF2-40B4-BE49-F238E27FC236}">
+                <a16:creationId xmlns:a16="http://schemas.microsoft.com/office/drawing/2014/main" id="{E6C6351E-A498-67BD-5015-2962D6B8911C}"/>
+              </a:ext>
+            </a:extLst>
+          </p:cNvPr>
+          <p:cNvSpPr>
+            <a:spLocks noGrp="1"/>
+          </p:cNvSpPr>
+          <p:nvPr>
+            <p:ph type="body" idx="1"/>
           </p:nvPr>
         </p:nvSpPr>
         <p:spPr/>
@@ -5391,622 +5640,24 @@
           <a:bodyPr/>
           <a:lstStyle/>
           <a:p>
-            <a:fld id="{45C00377-489B-40EC-B059-26BDDD2E89B9}" type="slidenum">
-              <a:rPr lang="en-US" smtClean="0"/>
-              <a:pPr/>
-              <a:t>12</a:t>
-            </a:fld>
-            <a:endParaRPr lang="en-US" dirty="0"/>
+            <a:endParaRPr lang="en-US"/>
           </a:p>
         </p:txBody>
       </p:sp>
     </p:spTree>
     <p:extLst>
       <p:ext uri="{BB962C8B-B14F-4D97-AF65-F5344CB8AC3E}">
-        <p14:creationId xmlns:p14="http://schemas.microsoft.com/office/powerpoint/2010/main" val="2273123572"/>
+        <p14:creationId xmlns:p14="http://schemas.microsoft.com/office/powerpoint/2010/main" val="143885244"/>
       </p:ext>
     </p:extLst>
   </p:cSld>
   <p:clrMapOvr>
     <a:masterClrMapping/>
   </p:clrMapOvr>
-  <p:timing>
-    <p:tnLst>
-      <p:par>
-        <p:cTn id="1" dur="indefinite" restart="never" nodeType="tmRoot">
-          <p:childTnLst>
-            <p:seq concurrent="1" nextAc="seek">
-              <p:cTn id="2" dur="indefinite" nodeType="mainSeq">
-                <p:childTnLst>
-                  <p:par>
-                    <p:cTn id="3" fill="hold">
-                      <p:stCondLst>
-                        <p:cond delay="indefinite"/>
-                      </p:stCondLst>
-                      <p:childTnLst>
-                        <p:par>
-                          <p:cTn id="4" fill="hold">
-                            <p:stCondLst>
-                              <p:cond delay="0"/>
-                            </p:stCondLst>
-                            <p:childTnLst>
-                              <p:par>
-                                <p:cTn id="5" presetID="1" presetClass="entr" presetSubtype="0" fill="hold" grpId="0" nodeType="clickEffect">
-                                  <p:stCondLst>
-                                    <p:cond delay="0"/>
-                                  </p:stCondLst>
-                                  <p:childTnLst>
-                                    <p:set>
-                                      <p:cBhvr>
-                                        <p:cTn id="6" dur="1" fill="hold">
-                                          <p:stCondLst>
-                                            <p:cond delay="0"/>
-                                          </p:stCondLst>
-                                        </p:cTn>
-                                        <p:tgtEl>
-                                          <p:spTgt spid="3">
-                                            <p:txEl>
-                                              <p:pRg st="0" end="0"/>
-                                            </p:txEl>
-                                          </p:spTgt>
-                                        </p:tgtEl>
-                                        <p:attrNameLst>
-                                          <p:attrName>style.visibility</p:attrName>
-                                        </p:attrNameLst>
-                                      </p:cBhvr>
-                                      <p:to>
-                                        <p:strVal val="visible"/>
-                                      </p:to>
-                                    </p:set>
-                                  </p:childTnLst>
-                                </p:cTn>
-                              </p:par>
-                              <p:par>
-                                <p:cTn id="7" presetID="1" presetClass="entr" presetSubtype="0" fill="hold" grpId="0" nodeType="withEffect">
-                                  <p:stCondLst>
-                                    <p:cond delay="0"/>
-                                  </p:stCondLst>
-                                  <p:childTnLst>
-                                    <p:set>
-                                      <p:cBhvr>
-                                        <p:cTn id="8" dur="1" fill="hold">
-                                          <p:stCondLst>
-                                            <p:cond delay="0"/>
-                                          </p:stCondLst>
-                                        </p:cTn>
-                                        <p:tgtEl>
-                                          <p:spTgt spid="3">
-                                            <p:txEl>
-                                              <p:pRg st="1" end="1"/>
-                                            </p:txEl>
-                                          </p:spTgt>
-                                        </p:tgtEl>
-                                        <p:attrNameLst>
-                                          <p:attrName>style.visibility</p:attrName>
-                                        </p:attrNameLst>
-                                      </p:cBhvr>
-                                      <p:to>
-                                        <p:strVal val="visible"/>
-                                      </p:to>
-                                    </p:set>
-                                  </p:childTnLst>
-                                </p:cTn>
-                              </p:par>
-                            </p:childTnLst>
-                          </p:cTn>
-                        </p:par>
-                      </p:childTnLst>
-                    </p:cTn>
-                  </p:par>
-                  <p:par>
-                    <p:cTn id="9" fill="hold">
-                      <p:stCondLst>
-                        <p:cond delay="indefinite"/>
-                      </p:stCondLst>
-                      <p:childTnLst>
-                        <p:par>
-                          <p:cTn id="10" fill="hold">
-                            <p:stCondLst>
-                              <p:cond delay="0"/>
-                            </p:stCondLst>
-                            <p:childTnLst>
-                              <p:par>
-                                <p:cTn id="11" presetID="1" presetClass="entr" presetSubtype="0" fill="hold" grpId="0" nodeType="clickEffect">
-                                  <p:stCondLst>
-                                    <p:cond delay="0"/>
-                                  </p:stCondLst>
-                                  <p:childTnLst>
-                                    <p:set>
-                                      <p:cBhvr>
-                                        <p:cTn id="12" dur="1" fill="hold">
-                                          <p:stCondLst>
-                                            <p:cond delay="0"/>
-                                          </p:stCondLst>
-                                        </p:cTn>
-                                        <p:tgtEl>
-                                          <p:spTgt spid="3">
-                                            <p:txEl>
-                                              <p:pRg st="2" end="2"/>
-                                            </p:txEl>
-                                          </p:spTgt>
-                                        </p:tgtEl>
-                                        <p:attrNameLst>
-                                          <p:attrName>style.visibility</p:attrName>
-                                        </p:attrNameLst>
-                                      </p:cBhvr>
-                                      <p:to>
-                                        <p:strVal val="visible"/>
-                                      </p:to>
-                                    </p:set>
-                                  </p:childTnLst>
-                                </p:cTn>
-                              </p:par>
-                              <p:par>
-                                <p:cTn id="13" presetID="1" presetClass="entr" presetSubtype="0" fill="hold" grpId="0" nodeType="withEffect">
-                                  <p:stCondLst>
-                                    <p:cond delay="0"/>
-                                  </p:stCondLst>
-                                  <p:childTnLst>
-                                    <p:set>
-                                      <p:cBhvr>
-                                        <p:cTn id="14" dur="1" fill="hold">
-                                          <p:stCondLst>
-                                            <p:cond delay="0"/>
-                                          </p:stCondLst>
-                                        </p:cTn>
-                                        <p:tgtEl>
-                                          <p:spTgt spid="3">
-                                            <p:txEl>
-                                              <p:pRg st="3" end="3"/>
-                                            </p:txEl>
-                                          </p:spTgt>
-                                        </p:tgtEl>
-                                        <p:attrNameLst>
-                                          <p:attrName>style.visibility</p:attrName>
-                                        </p:attrNameLst>
-                                      </p:cBhvr>
-                                      <p:to>
-                                        <p:strVal val="visible"/>
-                                      </p:to>
-                                    </p:set>
-                                  </p:childTnLst>
-                                </p:cTn>
-                              </p:par>
-                            </p:childTnLst>
-                          </p:cTn>
-                        </p:par>
-                      </p:childTnLst>
-                    </p:cTn>
-                  </p:par>
-                  <p:par>
-                    <p:cTn id="15" fill="hold">
-                      <p:stCondLst>
-                        <p:cond delay="indefinite"/>
-                      </p:stCondLst>
-                      <p:childTnLst>
-                        <p:par>
-                          <p:cTn id="16" fill="hold">
-                            <p:stCondLst>
-                              <p:cond delay="0"/>
-                            </p:stCondLst>
-                            <p:childTnLst>
-                              <p:par>
-                                <p:cTn id="17" presetID="1" presetClass="entr" presetSubtype="0" fill="hold" grpId="0" nodeType="clickEffect">
-                                  <p:stCondLst>
-                                    <p:cond delay="0"/>
-                                  </p:stCondLst>
-                                  <p:childTnLst>
-                                    <p:set>
-                                      <p:cBhvr>
-                                        <p:cTn id="18" dur="1" fill="hold">
-                                          <p:stCondLst>
-                                            <p:cond delay="0"/>
-                                          </p:stCondLst>
-                                        </p:cTn>
-                                        <p:tgtEl>
-                                          <p:spTgt spid="3">
-                                            <p:txEl>
-                                              <p:pRg st="4" end="4"/>
-                                            </p:txEl>
-                                          </p:spTgt>
-                                        </p:tgtEl>
-                                        <p:attrNameLst>
-                                          <p:attrName>style.visibility</p:attrName>
-                                        </p:attrNameLst>
-                                      </p:cBhvr>
-                                      <p:to>
-                                        <p:strVal val="visible"/>
-                                      </p:to>
-                                    </p:set>
-                                  </p:childTnLst>
-                                </p:cTn>
-                              </p:par>
-                              <p:par>
-                                <p:cTn id="19" presetID="1" presetClass="entr" presetSubtype="0" fill="hold" grpId="0" nodeType="withEffect">
-                                  <p:stCondLst>
-                                    <p:cond delay="0"/>
-                                  </p:stCondLst>
-                                  <p:childTnLst>
-                                    <p:set>
-                                      <p:cBhvr>
-                                        <p:cTn id="20" dur="1" fill="hold">
-                                          <p:stCondLst>
-                                            <p:cond delay="0"/>
-                                          </p:stCondLst>
-                                        </p:cTn>
-                                        <p:tgtEl>
-                                          <p:spTgt spid="3">
-                                            <p:txEl>
-                                              <p:pRg st="5" end="5"/>
-                                            </p:txEl>
-                                          </p:spTgt>
-                                        </p:tgtEl>
-                                        <p:attrNameLst>
-                                          <p:attrName>style.visibility</p:attrName>
-                                        </p:attrNameLst>
-                                      </p:cBhvr>
-                                      <p:to>
-                                        <p:strVal val="visible"/>
-                                      </p:to>
-                                    </p:set>
-                                  </p:childTnLst>
-                                </p:cTn>
-                              </p:par>
-                            </p:childTnLst>
-                          </p:cTn>
-                        </p:par>
-                      </p:childTnLst>
-                    </p:cTn>
-                  </p:par>
-                  <p:par>
-                    <p:cTn id="21" fill="hold">
-                      <p:stCondLst>
-                        <p:cond delay="indefinite"/>
-                      </p:stCondLst>
-                      <p:childTnLst>
-                        <p:par>
-                          <p:cTn id="22" fill="hold">
-                            <p:stCondLst>
-                              <p:cond delay="0"/>
-                            </p:stCondLst>
-                            <p:childTnLst>
-                              <p:par>
-                                <p:cTn id="23" presetID="1" presetClass="entr" presetSubtype="0" fill="hold" grpId="0" nodeType="clickEffect">
-                                  <p:stCondLst>
-                                    <p:cond delay="0"/>
-                                  </p:stCondLst>
-                                  <p:childTnLst>
-                                    <p:set>
-                                      <p:cBhvr>
-                                        <p:cTn id="24" dur="1" fill="hold">
-                                          <p:stCondLst>
-                                            <p:cond delay="0"/>
-                                          </p:stCondLst>
-                                        </p:cTn>
-                                        <p:tgtEl>
-                                          <p:spTgt spid="3">
-                                            <p:txEl>
-                                              <p:pRg st="6" end="6"/>
-                                            </p:txEl>
-                                          </p:spTgt>
-                                        </p:tgtEl>
-                                        <p:attrNameLst>
-                                          <p:attrName>style.visibility</p:attrName>
-                                        </p:attrNameLst>
-                                      </p:cBhvr>
-                                      <p:to>
-                                        <p:strVal val="visible"/>
-                                      </p:to>
-                                    </p:set>
-                                  </p:childTnLst>
-                                </p:cTn>
-                              </p:par>
-                              <p:par>
-                                <p:cTn id="25" presetID="1" presetClass="entr" presetSubtype="0" fill="hold" grpId="0" nodeType="withEffect">
-                                  <p:stCondLst>
-                                    <p:cond delay="0"/>
-                                  </p:stCondLst>
-                                  <p:childTnLst>
-                                    <p:set>
-                                      <p:cBhvr>
-                                        <p:cTn id="26" dur="1" fill="hold">
-                                          <p:stCondLst>
-                                            <p:cond delay="0"/>
-                                          </p:stCondLst>
-                                        </p:cTn>
-                                        <p:tgtEl>
-                                          <p:spTgt spid="3">
-                                            <p:txEl>
-                                              <p:pRg st="7" end="7"/>
-                                            </p:txEl>
-                                          </p:spTgt>
-                                        </p:tgtEl>
-                                        <p:attrNameLst>
-                                          <p:attrName>style.visibility</p:attrName>
-                                        </p:attrNameLst>
-                                      </p:cBhvr>
-                                      <p:to>
-                                        <p:strVal val="visible"/>
-                                      </p:to>
-                                    </p:set>
-                                  </p:childTnLst>
-                                </p:cTn>
-                              </p:par>
-                            </p:childTnLst>
-                          </p:cTn>
-                        </p:par>
-                      </p:childTnLst>
-                    </p:cTn>
-                  </p:par>
-                  <p:par>
-                    <p:cTn id="27" fill="hold">
-                      <p:stCondLst>
-                        <p:cond delay="indefinite"/>
-                      </p:stCondLst>
-                      <p:childTnLst>
-                        <p:par>
-                          <p:cTn id="28" fill="hold">
-                            <p:stCondLst>
-                              <p:cond delay="0"/>
-                            </p:stCondLst>
-                            <p:childTnLst>
-                              <p:par>
-                                <p:cTn id="29" presetID="1" presetClass="entr" presetSubtype="0" fill="hold" grpId="0" nodeType="clickEffect">
-                                  <p:stCondLst>
-                                    <p:cond delay="0"/>
-                                  </p:stCondLst>
-                                  <p:childTnLst>
-                                    <p:set>
-                                      <p:cBhvr>
-                                        <p:cTn id="30" dur="1" fill="hold">
-                                          <p:stCondLst>
-                                            <p:cond delay="0"/>
-                                          </p:stCondLst>
-                                        </p:cTn>
-                                        <p:tgtEl>
-                                          <p:spTgt spid="3">
-                                            <p:txEl>
-                                              <p:pRg st="8" end="8"/>
-                                            </p:txEl>
-                                          </p:spTgt>
-                                        </p:tgtEl>
-                                        <p:attrNameLst>
-                                          <p:attrName>style.visibility</p:attrName>
-                                        </p:attrNameLst>
-                                      </p:cBhvr>
-                                      <p:to>
-                                        <p:strVal val="visible"/>
-                                      </p:to>
-                                    </p:set>
-                                  </p:childTnLst>
-                                </p:cTn>
-                              </p:par>
-                              <p:par>
-                                <p:cTn id="31" presetID="1" presetClass="entr" presetSubtype="0" fill="hold" grpId="0" nodeType="withEffect">
-                                  <p:stCondLst>
-                                    <p:cond delay="0"/>
-                                  </p:stCondLst>
-                                  <p:childTnLst>
-                                    <p:set>
-                                      <p:cBhvr>
-                                        <p:cTn id="32" dur="1" fill="hold">
-                                          <p:stCondLst>
-                                            <p:cond delay="0"/>
-                                          </p:stCondLst>
-                                        </p:cTn>
-                                        <p:tgtEl>
-                                          <p:spTgt spid="3">
-                                            <p:txEl>
-                                              <p:pRg st="9" end="9"/>
-                                            </p:txEl>
-                                          </p:spTgt>
-                                        </p:tgtEl>
-                                        <p:attrNameLst>
-                                          <p:attrName>style.visibility</p:attrName>
-                                        </p:attrNameLst>
-                                      </p:cBhvr>
-                                      <p:to>
-                                        <p:strVal val="visible"/>
-                                      </p:to>
-                                    </p:set>
-                                  </p:childTnLst>
-                                </p:cTn>
-                              </p:par>
-                            </p:childTnLst>
-                          </p:cTn>
-                        </p:par>
-                      </p:childTnLst>
-                    </p:cTn>
-                  </p:par>
-                  <p:par>
-                    <p:cTn id="33" fill="hold">
-                      <p:stCondLst>
-                        <p:cond delay="indefinite"/>
-                      </p:stCondLst>
-                      <p:childTnLst>
-                        <p:par>
-                          <p:cTn id="34" fill="hold">
-                            <p:stCondLst>
-                              <p:cond delay="0"/>
-                            </p:stCondLst>
-                            <p:childTnLst>
-                              <p:par>
-                                <p:cTn id="35" presetID="1" presetClass="entr" presetSubtype="0" fill="hold" grpId="0" nodeType="clickEffect">
-                                  <p:stCondLst>
-                                    <p:cond delay="0"/>
-                                  </p:stCondLst>
-                                  <p:childTnLst>
-                                    <p:set>
-                                      <p:cBhvr>
-                                        <p:cTn id="36" dur="1" fill="hold">
-                                          <p:stCondLst>
-                                            <p:cond delay="0"/>
-                                          </p:stCondLst>
-                                        </p:cTn>
-                                        <p:tgtEl>
-                                          <p:spTgt spid="3">
-                                            <p:txEl>
-                                              <p:pRg st="10" end="10"/>
-                                            </p:txEl>
-                                          </p:spTgt>
-                                        </p:tgtEl>
-                                        <p:attrNameLst>
-                                          <p:attrName>style.visibility</p:attrName>
-                                        </p:attrNameLst>
-                                      </p:cBhvr>
-                                      <p:to>
-                                        <p:strVal val="visible"/>
-                                      </p:to>
-                                    </p:set>
-                                  </p:childTnLst>
-                                </p:cTn>
-                              </p:par>
-                              <p:par>
-                                <p:cTn id="37" presetID="1" presetClass="entr" presetSubtype="0" fill="hold" grpId="0" nodeType="withEffect">
-                                  <p:stCondLst>
-                                    <p:cond delay="0"/>
-                                  </p:stCondLst>
-                                  <p:childTnLst>
-                                    <p:set>
-                                      <p:cBhvr>
-                                        <p:cTn id="38" dur="1" fill="hold">
-                                          <p:stCondLst>
-                                            <p:cond delay="0"/>
-                                          </p:stCondLst>
-                                        </p:cTn>
-                                        <p:tgtEl>
-                                          <p:spTgt spid="3">
-                                            <p:txEl>
-                                              <p:pRg st="11" end="11"/>
-                                            </p:txEl>
-                                          </p:spTgt>
-                                        </p:tgtEl>
-                                        <p:attrNameLst>
-                                          <p:attrName>style.visibility</p:attrName>
-                                        </p:attrNameLst>
-                                      </p:cBhvr>
-                                      <p:to>
-                                        <p:strVal val="visible"/>
-                                      </p:to>
-                                    </p:set>
-                                  </p:childTnLst>
-                                </p:cTn>
-                              </p:par>
-                            </p:childTnLst>
-                          </p:cTn>
-                        </p:par>
-                      </p:childTnLst>
-                    </p:cTn>
-                  </p:par>
-                  <p:par>
-                    <p:cTn id="39" fill="hold">
-                      <p:stCondLst>
-                        <p:cond delay="indefinite"/>
-                      </p:stCondLst>
-                      <p:childTnLst>
-                        <p:par>
-                          <p:cTn id="40" fill="hold">
-                            <p:stCondLst>
-                              <p:cond delay="0"/>
-                            </p:stCondLst>
-                            <p:childTnLst>
-                              <p:par>
-                                <p:cTn id="41" presetID="1" presetClass="entr" presetSubtype="0" fill="hold" grpId="0" nodeType="clickEffect">
-                                  <p:stCondLst>
-                                    <p:cond delay="0"/>
-                                  </p:stCondLst>
-                                  <p:childTnLst>
-                                    <p:set>
-                                      <p:cBhvr>
-                                        <p:cTn id="42" dur="1" fill="hold">
-                                          <p:stCondLst>
-                                            <p:cond delay="0"/>
-                                          </p:stCondLst>
-                                        </p:cTn>
-                                        <p:tgtEl>
-                                          <p:spTgt spid="3">
-                                            <p:txEl>
-                                              <p:pRg st="12" end="12"/>
-                                            </p:txEl>
-                                          </p:spTgt>
-                                        </p:tgtEl>
-                                        <p:attrNameLst>
-                                          <p:attrName>style.visibility</p:attrName>
-                                        </p:attrNameLst>
-                                      </p:cBhvr>
-                                      <p:to>
-                                        <p:strVal val="visible"/>
-                                      </p:to>
-                                    </p:set>
-                                  </p:childTnLst>
-                                </p:cTn>
-                              </p:par>
-                              <p:par>
-                                <p:cTn id="43" presetID="1" presetClass="entr" presetSubtype="0" fill="hold" grpId="0" nodeType="withEffect">
-                                  <p:stCondLst>
-                                    <p:cond delay="0"/>
-                                  </p:stCondLst>
-                                  <p:childTnLst>
-                                    <p:set>
-                                      <p:cBhvr>
-                                        <p:cTn id="44" dur="1" fill="hold">
-                                          <p:stCondLst>
-                                            <p:cond delay="0"/>
-                                          </p:stCondLst>
-                                        </p:cTn>
-                                        <p:tgtEl>
-                                          <p:spTgt spid="3">
-                                            <p:txEl>
-                                              <p:pRg st="13" end="13"/>
-                                            </p:txEl>
-                                          </p:spTgt>
-                                        </p:tgtEl>
-                                        <p:attrNameLst>
-                                          <p:attrName>style.visibility</p:attrName>
-                                        </p:attrNameLst>
-                                      </p:cBhvr>
-                                      <p:to>
-                                        <p:strVal val="visible"/>
-                                      </p:to>
-                                    </p:set>
-                                  </p:childTnLst>
-                                </p:cTn>
-                              </p:par>
-                            </p:childTnLst>
-                          </p:cTn>
-                        </p:par>
-                      </p:childTnLst>
-                    </p:cTn>
-                  </p:par>
-                </p:childTnLst>
-              </p:cTn>
-              <p:prevCondLst>
-                <p:cond evt="onPrev" delay="0">
-                  <p:tgtEl>
-                    <p:sldTgt/>
-                  </p:tgtEl>
-                </p:cond>
-              </p:prevCondLst>
-              <p:nextCondLst>
-                <p:cond evt="onNext" delay="0">
-                  <p:tgtEl>
-                    <p:sldTgt/>
-                  </p:tgtEl>
-                </p:cond>
-              </p:nextCondLst>
-            </p:seq>
-          </p:childTnLst>
-        </p:cTn>
-      </p:par>
-    </p:tnLst>
-    <p:bldLst>
-      <p:bldP spid="3" grpId="0" build="p"/>
-    </p:bldLst>
-  </p:timing>
 </p:sld>
 </file>
 
-<file path=ppt/slides/slide13.xml><?xml version="1.0" encoding="utf-8"?>
+<file path=ppt/slides/slide12.xml><?xml version="1.0" encoding="utf-8"?>
 <p:sld xmlns:a="http://schemas.openxmlformats.org/drawingml/2006/main" xmlns:r="http://schemas.openxmlformats.org/officeDocument/2006/relationships" xmlns:p="http://schemas.openxmlformats.org/presentationml/2006/main">
   <p:cSld>
     <p:spTree>
@@ -6183,7 +5834,7 @@
             <a:fld id="{45C00377-489B-40EC-B059-26BDDD2E89B9}" type="slidenum">
               <a:rPr lang="en-US" smtClean="0"/>
               <a:pPr/>
-              <a:t>13</a:t>
+              <a:t>12</a:t>
             </a:fld>
             <a:endParaRPr lang="en-US" dirty="0"/>
           </a:p>
@@ -6666,7 +6317,7 @@
 </p:sld>
 </file>
 
-<file path=ppt/slides/slide14.xml><?xml version="1.0" encoding="utf-8"?>
+<file path=ppt/slides/slide13.xml><?xml version="1.0" encoding="utf-8"?>
 <p:sld xmlns:a="http://schemas.openxmlformats.org/drawingml/2006/main" xmlns:r="http://schemas.openxmlformats.org/officeDocument/2006/relationships" xmlns:p="http://schemas.openxmlformats.org/presentationml/2006/main">
   <p:cSld>
     <p:spTree>
@@ -6735,7 +6386,7 @@
             <a:fld id="{45C00377-489B-40EC-B059-26BDDD2E89B9}" type="slidenum">
               <a:rPr lang="en-US" smtClean="0"/>
               <a:pPr/>
-              <a:t>14</a:t>
+              <a:t>13</a:t>
             </a:fld>
             <a:endParaRPr lang="en-US" dirty="0"/>
           </a:p>
@@ -7492,7 +7143,7 @@
 </p:sld>
 </file>
 
-<file path=ppt/slides/slide15.xml><?xml version="1.0" encoding="utf-8"?>
+<file path=ppt/slides/slide14.xml><?xml version="1.0" encoding="utf-8"?>
 <p:sld xmlns:a="http://schemas.openxmlformats.org/drawingml/2006/main" xmlns:r="http://schemas.openxmlformats.org/officeDocument/2006/relationships" xmlns:p="http://schemas.openxmlformats.org/presentationml/2006/main">
   <p:cSld>
     <p:spTree>
@@ -7582,7 +7233,7 @@
             <a:pPr lvl="1"/>
             <a:r>
               <a:rPr lang="en-US" dirty="0"/>
-              <a:t>Grade rounding at the end of the semester is only applied if full attendance points is earned.</a:t>
+              <a:t>Grade rounding at the end of the semester is only applied if full attendance points is earned.*</a:t>
             </a:r>
           </a:p>
           <a:p>
@@ -7632,7 +7283,7 @@
             <a:fld id="{45C00377-489B-40EC-B059-26BDDD2E89B9}" type="slidenum">
               <a:rPr lang="en-US" smtClean="0"/>
               <a:pPr/>
-              <a:t>15</a:t>
+              <a:t>14</a:t>
             </a:fld>
             <a:endParaRPr lang="en-US" dirty="0"/>
           </a:p>
@@ -7944,7 +7595,7 @@
 </p:sld>
 </file>
 
-<file path=ppt/slides/slide16.xml><?xml version="1.0" encoding="utf-8"?>
+<file path=ppt/slides/slide15.xml><?xml version="1.0" encoding="utf-8"?>
 <p:sld xmlns:a="http://schemas.openxmlformats.org/drawingml/2006/main" xmlns:r="http://schemas.openxmlformats.org/officeDocument/2006/relationships" xmlns:p="http://schemas.openxmlformats.org/presentationml/2006/main">
   <p:cSld>
     <p:spTree>
@@ -8155,7 +7806,7 @@
             <a:fld id="{45C00377-489B-40EC-B059-26BDDD2E89B9}" type="slidenum">
               <a:rPr lang="en-US" smtClean="0"/>
               <a:pPr/>
-              <a:t>16</a:t>
+              <a:t>15</a:t>
             </a:fld>
             <a:endParaRPr lang="en-US" dirty="0"/>
           </a:p>
@@ -8571,7 +8222,7 @@
 </p:sld>
 </file>
 
-<file path=ppt/slides/slide17.xml><?xml version="1.0" encoding="utf-8"?>
+<file path=ppt/slides/slide16.xml><?xml version="1.0" encoding="utf-8"?>
 <p:sld xmlns:a="http://schemas.openxmlformats.org/drawingml/2006/main" xmlns:r="http://schemas.openxmlformats.org/officeDocument/2006/relationships" xmlns:p="http://schemas.openxmlformats.org/presentationml/2006/main">
   <p:cSld>
     <p:spTree>
@@ -8690,8 +8341,8 @@
 </p:sld>
 </file>
 
-<file path=ppt/slides/slide2.xml><?xml version="1.0" encoding="utf-8"?>
-<p:sld xmlns:a="http://schemas.openxmlformats.org/drawingml/2006/main" xmlns:r="http://schemas.openxmlformats.org/officeDocument/2006/relationships" xmlns:p="http://schemas.openxmlformats.org/presentationml/2006/main">
+<file path=ppt/slides/slide17.xml><?xml version="1.0" encoding="utf-8"?>
+<p:sld xmlns:a="http://schemas.openxmlformats.org/drawingml/2006/main" xmlns:r="http://schemas.openxmlformats.org/officeDocument/2006/relationships" xmlns:p="http://schemas.openxmlformats.org/presentationml/2006/main" show="0">
   <p:cSld>
     <p:spTree>
       <p:nvGrpSpPr>
@@ -8712,97 +8363,6 @@
           <p:cNvPr id="2" name="Title 1">
             <a:extLst>
               <a:ext uri="{FF2B5EF4-FFF2-40B4-BE49-F238E27FC236}">
-                <a16:creationId xmlns:a16="http://schemas.microsoft.com/office/drawing/2014/main" id="{9806E65A-FA49-3A96-CB61-659E2BF7CFEB}"/>
-              </a:ext>
-            </a:extLst>
-          </p:cNvPr>
-          <p:cNvSpPr>
-            <a:spLocks noGrp="1"/>
-          </p:cNvSpPr>
-          <p:nvPr>
-            <p:ph type="title"/>
-          </p:nvPr>
-        </p:nvSpPr>
-        <p:spPr/>
-        <p:txBody>
-          <a:bodyPr/>
-          <a:lstStyle/>
-          <a:p>
-            <a:endParaRPr lang="en-US"/>
-          </a:p>
-        </p:txBody>
-      </p:sp>
-      <p:sp>
-        <p:nvSpPr>
-          <p:cNvPr id="3" name="Content Placeholder 2">
-            <a:extLst>
-              <a:ext uri="{FF2B5EF4-FFF2-40B4-BE49-F238E27FC236}">
-                <a16:creationId xmlns:a16="http://schemas.microsoft.com/office/drawing/2014/main" id="{1E4CA25C-DE20-7E88-572F-F99D1139B41F}"/>
-              </a:ext>
-            </a:extLst>
-          </p:cNvPr>
-          <p:cNvSpPr>
-            <a:spLocks noGrp="1"/>
-          </p:cNvSpPr>
-          <p:nvPr>
-            <p:ph idx="1"/>
-          </p:nvPr>
-        </p:nvSpPr>
-        <p:spPr>
-          <a:xfrm>
-            <a:off x="838200" y="3002692"/>
-            <a:ext cx="10515600" cy="3174271"/>
-          </a:xfrm>
-        </p:spPr>
-        <p:txBody>
-          <a:bodyPr/>
-          <a:lstStyle/>
-          <a:p>
-            <a:pPr marL="0" indent="0">
-              <a:buNone/>
-            </a:pPr>
-            <a:r>
-              <a:rPr lang="en-US" dirty="0"/>
-              <a:t>Close all computers and pull out a pen and paper</a:t>
-            </a:r>
-          </a:p>
-        </p:txBody>
-      </p:sp>
-    </p:spTree>
-    <p:extLst>
-      <p:ext uri="{BB962C8B-B14F-4D97-AF65-F5344CB8AC3E}">
-        <p14:creationId xmlns:p14="http://schemas.microsoft.com/office/powerpoint/2010/main" val="1851096584"/>
-      </p:ext>
-    </p:extLst>
-  </p:cSld>
-  <p:clrMapOvr>
-    <a:masterClrMapping/>
-  </p:clrMapOvr>
-</p:sld>
-</file>
-
-<file path=ppt/slides/slide3.xml><?xml version="1.0" encoding="utf-8"?>
-<p:sld xmlns:a="http://schemas.openxmlformats.org/drawingml/2006/main" xmlns:r="http://schemas.openxmlformats.org/officeDocument/2006/relationships" xmlns:p="http://schemas.openxmlformats.org/presentationml/2006/main">
-  <p:cSld>
-    <p:spTree>
-      <p:nvGrpSpPr>
-        <p:cNvPr id="1" name=""/>
-        <p:cNvGrpSpPr/>
-        <p:nvPr/>
-      </p:nvGrpSpPr>
-      <p:grpSpPr>
-        <a:xfrm>
-          <a:off x="0" y="0"/>
-          <a:ext cx="0" cy="0"/>
-          <a:chOff x="0" y="0"/>
-          <a:chExt cx="0" cy="0"/>
-        </a:xfrm>
-      </p:grpSpPr>
-      <p:sp>
-        <p:nvSpPr>
-          <p:cNvPr id="2" name="Title 1">
-            <a:extLst>
-              <a:ext uri="{FF2B5EF4-FFF2-40B4-BE49-F238E27FC236}">
                 <a16:creationId xmlns:a16="http://schemas.microsoft.com/office/drawing/2014/main" id="{D9BE2FAA-0AEB-A3B4-8F23-4370C2717662}"/>
               </a:ext>
             </a:extLst>
@@ -8941,8 +8501,8 @@
 </p:sld>
 </file>
 
-<file path=ppt/slides/slide4.xml><?xml version="1.0" encoding="utf-8"?>
-<p:sld xmlns:a="http://schemas.openxmlformats.org/drawingml/2006/main" xmlns:r="http://schemas.openxmlformats.org/officeDocument/2006/relationships" xmlns:p="http://schemas.openxmlformats.org/presentationml/2006/main">
+<file path=ppt/slides/slide18.xml><?xml version="1.0" encoding="utf-8"?>
+<p:sld xmlns:a="http://schemas.openxmlformats.org/drawingml/2006/main" xmlns:r="http://schemas.openxmlformats.org/officeDocument/2006/relationships" xmlns:p="http://schemas.openxmlformats.org/presentationml/2006/main" show="0">
   <p:cSld>
     <p:spTree>
       <p:nvGrpSpPr>
@@ -9344,7 +8904,7 @@
 </p:sld>
 </file>
 
-<file path=ppt/slides/slide5.xml><?xml version="1.0" encoding="utf-8"?>
+<file path=ppt/slides/slide2.xml><?xml version="1.0" encoding="utf-8"?>
 <p:sld xmlns:a="http://schemas.openxmlformats.org/drawingml/2006/main" xmlns:r="http://schemas.openxmlformats.org/officeDocument/2006/relationships" xmlns:p="http://schemas.openxmlformats.org/presentationml/2006/main">
   <p:cSld>
     <p:spTree>
@@ -9366,7 +8926,7 @@
           <p:cNvPr id="2" name="Title 1">
             <a:extLst>
               <a:ext uri="{FF2B5EF4-FFF2-40B4-BE49-F238E27FC236}">
-                <a16:creationId xmlns:a16="http://schemas.microsoft.com/office/drawing/2014/main" id="{02A06033-5535-BCB7-6889-68AB47D34138}"/>
+                <a16:creationId xmlns:a16="http://schemas.microsoft.com/office/drawing/2014/main" id="{9EED8245-CA1F-C927-B33D-5C3CD3E521B9}"/>
               </a:ext>
             </a:extLst>
           </p:cNvPr>
@@ -9384,7 +8944,2767 @@
           <a:p>
             <a:r>
               <a:rPr lang="en-US" dirty="0"/>
-              <a:t>The Scope of HES 3000</a:t>
+              <a:t>About me</a:t>
+            </a:r>
+          </a:p>
+        </p:txBody>
+      </p:sp>
+      <p:sp>
+        <p:nvSpPr>
+          <p:cNvPr id="3" name="Content Placeholder 2">
+            <a:extLst>
+              <a:ext uri="{FF2B5EF4-FFF2-40B4-BE49-F238E27FC236}">
+                <a16:creationId xmlns:a16="http://schemas.microsoft.com/office/drawing/2014/main" id="{2ACEF787-4746-2764-9D5B-D88B3D24D11F}"/>
+              </a:ext>
+            </a:extLst>
+          </p:cNvPr>
+          <p:cNvSpPr>
+            <a:spLocks noGrp="1"/>
+          </p:cNvSpPr>
+          <p:nvPr>
+            <p:ph idx="1"/>
+          </p:nvPr>
+        </p:nvSpPr>
+        <p:spPr/>
+        <p:txBody>
+          <a:bodyPr>
+            <a:normAutofit/>
+          </a:bodyPr>
+          <a:lstStyle/>
+          <a:p>
+            <a:r>
+              <a:rPr lang="en-US" sz="2400" dirty="0"/>
+              <a:t>Graduate Instructor</a:t>
+            </a:r>
+          </a:p>
+          <a:p>
+            <a:pPr lvl="1"/>
+            <a:r>
+              <a:rPr lang="en-US" sz="2000" dirty="0"/>
+              <a:t>HES 3000-002: Sports Performance Analytics</a:t>
+            </a:r>
+          </a:p>
+          <a:p>
+            <a:pPr lvl="1"/>
+            <a:r>
+              <a:rPr lang="en-US" sz="2000" dirty="0"/>
+              <a:t>HES 3883: Principals of Endurance Training</a:t>
+            </a:r>
+          </a:p>
+          <a:p>
+            <a:pPr lvl="1"/>
+            <a:r>
+              <a:rPr lang="en-US" sz="2000" dirty="0"/>
+              <a:t>HES </a:t>
+            </a:r>
+            <a:r>
+              <a:rPr lang="en-GB" sz="2000" dirty="0"/>
+              <a:t>2131, </a:t>
+            </a:r>
+            <a:r>
+              <a:rPr lang="en-US" sz="2000" dirty="0"/>
+              <a:t>2913, </a:t>
+            </a:r>
+            <a:r>
+              <a:rPr lang="en-GB" sz="2000" dirty="0"/>
+              <a:t>2823</a:t>
+            </a:r>
+            <a:endParaRPr lang="en-US" sz="2000" dirty="0"/>
+          </a:p>
+          <a:p>
+            <a:r>
+              <a:rPr lang="en-US" sz="2400" dirty="0"/>
+              <a:t>Background &amp; Research</a:t>
+            </a:r>
+          </a:p>
+          <a:p>
+            <a:pPr lvl="1"/>
+            <a:r>
+              <a:rPr lang="en-US" sz="2000" dirty="0"/>
+              <a:t>Endurance sports and physiology</a:t>
+            </a:r>
+          </a:p>
+          <a:p>
+            <a:pPr lvl="1"/>
+            <a:r>
+              <a:rPr lang="en-US" sz="2000" dirty="0"/>
+              <a:t>Performance Analytics</a:t>
+            </a:r>
+          </a:p>
+          <a:p>
+            <a:pPr lvl="1"/>
+            <a:r>
+              <a:rPr lang="en-US" sz="2000" dirty="0"/>
+              <a:t>Athlete monitoring and training load management</a:t>
+            </a:r>
+          </a:p>
+          <a:p>
+            <a:endParaRPr lang="en-US" sz="2400" dirty="0"/>
+          </a:p>
+        </p:txBody>
+      </p:sp>
+      <p:sp>
+        <p:nvSpPr>
+          <p:cNvPr id="4" name="Slide Number Placeholder 3">
+            <a:extLst>
+              <a:ext uri="{FF2B5EF4-FFF2-40B4-BE49-F238E27FC236}">
+                <a16:creationId xmlns:a16="http://schemas.microsoft.com/office/drawing/2014/main" id="{94F605A1-2F80-DE56-3042-69F40CFBA8F3}"/>
+              </a:ext>
+            </a:extLst>
+          </p:cNvPr>
+          <p:cNvSpPr>
+            <a:spLocks noGrp="1"/>
+          </p:cNvSpPr>
+          <p:nvPr>
+            <p:ph type="sldNum" sz="quarter" idx="12"/>
+          </p:nvPr>
+        </p:nvSpPr>
+        <p:spPr/>
+        <p:txBody>
+          <a:bodyPr/>
+          <a:lstStyle/>
+          <a:p>
+            <a:fld id="{45C00377-489B-40EC-B059-26BDDD2E89B9}" type="slidenum">
+              <a:rPr lang="en-US" smtClean="0"/>
+              <a:pPr/>
+              <a:t>2</a:t>
+            </a:fld>
+            <a:endParaRPr lang="en-US" dirty="0"/>
+          </a:p>
+        </p:txBody>
+      </p:sp>
+      <p:pic>
+        <p:nvPicPr>
+          <p:cNvPr id="4101" name="Picture 5" descr="Tokyo 2020, Catapult festeggia 24 medaglie e l'11° posto nel medagliere ...">
+            <a:extLst>
+              <a:ext uri="{FF2B5EF4-FFF2-40B4-BE49-F238E27FC236}">
+                <a16:creationId xmlns:a16="http://schemas.microsoft.com/office/drawing/2014/main" id="{5C309B9E-A3B9-44C0-FF55-89CE6B733CFF}"/>
+              </a:ext>
+            </a:extLst>
+          </p:cNvPr>
+          <p:cNvPicPr>
+            <a:picLocks noChangeAspect="1" noChangeArrowheads="1"/>
+          </p:cNvPicPr>
+          <p:nvPr/>
+        </p:nvPicPr>
+        <p:blipFill>
+          <a:blip r:embed="rId3">
+            <a:extLst>
+              <a:ext uri="{28A0092B-C50C-407E-A947-70E740481C1C}">
+                <a14:useLocalDpi xmlns:a14="http://schemas.microsoft.com/office/drawing/2010/main" val="0"/>
+              </a:ext>
+            </a:extLst>
+          </a:blip>
+          <a:srcRect/>
+          <a:stretch>
+            <a:fillRect/>
+          </a:stretch>
+        </p:blipFill>
+        <p:spPr bwMode="auto">
+          <a:xfrm>
+            <a:off x="7455228" y="1067187"/>
+            <a:ext cx="3785476" cy="2522483"/>
+          </a:xfrm>
+          <a:prstGeom prst="rect">
+            <a:avLst/>
+          </a:prstGeom>
+          <a:noFill/>
+          <a:extLst>
+            <a:ext uri="{909E8E84-426E-40DD-AFC4-6F175D3DCCD1}">
+              <a14:hiddenFill xmlns:a14="http://schemas.microsoft.com/office/drawing/2010/main">
+                <a:solidFill>
+                  <a:srgbClr val="FFFFFF"/>
+                </a:solidFill>
+              </a14:hiddenFill>
+            </a:ext>
+          </a:extLst>
+        </p:spPr>
+      </p:pic>
+      <p:sp>
+        <p:nvSpPr>
+          <p:cNvPr id="5" name="Content Placeholder 2">
+            <a:extLst>
+              <a:ext uri="{FF2B5EF4-FFF2-40B4-BE49-F238E27FC236}">
+                <a16:creationId xmlns:a16="http://schemas.microsoft.com/office/drawing/2014/main" id="{84644E02-2380-22C4-E935-A4C600C622A9}"/>
+              </a:ext>
+            </a:extLst>
+          </p:cNvPr>
+          <p:cNvSpPr txBox="1">
+            <a:spLocks/>
+          </p:cNvSpPr>
+          <p:nvPr/>
+        </p:nvSpPr>
+        <p:spPr>
+          <a:xfrm>
+            <a:off x="838200" y="4331975"/>
+            <a:ext cx="6304005" cy="1539575"/>
+          </a:xfrm>
+          <a:prstGeom prst="rect">
+            <a:avLst/>
+          </a:prstGeom>
+        </p:spPr>
+        <p:txBody>
+          <a:bodyPr vert="horz" lIns="91440" tIns="45720" rIns="91440" bIns="45720" rtlCol="0">
+            <a:normAutofit/>
+          </a:bodyPr>
+          <a:lstStyle>
+            <a:lvl1pPr marL="228600" indent="-228600" algn="l" defTabSz="914400" rtl="0" eaLnBrk="1" latinLnBrk="0" hangingPunct="1">
+              <a:lnSpc>
+                <a:spcPct val="90000"/>
+              </a:lnSpc>
+              <a:spcBef>
+                <a:spcPts val="1000"/>
+              </a:spcBef>
+              <a:buFont typeface="Arial" panose="020B0604020202020204" pitchFamily="34" charset="0"/>
+              <a:buChar char="•"/>
+              <a:defRPr sz="2800" kern="1200">
+                <a:solidFill>
+                  <a:schemeClr val="tx1"/>
+                </a:solidFill>
+                <a:latin typeface="+mn-lt"/>
+                <a:ea typeface="+mn-ea"/>
+                <a:cs typeface="+mn-cs"/>
+              </a:defRPr>
+            </a:lvl1pPr>
+            <a:lvl2pPr marL="685800" indent="-228600" algn="l" defTabSz="914400" rtl="0" eaLnBrk="1" latinLnBrk="0" hangingPunct="1">
+              <a:lnSpc>
+                <a:spcPct val="90000"/>
+              </a:lnSpc>
+              <a:spcBef>
+                <a:spcPts val="500"/>
+              </a:spcBef>
+              <a:buFont typeface="Arial" panose="020B0604020202020204" pitchFamily="34" charset="0"/>
+              <a:buChar char="•"/>
+              <a:defRPr sz="2400" kern="1200">
+                <a:solidFill>
+                  <a:schemeClr val="tx1"/>
+                </a:solidFill>
+                <a:latin typeface="+mn-lt"/>
+                <a:ea typeface="+mn-ea"/>
+                <a:cs typeface="+mn-cs"/>
+              </a:defRPr>
+            </a:lvl2pPr>
+            <a:lvl3pPr marL="1143000" indent="-228600" algn="l" defTabSz="914400" rtl="0" eaLnBrk="1" latinLnBrk="0" hangingPunct="1">
+              <a:lnSpc>
+                <a:spcPct val="90000"/>
+              </a:lnSpc>
+              <a:spcBef>
+                <a:spcPts val="500"/>
+              </a:spcBef>
+              <a:buFont typeface="Arial" panose="020B0604020202020204" pitchFamily="34" charset="0"/>
+              <a:buChar char="•"/>
+              <a:defRPr sz="2000" kern="1200">
+                <a:solidFill>
+                  <a:schemeClr val="tx1"/>
+                </a:solidFill>
+                <a:latin typeface="+mn-lt"/>
+                <a:ea typeface="+mn-ea"/>
+                <a:cs typeface="+mn-cs"/>
+              </a:defRPr>
+            </a:lvl3pPr>
+            <a:lvl4pPr marL="1600200" indent="-228600" algn="l" defTabSz="914400" rtl="0" eaLnBrk="1" latinLnBrk="0" hangingPunct="1">
+              <a:lnSpc>
+                <a:spcPct val="90000"/>
+              </a:lnSpc>
+              <a:spcBef>
+                <a:spcPts val="500"/>
+              </a:spcBef>
+              <a:buFont typeface="Arial" panose="020B0604020202020204" pitchFamily="34" charset="0"/>
+              <a:buChar char="•"/>
+              <a:defRPr sz="1800" kern="1200">
+                <a:solidFill>
+                  <a:schemeClr val="tx1"/>
+                </a:solidFill>
+                <a:latin typeface="+mn-lt"/>
+                <a:ea typeface="+mn-ea"/>
+                <a:cs typeface="+mn-cs"/>
+              </a:defRPr>
+            </a:lvl4pPr>
+            <a:lvl5pPr marL="2057400" indent="-228600" algn="l" defTabSz="914400" rtl="0" eaLnBrk="1" latinLnBrk="0" hangingPunct="1">
+              <a:lnSpc>
+                <a:spcPct val="90000"/>
+              </a:lnSpc>
+              <a:spcBef>
+                <a:spcPts val="500"/>
+              </a:spcBef>
+              <a:buFont typeface="Arial" panose="020B0604020202020204" pitchFamily="34" charset="0"/>
+              <a:buChar char="•"/>
+              <a:defRPr sz="1800" kern="1200">
+                <a:solidFill>
+                  <a:schemeClr val="tx1"/>
+                </a:solidFill>
+                <a:latin typeface="+mn-lt"/>
+                <a:ea typeface="+mn-ea"/>
+                <a:cs typeface="+mn-cs"/>
+              </a:defRPr>
+            </a:lvl5pPr>
+            <a:lvl6pPr marL="2514600" indent="-228600" algn="l" defTabSz="914400" rtl="0" eaLnBrk="1" latinLnBrk="0" hangingPunct="1">
+              <a:lnSpc>
+                <a:spcPct val="90000"/>
+              </a:lnSpc>
+              <a:spcBef>
+                <a:spcPts val="500"/>
+              </a:spcBef>
+              <a:buFont typeface="Arial" panose="020B0604020202020204" pitchFamily="34" charset="0"/>
+              <a:buChar char="•"/>
+              <a:defRPr sz="1800" kern="1200">
+                <a:solidFill>
+                  <a:schemeClr val="tx1"/>
+                </a:solidFill>
+                <a:latin typeface="+mn-lt"/>
+                <a:ea typeface="+mn-ea"/>
+                <a:cs typeface="+mn-cs"/>
+              </a:defRPr>
+            </a:lvl6pPr>
+            <a:lvl7pPr marL="2971800" indent="-228600" algn="l" defTabSz="914400" rtl="0" eaLnBrk="1" latinLnBrk="0" hangingPunct="1">
+              <a:lnSpc>
+                <a:spcPct val="90000"/>
+              </a:lnSpc>
+              <a:spcBef>
+                <a:spcPts val="500"/>
+              </a:spcBef>
+              <a:buFont typeface="Arial" panose="020B0604020202020204" pitchFamily="34" charset="0"/>
+              <a:buChar char="•"/>
+              <a:defRPr sz="1800" kern="1200">
+                <a:solidFill>
+                  <a:schemeClr val="tx1"/>
+                </a:solidFill>
+                <a:latin typeface="+mn-lt"/>
+                <a:ea typeface="+mn-ea"/>
+                <a:cs typeface="+mn-cs"/>
+              </a:defRPr>
+            </a:lvl7pPr>
+            <a:lvl8pPr marL="3429000" indent="-228600" algn="l" defTabSz="914400" rtl="0" eaLnBrk="1" latinLnBrk="0" hangingPunct="1">
+              <a:lnSpc>
+                <a:spcPct val="90000"/>
+              </a:lnSpc>
+              <a:spcBef>
+                <a:spcPts val="500"/>
+              </a:spcBef>
+              <a:buFont typeface="Arial" panose="020B0604020202020204" pitchFamily="34" charset="0"/>
+              <a:buChar char="•"/>
+              <a:defRPr sz="1800" kern="1200">
+                <a:solidFill>
+                  <a:schemeClr val="tx1"/>
+                </a:solidFill>
+                <a:latin typeface="+mn-lt"/>
+                <a:ea typeface="+mn-ea"/>
+                <a:cs typeface="+mn-cs"/>
+              </a:defRPr>
+            </a:lvl8pPr>
+            <a:lvl9pPr marL="3886200" indent="-228600" algn="l" defTabSz="914400" rtl="0" eaLnBrk="1" latinLnBrk="0" hangingPunct="1">
+              <a:lnSpc>
+                <a:spcPct val="90000"/>
+              </a:lnSpc>
+              <a:spcBef>
+                <a:spcPts val="500"/>
+              </a:spcBef>
+              <a:buFont typeface="Arial" panose="020B0604020202020204" pitchFamily="34" charset="0"/>
+              <a:buChar char="•"/>
+              <a:defRPr sz="1800" kern="1200">
+                <a:solidFill>
+                  <a:schemeClr val="tx1"/>
+                </a:solidFill>
+                <a:latin typeface="+mn-lt"/>
+                <a:ea typeface="+mn-ea"/>
+                <a:cs typeface="+mn-cs"/>
+              </a:defRPr>
+            </a:lvl9pPr>
+          </a:lstStyle>
+          <a:p>
+            <a:endParaRPr lang="en-US" sz="2000" dirty="0"/>
+          </a:p>
+        </p:txBody>
+      </p:sp>
+      <p:pic>
+        <p:nvPicPr>
+          <p:cNvPr id="6" name="Picture 5" descr="No photo description available.">
+            <a:extLst>
+              <a:ext uri="{FF2B5EF4-FFF2-40B4-BE49-F238E27FC236}">
+                <a16:creationId xmlns:a16="http://schemas.microsoft.com/office/drawing/2014/main" id="{EABC1EEA-7BAE-018F-6002-3E9647678D04}"/>
+              </a:ext>
+            </a:extLst>
+          </p:cNvPr>
+          <p:cNvPicPr>
+            <a:picLocks noChangeAspect="1"/>
+          </p:cNvPicPr>
+          <p:nvPr/>
+        </p:nvPicPr>
+        <p:blipFill>
+          <a:blip r:embed="rId4"/>
+          <a:srcRect t="26461" b="29447"/>
+          <a:stretch>
+            <a:fillRect/>
+          </a:stretch>
+        </p:blipFill>
+        <p:spPr>
+          <a:xfrm>
+            <a:off x="4033363" y="5169684"/>
+            <a:ext cx="4232190" cy="1049637"/>
+          </a:xfrm>
+          <a:prstGeom prst="rect">
+            <a:avLst/>
+          </a:prstGeom>
+        </p:spPr>
+      </p:pic>
+      <p:pic>
+        <p:nvPicPr>
+          <p:cNvPr id="7" name="Picture 6" descr="Oklahoma men's basketball gets biggest win of season at perfect time">
+            <a:extLst>
+              <a:ext uri="{FF2B5EF4-FFF2-40B4-BE49-F238E27FC236}">
+                <a16:creationId xmlns:a16="http://schemas.microsoft.com/office/drawing/2014/main" id="{E674796D-C9BF-A177-4523-6EFE20095B65}"/>
+              </a:ext>
+            </a:extLst>
+          </p:cNvPr>
+          <p:cNvPicPr>
+            <a:picLocks noChangeAspect="1"/>
+          </p:cNvPicPr>
+          <p:nvPr/>
+        </p:nvPicPr>
+        <p:blipFill>
+          <a:blip r:embed="rId5"/>
+          <a:stretch>
+            <a:fillRect/>
+          </a:stretch>
+        </p:blipFill>
+        <p:spPr>
+          <a:xfrm>
+            <a:off x="951296" y="4816776"/>
+            <a:ext cx="2737021" cy="1539574"/>
+          </a:xfrm>
+          <a:prstGeom prst="rect">
+            <a:avLst/>
+          </a:prstGeom>
+        </p:spPr>
+      </p:pic>
+      <p:pic>
+        <p:nvPicPr>
+          <p:cNvPr id="8" name="Picture 7" descr="The Vegas Golden Knights unveil their new centre ice logo for the teams  tenth season👀🎰">
+            <a:extLst>
+              <a:ext uri="{FF2B5EF4-FFF2-40B4-BE49-F238E27FC236}">
+                <a16:creationId xmlns:a16="http://schemas.microsoft.com/office/drawing/2014/main" id="{E13F793F-1275-E0D5-E891-7A17E4237B89}"/>
+              </a:ext>
+            </a:extLst>
+          </p:cNvPr>
+          <p:cNvPicPr>
+            <a:picLocks noChangeAspect="1"/>
+          </p:cNvPicPr>
+          <p:nvPr/>
+        </p:nvPicPr>
+        <p:blipFill>
+          <a:blip r:embed="rId6"/>
+          <a:stretch>
+            <a:fillRect/>
+          </a:stretch>
+        </p:blipFill>
+        <p:spPr>
+          <a:xfrm>
+            <a:off x="8551488" y="4835178"/>
+            <a:ext cx="2689216" cy="1521172"/>
+          </a:xfrm>
+          <a:prstGeom prst="rect">
+            <a:avLst/>
+          </a:prstGeom>
+        </p:spPr>
+      </p:pic>
+    </p:spTree>
+    <p:extLst>
+      <p:ext uri="{BB962C8B-B14F-4D97-AF65-F5344CB8AC3E}">
+        <p14:creationId xmlns:p14="http://schemas.microsoft.com/office/powerpoint/2010/main" val="1061952016"/>
+      </p:ext>
+    </p:extLst>
+  </p:cSld>
+  <p:clrMapOvr>
+    <a:masterClrMapping/>
+  </p:clrMapOvr>
+</p:sld>
+</file>
+
+<file path=ppt/slides/slide3.xml><?xml version="1.0" encoding="utf-8"?>
+<p:sld xmlns:a="http://schemas.openxmlformats.org/drawingml/2006/main" xmlns:r="http://schemas.openxmlformats.org/officeDocument/2006/relationships" xmlns:p="http://schemas.openxmlformats.org/presentationml/2006/main">
+  <p:cSld>
+    <p:spTree>
+      <p:nvGrpSpPr>
+        <p:cNvPr id="1" name="">
+          <a:extLst>
+            <a:ext uri="{FF2B5EF4-FFF2-40B4-BE49-F238E27FC236}">
+              <a16:creationId xmlns:a16="http://schemas.microsoft.com/office/drawing/2014/main" id="{22AC6CEF-DC87-42AD-88D5-B88B29111B8E}"/>
+            </a:ext>
+          </a:extLst>
+        </p:cNvPr>
+        <p:cNvGrpSpPr/>
+        <p:nvPr/>
+      </p:nvGrpSpPr>
+      <p:grpSpPr>
+        <a:xfrm>
+          <a:off x="0" y="0"/>
+          <a:ext cx="0" cy="0"/>
+          <a:chOff x="0" y="0"/>
+          <a:chExt cx="0" cy="0"/>
+        </a:xfrm>
+      </p:grpSpPr>
+      <p:sp>
+        <p:nvSpPr>
+          <p:cNvPr id="2" name="Title 1">
+            <a:extLst>
+              <a:ext uri="{FF2B5EF4-FFF2-40B4-BE49-F238E27FC236}">
+                <a16:creationId xmlns:a16="http://schemas.microsoft.com/office/drawing/2014/main" id="{C1061A3A-DBF4-AAE3-4183-A3D67BE26DDA}"/>
+              </a:ext>
+            </a:extLst>
+          </p:cNvPr>
+          <p:cNvSpPr>
+            <a:spLocks noGrp="1"/>
+          </p:cNvSpPr>
+          <p:nvPr>
+            <p:ph type="title"/>
+          </p:nvPr>
+        </p:nvSpPr>
+        <p:spPr/>
+        <p:txBody>
+          <a:bodyPr/>
+          <a:lstStyle/>
+          <a:p>
+            <a:r>
+              <a:rPr lang="en-US" dirty="0"/>
+              <a:t>Why Performance Analytics?</a:t>
+            </a:r>
+          </a:p>
+        </p:txBody>
+      </p:sp>
+      <p:sp>
+        <p:nvSpPr>
+          <p:cNvPr id="3" name="Content Placeholder 2">
+            <a:extLst>
+              <a:ext uri="{FF2B5EF4-FFF2-40B4-BE49-F238E27FC236}">
+                <a16:creationId xmlns:a16="http://schemas.microsoft.com/office/drawing/2014/main" id="{6F87BC87-22FD-730C-21A4-0D6ECB9AABA1}"/>
+              </a:ext>
+            </a:extLst>
+          </p:cNvPr>
+          <p:cNvSpPr>
+            <a:spLocks noGrp="1"/>
+          </p:cNvSpPr>
+          <p:nvPr>
+            <p:ph idx="1"/>
+          </p:nvPr>
+        </p:nvSpPr>
+        <p:spPr/>
+        <p:txBody>
+          <a:bodyPr>
+            <a:normAutofit/>
+          </a:bodyPr>
+          <a:lstStyle/>
+          <a:p>
+            <a:pPr marL="0" indent="0">
+              <a:buNone/>
+            </a:pPr>
+            <a:r>
+              <a:rPr lang="en-GB" sz="2400" dirty="0"/>
+              <a:t>Bring together physiology, data and real decisions</a:t>
+            </a:r>
+          </a:p>
+          <a:p>
+            <a:r>
+              <a:rPr lang="en-GB" sz="2400" dirty="0"/>
+              <a:t>Improve performance by:</a:t>
+            </a:r>
+          </a:p>
+          <a:p>
+            <a:pPr lvl="1"/>
+            <a:r>
+              <a:rPr lang="en-GB" sz="2000" dirty="0"/>
+              <a:t>understanding how athletes respond to training.</a:t>
+            </a:r>
+          </a:p>
+          <a:p>
+            <a:pPr lvl="1"/>
+            <a:r>
+              <a:rPr lang="en-GB" sz="2000" dirty="0"/>
+              <a:t>flag concerning patterns before they become larger performance or health problems.</a:t>
+            </a:r>
+          </a:p>
+          <a:p>
+            <a:pPr lvl="1"/>
+            <a:r>
+              <a:rPr lang="en-GB" sz="2000" dirty="0"/>
+              <a:t>guide better decisions with information.</a:t>
+            </a:r>
+          </a:p>
+        </p:txBody>
+      </p:sp>
+      <p:sp>
+        <p:nvSpPr>
+          <p:cNvPr id="4" name="Slide Number Placeholder 3">
+            <a:extLst>
+              <a:ext uri="{FF2B5EF4-FFF2-40B4-BE49-F238E27FC236}">
+                <a16:creationId xmlns:a16="http://schemas.microsoft.com/office/drawing/2014/main" id="{1516E01D-5BCA-8CD6-0F02-8D59454915DF}"/>
+              </a:ext>
+            </a:extLst>
+          </p:cNvPr>
+          <p:cNvSpPr>
+            <a:spLocks noGrp="1"/>
+          </p:cNvSpPr>
+          <p:nvPr>
+            <p:ph type="sldNum" sz="quarter" idx="12"/>
+          </p:nvPr>
+        </p:nvSpPr>
+        <p:spPr/>
+        <p:txBody>
+          <a:bodyPr/>
+          <a:lstStyle/>
+          <a:p>
+            <a:fld id="{45C00377-489B-40EC-B059-26BDDD2E89B9}" type="slidenum">
+              <a:rPr lang="en-US" smtClean="0"/>
+              <a:pPr/>
+              <a:t>3</a:t>
+            </a:fld>
+            <a:endParaRPr lang="en-US" dirty="0"/>
+          </a:p>
+        </p:txBody>
+      </p:sp>
+    </p:spTree>
+    <p:extLst>
+      <p:ext uri="{BB962C8B-B14F-4D97-AF65-F5344CB8AC3E}">
+        <p14:creationId xmlns:p14="http://schemas.microsoft.com/office/powerpoint/2010/main" val="1811922779"/>
+      </p:ext>
+    </p:extLst>
+  </p:cSld>
+  <p:clrMapOvr>
+    <a:masterClrMapping/>
+  </p:clrMapOvr>
+</p:sld>
+</file>
+
+<file path=ppt/slides/slide4.xml><?xml version="1.0" encoding="utf-8"?>
+<p:sld xmlns:a="http://schemas.openxmlformats.org/drawingml/2006/main" xmlns:r="http://schemas.openxmlformats.org/officeDocument/2006/relationships" xmlns:p="http://schemas.openxmlformats.org/presentationml/2006/main">
+  <p:cSld>
+    <p:spTree>
+      <p:nvGrpSpPr>
+        <p:cNvPr id="1" name=""/>
+        <p:cNvGrpSpPr/>
+        <p:nvPr/>
+      </p:nvGrpSpPr>
+      <p:grpSpPr>
+        <a:xfrm>
+          <a:off x="0" y="0"/>
+          <a:ext cx="0" cy="0"/>
+          <a:chOff x="0" y="0"/>
+          <a:chExt cx="0" cy="0"/>
+        </a:xfrm>
+      </p:grpSpPr>
+      <p:sp>
+        <p:nvSpPr>
+          <p:cNvPr id="2" name="Title 1">
+            <a:extLst>
+              <a:ext uri="{FF2B5EF4-FFF2-40B4-BE49-F238E27FC236}">
+                <a16:creationId xmlns:a16="http://schemas.microsoft.com/office/drawing/2014/main" id="{65DFB025-3E1A-9CDA-C083-1C971AF701FB}"/>
+              </a:ext>
+            </a:extLst>
+          </p:cNvPr>
+          <p:cNvSpPr>
+            <a:spLocks noGrp="1"/>
+          </p:cNvSpPr>
+          <p:nvPr>
+            <p:ph type="title"/>
+          </p:nvPr>
+        </p:nvSpPr>
+        <p:spPr/>
+        <p:txBody>
+          <a:bodyPr/>
+          <a:lstStyle/>
+          <a:p>
+            <a:r>
+              <a:rPr lang="en-US" dirty="0"/>
+              <a:t>Tell me about yourself!</a:t>
+            </a:r>
+          </a:p>
+        </p:txBody>
+      </p:sp>
+      <p:sp>
+        <p:nvSpPr>
+          <p:cNvPr id="3" name="Content Placeholder 2">
+            <a:extLst>
+              <a:ext uri="{FF2B5EF4-FFF2-40B4-BE49-F238E27FC236}">
+                <a16:creationId xmlns:a16="http://schemas.microsoft.com/office/drawing/2014/main" id="{4E71609D-83B2-28F8-F9F7-8A7B5F735096}"/>
+              </a:ext>
+            </a:extLst>
+          </p:cNvPr>
+          <p:cNvSpPr>
+            <a:spLocks noGrp="1"/>
+          </p:cNvSpPr>
+          <p:nvPr>
+            <p:ph idx="1"/>
+          </p:nvPr>
+        </p:nvSpPr>
+        <p:spPr/>
+        <p:txBody>
+          <a:bodyPr/>
+          <a:lstStyle/>
+          <a:p>
+            <a:pPr marL="0" indent="0">
+              <a:buNone/>
+            </a:pPr>
+            <a:r>
+              <a:rPr lang="en-US" dirty="0"/>
+              <a:t>In your index cards:</a:t>
+            </a:r>
+          </a:p>
+          <a:p>
+            <a:pPr lvl="1"/>
+            <a:r>
+              <a:rPr lang="en-US" dirty="0"/>
+              <a:t>Name</a:t>
+            </a:r>
+          </a:p>
+          <a:p>
+            <a:pPr lvl="1"/>
+            <a:r>
+              <a:rPr lang="en-US" dirty="0"/>
+              <a:t>Year + Major </a:t>
+            </a:r>
+          </a:p>
+          <a:p>
+            <a:pPr lvl="1"/>
+            <a:r>
+              <a:rPr lang="en-US" dirty="0"/>
+              <a:t>Favorite sport / team</a:t>
+            </a:r>
+          </a:p>
+          <a:p>
+            <a:pPr lvl="1"/>
+            <a:r>
+              <a:rPr lang="en-US" dirty="0"/>
+              <a:t>One thing you’re hoping to learning in this class</a:t>
+            </a:r>
+          </a:p>
+        </p:txBody>
+      </p:sp>
+      <p:sp>
+        <p:nvSpPr>
+          <p:cNvPr id="4" name="Slide Number Placeholder 3">
+            <a:extLst>
+              <a:ext uri="{FF2B5EF4-FFF2-40B4-BE49-F238E27FC236}">
+                <a16:creationId xmlns:a16="http://schemas.microsoft.com/office/drawing/2014/main" id="{AF082B2D-DB76-A161-D92D-655EDCC741A4}"/>
+              </a:ext>
+            </a:extLst>
+          </p:cNvPr>
+          <p:cNvSpPr>
+            <a:spLocks noGrp="1"/>
+          </p:cNvSpPr>
+          <p:nvPr>
+            <p:ph type="sldNum" sz="quarter" idx="12"/>
+          </p:nvPr>
+        </p:nvSpPr>
+        <p:spPr/>
+        <p:txBody>
+          <a:bodyPr/>
+          <a:lstStyle/>
+          <a:p>
+            <a:fld id="{45C00377-489B-40EC-B059-26BDDD2E89B9}" type="slidenum">
+              <a:rPr lang="en-US" smtClean="0"/>
+              <a:pPr/>
+              <a:t>4</a:t>
+            </a:fld>
+            <a:endParaRPr lang="en-US" dirty="0"/>
+          </a:p>
+        </p:txBody>
+      </p:sp>
+    </p:spTree>
+    <p:extLst>
+      <p:ext uri="{BB962C8B-B14F-4D97-AF65-F5344CB8AC3E}">
+        <p14:creationId xmlns:p14="http://schemas.microsoft.com/office/powerpoint/2010/main" val="1929088294"/>
+      </p:ext>
+    </p:extLst>
+  </p:cSld>
+  <p:clrMapOvr>
+    <a:masterClrMapping/>
+  </p:clrMapOvr>
+</p:sld>
+</file>
+
+<file path=ppt/slides/slide5.xml><?xml version="1.0" encoding="utf-8"?>
+<p:sld xmlns:a="http://schemas.openxmlformats.org/drawingml/2006/main" xmlns:r="http://schemas.openxmlformats.org/officeDocument/2006/relationships" xmlns:p="http://schemas.openxmlformats.org/presentationml/2006/main">
+  <p:cSld>
+    <p:spTree>
+      <p:nvGrpSpPr>
+        <p:cNvPr id="1" name="">
+          <a:extLst>
+            <a:ext uri="{FF2B5EF4-FFF2-40B4-BE49-F238E27FC236}">
+              <a16:creationId xmlns:a16="http://schemas.microsoft.com/office/drawing/2014/main" id="{1541FAB8-1447-A9CC-AA6A-B6AA1D106F10}"/>
+            </a:ext>
+          </a:extLst>
+        </p:cNvPr>
+        <p:cNvGrpSpPr/>
+        <p:nvPr/>
+      </p:nvGrpSpPr>
+      <p:grpSpPr>
+        <a:xfrm>
+          <a:off x="0" y="0"/>
+          <a:ext cx="0" cy="0"/>
+          <a:chOff x="0" y="0"/>
+          <a:chExt cx="0" cy="0"/>
+        </a:xfrm>
+      </p:grpSpPr>
+      <p:sp>
+        <p:nvSpPr>
+          <p:cNvPr id="2" name="Title 1">
+            <a:extLst>
+              <a:ext uri="{FF2B5EF4-FFF2-40B4-BE49-F238E27FC236}">
+                <a16:creationId xmlns:a16="http://schemas.microsoft.com/office/drawing/2014/main" id="{3E2ABB1E-5B1A-C5E8-40FF-DD69A08210CC}"/>
+              </a:ext>
+            </a:extLst>
+          </p:cNvPr>
+          <p:cNvSpPr>
+            <a:spLocks noGrp="1"/>
+          </p:cNvSpPr>
+          <p:nvPr>
+            <p:ph type="title"/>
+          </p:nvPr>
+        </p:nvSpPr>
+        <p:spPr/>
+        <p:txBody>
+          <a:bodyPr/>
+          <a:lstStyle/>
+          <a:p>
+            <a:r>
+              <a:rPr lang="en-US" dirty="0"/>
+              <a:t>Components of Performance Analytics</a:t>
+            </a:r>
+          </a:p>
+        </p:txBody>
+      </p:sp>
+      <p:sp>
+        <p:nvSpPr>
+          <p:cNvPr id="3" name="Content Placeholder 2">
+            <a:extLst>
+              <a:ext uri="{FF2B5EF4-FFF2-40B4-BE49-F238E27FC236}">
+                <a16:creationId xmlns:a16="http://schemas.microsoft.com/office/drawing/2014/main" id="{285E5190-4BBA-A9D5-37DF-E16DBCFE7556}"/>
+              </a:ext>
+            </a:extLst>
+          </p:cNvPr>
+          <p:cNvSpPr>
+            <a:spLocks noGrp="1"/>
+          </p:cNvSpPr>
+          <p:nvPr>
+            <p:ph idx="1"/>
+          </p:nvPr>
+        </p:nvSpPr>
+        <p:spPr/>
+        <p:txBody>
+          <a:bodyPr>
+            <a:normAutofit/>
+          </a:bodyPr>
+          <a:lstStyle/>
+          <a:p>
+            <a:pPr marL="0" indent="0">
+              <a:buNone/>
+            </a:pPr>
+            <a:r>
+              <a:rPr lang="en-GB" sz="2400" dirty="0"/>
+              <a:t>Performance analytics is not a single skillet</a:t>
+            </a:r>
+            <a:endParaRPr lang="en-GB" sz="2000" dirty="0"/>
+          </a:p>
+        </p:txBody>
+      </p:sp>
+      <p:sp>
+        <p:nvSpPr>
+          <p:cNvPr id="4" name="Slide Number Placeholder 3">
+            <a:extLst>
+              <a:ext uri="{FF2B5EF4-FFF2-40B4-BE49-F238E27FC236}">
+                <a16:creationId xmlns:a16="http://schemas.microsoft.com/office/drawing/2014/main" id="{64F8EAC5-A765-E323-782B-BFD8031607AA}"/>
+              </a:ext>
+            </a:extLst>
+          </p:cNvPr>
+          <p:cNvSpPr>
+            <a:spLocks noGrp="1"/>
+          </p:cNvSpPr>
+          <p:nvPr>
+            <p:ph type="sldNum" sz="quarter" idx="12"/>
+          </p:nvPr>
+        </p:nvSpPr>
+        <p:spPr/>
+        <p:txBody>
+          <a:bodyPr/>
+          <a:lstStyle/>
+          <a:p>
+            <a:fld id="{45C00377-489B-40EC-B059-26BDDD2E89B9}" type="slidenum">
+              <a:rPr lang="en-US" smtClean="0"/>
+              <a:pPr/>
+              <a:t>5</a:t>
+            </a:fld>
+            <a:endParaRPr lang="en-US" dirty="0"/>
+          </a:p>
+        </p:txBody>
+      </p:sp>
+      <p:sp>
+        <p:nvSpPr>
+          <p:cNvPr id="6" name="TextBox 5">
+            <a:extLst>
+              <a:ext uri="{FF2B5EF4-FFF2-40B4-BE49-F238E27FC236}">
+                <a16:creationId xmlns:a16="http://schemas.microsoft.com/office/drawing/2014/main" id="{1DC8A293-94E2-4997-4152-E34469BA2363}"/>
+              </a:ext>
+            </a:extLst>
+          </p:cNvPr>
+          <p:cNvSpPr txBox="1"/>
+          <p:nvPr/>
+        </p:nvSpPr>
+        <p:spPr>
+          <a:xfrm>
+            <a:off x="4941376" y="4769731"/>
+            <a:ext cx="2309247" cy="1384995"/>
+          </a:xfrm>
+          <a:prstGeom prst="rect">
+            <a:avLst/>
+          </a:prstGeom>
+          <a:noFill/>
+        </p:spPr>
+        <p:txBody>
+          <a:bodyPr wrap="square" rtlCol="0">
+            <a:spAutoFit/>
+          </a:bodyPr>
+          <a:lstStyle/>
+          <a:p>
+            <a:pPr algn="ctr"/>
+            <a:r>
+              <a:rPr lang="en-US" sz="2800" dirty="0"/>
+              <a:t>Sports Performance Analytics</a:t>
+            </a:r>
+          </a:p>
+        </p:txBody>
+      </p:sp>
+      <p:cxnSp>
+        <p:nvCxnSpPr>
+          <p:cNvPr id="8" name="Straight Arrow Connector 7">
+            <a:extLst>
+              <a:ext uri="{FF2B5EF4-FFF2-40B4-BE49-F238E27FC236}">
+                <a16:creationId xmlns:a16="http://schemas.microsoft.com/office/drawing/2014/main" id="{086120AC-92EF-3CA1-FFBC-1B0730067104}"/>
+              </a:ext>
+            </a:extLst>
+          </p:cNvPr>
+          <p:cNvCxnSpPr>
+            <a:cxnSpLocks/>
+          </p:cNvCxnSpPr>
+          <p:nvPr/>
+        </p:nvCxnSpPr>
+        <p:spPr>
+          <a:xfrm flipV="1">
+            <a:off x="2743200" y="5415701"/>
+            <a:ext cx="1751308" cy="1"/>
+          </a:xfrm>
+          <a:prstGeom prst="straightConnector1">
+            <a:avLst/>
+          </a:prstGeom>
+          <a:ln>
+            <a:tailEnd type="triangle"/>
+          </a:ln>
+        </p:spPr>
+        <p:style>
+          <a:lnRef idx="2">
+            <a:schemeClr val="accent1"/>
+          </a:lnRef>
+          <a:fillRef idx="0">
+            <a:schemeClr val="accent1"/>
+          </a:fillRef>
+          <a:effectRef idx="1">
+            <a:schemeClr val="accent1"/>
+          </a:effectRef>
+          <a:fontRef idx="minor">
+            <a:schemeClr val="tx1"/>
+          </a:fontRef>
+        </p:style>
+      </p:cxnSp>
+      <p:cxnSp>
+        <p:nvCxnSpPr>
+          <p:cNvPr id="14" name="Straight Arrow Connector 13">
+            <a:extLst>
+              <a:ext uri="{FF2B5EF4-FFF2-40B4-BE49-F238E27FC236}">
+                <a16:creationId xmlns:a16="http://schemas.microsoft.com/office/drawing/2014/main" id="{389ADDCA-1A65-9E17-7CF6-EE8C537E7457}"/>
+              </a:ext>
+            </a:extLst>
+          </p:cNvPr>
+          <p:cNvCxnSpPr>
+            <a:cxnSpLocks/>
+          </p:cNvCxnSpPr>
+          <p:nvPr/>
+        </p:nvCxnSpPr>
+        <p:spPr>
+          <a:xfrm>
+            <a:off x="3409627" y="4264116"/>
+            <a:ext cx="1270860" cy="648847"/>
+          </a:xfrm>
+          <a:prstGeom prst="straightConnector1">
+            <a:avLst/>
+          </a:prstGeom>
+          <a:ln>
+            <a:tailEnd type="triangle"/>
+          </a:ln>
+        </p:spPr>
+        <p:style>
+          <a:lnRef idx="2">
+            <a:schemeClr val="accent1"/>
+          </a:lnRef>
+          <a:fillRef idx="0">
+            <a:schemeClr val="accent1"/>
+          </a:fillRef>
+          <a:effectRef idx="1">
+            <a:schemeClr val="accent1"/>
+          </a:effectRef>
+          <a:fontRef idx="minor">
+            <a:schemeClr val="tx1"/>
+          </a:fontRef>
+        </p:style>
+      </p:cxnSp>
+      <p:cxnSp>
+        <p:nvCxnSpPr>
+          <p:cNvPr id="17" name="Straight Arrow Connector 16">
+            <a:extLst>
+              <a:ext uri="{FF2B5EF4-FFF2-40B4-BE49-F238E27FC236}">
+                <a16:creationId xmlns:a16="http://schemas.microsoft.com/office/drawing/2014/main" id="{EDA15C96-C49C-95D1-A6A4-722958992CE4}"/>
+              </a:ext>
+            </a:extLst>
+          </p:cNvPr>
+          <p:cNvCxnSpPr>
+            <a:cxnSpLocks/>
+          </p:cNvCxnSpPr>
+          <p:nvPr/>
+        </p:nvCxnSpPr>
+        <p:spPr>
+          <a:xfrm>
+            <a:off x="5040501" y="3276654"/>
+            <a:ext cx="322554" cy="1200598"/>
+          </a:xfrm>
+          <a:prstGeom prst="straightConnector1">
+            <a:avLst/>
+          </a:prstGeom>
+          <a:ln>
+            <a:tailEnd type="triangle"/>
+          </a:ln>
+        </p:spPr>
+        <p:style>
+          <a:lnRef idx="2">
+            <a:schemeClr val="accent1"/>
+          </a:lnRef>
+          <a:fillRef idx="0">
+            <a:schemeClr val="accent1"/>
+          </a:fillRef>
+          <a:effectRef idx="1">
+            <a:schemeClr val="accent1"/>
+          </a:effectRef>
+          <a:fontRef idx="minor">
+            <a:schemeClr val="tx1"/>
+          </a:fontRef>
+        </p:style>
+      </p:cxnSp>
+      <p:cxnSp>
+        <p:nvCxnSpPr>
+          <p:cNvPr id="20" name="Straight Arrow Connector 19">
+            <a:extLst>
+              <a:ext uri="{FF2B5EF4-FFF2-40B4-BE49-F238E27FC236}">
+                <a16:creationId xmlns:a16="http://schemas.microsoft.com/office/drawing/2014/main" id="{0C850866-A58C-BFE6-91CB-21F093D87BFC}"/>
+              </a:ext>
+            </a:extLst>
+          </p:cNvPr>
+          <p:cNvCxnSpPr>
+            <a:cxnSpLocks/>
+          </p:cNvCxnSpPr>
+          <p:nvPr/>
+        </p:nvCxnSpPr>
+        <p:spPr>
+          <a:xfrm flipH="1">
+            <a:off x="6635849" y="3415153"/>
+            <a:ext cx="428798" cy="1173386"/>
+          </a:xfrm>
+          <a:prstGeom prst="straightConnector1">
+            <a:avLst/>
+          </a:prstGeom>
+          <a:ln>
+            <a:tailEnd type="triangle"/>
+          </a:ln>
+        </p:spPr>
+        <p:style>
+          <a:lnRef idx="2">
+            <a:schemeClr val="accent1"/>
+          </a:lnRef>
+          <a:fillRef idx="0">
+            <a:schemeClr val="accent1"/>
+          </a:fillRef>
+          <a:effectRef idx="1">
+            <a:schemeClr val="accent1"/>
+          </a:effectRef>
+          <a:fontRef idx="minor">
+            <a:schemeClr val="tx1"/>
+          </a:fontRef>
+        </p:style>
+      </p:cxnSp>
+      <p:cxnSp>
+        <p:nvCxnSpPr>
+          <p:cNvPr id="24" name="Straight Arrow Connector 23">
+            <a:extLst>
+              <a:ext uri="{FF2B5EF4-FFF2-40B4-BE49-F238E27FC236}">
+                <a16:creationId xmlns:a16="http://schemas.microsoft.com/office/drawing/2014/main" id="{EA81B3E3-9C26-7BFE-17E7-132B8704B6F7}"/>
+              </a:ext>
+            </a:extLst>
+          </p:cNvPr>
+          <p:cNvCxnSpPr>
+            <a:cxnSpLocks/>
+          </p:cNvCxnSpPr>
+          <p:nvPr/>
+        </p:nvCxnSpPr>
+        <p:spPr>
+          <a:xfrm flipH="1">
+            <a:off x="7250623" y="4127304"/>
+            <a:ext cx="1128794" cy="780926"/>
+          </a:xfrm>
+          <a:prstGeom prst="straightConnector1">
+            <a:avLst/>
+          </a:prstGeom>
+          <a:ln>
+            <a:tailEnd type="triangle"/>
+          </a:ln>
+        </p:spPr>
+        <p:style>
+          <a:lnRef idx="2">
+            <a:schemeClr val="accent1"/>
+          </a:lnRef>
+          <a:fillRef idx="0">
+            <a:schemeClr val="accent1"/>
+          </a:fillRef>
+          <a:effectRef idx="1">
+            <a:schemeClr val="accent1"/>
+          </a:effectRef>
+          <a:fontRef idx="minor">
+            <a:schemeClr val="tx1"/>
+          </a:fontRef>
+        </p:style>
+      </p:cxnSp>
+      <p:cxnSp>
+        <p:nvCxnSpPr>
+          <p:cNvPr id="27" name="Straight Arrow Connector 26">
+            <a:extLst>
+              <a:ext uri="{FF2B5EF4-FFF2-40B4-BE49-F238E27FC236}">
+                <a16:creationId xmlns:a16="http://schemas.microsoft.com/office/drawing/2014/main" id="{9DC3CB3F-B45D-F1B1-CB0A-5A06D8647045}"/>
+              </a:ext>
+            </a:extLst>
+          </p:cNvPr>
+          <p:cNvCxnSpPr>
+            <a:cxnSpLocks/>
+          </p:cNvCxnSpPr>
+          <p:nvPr/>
+        </p:nvCxnSpPr>
+        <p:spPr>
+          <a:xfrm flipH="1">
+            <a:off x="7429835" y="5462228"/>
+            <a:ext cx="1515260" cy="0"/>
+          </a:xfrm>
+          <a:prstGeom prst="straightConnector1">
+            <a:avLst/>
+          </a:prstGeom>
+          <a:ln>
+            <a:tailEnd type="triangle"/>
+          </a:ln>
+        </p:spPr>
+        <p:style>
+          <a:lnRef idx="2">
+            <a:schemeClr val="accent1"/>
+          </a:lnRef>
+          <a:fillRef idx="0">
+            <a:schemeClr val="accent1"/>
+          </a:fillRef>
+          <a:effectRef idx="1">
+            <a:schemeClr val="accent1"/>
+          </a:effectRef>
+          <a:fontRef idx="minor">
+            <a:schemeClr val="tx1"/>
+          </a:fontRef>
+        </p:style>
+      </p:cxnSp>
+      <p:sp>
+        <p:nvSpPr>
+          <p:cNvPr id="33" name="TextBox 32">
+            <a:extLst>
+              <a:ext uri="{FF2B5EF4-FFF2-40B4-BE49-F238E27FC236}">
+                <a16:creationId xmlns:a16="http://schemas.microsoft.com/office/drawing/2014/main" id="{EA7BB90C-BB06-5036-5929-EC56DBF11153}"/>
+              </a:ext>
+            </a:extLst>
+          </p:cNvPr>
+          <p:cNvSpPr txBox="1"/>
+          <p:nvPr/>
+        </p:nvSpPr>
+        <p:spPr>
+          <a:xfrm>
+            <a:off x="4744763" y="2146420"/>
+            <a:ext cx="2702471" cy="369332"/>
+          </a:xfrm>
+          <a:prstGeom prst="rect">
+            <a:avLst/>
+          </a:prstGeom>
+          <a:noFill/>
+        </p:spPr>
+        <p:txBody>
+          <a:bodyPr wrap="none" rtlCol="0">
+            <a:spAutoFit/>
+          </a:bodyPr>
+          <a:lstStyle/>
+          <a:p>
+            <a:r>
+              <a:rPr lang="en-US" b="1" dirty="0">
+                <a:solidFill>
+                  <a:srgbClr val="FF0000"/>
+                </a:solidFill>
+              </a:rPr>
+              <a:t>What skills do we need?</a:t>
+            </a:r>
+          </a:p>
+        </p:txBody>
+      </p:sp>
+    </p:spTree>
+    <p:extLst>
+      <p:ext uri="{BB962C8B-B14F-4D97-AF65-F5344CB8AC3E}">
+        <p14:creationId xmlns:p14="http://schemas.microsoft.com/office/powerpoint/2010/main" val="3935738257"/>
+      </p:ext>
+    </p:extLst>
+  </p:cSld>
+  <p:clrMapOvr>
+    <a:masterClrMapping/>
+  </p:clrMapOvr>
+</p:sld>
+</file>
+
+<file path=ppt/slides/slide6.xml><?xml version="1.0" encoding="utf-8"?>
+<p:sld xmlns:a="http://schemas.openxmlformats.org/drawingml/2006/main" xmlns:r="http://schemas.openxmlformats.org/officeDocument/2006/relationships" xmlns:p="http://schemas.openxmlformats.org/presentationml/2006/main">
+  <p:cSld>
+    <p:spTree>
+      <p:nvGrpSpPr>
+        <p:cNvPr id="1" name="">
+          <a:extLst>
+            <a:ext uri="{FF2B5EF4-FFF2-40B4-BE49-F238E27FC236}">
+              <a16:creationId xmlns:a16="http://schemas.microsoft.com/office/drawing/2014/main" id="{2867AC3C-C955-A448-084F-BA2FCF6C9FA1}"/>
+            </a:ext>
+          </a:extLst>
+        </p:cNvPr>
+        <p:cNvGrpSpPr/>
+        <p:nvPr/>
+      </p:nvGrpSpPr>
+      <p:grpSpPr>
+        <a:xfrm>
+          <a:off x="0" y="0"/>
+          <a:ext cx="0" cy="0"/>
+          <a:chOff x="0" y="0"/>
+          <a:chExt cx="0" cy="0"/>
+        </a:xfrm>
+      </p:grpSpPr>
+      <p:sp>
+        <p:nvSpPr>
+          <p:cNvPr id="2" name="Title 1">
+            <a:extLst>
+              <a:ext uri="{FF2B5EF4-FFF2-40B4-BE49-F238E27FC236}">
+                <a16:creationId xmlns:a16="http://schemas.microsoft.com/office/drawing/2014/main" id="{7C11C577-A89A-CEBD-347E-96BB8E665E37}"/>
+              </a:ext>
+            </a:extLst>
+          </p:cNvPr>
+          <p:cNvSpPr>
+            <a:spLocks noGrp="1"/>
+          </p:cNvSpPr>
+          <p:nvPr>
+            <p:ph type="title"/>
+          </p:nvPr>
+        </p:nvSpPr>
+        <p:spPr/>
+        <p:txBody>
+          <a:bodyPr/>
+          <a:lstStyle/>
+          <a:p>
+            <a:r>
+              <a:rPr lang="en-US" dirty="0"/>
+              <a:t>Components of Performance Analytics</a:t>
+            </a:r>
+          </a:p>
+        </p:txBody>
+      </p:sp>
+      <p:sp>
+        <p:nvSpPr>
+          <p:cNvPr id="3" name="Content Placeholder 2">
+            <a:extLst>
+              <a:ext uri="{FF2B5EF4-FFF2-40B4-BE49-F238E27FC236}">
+                <a16:creationId xmlns:a16="http://schemas.microsoft.com/office/drawing/2014/main" id="{1E8B420C-6946-CC4C-342A-E1BB2C2FE928}"/>
+              </a:ext>
+            </a:extLst>
+          </p:cNvPr>
+          <p:cNvSpPr>
+            <a:spLocks noGrp="1"/>
+          </p:cNvSpPr>
+          <p:nvPr>
+            <p:ph idx="1"/>
+          </p:nvPr>
+        </p:nvSpPr>
+        <p:spPr/>
+        <p:txBody>
+          <a:bodyPr>
+            <a:normAutofit/>
+          </a:bodyPr>
+          <a:lstStyle/>
+          <a:p>
+            <a:pPr marL="0" indent="0">
+              <a:buNone/>
+            </a:pPr>
+            <a:r>
+              <a:rPr lang="en-GB" sz="2400" dirty="0"/>
+              <a:t>Performance analytics is not a single skillet</a:t>
+            </a:r>
+            <a:endParaRPr lang="en-GB" sz="2000" dirty="0"/>
+          </a:p>
+        </p:txBody>
+      </p:sp>
+      <p:sp>
+        <p:nvSpPr>
+          <p:cNvPr id="4" name="Slide Number Placeholder 3">
+            <a:extLst>
+              <a:ext uri="{FF2B5EF4-FFF2-40B4-BE49-F238E27FC236}">
+                <a16:creationId xmlns:a16="http://schemas.microsoft.com/office/drawing/2014/main" id="{8F942906-B945-FA19-513B-8543E5629E65}"/>
+              </a:ext>
+            </a:extLst>
+          </p:cNvPr>
+          <p:cNvSpPr>
+            <a:spLocks noGrp="1"/>
+          </p:cNvSpPr>
+          <p:nvPr>
+            <p:ph type="sldNum" sz="quarter" idx="12"/>
+          </p:nvPr>
+        </p:nvSpPr>
+        <p:spPr/>
+        <p:txBody>
+          <a:bodyPr/>
+          <a:lstStyle/>
+          <a:p>
+            <a:fld id="{45C00377-489B-40EC-B059-26BDDD2E89B9}" type="slidenum">
+              <a:rPr lang="en-US" smtClean="0"/>
+              <a:pPr/>
+              <a:t>6</a:t>
+            </a:fld>
+            <a:endParaRPr lang="en-US" dirty="0"/>
+          </a:p>
+        </p:txBody>
+      </p:sp>
+      <p:sp>
+        <p:nvSpPr>
+          <p:cNvPr id="9" name="TextBox 8">
+            <a:extLst>
+              <a:ext uri="{FF2B5EF4-FFF2-40B4-BE49-F238E27FC236}">
+                <a16:creationId xmlns:a16="http://schemas.microsoft.com/office/drawing/2014/main" id="{84DFCF49-E2E7-3AC5-3EA4-3B665ACDE306}"/>
+              </a:ext>
+            </a:extLst>
+          </p:cNvPr>
+          <p:cNvSpPr txBox="1"/>
+          <p:nvPr/>
+        </p:nvSpPr>
+        <p:spPr>
+          <a:xfrm>
+            <a:off x="433954" y="5092536"/>
+            <a:ext cx="2309246" cy="646331"/>
+          </a:xfrm>
+          <a:prstGeom prst="rect">
+            <a:avLst/>
+          </a:prstGeom>
+          <a:noFill/>
+        </p:spPr>
+        <p:txBody>
+          <a:bodyPr wrap="square" rtlCol="0">
+            <a:spAutoFit/>
+          </a:bodyPr>
+          <a:lstStyle/>
+          <a:p>
+            <a:r>
+              <a:rPr lang="en-US" dirty="0"/>
+              <a:t>Sport/performance knowledge</a:t>
+            </a:r>
+          </a:p>
+        </p:txBody>
+      </p:sp>
+      <p:sp>
+        <p:nvSpPr>
+          <p:cNvPr id="10" name="TextBox 9">
+            <a:extLst>
+              <a:ext uri="{FF2B5EF4-FFF2-40B4-BE49-F238E27FC236}">
+                <a16:creationId xmlns:a16="http://schemas.microsoft.com/office/drawing/2014/main" id="{A774D96D-B46E-4C61-C793-6FBA78971425}"/>
+              </a:ext>
+            </a:extLst>
+          </p:cNvPr>
+          <p:cNvSpPr txBox="1"/>
+          <p:nvPr/>
+        </p:nvSpPr>
+        <p:spPr>
+          <a:xfrm>
+            <a:off x="1288300" y="3830921"/>
+            <a:ext cx="2309246" cy="646331"/>
+          </a:xfrm>
+          <a:prstGeom prst="rect">
+            <a:avLst/>
+          </a:prstGeom>
+          <a:noFill/>
+        </p:spPr>
+        <p:txBody>
+          <a:bodyPr wrap="square" rtlCol="0">
+            <a:spAutoFit/>
+          </a:bodyPr>
+          <a:lstStyle/>
+          <a:p>
+            <a:r>
+              <a:rPr lang="en-US" dirty="0"/>
+              <a:t>Measurement and collection of data</a:t>
+            </a:r>
+          </a:p>
+        </p:txBody>
+      </p:sp>
+      <p:sp>
+        <p:nvSpPr>
+          <p:cNvPr id="11" name="TextBox 10">
+            <a:extLst>
+              <a:ext uri="{FF2B5EF4-FFF2-40B4-BE49-F238E27FC236}">
+                <a16:creationId xmlns:a16="http://schemas.microsoft.com/office/drawing/2014/main" id="{C6AFBE1E-C5F3-9AF5-1C8B-F3980AB21952}"/>
+              </a:ext>
+            </a:extLst>
+          </p:cNvPr>
+          <p:cNvSpPr txBox="1"/>
+          <p:nvPr/>
+        </p:nvSpPr>
+        <p:spPr>
+          <a:xfrm>
+            <a:off x="3525864" y="2743200"/>
+            <a:ext cx="2309246" cy="369332"/>
+          </a:xfrm>
+          <a:prstGeom prst="rect">
+            <a:avLst/>
+          </a:prstGeom>
+          <a:noFill/>
+        </p:spPr>
+        <p:txBody>
+          <a:bodyPr wrap="square" rtlCol="0">
+            <a:spAutoFit/>
+          </a:bodyPr>
+          <a:lstStyle/>
+          <a:p>
+            <a:r>
+              <a:rPr lang="en-US" dirty="0"/>
+              <a:t>Data management</a:t>
+            </a:r>
+          </a:p>
+        </p:txBody>
+      </p:sp>
+      <p:sp>
+        <p:nvSpPr>
+          <p:cNvPr id="12" name="TextBox 11">
+            <a:extLst>
+              <a:ext uri="{FF2B5EF4-FFF2-40B4-BE49-F238E27FC236}">
+                <a16:creationId xmlns:a16="http://schemas.microsoft.com/office/drawing/2014/main" id="{1C2D5184-1664-7044-F772-DDAD8C604B7C}"/>
+              </a:ext>
+            </a:extLst>
+          </p:cNvPr>
+          <p:cNvSpPr txBox="1"/>
+          <p:nvPr/>
+        </p:nvSpPr>
+        <p:spPr>
+          <a:xfrm>
+            <a:off x="6635849" y="2604700"/>
+            <a:ext cx="2309246" cy="646331"/>
+          </a:xfrm>
+          <a:prstGeom prst="rect">
+            <a:avLst/>
+          </a:prstGeom>
+          <a:noFill/>
+        </p:spPr>
+        <p:txBody>
+          <a:bodyPr wrap="square" rtlCol="0">
+            <a:spAutoFit/>
+          </a:bodyPr>
+          <a:lstStyle/>
+          <a:p>
+            <a:r>
+              <a:rPr lang="en-US" dirty="0"/>
+              <a:t>Statistics and modelling</a:t>
+            </a:r>
+          </a:p>
+        </p:txBody>
+      </p:sp>
+      <p:sp>
+        <p:nvSpPr>
+          <p:cNvPr id="13" name="TextBox 12">
+            <a:extLst>
+              <a:ext uri="{FF2B5EF4-FFF2-40B4-BE49-F238E27FC236}">
+                <a16:creationId xmlns:a16="http://schemas.microsoft.com/office/drawing/2014/main" id="{79BA9B72-5350-3AB5-EDFE-446466F95265}"/>
+              </a:ext>
+            </a:extLst>
+          </p:cNvPr>
+          <p:cNvSpPr txBox="1"/>
+          <p:nvPr/>
+        </p:nvSpPr>
+        <p:spPr>
+          <a:xfrm>
+            <a:off x="8610600" y="3830921"/>
+            <a:ext cx="2309246" cy="646331"/>
+          </a:xfrm>
+          <a:prstGeom prst="rect">
+            <a:avLst/>
+          </a:prstGeom>
+          <a:noFill/>
+        </p:spPr>
+        <p:txBody>
+          <a:bodyPr wrap="square" rtlCol="0">
+            <a:spAutoFit/>
+          </a:bodyPr>
+          <a:lstStyle/>
+          <a:p>
+            <a:r>
+              <a:rPr lang="en-US" dirty="0"/>
+              <a:t>Visualization and communication</a:t>
+            </a:r>
+          </a:p>
+        </p:txBody>
+      </p:sp>
+      <p:sp>
+        <p:nvSpPr>
+          <p:cNvPr id="5" name="TextBox 4">
+            <a:extLst>
+              <a:ext uri="{FF2B5EF4-FFF2-40B4-BE49-F238E27FC236}">
+                <a16:creationId xmlns:a16="http://schemas.microsoft.com/office/drawing/2014/main" id="{852381D4-7307-7EBD-C6B4-2494AEAFC291}"/>
+              </a:ext>
+            </a:extLst>
+          </p:cNvPr>
+          <p:cNvSpPr txBox="1"/>
+          <p:nvPr/>
+        </p:nvSpPr>
+        <p:spPr>
+          <a:xfrm>
+            <a:off x="9151120" y="5206449"/>
+            <a:ext cx="2606926" cy="646331"/>
+          </a:xfrm>
+          <a:prstGeom prst="rect">
+            <a:avLst/>
+          </a:prstGeom>
+          <a:noFill/>
+        </p:spPr>
+        <p:txBody>
+          <a:bodyPr wrap="square" rtlCol="0">
+            <a:spAutoFit/>
+          </a:bodyPr>
+          <a:lstStyle/>
+          <a:p>
+            <a:r>
+              <a:rPr lang="en-US" dirty="0"/>
+              <a:t>Decision-making and evaluating success</a:t>
+            </a:r>
+          </a:p>
+        </p:txBody>
+      </p:sp>
+      <p:sp>
+        <p:nvSpPr>
+          <p:cNvPr id="6" name="TextBox 5">
+            <a:extLst>
+              <a:ext uri="{FF2B5EF4-FFF2-40B4-BE49-F238E27FC236}">
+                <a16:creationId xmlns:a16="http://schemas.microsoft.com/office/drawing/2014/main" id="{F9C4346E-48A2-6091-B4F7-446F9618B953}"/>
+              </a:ext>
+            </a:extLst>
+          </p:cNvPr>
+          <p:cNvSpPr txBox="1"/>
+          <p:nvPr/>
+        </p:nvSpPr>
+        <p:spPr>
+          <a:xfrm>
+            <a:off x="4941376" y="4769731"/>
+            <a:ext cx="2309247" cy="1384995"/>
+          </a:xfrm>
+          <a:prstGeom prst="rect">
+            <a:avLst/>
+          </a:prstGeom>
+          <a:noFill/>
+        </p:spPr>
+        <p:txBody>
+          <a:bodyPr wrap="square" rtlCol="0">
+            <a:spAutoFit/>
+          </a:bodyPr>
+          <a:lstStyle/>
+          <a:p>
+            <a:pPr algn="ctr"/>
+            <a:r>
+              <a:rPr lang="en-US" sz="2800" dirty="0"/>
+              <a:t>Sports Performance Analytics</a:t>
+            </a:r>
+          </a:p>
+        </p:txBody>
+      </p:sp>
+      <p:cxnSp>
+        <p:nvCxnSpPr>
+          <p:cNvPr id="8" name="Straight Arrow Connector 7">
+            <a:extLst>
+              <a:ext uri="{FF2B5EF4-FFF2-40B4-BE49-F238E27FC236}">
+                <a16:creationId xmlns:a16="http://schemas.microsoft.com/office/drawing/2014/main" id="{9727921C-C1F0-57FA-6808-19CAC8F5D394}"/>
+              </a:ext>
+            </a:extLst>
+          </p:cNvPr>
+          <p:cNvCxnSpPr>
+            <a:stCxn id="9" idx="3"/>
+          </p:cNvCxnSpPr>
+          <p:nvPr/>
+        </p:nvCxnSpPr>
+        <p:spPr>
+          <a:xfrm flipV="1">
+            <a:off x="2743200" y="5415701"/>
+            <a:ext cx="1751308" cy="1"/>
+          </a:xfrm>
+          <a:prstGeom prst="straightConnector1">
+            <a:avLst/>
+          </a:prstGeom>
+          <a:ln>
+            <a:tailEnd type="triangle"/>
+          </a:ln>
+        </p:spPr>
+        <p:style>
+          <a:lnRef idx="2">
+            <a:schemeClr val="accent1"/>
+          </a:lnRef>
+          <a:fillRef idx="0">
+            <a:schemeClr val="accent1"/>
+          </a:fillRef>
+          <a:effectRef idx="1">
+            <a:schemeClr val="accent1"/>
+          </a:effectRef>
+          <a:fontRef idx="minor">
+            <a:schemeClr val="tx1"/>
+          </a:fontRef>
+        </p:style>
+      </p:cxnSp>
+      <p:cxnSp>
+        <p:nvCxnSpPr>
+          <p:cNvPr id="14" name="Straight Arrow Connector 13">
+            <a:extLst>
+              <a:ext uri="{FF2B5EF4-FFF2-40B4-BE49-F238E27FC236}">
+                <a16:creationId xmlns:a16="http://schemas.microsoft.com/office/drawing/2014/main" id="{B26D5943-50EE-CDCA-1AEF-9E10AC762FCF}"/>
+              </a:ext>
+            </a:extLst>
+          </p:cNvPr>
+          <p:cNvCxnSpPr>
+            <a:cxnSpLocks/>
+          </p:cNvCxnSpPr>
+          <p:nvPr/>
+        </p:nvCxnSpPr>
+        <p:spPr>
+          <a:xfrm>
+            <a:off x="3409627" y="4264116"/>
+            <a:ext cx="1270860" cy="648847"/>
+          </a:xfrm>
+          <a:prstGeom prst="straightConnector1">
+            <a:avLst/>
+          </a:prstGeom>
+          <a:ln>
+            <a:tailEnd type="triangle"/>
+          </a:ln>
+        </p:spPr>
+        <p:style>
+          <a:lnRef idx="2">
+            <a:schemeClr val="accent1"/>
+          </a:lnRef>
+          <a:fillRef idx="0">
+            <a:schemeClr val="accent1"/>
+          </a:fillRef>
+          <a:effectRef idx="1">
+            <a:schemeClr val="accent1"/>
+          </a:effectRef>
+          <a:fontRef idx="minor">
+            <a:schemeClr val="tx1"/>
+          </a:fontRef>
+        </p:style>
+      </p:cxnSp>
+      <p:cxnSp>
+        <p:nvCxnSpPr>
+          <p:cNvPr id="17" name="Straight Arrow Connector 16">
+            <a:extLst>
+              <a:ext uri="{FF2B5EF4-FFF2-40B4-BE49-F238E27FC236}">
+                <a16:creationId xmlns:a16="http://schemas.microsoft.com/office/drawing/2014/main" id="{AA4AE189-E46A-0156-773A-9807FB47C0C5}"/>
+              </a:ext>
+            </a:extLst>
+          </p:cNvPr>
+          <p:cNvCxnSpPr>
+            <a:cxnSpLocks/>
+          </p:cNvCxnSpPr>
+          <p:nvPr/>
+        </p:nvCxnSpPr>
+        <p:spPr>
+          <a:xfrm>
+            <a:off x="5040501" y="3276654"/>
+            <a:ext cx="322554" cy="1200598"/>
+          </a:xfrm>
+          <a:prstGeom prst="straightConnector1">
+            <a:avLst/>
+          </a:prstGeom>
+          <a:ln>
+            <a:tailEnd type="triangle"/>
+          </a:ln>
+        </p:spPr>
+        <p:style>
+          <a:lnRef idx="2">
+            <a:schemeClr val="accent1"/>
+          </a:lnRef>
+          <a:fillRef idx="0">
+            <a:schemeClr val="accent1"/>
+          </a:fillRef>
+          <a:effectRef idx="1">
+            <a:schemeClr val="accent1"/>
+          </a:effectRef>
+          <a:fontRef idx="minor">
+            <a:schemeClr val="tx1"/>
+          </a:fontRef>
+        </p:style>
+      </p:cxnSp>
+      <p:cxnSp>
+        <p:nvCxnSpPr>
+          <p:cNvPr id="20" name="Straight Arrow Connector 19">
+            <a:extLst>
+              <a:ext uri="{FF2B5EF4-FFF2-40B4-BE49-F238E27FC236}">
+                <a16:creationId xmlns:a16="http://schemas.microsoft.com/office/drawing/2014/main" id="{8D72CF50-7D90-5463-979B-5FD99C6B4290}"/>
+              </a:ext>
+            </a:extLst>
+          </p:cNvPr>
+          <p:cNvCxnSpPr>
+            <a:cxnSpLocks/>
+          </p:cNvCxnSpPr>
+          <p:nvPr/>
+        </p:nvCxnSpPr>
+        <p:spPr>
+          <a:xfrm flipH="1">
+            <a:off x="6635849" y="3415153"/>
+            <a:ext cx="428798" cy="1173386"/>
+          </a:xfrm>
+          <a:prstGeom prst="straightConnector1">
+            <a:avLst/>
+          </a:prstGeom>
+          <a:ln>
+            <a:tailEnd type="triangle"/>
+          </a:ln>
+        </p:spPr>
+        <p:style>
+          <a:lnRef idx="2">
+            <a:schemeClr val="accent1"/>
+          </a:lnRef>
+          <a:fillRef idx="0">
+            <a:schemeClr val="accent1"/>
+          </a:fillRef>
+          <a:effectRef idx="1">
+            <a:schemeClr val="accent1"/>
+          </a:effectRef>
+          <a:fontRef idx="minor">
+            <a:schemeClr val="tx1"/>
+          </a:fontRef>
+        </p:style>
+      </p:cxnSp>
+      <p:cxnSp>
+        <p:nvCxnSpPr>
+          <p:cNvPr id="24" name="Straight Arrow Connector 23">
+            <a:extLst>
+              <a:ext uri="{FF2B5EF4-FFF2-40B4-BE49-F238E27FC236}">
+                <a16:creationId xmlns:a16="http://schemas.microsoft.com/office/drawing/2014/main" id="{B9275E68-F9AE-1238-9E1B-F149485B87DA}"/>
+              </a:ext>
+            </a:extLst>
+          </p:cNvPr>
+          <p:cNvCxnSpPr>
+            <a:cxnSpLocks/>
+          </p:cNvCxnSpPr>
+          <p:nvPr/>
+        </p:nvCxnSpPr>
+        <p:spPr>
+          <a:xfrm flipH="1">
+            <a:off x="7250623" y="4127304"/>
+            <a:ext cx="1128794" cy="780926"/>
+          </a:xfrm>
+          <a:prstGeom prst="straightConnector1">
+            <a:avLst/>
+          </a:prstGeom>
+          <a:ln>
+            <a:tailEnd type="triangle"/>
+          </a:ln>
+        </p:spPr>
+        <p:style>
+          <a:lnRef idx="2">
+            <a:schemeClr val="accent1"/>
+          </a:lnRef>
+          <a:fillRef idx="0">
+            <a:schemeClr val="accent1"/>
+          </a:fillRef>
+          <a:effectRef idx="1">
+            <a:schemeClr val="accent1"/>
+          </a:effectRef>
+          <a:fontRef idx="minor">
+            <a:schemeClr val="tx1"/>
+          </a:fontRef>
+        </p:style>
+      </p:cxnSp>
+      <p:cxnSp>
+        <p:nvCxnSpPr>
+          <p:cNvPr id="27" name="Straight Arrow Connector 26">
+            <a:extLst>
+              <a:ext uri="{FF2B5EF4-FFF2-40B4-BE49-F238E27FC236}">
+                <a16:creationId xmlns:a16="http://schemas.microsoft.com/office/drawing/2014/main" id="{569F38EE-F7A2-6442-4855-4BC66194A81A}"/>
+              </a:ext>
+            </a:extLst>
+          </p:cNvPr>
+          <p:cNvCxnSpPr>
+            <a:cxnSpLocks/>
+          </p:cNvCxnSpPr>
+          <p:nvPr/>
+        </p:nvCxnSpPr>
+        <p:spPr>
+          <a:xfrm flipH="1">
+            <a:off x="7429835" y="5462228"/>
+            <a:ext cx="1515260" cy="0"/>
+          </a:xfrm>
+          <a:prstGeom prst="straightConnector1">
+            <a:avLst/>
+          </a:prstGeom>
+          <a:ln>
+            <a:tailEnd type="triangle"/>
+          </a:ln>
+        </p:spPr>
+        <p:style>
+          <a:lnRef idx="2">
+            <a:schemeClr val="accent1"/>
+          </a:lnRef>
+          <a:fillRef idx="0">
+            <a:schemeClr val="accent1"/>
+          </a:fillRef>
+          <a:effectRef idx="1">
+            <a:schemeClr val="accent1"/>
+          </a:effectRef>
+          <a:fontRef idx="minor">
+            <a:schemeClr val="tx1"/>
+          </a:fontRef>
+        </p:style>
+      </p:cxnSp>
+      <p:sp>
+        <p:nvSpPr>
+          <p:cNvPr id="7" name="TextBox 6">
+            <a:extLst>
+              <a:ext uri="{FF2B5EF4-FFF2-40B4-BE49-F238E27FC236}">
+                <a16:creationId xmlns:a16="http://schemas.microsoft.com/office/drawing/2014/main" id="{72105D21-9A79-93CB-47DC-C738D25F9C08}"/>
+              </a:ext>
+            </a:extLst>
+          </p:cNvPr>
+          <p:cNvSpPr txBox="1"/>
+          <p:nvPr/>
+        </p:nvSpPr>
+        <p:spPr>
+          <a:xfrm>
+            <a:off x="4216574" y="6269296"/>
+            <a:ext cx="3758850" cy="369332"/>
+          </a:xfrm>
+          <a:prstGeom prst="rect">
+            <a:avLst/>
+          </a:prstGeom>
+          <a:noFill/>
+        </p:spPr>
+        <p:txBody>
+          <a:bodyPr wrap="none" rtlCol="0">
+            <a:spAutoFit/>
+          </a:bodyPr>
+          <a:lstStyle/>
+          <a:p>
+            <a:r>
+              <a:rPr lang="en-US" b="1" dirty="0">
+                <a:solidFill>
+                  <a:srgbClr val="FF0000"/>
+                </a:solidFill>
+              </a:rPr>
+              <a:t>What skill is the most important?</a:t>
+            </a:r>
+          </a:p>
+        </p:txBody>
+      </p:sp>
+    </p:spTree>
+    <p:extLst>
+      <p:ext uri="{BB962C8B-B14F-4D97-AF65-F5344CB8AC3E}">
+        <p14:creationId xmlns:p14="http://schemas.microsoft.com/office/powerpoint/2010/main" val="2290696612"/>
+      </p:ext>
+    </p:extLst>
+  </p:cSld>
+  <p:clrMapOvr>
+    <a:masterClrMapping/>
+  </p:clrMapOvr>
+</p:sld>
+</file>
+
+<file path=ppt/slides/slide7.xml><?xml version="1.0" encoding="utf-8"?>
+<p:sld xmlns:a="http://schemas.openxmlformats.org/drawingml/2006/main" xmlns:r="http://schemas.openxmlformats.org/officeDocument/2006/relationships" xmlns:p="http://schemas.openxmlformats.org/presentationml/2006/main">
+  <p:cSld>
+    <p:spTree>
+      <p:nvGrpSpPr>
+        <p:cNvPr id="1" name=""/>
+        <p:cNvGrpSpPr/>
+        <p:nvPr/>
+      </p:nvGrpSpPr>
+      <p:grpSpPr>
+        <a:xfrm>
+          <a:off x="0" y="0"/>
+          <a:ext cx="0" cy="0"/>
+          <a:chOff x="0" y="0"/>
+          <a:chExt cx="0" cy="0"/>
+        </a:xfrm>
+      </p:grpSpPr>
+      <p:sp>
+        <p:nvSpPr>
+          <p:cNvPr id="2" name="Title 1">
+            <a:extLst>
+              <a:ext uri="{FF2B5EF4-FFF2-40B4-BE49-F238E27FC236}">
+                <a16:creationId xmlns:a16="http://schemas.microsoft.com/office/drawing/2014/main" id="{1B9BBDF3-3F2B-46C8-EBB9-E76680C30537}"/>
+              </a:ext>
+            </a:extLst>
+          </p:cNvPr>
+          <p:cNvSpPr>
+            <a:spLocks noGrp="1"/>
+          </p:cNvSpPr>
+          <p:nvPr>
+            <p:ph type="title"/>
+          </p:nvPr>
+        </p:nvSpPr>
+        <p:spPr/>
+        <p:txBody>
+          <a:bodyPr/>
+          <a:lstStyle/>
+          <a:p>
+            <a:r>
+              <a:rPr lang="en-GB" dirty="0"/>
+              <a:t>Skills to Build during this semester</a:t>
+            </a:r>
+          </a:p>
+        </p:txBody>
+      </p:sp>
+      <p:sp>
+        <p:nvSpPr>
+          <p:cNvPr id="3" name="Content Placeholder 2">
+            <a:extLst>
+              <a:ext uri="{FF2B5EF4-FFF2-40B4-BE49-F238E27FC236}">
+                <a16:creationId xmlns:a16="http://schemas.microsoft.com/office/drawing/2014/main" id="{F47673A8-7F5B-DC3C-10BB-FE0C6EAFCA30}"/>
+              </a:ext>
+            </a:extLst>
+          </p:cNvPr>
+          <p:cNvSpPr>
+            <a:spLocks noGrp="1"/>
+          </p:cNvSpPr>
+          <p:nvPr>
+            <p:ph idx="1"/>
+          </p:nvPr>
+        </p:nvSpPr>
+        <p:spPr/>
+        <p:txBody>
+          <a:bodyPr>
+            <a:normAutofit fontScale="85000" lnSpcReduction="20000"/>
+          </a:bodyPr>
+          <a:lstStyle/>
+          <a:p>
+            <a:pPr lvl="0"/>
+            <a:r>
+              <a:rPr lang="en-GB" b="1" dirty="0"/>
+              <a:t>Analytics foundations:</a:t>
+            </a:r>
+            <a:r>
+              <a:rPr lang="en-GB" dirty="0"/>
+              <a:t> </a:t>
+            </a:r>
+          </a:p>
+          <a:p>
+            <a:pPr lvl="1"/>
+            <a:r>
+              <a:rPr lang="en-GB" dirty="0"/>
+              <a:t>What sport analytics is and formulating good questions we can answer</a:t>
+            </a:r>
+          </a:p>
+          <a:p>
+            <a:pPr lvl="0"/>
+            <a:r>
+              <a:rPr lang="en-GB" b="1" dirty="0"/>
+              <a:t>Data:</a:t>
+            </a:r>
+            <a:r>
+              <a:rPr lang="en-GB" dirty="0"/>
+              <a:t> </a:t>
+            </a:r>
+          </a:p>
+          <a:p>
+            <a:pPr lvl="1"/>
+            <a:r>
+              <a:rPr lang="en-GB" dirty="0"/>
+              <a:t>Sources, structure, quality, validity, reliability, and ethics</a:t>
+            </a:r>
+          </a:p>
+          <a:p>
+            <a:pPr lvl="0"/>
+            <a:r>
+              <a:rPr lang="en-GB" b="1" dirty="0"/>
+              <a:t>Describe data:</a:t>
+            </a:r>
+            <a:r>
+              <a:rPr lang="en-GB" dirty="0"/>
+              <a:t> </a:t>
+            </a:r>
+          </a:p>
+          <a:p>
+            <a:pPr lvl="1"/>
+            <a:r>
+              <a:rPr lang="en-GB" dirty="0" err="1"/>
+              <a:t>Center</a:t>
+            </a:r>
+            <a:r>
+              <a:rPr lang="en-GB" dirty="0"/>
+              <a:t>, spread, distributions, and athlete profiling</a:t>
+            </a:r>
+          </a:p>
+          <a:p>
+            <a:pPr lvl="0"/>
+            <a:r>
+              <a:rPr lang="en-GB" b="1" dirty="0"/>
+              <a:t>Visualize data:</a:t>
+            </a:r>
+            <a:r>
+              <a:rPr lang="en-GB" dirty="0"/>
+              <a:t> </a:t>
+            </a:r>
+          </a:p>
+          <a:p>
+            <a:pPr lvl="1"/>
+            <a:r>
+              <a:rPr lang="en-GB" dirty="0"/>
+              <a:t>Showing patterns clearly and honestly</a:t>
+            </a:r>
+          </a:p>
+          <a:p>
+            <a:pPr lvl="0"/>
+            <a:r>
+              <a:rPr lang="en-GB" b="1" dirty="0"/>
+              <a:t>Explore relationships:</a:t>
+            </a:r>
+            <a:r>
+              <a:rPr lang="en-GB" dirty="0"/>
+              <a:t> </a:t>
+            </a:r>
+          </a:p>
+          <a:p>
+            <a:pPr lvl="1"/>
+            <a:r>
+              <a:rPr lang="en-GB" dirty="0"/>
+              <a:t>Association, regression, and interpretation</a:t>
+            </a:r>
+          </a:p>
+          <a:p>
+            <a:pPr lvl="0"/>
+            <a:r>
+              <a:rPr lang="en-GB" b="1" dirty="0"/>
+              <a:t>Making decisions:</a:t>
+            </a:r>
+            <a:r>
+              <a:rPr lang="en-GB" dirty="0"/>
+              <a:t> </a:t>
+            </a:r>
+          </a:p>
+          <a:p>
+            <a:pPr lvl="1"/>
+            <a:r>
+              <a:rPr lang="en-GB" dirty="0"/>
+              <a:t>Thresholds, probabilities, models, and communication</a:t>
+            </a:r>
+          </a:p>
+          <a:p>
+            <a:pPr lvl="0"/>
+            <a:r>
+              <a:rPr lang="en-GB" b="1" dirty="0"/>
+              <a:t>Application:</a:t>
+            </a:r>
+            <a:r>
+              <a:rPr lang="en-GB" dirty="0"/>
+              <a:t> </a:t>
+            </a:r>
+          </a:p>
+          <a:p>
+            <a:pPr lvl="1"/>
+            <a:r>
+              <a:rPr lang="en-GB" dirty="0"/>
+              <a:t>Example applications + semester-long group project</a:t>
+            </a:r>
+          </a:p>
+        </p:txBody>
+      </p:sp>
+      <p:sp>
+        <p:nvSpPr>
+          <p:cNvPr id="4" name="Slide Number Placeholder 3">
+            <a:extLst>
+              <a:ext uri="{FF2B5EF4-FFF2-40B4-BE49-F238E27FC236}">
+                <a16:creationId xmlns:a16="http://schemas.microsoft.com/office/drawing/2014/main" id="{33898ED9-935E-620F-FAF1-607D0AF58D5D}"/>
+              </a:ext>
+            </a:extLst>
+          </p:cNvPr>
+          <p:cNvSpPr>
+            <a:spLocks noGrp="1"/>
+          </p:cNvSpPr>
+          <p:nvPr>
+            <p:ph type="sldNum" sz="quarter" idx="12"/>
+          </p:nvPr>
+        </p:nvSpPr>
+        <p:spPr/>
+        <p:txBody>
+          <a:bodyPr/>
+          <a:lstStyle/>
+          <a:p>
+            <a:fld id="{45C00377-489B-40EC-B059-26BDDD2E89B9}" type="slidenum">
+              <a:rPr lang="en-US" smtClean="0"/>
+              <a:pPr/>
+              <a:t>7</a:t>
+            </a:fld>
+            <a:endParaRPr lang="en-US" dirty="0"/>
+          </a:p>
+        </p:txBody>
+      </p:sp>
+    </p:spTree>
+    <p:extLst>
+      <p:ext uri="{BB962C8B-B14F-4D97-AF65-F5344CB8AC3E}">
+        <p14:creationId xmlns:p14="http://schemas.microsoft.com/office/powerpoint/2010/main" val="2273123572"/>
+      </p:ext>
+    </p:extLst>
+  </p:cSld>
+  <p:clrMapOvr>
+    <a:masterClrMapping/>
+  </p:clrMapOvr>
+  <p:timing>
+    <p:tnLst>
+      <p:par>
+        <p:cTn id="1" dur="indefinite" restart="never" nodeType="tmRoot">
+          <p:childTnLst>
+            <p:seq concurrent="1" nextAc="seek">
+              <p:cTn id="2" dur="indefinite" nodeType="mainSeq">
+                <p:childTnLst>
+                  <p:par>
+                    <p:cTn id="3" fill="hold">
+                      <p:stCondLst>
+                        <p:cond delay="indefinite"/>
+                      </p:stCondLst>
+                      <p:childTnLst>
+                        <p:par>
+                          <p:cTn id="4" fill="hold">
+                            <p:stCondLst>
+                              <p:cond delay="0"/>
+                            </p:stCondLst>
+                            <p:childTnLst>
+                              <p:par>
+                                <p:cTn id="5" presetID="1" presetClass="entr" presetSubtype="0" fill="hold" grpId="0" nodeType="clickEffect">
+                                  <p:stCondLst>
+                                    <p:cond delay="0"/>
+                                  </p:stCondLst>
+                                  <p:childTnLst>
+                                    <p:set>
+                                      <p:cBhvr>
+                                        <p:cTn id="6" dur="1" fill="hold">
+                                          <p:stCondLst>
+                                            <p:cond delay="0"/>
+                                          </p:stCondLst>
+                                        </p:cTn>
+                                        <p:tgtEl>
+                                          <p:spTgt spid="3">
+                                            <p:txEl>
+                                              <p:pRg st="0" end="0"/>
+                                            </p:txEl>
+                                          </p:spTgt>
+                                        </p:tgtEl>
+                                        <p:attrNameLst>
+                                          <p:attrName>style.visibility</p:attrName>
+                                        </p:attrNameLst>
+                                      </p:cBhvr>
+                                      <p:to>
+                                        <p:strVal val="visible"/>
+                                      </p:to>
+                                    </p:set>
+                                  </p:childTnLst>
+                                </p:cTn>
+                              </p:par>
+                              <p:par>
+                                <p:cTn id="7" presetID="1" presetClass="entr" presetSubtype="0" fill="hold" grpId="0" nodeType="withEffect">
+                                  <p:stCondLst>
+                                    <p:cond delay="0"/>
+                                  </p:stCondLst>
+                                  <p:childTnLst>
+                                    <p:set>
+                                      <p:cBhvr>
+                                        <p:cTn id="8" dur="1" fill="hold">
+                                          <p:stCondLst>
+                                            <p:cond delay="0"/>
+                                          </p:stCondLst>
+                                        </p:cTn>
+                                        <p:tgtEl>
+                                          <p:spTgt spid="3">
+                                            <p:txEl>
+                                              <p:pRg st="1" end="1"/>
+                                            </p:txEl>
+                                          </p:spTgt>
+                                        </p:tgtEl>
+                                        <p:attrNameLst>
+                                          <p:attrName>style.visibility</p:attrName>
+                                        </p:attrNameLst>
+                                      </p:cBhvr>
+                                      <p:to>
+                                        <p:strVal val="visible"/>
+                                      </p:to>
+                                    </p:set>
+                                  </p:childTnLst>
+                                </p:cTn>
+                              </p:par>
+                            </p:childTnLst>
+                          </p:cTn>
+                        </p:par>
+                      </p:childTnLst>
+                    </p:cTn>
+                  </p:par>
+                  <p:par>
+                    <p:cTn id="9" fill="hold">
+                      <p:stCondLst>
+                        <p:cond delay="indefinite"/>
+                      </p:stCondLst>
+                      <p:childTnLst>
+                        <p:par>
+                          <p:cTn id="10" fill="hold">
+                            <p:stCondLst>
+                              <p:cond delay="0"/>
+                            </p:stCondLst>
+                            <p:childTnLst>
+                              <p:par>
+                                <p:cTn id="11" presetID="1" presetClass="entr" presetSubtype="0" fill="hold" grpId="0" nodeType="clickEffect">
+                                  <p:stCondLst>
+                                    <p:cond delay="0"/>
+                                  </p:stCondLst>
+                                  <p:childTnLst>
+                                    <p:set>
+                                      <p:cBhvr>
+                                        <p:cTn id="12" dur="1" fill="hold">
+                                          <p:stCondLst>
+                                            <p:cond delay="0"/>
+                                          </p:stCondLst>
+                                        </p:cTn>
+                                        <p:tgtEl>
+                                          <p:spTgt spid="3">
+                                            <p:txEl>
+                                              <p:pRg st="2" end="2"/>
+                                            </p:txEl>
+                                          </p:spTgt>
+                                        </p:tgtEl>
+                                        <p:attrNameLst>
+                                          <p:attrName>style.visibility</p:attrName>
+                                        </p:attrNameLst>
+                                      </p:cBhvr>
+                                      <p:to>
+                                        <p:strVal val="visible"/>
+                                      </p:to>
+                                    </p:set>
+                                  </p:childTnLst>
+                                </p:cTn>
+                              </p:par>
+                              <p:par>
+                                <p:cTn id="13" presetID="1" presetClass="entr" presetSubtype="0" fill="hold" grpId="0" nodeType="withEffect">
+                                  <p:stCondLst>
+                                    <p:cond delay="0"/>
+                                  </p:stCondLst>
+                                  <p:childTnLst>
+                                    <p:set>
+                                      <p:cBhvr>
+                                        <p:cTn id="14" dur="1" fill="hold">
+                                          <p:stCondLst>
+                                            <p:cond delay="0"/>
+                                          </p:stCondLst>
+                                        </p:cTn>
+                                        <p:tgtEl>
+                                          <p:spTgt spid="3">
+                                            <p:txEl>
+                                              <p:pRg st="3" end="3"/>
+                                            </p:txEl>
+                                          </p:spTgt>
+                                        </p:tgtEl>
+                                        <p:attrNameLst>
+                                          <p:attrName>style.visibility</p:attrName>
+                                        </p:attrNameLst>
+                                      </p:cBhvr>
+                                      <p:to>
+                                        <p:strVal val="visible"/>
+                                      </p:to>
+                                    </p:set>
+                                  </p:childTnLst>
+                                </p:cTn>
+                              </p:par>
+                            </p:childTnLst>
+                          </p:cTn>
+                        </p:par>
+                      </p:childTnLst>
+                    </p:cTn>
+                  </p:par>
+                  <p:par>
+                    <p:cTn id="15" fill="hold">
+                      <p:stCondLst>
+                        <p:cond delay="indefinite"/>
+                      </p:stCondLst>
+                      <p:childTnLst>
+                        <p:par>
+                          <p:cTn id="16" fill="hold">
+                            <p:stCondLst>
+                              <p:cond delay="0"/>
+                            </p:stCondLst>
+                            <p:childTnLst>
+                              <p:par>
+                                <p:cTn id="17" presetID="1" presetClass="entr" presetSubtype="0" fill="hold" grpId="0" nodeType="clickEffect">
+                                  <p:stCondLst>
+                                    <p:cond delay="0"/>
+                                  </p:stCondLst>
+                                  <p:childTnLst>
+                                    <p:set>
+                                      <p:cBhvr>
+                                        <p:cTn id="18" dur="1" fill="hold">
+                                          <p:stCondLst>
+                                            <p:cond delay="0"/>
+                                          </p:stCondLst>
+                                        </p:cTn>
+                                        <p:tgtEl>
+                                          <p:spTgt spid="3">
+                                            <p:txEl>
+                                              <p:pRg st="4" end="4"/>
+                                            </p:txEl>
+                                          </p:spTgt>
+                                        </p:tgtEl>
+                                        <p:attrNameLst>
+                                          <p:attrName>style.visibility</p:attrName>
+                                        </p:attrNameLst>
+                                      </p:cBhvr>
+                                      <p:to>
+                                        <p:strVal val="visible"/>
+                                      </p:to>
+                                    </p:set>
+                                  </p:childTnLst>
+                                </p:cTn>
+                              </p:par>
+                              <p:par>
+                                <p:cTn id="19" presetID="1" presetClass="entr" presetSubtype="0" fill="hold" grpId="0" nodeType="withEffect">
+                                  <p:stCondLst>
+                                    <p:cond delay="0"/>
+                                  </p:stCondLst>
+                                  <p:childTnLst>
+                                    <p:set>
+                                      <p:cBhvr>
+                                        <p:cTn id="20" dur="1" fill="hold">
+                                          <p:stCondLst>
+                                            <p:cond delay="0"/>
+                                          </p:stCondLst>
+                                        </p:cTn>
+                                        <p:tgtEl>
+                                          <p:spTgt spid="3">
+                                            <p:txEl>
+                                              <p:pRg st="5" end="5"/>
+                                            </p:txEl>
+                                          </p:spTgt>
+                                        </p:tgtEl>
+                                        <p:attrNameLst>
+                                          <p:attrName>style.visibility</p:attrName>
+                                        </p:attrNameLst>
+                                      </p:cBhvr>
+                                      <p:to>
+                                        <p:strVal val="visible"/>
+                                      </p:to>
+                                    </p:set>
+                                  </p:childTnLst>
+                                </p:cTn>
+                              </p:par>
+                            </p:childTnLst>
+                          </p:cTn>
+                        </p:par>
+                      </p:childTnLst>
+                    </p:cTn>
+                  </p:par>
+                  <p:par>
+                    <p:cTn id="21" fill="hold">
+                      <p:stCondLst>
+                        <p:cond delay="indefinite"/>
+                      </p:stCondLst>
+                      <p:childTnLst>
+                        <p:par>
+                          <p:cTn id="22" fill="hold">
+                            <p:stCondLst>
+                              <p:cond delay="0"/>
+                            </p:stCondLst>
+                            <p:childTnLst>
+                              <p:par>
+                                <p:cTn id="23" presetID="1" presetClass="entr" presetSubtype="0" fill="hold" grpId="0" nodeType="clickEffect">
+                                  <p:stCondLst>
+                                    <p:cond delay="0"/>
+                                  </p:stCondLst>
+                                  <p:childTnLst>
+                                    <p:set>
+                                      <p:cBhvr>
+                                        <p:cTn id="24" dur="1" fill="hold">
+                                          <p:stCondLst>
+                                            <p:cond delay="0"/>
+                                          </p:stCondLst>
+                                        </p:cTn>
+                                        <p:tgtEl>
+                                          <p:spTgt spid="3">
+                                            <p:txEl>
+                                              <p:pRg st="6" end="6"/>
+                                            </p:txEl>
+                                          </p:spTgt>
+                                        </p:tgtEl>
+                                        <p:attrNameLst>
+                                          <p:attrName>style.visibility</p:attrName>
+                                        </p:attrNameLst>
+                                      </p:cBhvr>
+                                      <p:to>
+                                        <p:strVal val="visible"/>
+                                      </p:to>
+                                    </p:set>
+                                  </p:childTnLst>
+                                </p:cTn>
+                              </p:par>
+                              <p:par>
+                                <p:cTn id="25" presetID="1" presetClass="entr" presetSubtype="0" fill="hold" grpId="0" nodeType="withEffect">
+                                  <p:stCondLst>
+                                    <p:cond delay="0"/>
+                                  </p:stCondLst>
+                                  <p:childTnLst>
+                                    <p:set>
+                                      <p:cBhvr>
+                                        <p:cTn id="26" dur="1" fill="hold">
+                                          <p:stCondLst>
+                                            <p:cond delay="0"/>
+                                          </p:stCondLst>
+                                        </p:cTn>
+                                        <p:tgtEl>
+                                          <p:spTgt spid="3">
+                                            <p:txEl>
+                                              <p:pRg st="7" end="7"/>
+                                            </p:txEl>
+                                          </p:spTgt>
+                                        </p:tgtEl>
+                                        <p:attrNameLst>
+                                          <p:attrName>style.visibility</p:attrName>
+                                        </p:attrNameLst>
+                                      </p:cBhvr>
+                                      <p:to>
+                                        <p:strVal val="visible"/>
+                                      </p:to>
+                                    </p:set>
+                                  </p:childTnLst>
+                                </p:cTn>
+                              </p:par>
+                            </p:childTnLst>
+                          </p:cTn>
+                        </p:par>
+                      </p:childTnLst>
+                    </p:cTn>
+                  </p:par>
+                  <p:par>
+                    <p:cTn id="27" fill="hold">
+                      <p:stCondLst>
+                        <p:cond delay="indefinite"/>
+                      </p:stCondLst>
+                      <p:childTnLst>
+                        <p:par>
+                          <p:cTn id="28" fill="hold">
+                            <p:stCondLst>
+                              <p:cond delay="0"/>
+                            </p:stCondLst>
+                            <p:childTnLst>
+                              <p:par>
+                                <p:cTn id="29" presetID="1" presetClass="entr" presetSubtype="0" fill="hold" grpId="0" nodeType="clickEffect">
+                                  <p:stCondLst>
+                                    <p:cond delay="0"/>
+                                  </p:stCondLst>
+                                  <p:childTnLst>
+                                    <p:set>
+                                      <p:cBhvr>
+                                        <p:cTn id="30" dur="1" fill="hold">
+                                          <p:stCondLst>
+                                            <p:cond delay="0"/>
+                                          </p:stCondLst>
+                                        </p:cTn>
+                                        <p:tgtEl>
+                                          <p:spTgt spid="3">
+                                            <p:txEl>
+                                              <p:pRg st="8" end="8"/>
+                                            </p:txEl>
+                                          </p:spTgt>
+                                        </p:tgtEl>
+                                        <p:attrNameLst>
+                                          <p:attrName>style.visibility</p:attrName>
+                                        </p:attrNameLst>
+                                      </p:cBhvr>
+                                      <p:to>
+                                        <p:strVal val="visible"/>
+                                      </p:to>
+                                    </p:set>
+                                  </p:childTnLst>
+                                </p:cTn>
+                              </p:par>
+                              <p:par>
+                                <p:cTn id="31" presetID="1" presetClass="entr" presetSubtype="0" fill="hold" grpId="0" nodeType="withEffect">
+                                  <p:stCondLst>
+                                    <p:cond delay="0"/>
+                                  </p:stCondLst>
+                                  <p:childTnLst>
+                                    <p:set>
+                                      <p:cBhvr>
+                                        <p:cTn id="32" dur="1" fill="hold">
+                                          <p:stCondLst>
+                                            <p:cond delay="0"/>
+                                          </p:stCondLst>
+                                        </p:cTn>
+                                        <p:tgtEl>
+                                          <p:spTgt spid="3">
+                                            <p:txEl>
+                                              <p:pRg st="9" end="9"/>
+                                            </p:txEl>
+                                          </p:spTgt>
+                                        </p:tgtEl>
+                                        <p:attrNameLst>
+                                          <p:attrName>style.visibility</p:attrName>
+                                        </p:attrNameLst>
+                                      </p:cBhvr>
+                                      <p:to>
+                                        <p:strVal val="visible"/>
+                                      </p:to>
+                                    </p:set>
+                                  </p:childTnLst>
+                                </p:cTn>
+                              </p:par>
+                            </p:childTnLst>
+                          </p:cTn>
+                        </p:par>
+                      </p:childTnLst>
+                    </p:cTn>
+                  </p:par>
+                  <p:par>
+                    <p:cTn id="33" fill="hold">
+                      <p:stCondLst>
+                        <p:cond delay="indefinite"/>
+                      </p:stCondLst>
+                      <p:childTnLst>
+                        <p:par>
+                          <p:cTn id="34" fill="hold">
+                            <p:stCondLst>
+                              <p:cond delay="0"/>
+                            </p:stCondLst>
+                            <p:childTnLst>
+                              <p:par>
+                                <p:cTn id="35" presetID="1" presetClass="entr" presetSubtype="0" fill="hold" grpId="0" nodeType="clickEffect">
+                                  <p:stCondLst>
+                                    <p:cond delay="0"/>
+                                  </p:stCondLst>
+                                  <p:childTnLst>
+                                    <p:set>
+                                      <p:cBhvr>
+                                        <p:cTn id="36" dur="1" fill="hold">
+                                          <p:stCondLst>
+                                            <p:cond delay="0"/>
+                                          </p:stCondLst>
+                                        </p:cTn>
+                                        <p:tgtEl>
+                                          <p:spTgt spid="3">
+                                            <p:txEl>
+                                              <p:pRg st="10" end="10"/>
+                                            </p:txEl>
+                                          </p:spTgt>
+                                        </p:tgtEl>
+                                        <p:attrNameLst>
+                                          <p:attrName>style.visibility</p:attrName>
+                                        </p:attrNameLst>
+                                      </p:cBhvr>
+                                      <p:to>
+                                        <p:strVal val="visible"/>
+                                      </p:to>
+                                    </p:set>
+                                  </p:childTnLst>
+                                </p:cTn>
+                              </p:par>
+                              <p:par>
+                                <p:cTn id="37" presetID="1" presetClass="entr" presetSubtype="0" fill="hold" grpId="0" nodeType="withEffect">
+                                  <p:stCondLst>
+                                    <p:cond delay="0"/>
+                                  </p:stCondLst>
+                                  <p:childTnLst>
+                                    <p:set>
+                                      <p:cBhvr>
+                                        <p:cTn id="38" dur="1" fill="hold">
+                                          <p:stCondLst>
+                                            <p:cond delay="0"/>
+                                          </p:stCondLst>
+                                        </p:cTn>
+                                        <p:tgtEl>
+                                          <p:spTgt spid="3">
+                                            <p:txEl>
+                                              <p:pRg st="11" end="11"/>
+                                            </p:txEl>
+                                          </p:spTgt>
+                                        </p:tgtEl>
+                                        <p:attrNameLst>
+                                          <p:attrName>style.visibility</p:attrName>
+                                        </p:attrNameLst>
+                                      </p:cBhvr>
+                                      <p:to>
+                                        <p:strVal val="visible"/>
+                                      </p:to>
+                                    </p:set>
+                                  </p:childTnLst>
+                                </p:cTn>
+                              </p:par>
+                            </p:childTnLst>
+                          </p:cTn>
+                        </p:par>
+                      </p:childTnLst>
+                    </p:cTn>
+                  </p:par>
+                  <p:par>
+                    <p:cTn id="39" fill="hold">
+                      <p:stCondLst>
+                        <p:cond delay="indefinite"/>
+                      </p:stCondLst>
+                      <p:childTnLst>
+                        <p:par>
+                          <p:cTn id="40" fill="hold">
+                            <p:stCondLst>
+                              <p:cond delay="0"/>
+                            </p:stCondLst>
+                            <p:childTnLst>
+                              <p:par>
+                                <p:cTn id="41" presetID="1" presetClass="entr" presetSubtype="0" fill="hold" grpId="0" nodeType="clickEffect">
+                                  <p:stCondLst>
+                                    <p:cond delay="0"/>
+                                  </p:stCondLst>
+                                  <p:childTnLst>
+                                    <p:set>
+                                      <p:cBhvr>
+                                        <p:cTn id="42" dur="1" fill="hold">
+                                          <p:stCondLst>
+                                            <p:cond delay="0"/>
+                                          </p:stCondLst>
+                                        </p:cTn>
+                                        <p:tgtEl>
+                                          <p:spTgt spid="3">
+                                            <p:txEl>
+                                              <p:pRg st="12" end="12"/>
+                                            </p:txEl>
+                                          </p:spTgt>
+                                        </p:tgtEl>
+                                        <p:attrNameLst>
+                                          <p:attrName>style.visibility</p:attrName>
+                                        </p:attrNameLst>
+                                      </p:cBhvr>
+                                      <p:to>
+                                        <p:strVal val="visible"/>
+                                      </p:to>
+                                    </p:set>
+                                  </p:childTnLst>
+                                </p:cTn>
+                              </p:par>
+                              <p:par>
+                                <p:cTn id="43" presetID="1" presetClass="entr" presetSubtype="0" fill="hold" grpId="0" nodeType="withEffect">
+                                  <p:stCondLst>
+                                    <p:cond delay="0"/>
+                                  </p:stCondLst>
+                                  <p:childTnLst>
+                                    <p:set>
+                                      <p:cBhvr>
+                                        <p:cTn id="44" dur="1" fill="hold">
+                                          <p:stCondLst>
+                                            <p:cond delay="0"/>
+                                          </p:stCondLst>
+                                        </p:cTn>
+                                        <p:tgtEl>
+                                          <p:spTgt spid="3">
+                                            <p:txEl>
+                                              <p:pRg st="13" end="13"/>
+                                            </p:txEl>
+                                          </p:spTgt>
+                                        </p:tgtEl>
+                                        <p:attrNameLst>
+                                          <p:attrName>style.visibility</p:attrName>
+                                        </p:attrNameLst>
+                                      </p:cBhvr>
+                                      <p:to>
+                                        <p:strVal val="visible"/>
+                                      </p:to>
+                                    </p:set>
+                                  </p:childTnLst>
+                                </p:cTn>
+                              </p:par>
+                            </p:childTnLst>
+                          </p:cTn>
+                        </p:par>
+                      </p:childTnLst>
+                    </p:cTn>
+                  </p:par>
+                </p:childTnLst>
+              </p:cTn>
+              <p:prevCondLst>
+                <p:cond evt="onPrev" delay="0">
+                  <p:tgtEl>
+                    <p:sldTgt/>
+                  </p:tgtEl>
+                </p:cond>
+              </p:prevCondLst>
+              <p:nextCondLst>
+                <p:cond evt="onNext" delay="0">
+                  <p:tgtEl>
+                    <p:sldTgt/>
+                  </p:tgtEl>
+                </p:cond>
+              </p:nextCondLst>
+            </p:seq>
+          </p:childTnLst>
+        </p:cTn>
+      </p:par>
+    </p:tnLst>
+    <p:bldLst>
+      <p:bldP spid="3" grpId="0" build="p"/>
+    </p:bldLst>
+  </p:timing>
+</p:sld>
+</file>
+
+<file path=ppt/slides/slide8.xml><?xml version="1.0" encoding="utf-8"?>
+<p:sld xmlns:a="http://schemas.openxmlformats.org/drawingml/2006/main" xmlns:r="http://schemas.openxmlformats.org/officeDocument/2006/relationships" xmlns:p="http://schemas.openxmlformats.org/presentationml/2006/main">
+  <p:cSld>
+    <p:spTree>
+      <p:nvGrpSpPr>
+        <p:cNvPr id="1" name=""/>
+        <p:cNvGrpSpPr/>
+        <p:nvPr/>
+      </p:nvGrpSpPr>
+      <p:grpSpPr>
+        <a:xfrm>
+          <a:off x="0" y="0"/>
+          <a:ext cx="0" cy="0"/>
+          <a:chOff x="0" y="0"/>
+          <a:chExt cx="0" cy="0"/>
+        </a:xfrm>
+      </p:grpSpPr>
+      <p:sp>
+        <p:nvSpPr>
+          <p:cNvPr id="2" name="Title 1">
+            <a:extLst>
+              <a:ext uri="{FF2B5EF4-FFF2-40B4-BE49-F238E27FC236}">
+                <a16:creationId xmlns:a16="http://schemas.microsoft.com/office/drawing/2014/main" id="{02A06033-5535-BCB7-6889-68AB47D34138}"/>
+              </a:ext>
+            </a:extLst>
+          </p:cNvPr>
+          <p:cNvSpPr>
+            <a:spLocks noGrp="1"/>
+          </p:cNvSpPr>
+          <p:nvPr>
+            <p:ph type="title"/>
+          </p:nvPr>
+        </p:nvSpPr>
+        <p:spPr/>
+        <p:txBody>
+          <a:bodyPr/>
+          <a:lstStyle/>
+          <a:p>
+            <a:r>
+              <a:rPr lang="en-US" dirty="0"/>
+              <a:t>The Scope of this Course</a:t>
             </a:r>
           </a:p>
         </p:txBody>
@@ -9808,723 +12128,6 @@
 </p:sld>
 </file>
 
-<file path=ppt/slides/slide6.xml><?xml version="1.0" encoding="utf-8"?>
-<p:sld xmlns:a="http://schemas.openxmlformats.org/drawingml/2006/main" xmlns:r="http://schemas.openxmlformats.org/officeDocument/2006/relationships" xmlns:p="http://schemas.openxmlformats.org/presentationml/2006/main">
-  <p:cSld>
-    <p:spTree>
-      <p:nvGrpSpPr>
-        <p:cNvPr id="1" name=""/>
-        <p:cNvGrpSpPr/>
-        <p:nvPr/>
-      </p:nvGrpSpPr>
-      <p:grpSpPr>
-        <a:xfrm>
-          <a:off x="0" y="0"/>
-          <a:ext cx="0" cy="0"/>
-          <a:chOff x="0" y="0"/>
-          <a:chExt cx="0" cy="0"/>
-        </a:xfrm>
-      </p:grpSpPr>
-      <p:sp>
-        <p:nvSpPr>
-          <p:cNvPr id="2" name="Title 1">
-            <a:extLst>
-              <a:ext uri="{FF2B5EF4-FFF2-40B4-BE49-F238E27FC236}">
-                <a16:creationId xmlns:a16="http://schemas.microsoft.com/office/drawing/2014/main" id="{7C22D48E-96E4-8E67-7410-C409190D788A}"/>
-              </a:ext>
-            </a:extLst>
-          </p:cNvPr>
-          <p:cNvSpPr>
-            <a:spLocks noGrp="1"/>
-          </p:cNvSpPr>
-          <p:nvPr>
-            <p:ph type="title"/>
-          </p:nvPr>
-        </p:nvSpPr>
-        <p:spPr/>
-        <p:txBody>
-          <a:bodyPr/>
-          <a:lstStyle/>
-          <a:p>
-            <a:r>
-              <a:rPr lang="en-US" dirty="0"/>
-              <a:t>Before we get too far …</a:t>
-            </a:r>
-          </a:p>
-        </p:txBody>
-      </p:sp>
-      <p:sp>
-        <p:nvSpPr>
-          <p:cNvPr id="3" name="Text Placeholder 2">
-            <a:extLst>
-              <a:ext uri="{FF2B5EF4-FFF2-40B4-BE49-F238E27FC236}">
-                <a16:creationId xmlns:a16="http://schemas.microsoft.com/office/drawing/2014/main" id="{6C4040A4-E862-A3E1-DF9E-77127C1BE2B3}"/>
-              </a:ext>
-            </a:extLst>
-          </p:cNvPr>
-          <p:cNvSpPr>
-            <a:spLocks noGrp="1"/>
-          </p:cNvSpPr>
-          <p:nvPr>
-            <p:ph type="body" idx="1"/>
-          </p:nvPr>
-        </p:nvSpPr>
-        <p:spPr/>
-        <p:txBody>
-          <a:bodyPr/>
-          <a:lstStyle/>
-          <a:p>
-            <a:endParaRPr lang="en-US"/>
-          </a:p>
-        </p:txBody>
-      </p:sp>
-    </p:spTree>
-    <p:extLst>
-      <p:ext uri="{BB962C8B-B14F-4D97-AF65-F5344CB8AC3E}">
-        <p14:creationId xmlns:p14="http://schemas.microsoft.com/office/powerpoint/2010/main" val="190724077"/>
-      </p:ext>
-    </p:extLst>
-  </p:cSld>
-  <p:clrMapOvr>
-    <a:masterClrMapping/>
-  </p:clrMapOvr>
-</p:sld>
-</file>
-
-<file path=ppt/slides/slide7.xml><?xml version="1.0" encoding="utf-8"?>
-<p:sld xmlns:a="http://schemas.openxmlformats.org/drawingml/2006/main" xmlns:r="http://schemas.openxmlformats.org/officeDocument/2006/relationships" xmlns:p="http://schemas.openxmlformats.org/presentationml/2006/main">
-  <p:cSld>
-    <p:spTree>
-      <p:nvGrpSpPr>
-        <p:cNvPr id="1" name=""/>
-        <p:cNvGrpSpPr/>
-        <p:nvPr/>
-      </p:nvGrpSpPr>
-      <p:grpSpPr>
-        <a:xfrm>
-          <a:off x="0" y="0"/>
-          <a:ext cx="0" cy="0"/>
-          <a:chOff x="0" y="0"/>
-          <a:chExt cx="0" cy="0"/>
-        </a:xfrm>
-      </p:grpSpPr>
-      <p:sp>
-        <p:nvSpPr>
-          <p:cNvPr id="2" name="Title 1">
-            <a:extLst>
-              <a:ext uri="{FF2B5EF4-FFF2-40B4-BE49-F238E27FC236}">
-                <a16:creationId xmlns:a16="http://schemas.microsoft.com/office/drawing/2014/main" id="{9EED8245-CA1F-C927-B33D-5C3CD3E521B9}"/>
-              </a:ext>
-            </a:extLst>
-          </p:cNvPr>
-          <p:cNvSpPr>
-            <a:spLocks noGrp="1"/>
-          </p:cNvSpPr>
-          <p:nvPr>
-            <p:ph type="title"/>
-          </p:nvPr>
-        </p:nvSpPr>
-        <p:spPr/>
-        <p:txBody>
-          <a:bodyPr/>
-          <a:lstStyle/>
-          <a:p>
-            <a:r>
-              <a:rPr lang="en-US" dirty="0"/>
-              <a:t>About me</a:t>
-            </a:r>
-          </a:p>
-        </p:txBody>
-      </p:sp>
-      <p:sp>
-        <p:nvSpPr>
-          <p:cNvPr id="3" name="Content Placeholder 2">
-            <a:extLst>
-              <a:ext uri="{FF2B5EF4-FFF2-40B4-BE49-F238E27FC236}">
-                <a16:creationId xmlns:a16="http://schemas.microsoft.com/office/drawing/2014/main" id="{2ACEF787-4746-2764-9D5B-D88B3D24D11F}"/>
-              </a:ext>
-            </a:extLst>
-          </p:cNvPr>
-          <p:cNvSpPr>
-            <a:spLocks noGrp="1"/>
-          </p:cNvSpPr>
-          <p:nvPr>
-            <p:ph idx="1"/>
-          </p:nvPr>
-        </p:nvSpPr>
-        <p:spPr/>
-        <p:txBody>
-          <a:bodyPr>
-            <a:normAutofit/>
-          </a:bodyPr>
-          <a:lstStyle/>
-          <a:p>
-            <a:r>
-              <a:rPr lang="en-US" sz="2400" dirty="0"/>
-              <a:t>Sports Data Analytics MSc</a:t>
-            </a:r>
-          </a:p>
-          <a:p>
-            <a:r>
-              <a:rPr lang="en-US" sz="2400" dirty="0"/>
-              <a:t>Exercise Physiology PhD candidate</a:t>
-            </a:r>
-          </a:p>
-          <a:p>
-            <a:r>
-              <a:rPr lang="en-US" sz="2400" dirty="0"/>
-              <a:t>Sport science, Oklahoma Basketball</a:t>
-            </a:r>
-          </a:p>
-          <a:p>
-            <a:r>
-              <a:rPr lang="en-US" sz="2400" dirty="0"/>
-              <a:t>Performance Intern, Vegas Golden Knights</a:t>
-            </a:r>
-          </a:p>
-        </p:txBody>
-      </p:sp>
-      <p:sp>
-        <p:nvSpPr>
-          <p:cNvPr id="4" name="Slide Number Placeholder 3">
-            <a:extLst>
-              <a:ext uri="{FF2B5EF4-FFF2-40B4-BE49-F238E27FC236}">
-                <a16:creationId xmlns:a16="http://schemas.microsoft.com/office/drawing/2014/main" id="{94F605A1-2F80-DE56-3042-69F40CFBA8F3}"/>
-              </a:ext>
-            </a:extLst>
-          </p:cNvPr>
-          <p:cNvSpPr>
-            <a:spLocks noGrp="1"/>
-          </p:cNvSpPr>
-          <p:nvPr>
-            <p:ph type="sldNum" sz="quarter" idx="12"/>
-          </p:nvPr>
-        </p:nvSpPr>
-        <p:spPr/>
-        <p:txBody>
-          <a:bodyPr/>
-          <a:lstStyle/>
-          <a:p>
-            <a:fld id="{45C00377-489B-40EC-B059-26BDDD2E89B9}" type="slidenum">
-              <a:rPr lang="en-US" smtClean="0"/>
-              <a:pPr/>
-              <a:t>7</a:t>
-            </a:fld>
-            <a:endParaRPr lang="en-US" dirty="0"/>
-          </a:p>
-        </p:txBody>
-      </p:sp>
-      <p:pic>
-        <p:nvPicPr>
-          <p:cNvPr id="4101" name="Picture 5" descr="Tokyo 2020, Catapult festeggia 24 medaglie e l'11° posto nel medagliere ...">
-            <a:extLst>
-              <a:ext uri="{FF2B5EF4-FFF2-40B4-BE49-F238E27FC236}">
-                <a16:creationId xmlns:a16="http://schemas.microsoft.com/office/drawing/2014/main" id="{5C309B9E-A3B9-44C0-FF55-89CE6B733CFF}"/>
-              </a:ext>
-            </a:extLst>
-          </p:cNvPr>
-          <p:cNvPicPr>
-            <a:picLocks noChangeAspect="1" noChangeArrowheads="1"/>
-          </p:cNvPicPr>
-          <p:nvPr/>
-        </p:nvPicPr>
-        <p:blipFill>
-          <a:blip r:embed="rId2">
-            <a:extLst>
-              <a:ext uri="{28A0092B-C50C-407E-A947-70E740481C1C}">
-                <a14:useLocalDpi xmlns:a14="http://schemas.microsoft.com/office/drawing/2010/main" val="0"/>
-              </a:ext>
-            </a:extLst>
-          </a:blip>
-          <a:srcRect/>
-          <a:stretch>
-            <a:fillRect/>
-          </a:stretch>
-        </p:blipFill>
-        <p:spPr bwMode="auto">
-          <a:xfrm>
-            <a:off x="7661658" y="3961505"/>
-            <a:ext cx="3785476" cy="2522483"/>
-          </a:xfrm>
-          <a:prstGeom prst="rect">
-            <a:avLst/>
-          </a:prstGeom>
-          <a:noFill/>
-          <a:extLst>
-            <a:ext uri="{909E8E84-426E-40DD-AFC4-6F175D3DCCD1}">
-              <a14:hiddenFill xmlns:a14="http://schemas.microsoft.com/office/drawing/2010/main">
-                <a:solidFill>
-                  <a:srgbClr val="FFFFFF"/>
-                </a:solidFill>
-              </a14:hiddenFill>
-            </a:ext>
-          </a:extLst>
-        </p:spPr>
-      </p:pic>
-      <p:sp>
-        <p:nvSpPr>
-          <p:cNvPr id="5" name="Content Placeholder 2">
-            <a:extLst>
-              <a:ext uri="{FF2B5EF4-FFF2-40B4-BE49-F238E27FC236}">
-                <a16:creationId xmlns:a16="http://schemas.microsoft.com/office/drawing/2014/main" id="{84644E02-2380-22C4-E935-A4C600C622A9}"/>
-              </a:ext>
-            </a:extLst>
-          </p:cNvPr>
-          <p:cNvSpPr txBox="1">
-            <a:spLocks/>
-          </p:cNvSpPr>
-          <p:nvPr/>
-        </p:nvSpPr>
-        <p:spPr>
-          <a:xfrm>
-            <a:off x="838200" y="3805881"/>
-            <a:ext cx="6304005" cy="2065670"/>
-          </a:xfrm>
-          <a:prstGeom prst="rect">
-            <a:avLst/>
-          </a:prstGeom>
-        </p:spPr>
-        <p:txBody>
-          <a:bodyPr vert="horz" lIns="91440" tIns="45720" rIns="91440" bIns="45720" rtlCol="0">
-            <a:normAutofit/>
-          </a:bodyPr>
-          <a:lstStyle>
-            <a:lvl1pPr marL="228600" indent="-228600" algn="l" defTabSz="914400" rtl="0" eaLnBrk="1" latinLnBrk="0" hangingPunct="1">
-              <a:lnSpc>
-                <a:spcPct val="90000"/>
-              </a:lnSpc>
-              <a:spcBef>
-                <a:spcPts val="1000"/>
-              </a:spcBef>
-              <a:buFont typeface="Arial" panose="020B0604020202020204" pitchFamily="34" charset="0"/>
-              <a:buChar char="•"/>
-              <a:defRPr sz="2800" kern="1200">
-                <a:solidFill>
-                  <a:schemeClr val="tx1"/>
-                </a:solidFill>
-                <a:latin typeface="+mn-lt"/>
-                <a:ea typeface="+mn-ea"/>
-                <a:cs typeface="+mn-cs"/>
-              </a:defRPr>
-            </a:lvl1pPr>
-            <a:lvl2pPr marL="685800" indent="-228600" algn="l" defTabSz="914400" rtl="0" eaLnBrk="1" latinLnBrk="0" hangingPunct="1">
-              <a:lnSpc>
-                <a:spcPct val="90000"/>
-              </a:lnSpc>
-              <a:spcBef>
-                <a:spcPts val="500"/>
-              </a:spcBef>
-              <a:buFont typeface="Arial" panose="020B0604020202020204" pitchFamily="34" charset="0"/>
-              <a:buChar char="•"/>
-              <a:defRPr sz="2400" kern="1200">
-                <a:solidFill>
-                  <a:schemeClr val="tx1"/>
-                </a:solidFill>
-                <a:latin typeface="+mn-lt"/>
-                <a:ea typeface="+mn-ea"/>
-                <a:cs typeface="+mn-cs"/>
-              </a:defRPr>
-            </a:lvl2pPr>
-            <a:lvl3pPr marL="1143000" indent="-228600" algn="l" defTabSz="914400" rtl="0" eaLnBrk="1" latinLnBrk="0" hangingPunct="1">
-              <a:lnSpc>
-                <a:spcPct val="90000"/>
-              </a:lnSpc>
-              <a:spcBef>
-                <a:spcPts val="500"/>
-              </a:spcBef>
-              <a:buFont typeface="Arial" panose="020B0604020202020204" pitchFamily="34" charset="0"/>
-              <a:buChar char="•"/>
-              <a:defRPr sz="2000" kern="1200">
-                <a:solidFill>
-                  <a:schemeClr val="tx1"/>
-                </a:solidFill>
-                <a:latin typeface="+mn-lt"/>
-                <a:ea typeface="+mn-ea"/>
-                <a:cs typeface="+mn-cs"/>
-              </a:defRPr>
-            </a:lvl3pPr>
-            <a:lvl4pPr marL="1600200" indent="-228600" algn="l" defTabSz="914400" rtl="0" eaLnBrk="1" latinLnBrk="0" hangingPunct="1">
-              <a:lnSpc>
-                <a:spcPct val="90000"/>
-              </a:lnSpc>
-              <a:spcBef>
-                <a:spcPts val="500"/>
-              </a:spcBef>
-              <a:buFont typeface="Arial" panose="020B0604020202020204" pitchFamily="34" charset="0"/>
-              <a:buChar char="•"/>
-              <a:defRPr sz="1800" kern="1200">
-                <a:solidFill>
-                  <a:schemeClr val="tx1"/>
-                </a:solidFill>
-                <a:latin typeface="+mn-lt"/>
-                <a:ea typeface="+mn-ea"/>
-                <a:cs typeface="+mn-cs"/>
-              </a:defRPr>
-            </a:lvl4pPr>
-            <a:lvl5pPr marL="2057400" indent="-228600" algn="l" defTabSz="914400" rtl="0" eaLnBrk="1" latinLnBrk="0" hangingPunct="1">
-              <a:lnSpc>
-                <a:spcPct val="90000"/>
-              </a:lnSpc>
-              <a:spcBef>
-                <a:spcPts val="500"/>
-              </a:spcBef>
-              <a:buFont typeface="Arial" panose="020B0604020202020204" pitchFamily="34" charset="0"/>
-              <a:buChar char="•"/>
-              <a:defRPr sz="1800" kern="1200">
-                <a:solidFill>
-                  <a:schemeClr val="tx1"/>
-                </a:solidFill>
-                <a:latin typeface="+mn-lt"/>
-                <a:ea typeface="+mn-ea"/>
-                <a:cs typeface="+mn-cs"/>
-              </a:defRPr>
-            </a:lvl5pPr>
-            <a:lvl6pPr marL="2514600" indent="-228600" algn="l" defTabSz="914400" rtl="0" eaLnBrk="1" latinLnBrk="0" hangingPunct="1">
-              <a:lnSpc>
-                <a:spcPct val="90000"/>
-              </a:lnSpc>
-              <a:spcBef>
-                <a:spcPts val="500"/>
-              </a:spcBef>
-              <a:buFont typeface="Arial" panose="020B0604020202020204" pitchFamily="34" charset="0"/>
-              <a:buChar char="•"/>
-              <a:defRPr sz="1800" kern="1200">
-                <a:solidFill>
-                  <a:schemeClr val="tx1"/>
-                </a:solidFill>
-                <a:latin typeface="+mn-lt"/>
-                <a:ea typeface="+mn-ea"/>
-                <a:cs typeface="+mn-cs"/>
-              </a:defRPr>
-            </a:lvl6pPr>
-            <a:lvl7pPr marL="2971800" indent="-228600" algn="l" defTabSz="914400" rtl="0" eaLnBrk="1" latinLnBrk="0" hangingPunct="1">
-              <a:lnSpc>
-                <a:spcPct val="90000"/>
-              </a:lnSpc>
-              <a:spcBef>
-                <a:spcPts val="500"/>
-              </a:spcBef>
-              <a:buFont typeface="Arial" panose="020B0604020202020204" pitchFamily="34" charset="0"/>
-              <a:buChar char="•"/>
-              <a:defRPr sz="1800" kern="1200">
-                <a:solidFill>
-                  <a:schemeClr val="tx1"/>
-                </a:solidFill>
-                <a:latin typeface="+mn-lt"/>
-                <a:ea typeface="+mn-ea"/>
-                <a:cs typeface="+mn-cs"/>
-              </a:defRPr>
-            </a:lvl7pPr>
-            <a:lvl8pPr marL="3429000" indent="-228600" algn="l" defTabSz="914400" rtl="0" eaLnBrk="1" latinLnBrk="0" hangingPunct="1">
-              <a:lnSpc>
-                <a:spcPct val="90000"/>
-              </a:lnSpc>
-              <a:spcBef>
-                <a:spcPts val="500"/>
-              </a:spcBef>
-              <a:buFont typeface="Arial" panose="020B0604020202020204" pitchFamily="34" charset="0"/>
-              <a:buChar char="•"/>
-              <a:defRPr sz="1800" kern="1200">
-                <a:solidFill>
-                  <a:schemeClr val="tx1"/>
-                </a:solidFill>
-                <a:latin typeface="+mn-lt"/>
-                <a:ea typeface="+mn-ea"/>
-                <a:cs typeface="+mn-cs"/>
-              </a:defRPr>
-            </a:lvl8pPr>
-            <a:lvl9pPr marL="3886200" indent="-228600" algn="l" defTabSz="914400" rtl="0" eaLnBrk="1" latinLnBrk="0" hangingPunct="1">
-              <a:lnSpc>
-                <a:spcPct val="90000"/>
-              </a:lnSpc>
-              <a:spcBef>
-                <a:spcPts val="500"/>
-              </a:spcBef>
-              <a:buFont typeface="Arial" panose="020B0604020202020204" pitchFamily="34" charset="0"/>
-              <a:buChar char="•"/>
-              <a:defRPr sz="1800" kern="1200">
-                <a:solidFill>
-                  <a:schemeClr val="tx1"/>
-                </a:solidFill>
-                <a:latin typeface="+mn-lt"/>
-                <a:ea typeface="+mn-ea"/>
-                <a:cs typeface="+mn-cs"/>
-              </a:defRPr>
-            </a:lvl9pPr>
-          </a:lstStyle>
-          <a:p>
-            <a:r>
-              <a:rPr lang="en-US" sz="2400" dirty="0"/>
-              <a:t>What I work on</a:t>
-            </a:r>
-          </a:p>
-          <a:p>
-            <a:pPr lvl="1"/>
-            <a:r>
-              <a:rPr lang="en-US" sz="2000" dirty="0"/>
-              <a:t>Load management using wearable technology</a:t>
-            </a:r>
-          </a:p>
-          <a:p>
-            <a:pPr lvl="1"/>
-            <a:r>
-              <a:rPr lang="en-US" sz="2000" dirty="0"/>
-              <a:t>Translating data into actionable coaching insight</a:t>
-            </a:r>
-          </a:p>
-        </p:txBody>
-      </p:sp>
-      <p:pic>
-        <p:nvPicPr>
-          <p:cNvPr id="6" name="Picture 5" descr="No photo description available.">
-            <a:extLst>
-              <a:ext uri="{FF2B5EF4-FFF2-40B4-BE49-F238E27FC236}">
-                <a16:creationId xmlns:a16="http://schemas.microsoft.com/office/drawing/2014/main" id="{EABC1EEA-7BAE-018F-6002-3E9647678D04}"/>
-              </a:ext>
-            </a:extLst>
-          </p:cNvPr>
-          <p:cNvPicPr>
-            <a:picLocks noChangeAspect="1"/>
-          </p:cNvPicPr>
-          <p:nvPr/>
-        </p:nvPicPr>
-        <p:blipFill>
-          <a:blip r:embed="rId3"/>
-          <a:srcRect t="26461" b="29447"/>
-          <a:stretch>
-            <a:fillRect/>
-          </a:stretch>
-        </p:blipFill>
-        <p:spPr>
-          <a:xfrm>
-            <a:off x="7438301" y="2518750"/>
-            <a:ext cx="4232190" cy="1049637"/>
-          </a:xfrm>
-          <a:prstGeom prst="rect">
-            <a:avLst/>
-          </a:prstGeom>
-        </p:spPr>
-      </p:pic>
-      <p:pic>
-        <p:nvPicPr>
-          <p:cNvPr id="7" name="Picture 6" descr="Oklahoma men's basketball gets biggest win of season at perfect time">
-            <a:extLst>
-              <a:ext uri="{FF2B5EF4-FFF2-40B4-BE49-F238E27FC236}">
-                <a16:creationId xmlns:a16="http://schemas.microsoft.com/office/drawing/2014/main" id="{E674796D-C9BF-A177-4523-6EFE20095B65}"/>
-              </a:ext>
-            </a:extLst>
-          </p:cNvPr>
-          <p:cNvPicPr>
-            <a:picLocks noChangeAspect="1"/>
-          </p:cNvPicPr>
-          <p:nvPr/>
-        </p:nvPicPr>
-        <p:blipFill>
-          <a:blip r:embed="rId4"/>
-          <a:stretch>
-            <a:fillRect/>
-          </a:stretch>
-        </p:blipFill>
-        <p:spPr>
-          <a:xfrm>
-            <a:off x="6252345" y="672151"/>
-            <a:ext cx="2737021" cy="1539574"/>
-          </a:xfrm>
-          <a:prstGeom prst="rect">
-            <a:avLst/>
-          </a:prstGeom>
-        </p:spPr>
-      </p:pic>
-      <p:pic>
-        <p:nvPicPr>
-          <p:cNvPr id="8" name="Picture 7" descr="The Vegas Golden Knights unveil their new centre ice logo for the teams  tenth season👀🎰">
-            <a:extLst>
-              <a:ext uri="{FF2B5EF4-FFF2-40B4-BE49-F238E27FC236}">
-                <a16:creationId xmlns:a16="http://schemas.microsoft.com/office/drawing/2014/main" id="{E13F793F-1275-E0D5-E891-7A17E4237B89}"/>
-              </a:ext>
-            </a:extLst>
-          </p:cNvPr>
-          <p:cNvPicPr>
-            <a:picLocks noChangeAspect="1"/>
-          </p:cNvPicPr>
-          <p:nvPr/>
-        </p:nvPicPr>
-        <p:blipFill>
-          <a:blip r:embed="rId5"/>
-          <a:stretch>
-            <a:fillRect/>
-          </a:stretch>
-        </p:blipFill>
-        <p:spPr>
-          <a:xfrm>
-            <a:off x="9297965" y="690553"/>
-            <a:ext cx="2689216" cy="1521172"/>
-          </a:xfrm>
-          <a:prstGeom prst="rect">
-            <a:avLst/>
-          </a:prstGeom>
-        </p:spPr>
-      </p:pic>
-    </p:spTree>
-    <p:extLst>
-      <p:ext uri="{BB962C8B-B14F-4D97-AF65-F5344CB8AC3E}">
-        <p14:creationId xmlns:p14="http://schemas.microsoft.com/office/powerpoint/2010/main" val="1061952016"/>
-      </p:ext>
-    </p:extLst>
-  </p:cSld>
-  <p:clrMapOvr>
-    <a:masterClrMapping/>
-  </p:clrMapOvr>
-</p:sld>
-</file>
-
-<file path=ppt/slides/slide8.xml><?xml version="1.0" encoding="utf-8"?>
-<p:sld xmlns:a="http://schemas.openxmlformats.org/drawingml/2006/main" xmlns:r="http://schemas.openxmlformats.org/officeDocument/2006/relationships" xmlns:p="http://schemas.openxmlformats.org/presentationml/2006/main">
-  <p:cSld>
-    <p:spTree>
-      <p:nvGrpSpPr>
-        <p:cNvPr id="1" name=""/>
-        <p:cNvGrpSpPr/>
-        <p:nvPr/>
-      </p:nvGrpSpPr>
-      <p:grpSpPr>
-        <a:xfrm>
-          <a:off x="0" y="0"/>
-          <a:ext cx="0" cy="0"/>
-          <a:chOff x="0" y="0"/>
-          <a:chExt cx="0" cy="0"/>
-        </a:xfrm>
-      </p:grpSpPr>
-      <p:sp>
-        <p:nvSpPr>
-          <p:cNvPr id="2" name="Title 1">
-            <a:extLst>
-              <a:ext uri="{FF2B5EF4-FFF2-40B4-BE49-F238E27FC236}">
-                <a16:creationId xmlns:a16="http://schemas.microsoft.com/office/drawing/2014/main" id="{65DFB025-3E1A-9CDA-C083-1C971AF701FB}"/>
-              </a:ext>
-            </a:extLst>
-          </p:cNvPr>
-          <p:cNvSpPr>
-            <a:spLocks noGrp="1"/>
-          </p:cNvSpPr>
-          <p:nvPr>
-            <p:ph type="title"/>
-          </p:nvPr>
-        </p:nvSpPr>
-        <p:spPr/>
-        <p:txBody>
-          <a:bodyPr/>
-          <a:lstStyle/>
-          <a:p>
-            <a:r>
-              <a:rPr lang="en-US" dirty="0"/>
-              <a:t>Tell me about yourself!</a:t>
-            </a:r>
-          </a:p>
-        </p:txBody>
-      </p:sp>
-      <p:sp>
-        <p:nvSpPr>
-          <p:cNvPr id="3" name="Content Placeholder 2">
-            <a:extLst>
-              <a:ext uri="{FF2B5EF4-FFF2-40B4-BE49-F238E27FC236}">
-                <a16:creationId xmlns:a16="http://schemas.microsoft.com/office/drawing/2014/main" id="{4E71609D-83B2-28F8-F9F7-8A7B5F735096}"/>
-              </a:ext>
-            </a:extLst>
-          </p:cNvPr>
-          <p:cNvSpPr>
-            <a:spLocks noGrp="1"/>
-          </p:cNvSpPr>
-          <p:nvPr>
-            <p:ph idx="1"/>
-          </p:nvPr>
-        </p:nvSpPr>
-        <p:spPr/>
-        <p:txBody>
-          <a:bodyPr/>
-          <a:lstStyle/>
-          <a:p>
-            <a:pPr marL="0" indent="0">
-              <a:buNone/>
-            </a:pPr>
-            <a:r>
-              <a:rPr lang="en-US" dirty="0"/>
-              <a:t>In your index cards:</a:t>
-            </a:r>
-          </a:p>
-          <a:p>
-            <a:pPr lvl="1"/>
-            <a:r>
-              <a:rPr lang="en-US" dirty="0"/>
-              <a:t>Name</a:t>
-            </a:r>
-          </a:p>
-          <a:p>
-            <a:pPr lvl="1"/>
-            <a:r>
-              <a:rPr lang="en-US" dirty="0"/>
-              <a:t>Year + Major </a:t>
-            </a:r>
-          </a:p>
-          <a:p>
-            <a:pPr lvl="1"/>
-            <a:r>
-              <a:rPr lang="en-US" dirty="0"/>
-              <a:t>Favorite sport / team</a:t>
-            </a:r>
-          </a:p>
-          <a:p>
-            <a:pPr lvl="1"/>
-            <a:r>
-              <a:rPr lang="en-US" dirty="0"/>
-              <a:t>One thing you're interested in learning from this class</a:t>
-            </a:r>
-          </a:p>
-        </p:txBody>
-      </p:sp>
-      <p:sp>
-        <p:nvSpPr>
-          <p:cNvPr id="4" name="Slide Number Placeholder 3">
-            <a:extLst>
-              <a:ext uri="{FF2B5EF4-FFF2-40B4-BE49-F238E27FC236}">
-                <a16:creationId xmlns:a16="http://schemas.microsoft.com/office/drawing/2014/main" id="{AF082B2D-DB76-A161-D92D-655EDCC741A4}"/>
-              </a:ext>
-            </a:extLst>
-          </p:cNvPr>
-          <p:cNvSpPr>
-            <a:spLocks noGrp="1"/>
-          </p:cNvSpPr>
-          <p:nvPr>
-            <p:ph type="sldNum" sz="quarter" idx="12"/>
-          </p:nvPr>
-        </p:nvSpPr>
-        <p:spPr/>
-        <p:txBody>
-          <a:bodyPr/>
-          <a:lstStyle/>
-          <a:p>
-            <a:fld id="{45C00377-489B-40EC-B059-26BDDD2E89B9}" type="slidenum">
-              <a:rPr lang="en-US" smtClean="0"/>
-              <a:pPr/>
-              <a:t>8</a:t>
-            </a:fld>
-            <a:endParaRPr lang="en-US" dirty="0"/>
-          </a:p>
-        </p:txBody>
-      </p:sp>
-    </p:spTree>
-    <p:extLst>
-      <p:ext uri="{BB962C8B-B14F-4D97-AF65-F5344CB8AC3E}">
-        <p14:creationId xmlns:p14="http://schemas.microsoft.com/office/powerpoint/2010/main" val="1929088294"/>
-      </p:ext>
-    </p:extLst>
-  </p:cSld>
-  <p:clrMapOvr>
-    <a:masterClrMapping/>
-  </p:clrMapOvr>
-</p:sld>
-</file>
-
 <file path=ppt/slides/slide9.xml><?xml version="1.0" encoding="utf-8"?>
 <p:sld xmlns:a="http://schemas.openxmlformats.org/drawingml/2006/main" xmlns:r="http://schemas.openxmlformats.org/officeDocument/2006/relationships" xmlns:p="http://schemas.openxmlformats.org/presentationml/2006/main">
   <p:cSld>
@@ -10601,110 +12204,74 @@
             </a:pPr>
             <a:r>
               <a:rPr lang="en-GB" dirty="0"/>
-              <a:t>Jot down a few questions you have had about sports performance:</a:t>
+              <a:t>List a few example of data or analytics being used in sports.</a:t>
+            </a:r>
+          </a:p>
+          <a:p>
+            <a:pPr marL="0" indent="0">
+              <a:buNone/>
+            </a:pPr>
+            <a:endParaRPr lang="en-GB" dirty="0"/>
+          </a:p>
+          <a:p>
+            <a:pPr marL="0" indent="0">
+              <a:buNone/>
+            </a:pPr>
+            <a:r>
+              <a:rPr lang="en-GB" dirty="0"/>
+              <a:t>In pairs</a:t>
+            </a:r>
+          </a:p>
+          <a:p>
+            <a:pPr marL="514350" lvl="0" indent="-514350">
+              <a:buFont typeface="+mj-lt"/>
+              <a:buAutoNum type="arabicPeriod"/>
+            </a:pPr>
+            <a:r>
+              <a:rPr lang="en-GB" dirty="0"/>
+              <a:t>Give each person an opportunity to share.</a:t>
+            </a:r>
+          </a:p>
+          <a:p>
+            <a:pPr marL="514350" lvl="0" indent="-514350">
+              <a:buFont typeface="+mj-lt"/>
+              <a:buAutoNum type="arabicPeriod"/>
+            </a:pPr>
+            <a:r>
+              <a:rPr lang="en-GB" dirty="0"/>
+              <a:t>Select one or two ideas to discuss further.</a:t>
+            </a:r>
+          </a:p>
+          <a:p>
+            <a:pPr marL="514350" indent="-514350">
+              <a:buFont typeface="+mj-lt"/>
+              <a:buAutoNum type="arabicPeriod"/>
+            </a:pPr>
+            <a:r>
+              <a:rPr lang="en-GB" dirty="0"/>
+              <a:t>For each selected idea, consider:</a:t>
             </a:r>
           </a:p>
           <a:p>
             <a:pPr lvl="1"/>
             <a:r>
               <a:rPr lang="en-GB" dirty="0"/>
-              <a:t>Watching a game or competition</a:t>
+              <a:t>What information was being collected or presented? </a:t>
             </a:r>
           </a:p>
           <a:p>
             <a:pPr lvl="1"/>
             <a:r>
               <a:rPr lang="en-GB" dirty="0"/>
-              <a:t>Playing, coaching, or training for a sport</a:t>
+              <a:t>What was it being used for? To understand? To decide? </a:t>
             </a:r>
           </a:p>
           <a:p>
             <a:pPr lvl="1"/>
             <a:r>
               <a:rPr lang="en-GB" dirty="0"/>
-              <a:t>Comparing athletes</a:t>
-            </a:r>
-          </a:p>
-          <a:p>
-            <a:pPr lvl="1"/>
-            <a:r>
-              <a:rPr lang="en-GB" dirty="0"/>
-              <a:t>Following recruiting or roster decisions</a:t>
-            </a:r>
-          </a:p>
-          <a:p>
-            <a:pPr lvl="1"/>
-            <a:r>
-              <a:rPr lang="en-GB" dirty="0"/>
-              <a:t>Hearing a sports claim that seemed questionable</a:t>
-            </a:r>
-          </a:p>
-        </p:txBody>
-      </p:sp>
-      <p:sp>
-        <p:nvSpPr>
-          <p:cNvPr id="5" name="TextBox 4">
-            <a:extLst>
-              <a:ext uri="{FF2B5EF4-FFF2-40B4-BE49-F238E27FC236}">
-                <a16:creationId xmlns:a16="http://schemas.microsoft.com/office/drawing/2014/main" id="{92F0E46E-31B9-6E13-5981-34BD73251BBC}"/>
-              </a:ext>
-            </a:extLst>
-          </p:cNvPr>
-          <p:cNvSpPr txBox="1"/>
-          <p:nvPr/>
-        </p:nvSpPr>
-        <p:spPr>
-          <a:xfrm>
-            <a:off x="5255822" y="4484192"/>
-            <a:ext cx="6097978" cy="1692771"/>
-          </a:xfrm>
-          <a:prstGeom prst="rect">
-            <a:avLst/>
-          </a:prstGeom>
-          <a:noFill/>
-        </p:spPr>
-        <p:txBody>
-          <a:bodyPr wrap="square">
-            <a:spAutoFit/>
-          </a:bodyPr>
-          <a:lstStyle/>
-          <a:p>
-            <a:r>
-              <a:rPr lang="en-GB" sz="2400" dirty="0"/>
-              <a:t>Possible starting phrases:</a:t>
-            </a:r>
-          </a:p>
-          <a:p>
-            <a:pPr lvl="1"/>
-            <a:r>
-              <a:rPr lang="en-GB" sz="2000" i="1" dirty="0"/>
-              <a:t>“I have always wondered why…”</a:t>
-            </a:r>
-            <a:endParaRPr lang="en-GB" sz="2000" dirty="0"/>
-          </a:p>
-          <a:p>
-            <a:pPr lvl="1"/>
-            <a:r>
-              <a:rPr lang="en-GB" sz="2000" i="1" dirty="0"/>
-              <a:t>“How could a team determine whether…”</a:t>
-            </a:r>
-            <a:endParaRPr lang="en-GB" sz="2000" dirty="0"/>
-          </a:p>
-          <a:p>
-            <a:pPr lvl="1"/>
-            <a:r>
-              <a:rPr lang="en-GB" sz="2000" i="1" dirty="0"/>
-              <a:t>“How would we know if…”</a:t>
-            </a:r>
-            <a:endParaRPr lang="en-GB" sz="2000" dirty="0"/>
-          </a:p>
-          <a:p>
-            <a:pPr lvl="1"/>
-            <a:r>
-              <a:rPr lang="en-GB" sz="2000" i="1" dirty="0"/>
-              <a:t>“Should a coach…”</a:t>
-            </a:r>
-            <a:endParaRPr lang="en-GB" sz="2000" dirty="0"/>
+              <a:t>Did you find it useful, convincing, or questionable?</a:t>
+            </a:r>
           </a:p>
         </p:txBody>
       </p:sp>
@@ -10769,39 +12336,26 @@
                                   </p:childTnLst>
                                 </p:cTn>
                               </p:par>
+                            </p:childTnLst>
+                          </p:cTn>
+                        </p:par>
+                      </p:childTnLst>
+                    </p:cTn>
+                  </p:par>
+                  <p:par>
+                    <p:cTn id="7" fill="hold">
+                      <p:stCondLst>
+                        <p:cond delay="indefinite"/>
+                      </p:stCondLst>
+                      <p:childTnLst>
+                        <p:par>
+                          <p:cTn id="8" fill="hold">
+                            <p:stCondLst>
+                              <p:cond delay="0"/>
+                            </p:stCondLst>
+                            <p:childTnLst>
                               <p:par>
-                                <p:cTn id="7" presetID="1" presetClass="entr" presetSubtype="0" fill="hold" grpId="0" nodeType="withEffect">
-                                  <p:stCondLst>
-                                    <p:cond delay="0"/>
-                                  </p:stCondLst>
-                                  <p:childTnLst>
-                                    <p:set>
-                                      <p:cBhvr>
-                                        <p:cTn id="8" dur="1" fill="hold">
-                                          <p:stCondLst>
-                                            <p:cond delay="0"/>
-                                          </p:stCondLst>
-                                        </p:cTn>
-                                        <p:tgtEl>
-                                          <p:spTgt spid="3">
-                                            <p:txEl>
-                                              <p:pRg st="1" end="1"/>
-                                            </p:txEl>
-                                          </p:spTgt>
-                                        </p:tgtEl>
-                                        <p:attrNameLst>
-                                          <p:attrName>style.visibility</p:attrName>
-                                        </p:attrNameLst>
-                                      </p:cBhvr>
-                                      <p:to>
-                                        <p:strVal val="visible"/>
-                                      </p:to>
-                                    </p:set>
-                                  </p:childTnLst>
-                                </p:cTn>
-                              </p:par>
-                              <p:par>
-                                <p:cTn id="9" presetID="1" presetClass="entr" presetSubtype="0" fill="hold" grpId="0" nodeType="withEffect">
+                                <p:cTn id="9" presetID="1" presetClass="entr" presetSubtype="0" fill="hold" grpId="0" nodeType="clickEffect">
                                   <p:stCondLst>
                                     <p:cond delay="0"/>
                                   </p:stCondLst>
@@ -10831,15 +12385,33 @@
                                   </p:childTnLst>
                                 </p:cTn>
                               </p:par>
+                            </p:childTnLst>
+                          </p:cTn>
+                        </p:par>
+                      </p:childTnLst>
+                    </p:cTn>
+                  </p:par>
+                  <p:par>
+                    <p:cTn id="11" fill="hold">
+                      <p:stCondLst>
+                        <p:cond delay="indefinite"/>
+                      </p:stCondLst>
+                      <p:childTnLst>
+                        <p:par>
+                          <p:cTn id="12" fill="hold">
+                            <p:stCondLst>
+                              <p:cond delay="0"/>
+                            </p:stCondLst>
+                            <p:childTnLst>
                               <p:par>
-                                <p:cTn id="11" presetID="1" presetClass="entr" presetSubtype="0" fill="hold" grpId="0" nodeType="withEffect">
+                                <p:cTn id="13" presetID="1" presetClass="entr" presetSubtype="0" fill="hold" grpId="0" nodeType="clickEffect">
                                   <p:stCondLst>
                                     <p:cond delay="0"/>
                                   </p:stCondLst>
                                   <p:childTnLst>
                                     <p:set>
                                       <p:cBhvr>
-                                        <p:cTn id="12" dur="1" fill="hold">
+                                        <p:cTn id="14" dur="1" fill="hold">
                                           <p:stCondLst>
                                             <p:cond delay="0"/>
                                           </p:stCondLst>
@@ -10862,15 +12434,33 @@
                                   </p:childTnLst>
                                 </p:cTn>
                               </p:par>
+                            </p:childTnLst>
+                          </p:cTn>
+                        </p:par>
+                      </p:childTnLst>
+                    </p:cTn>
+                  </p:par>
+                  <p:par>
+                    <p:cTn id="15" fill="hold">
+                      <p:stCondLst>
+                        <p:cond delay="indefinite"/>
+                      </p:stCondLst>
+                      <p:childTnLst>
+                        <p:par>
+                          <p:cTn id="16" fill="hold">
+                            <p:stCondLst>
+                              <p:cond delay="0"/>
+                            </p:stCondLst>
+                            <p:childTnLst>
                               <p:par>
-                                <p:cTn id="13" presetID="1" presetClass="entr" presetSubtype="0" fill="hold" grpId="0" nodeType="withEffect">
+                                <p:cTn id="17" presetID="1" presetClass="entr" presetSubtype="0" fill="hold" grpId="0" nodeType="clickEffect">
                                   <p:stCondLst>
                                     <p:cond delay="0"/>
                                   </p:stCondLst>
                                   <p:childTnLst>
                                     <p:set>
                                       <p:cBhvr>
-                                        <p:cTn id="14" dur="1" fill="hold">
+                                        <p:cTn id="18" dur="1" fill="hold">
                                           <p:stCondLst>
                                             <p:cond delay="0"/>
                                           </p:stCondLst>
@@ -10893,15 +12483,33 @@
                                   </p:childTnLst>
                                 </p:cTn>
                               </p:par>
+                            </p:childTnLst>
+                          </p:cTn>
+                        </p:par>
+                      </p:childTnLst>
+                    </p:cTn>
+                  </p:par>
+                  <p:par>
+                    <p:cTn id="19" fill="hold">
+                      <p:stCondLst>
+                        <p:cond delay="indefinite"/>
+                      </p:stCondLst>
+                      <p:childTnLst>
+                        <p:par>
+                          <p:cTn id="20" fill="hold">
+                            <p:stCondLst>
+                              <p:cond delay="0"/>
+                            </p:stCondLst>
+                            <p:childTnLst>
                               <p:par>
-                                <p:cTn id="15" presetID="1" presetClass="entr" presetSubtype="0" fill="hold" grpId="0" nodeType="withEffect">
+                                <p:cTn id="21" presetID="1" presetClass="entr" presetSubtype="0" fill="hold" grpId="0" nodeType="clickEffect">
                                   <p:stCondLst>
                                     <p:cond delay="0"/>
                                   </p:stCondLst>
                                   <p:childTnLst>
                                     <p:set>
                                       <p:cBhvr>
-                                        <p:cTn id="16" dur="1" fill="hold">
+                                        <p:cTn id="22" dur="1" fill="hold">
                                           <p:stCondLst>
                                             <p:cond delay="0"/>
                                           </p:stCondLst>
@@ -10924,39 +12532,25 @@
                                   </p:childTnLst>
                                 </p:cTn>
                               </p:par>
-                            </p:childTnLst>
-                          </p:cTn>
-                        </p:par>
-                      </p:childTnLst>
-                    </p:cTn>
-                  </p:par>
-                  <p:par>
-                    <p:cTn id="17" fill="hold">
-                      <p:stCondLst>
-                        <p:cond delay="indefinite"/>
-                      </p:stCondLst>
-                      <p:childTnLst>
-                        <p:par>
-                          <p:cTn id="18" fill="hold">
-                            <p:stCondLst>
-                              <p:cond delay="0"/>
-                            </p:stCondLst>
-                            <p:childTnLst>
                               <p:par>
-                                <p:cTn id="19" presetID="1" presetClass="entr" presetSubtype="0" fill="hold" grpId="0" nodeType="clickEffect">
+                                <p:cTn id="23" presetID="1" presetClass="entr" presetSubtype="0" fill="hold" grpId="0" nodeType="withEffect">
                                   <p:stCondLst>
                                     <p:cond delay="0"/>
                                   </p:stCondLst>
                                   <p:childTnLst>
                                     <p:set>
                                       <p:cBhvr>
-                                        <p:cTn id="20" dur="1" fill="hold">
+                                        <p:cTn id="24" dur="1" fill="hold">
                                           <p:stCondLst>
                                             <p:cond delay="0"/>
                                           </p:stCondLst>
                                         </p:cTn>
                                         <p:tgtEl>
-                                          <p:spTgt spid="5"/>
+                                          <p:spTgt spid="3">
+                                            <p:txEl>
+                                              <p:pRg st="6" end="6"/>
+                                            </p:txEl>
+                                          </p:spTgt>
                                         </p:tgtEl>
                                         <p:attrNameLst>
                                           <p:attrName>style.visibility</p:attrName>
@@ -10969,39 +12563,56 @@
                                   </p:childTnLst>
                                 </p:cTn>
                               </p:par>
-                            </p:childTnLst>
-                          </p:cTn>
-                        </p:par>
-                      </p:childTnLst>
-                    </p:cTn>
-                  </p:par>
-                  <p:par>
-                    <p:cTn id="21" fill="hold">
-                      <p:stCondLst>
-                        <p:cond delay="indefinite"/>
-                      </p:stCondLst>
-                      <p:childTnLst>
-                        <p:par>
-                          <p:cTn id="22" fill="hold">
-                            <p:stCondLst>
-                              <p:cond delay="0"/>
-                            </p:stCondLst>
-                            <p:childTnLst>
                               <p:par>
-                                <p:cTn id="23" presetID="1" presetClass="entr" presetSubtype="0" fill="hold" grpId="1" nodeType="clickEffect">
+                                <p:cTn id="25" presetID="1" presetClass="entr" presetSubtype="0" fill="hold" grpId="0" nodeType="withEffect">
                                   <p:stCondLst>
                                     <p:cond delay="0"/>
                                   </p:stCondLst>
                                   <p:childTnLst>
                                     <p:set>
                                       <p:cBhvr>
-                                        <p:cTn id="24" dur="1" fill="hold">
+                                        <p:cTn id="26" dur="1" fill="hold">
                                           <p:stCondLst>
                                             <p:cond delay="0"/>
                                           </p:stCondLst>
                                         </p:cTn>
                                         <p:tgtEl>
-                                          <p:spTgt spid="5"/>
+                                          <p:spTgt spid="3">
+                                            <p:txEl>
+                                              <p:pRg st="7" end="7"/>
+                                            </p:txEl>
+                                          </p:spTgt>
+                                        </p:tgtEl>
+                                        <p:attrNameLst>
+                                          <p:attrName>style.visibility</p:attrName>
+                                        </p:attrNameLst>
+                                      </p:cBhvr>
+                                      <p:to>
+                                        <p:strVal val="visible"/>
+                                      </p:to>
+                                    </p:set>
+                                  </p:childTnLst>
+                                </p:cTn>
+                              </p:par>
+                              <p:par>
+                                <p:cTn id="27" presetID="1" presetClass="entr" presetSubtype="0" fill="hold" grpId="0" nodeType="withEffect">
+                                  <p:stCondLst>
+                                    <p:cond delay="0"/>
+                                  </p:stCondLst>
+                                  <p:childTnLst>
+                                    <p:set>
+                                      <p:cBhvr>
+                                        <p:cTn id="28" dur="1" fill="hold">
+                                          <p:stCondLst>
+                                            <p:cond delay="0"/>
+                                          </p:stCondLst>
+                                        </p:cTn>
+                                        <p:tgtEl>
+                                          <p:spTgt spid="3">
+                                            <p:txEl>
+                                              <p:pRg st="8" end="8"/>
+                                            </p:txEl>
+                                          </p:spTgt>
                                         </p:tgtEl>
                                         <p:attrNameLst>
                                           <p:attrName>style.visibility</p:attrName>
@@ -11043,8 +12654,6 @@
     </p:tnLst>
     <p:bldLst>
       <p:bldP spid="3" grpId="0" build="p"/>
-      <p:bldP spid="5" grpId="0"/>
-      <p:bldP spid="5" grpId="1"/>
     </p:bldLst>
   </p:timing>
 </p:sld>

--- a/pptx/Lecture0.pptx
+++ b/pptx/Lecture0.pptx
@@ -5,7 +5,7 @@
     <p:sldMasterId id="2147483648" r:id="rId1"/>
   </p:sldMasterIdLst>
   <p:notesMasterIdLst>
-    <p:notesMasterId r:id="rId20"/>
+    <p:notesMasterId r:id="rId21"/>
   </p:notesMasterIdLst>
   <p:sldIdLst>
     <p:sldId id="256" r:id="rId2"/>
@@ -14,18 +14,19 @@
     <p:sldId id="280" r:id="rId5"/>
     <p:sldId id="294" r:id="rId6"/>
     <p:sldId id="295" r:id="rId7"/>
-    <p:sldId id="258" r:id="rId8"/>
-    <p:sldId id="286" r:id="rId9"/>
-    <p:sldId id="285" r:id="rId10"/>
-    <p:sldId id="291" r:id="rId11"/>
-    <p:sldId id="296" r:id="rId12"/>
-    <p:sldId id="282" r:id="rId13"/>
-    <p:sldId id="263" r:id="rId14"/>
-    <p:sldId id="279" r:id="rId15"/>
-    <p:sldId id="267" r:id="rId16"/>
-    <p:sldId id="292" r:id="rId17"/>
-    <p:sldId id="283" r:id="rId18"/>
-    <p:sldId id="284" r:id="rId19"/>
+    <p:sldId id="272" r:id="rId8"/>
+    <p:sldId id="258" r:id="rId9"/>
+    <p:sldId id="286" r:id="rId10"/>
+    <p:sldId id="285" r:id="rId11"/>
+    <p:sldId id="291" r:id="rId12"/>
+    <p:sldId id="296" r:id="rId13"/>
+    <p:sldId id="282" r:id="rId14"/>
+    <p:sldId id="263" r:id="rId15"/>
+    <p:sldId id="279" r:id="rId16"/>
+    <p:sldId id="267" r:id="rId17"/>
+    <p:sldId id="292" r:id="rId18"/>
+    <p:sldId id="283" r:id="rId19"/>
+    <p:sldId id="284" r:id="rId20"/>
   </p:sldIdLst>
   <p:sldSz cx="12192000" cy="6858000"/>
   <p:notesSz cx="6858000" cy="9144000"/>
@@ -214,7 +215,7 @@
           <a:p>
             <a:fld id="{D77EEDEE-9F25-1248-8553-BC05D4D1E003}" type="datetimeFigureOut">
               <a:rPr lang="en-US" smtClean="0"/>
-              <a:t>8/25/26</a:t>
+              <a:t>8/25/2026</a:t>
             </a:fld>
             <a:endParaRPr lang="en-US"/>
           </a:p>
@@ -612,11 +613,19 @@
           <a:p>
             <a:r>
               <a:rPr lang="en-US" dirty="0"/>
-              <a:t>Groups: If there are issues, please speak to me asap</a:t>
-            </a:r>
-          </a:p>
-          <a:p>
+              <a:t>Point </a:t>
+            </a:r>
+            <a:r>
+              <a:rPr lang="en-US" dirty="0" err="1"/>
+              <a:t>disctibution</a:t>
+            </a:r>
             <a:endParaRPr lang="en-US" dirty="0"/>
+          </a:p>
+          <a:p>
+            <a:r>
+              <a:rPr lang="en-US" dirty="0"/>
+              <a:t>Available in syllabus</a:t>
+            </a:r>
           </a:p>
         </p:txBody>
       </p:sp>
@@ -646,7 +655,7 @@
     </p:spTree>
     <p:extLst>
       <p:ext uri="{BB962C8B-B14F-4D97-AF65-F5344CB8AC3E}">
-        <p14:creationId xmlns:p14="http://schemas.microsoft.com/office/powerpoint/2010/main" val="634966825"/>
+        <p14:creationId xmlns:p14="http://schemas.microsoft.com/office/powerpoint/2010/main" val="2870696525"/>
       </p:ext>
     </p:extLst>
   </p:cSld>
@@ -702,8 +711,11 @@
           <a:p>
             <a:r>
               <a:rPr lang="en-US" dirty="0"/>
-              <a:t>I do not get a sense of your understanding until the exams. Hence it is critical for you to reach out if you need help. If the slides look wrong or need clarification on anything, PLEASE email me or let me know in class. This is the only way I can help you</a:t>
-            </a:r>
+              <a:t>Groups: If there are issues, please speak to me asap</a:t>
+            </a:r>
+          </a:p>
+          <a:p>
+            <a:endParaRPr lang="en-US" dirty="0"/>
           </a:p>
         </p:txBody>
       </p:sp>
@@ -725,6 +737,93 @@
             <a:fld id="{1560C251-82B7-4253-A774-38D73C276BCE}" type="slidenum">
               <a:rPr lang="en-US" smtClean="0"/>
               <a:t>15</a:t>
+            </a:fld>
+            <a:endParaRPr lang="en-US" dirty="0"/>
+          </a:p>
+        </p:txBody>
+      </p:sp>
+    </p:spTree>
+    <p:extLst>
+      <p:ext uri="{BB962C8B-B14F-4D97-AF65-F5344CB8AC3E}">
+        <p14:creationId xmlns:p14="http://schemas.microsoft.com/office/powerpoint/2010/main" val="634966825"/>
+      </p:ext>
+    </p:extLst>
+  </p:cSld>
+  <p:clrMapOvr>
+    <a:masterClrMapping/>
+  </p:clrMapOvr>
+</p:notes>
+</file>
+
+<file path=ppt/notesSlides/notesSlide12.xml><?xml version="1.0" encoding="utf-8"?>
+<p:notes xmlns:a="http://schemas.openxmlformats.org/drawingml/2006/main" xmlns:r="http://schemas.openxmlformats.org/officeDocument/2006/relationships" xmlns:p="http://schemas.openxmlformats.org/presentationml/2006/main">
+  <p:cSld>
+    <p:spTree>
+      <p:nvGrpSpPr>
+        <p:cNvPr id="1" name=""/>
+        <p:cNvGrpSpPr/>
+        <p:nvPr/>
+      </p:nvGrpSpPr>
+      <p:grpSpPr>
+        <a:xfrm>
+          <a:off x="0" y="0"/>
+          <a:ext cx="0" cy="0"/>
+          <a:chOff x="0" y="0"/>
+          <a:chExt cx="0" cy="0"/>
+        </a:xfrm>
+      </p:grpSpPr>
+      <p:sp>
+        <p:nvSpPr>
+          <p:cNvPr id="2" name="Slide Image Placeholder 1"/>
+          <p:cNvSpPr>
+            <a:spLocks noGrp="1" noRot="1" noChangeAspect="1"/>
+          </p:cNvSpPr>
+          <p:nvPr>
+            <p:ph type="sldImg"/>
+          </p:nvPr>
+        </p:nvSpPr>
+        <p:spPr/>
+      </p:sp>
+      <p:sp>
+        <p:nvSpPr>
+          <p:cNvPr id="3" name="Notes Placeholder 2"/>
+          <p:cNvSpPr>
+            <a:spLocks noGrp="1"/>
+          </p:cNvSpPr>
+          <p:nvPr>
+            <p:ph type="body" idx="1"/>
+          </p:nvPr>
+        </p:nvSpPr>
+        <p:spPr/>
+        <p:txBody>
+          <a:bodyPr/>
+          <a:lstStyle/>
+          <a:p>
+            <a:r>
+              <a:rPr lang="en-US" dirty="0"/>
+              <a:t>I do not get a sense of your understanding until the exams. Hence it is critical for you to reach out if you need help. If the slides look wrong or need clarification on anything, PLEASE email me or let me know in class. This is the only way I can help you</a:t>
+            </a:r>
+          </a:p>
+        </p:txBody>
+      </p:sp>
+      <p:sp>
+        <p:nvSpPr>
+          <p:cNvPr id="4" name="Slide Number Placeholder 3"/>
+          <p:cNvSpPr>
+            <a:spLocks noGrp="1"/>
+          </p:cNvSpPr>
+          <p:nvPr>
+            <p:ph type="sldNum" sz="quarter" idx="5"/>
+          </p:nvPr>
+        </p:nvSpPr>
+        <p:spPr/>
+        <p:txBody>
+          <a:bodyPr/>
+          <a:lstStyle/>
+          <a:p>
+            <a:fld id="{1560C251-82B7-4253-A774-38D73C276BCE}" type="slidenum">
+              <a:rPr lang="en-US" smtClean="0"/>
+              <a:t>16</a:t>
             </a:fld>
             <a:endParaRPr lang="en-US" dirty="0"/>
           </a:p>
@@ -1306,39 +1405,8 @@
             <a:pPr lvl="0"/>
             <a:r>
               <a:rPr lang="en-GB" dirty="0"/>
-              <a:t>What do you love about teaching the course? How long have you been teaching? What is your </a:t>
-            </a:r>
-            <a:r>
-              <a:rPr lang="en-GB" dirty="0" err="1"/>
-              <a:t>favorite</a:t>
-            </a:r>
-            <a:r>
-              <a:rPr lang="en-GB" dirty="0"/>
-              <a:t> thing about teaching?</a:t>
-            </a:r>
-          </a:p>
-          <a:p>
-            <a:pPr lvl="0"/>
-            <a:r>
-              <a:rPr lang="en-GB" dirty="0"/>
-              <a:t>Why did you choose to study and work in your discipline? What do you love about the discipline? How you see the discipline affecting the world and vice versa?</a:t>
-            </a:r>
-          </a:p>
-          <a:p>
-            <a:pPr lvl="0"/>
-            <a:r>
-              <a:rPr lang="en-GB" dirty="0"/>
-              <a:t>What is your research agenda and how does it relate to the course? (if applicable)</a:t>
-            </a:r>
-          </a:p>
-          <a:p>
-            <a:pPr lvl="0"/>
-            <a:r>
-              <a:rPr lang="en-GB" dirty="0"/>
-              <a:t>Personal details that you feel comfortable sharing, such as place of birth, family details, hobbies and interests, future plans.</a:t>
-            </a:r>
-          </a:p>
-          <a:p>
+              <a:t>Its not about the stats</a:t>
+            </a:r>
             <a:endParaRPr lang="en-US" dirty="0"/>
           </a:p>
         </p:txBody>
@@ -1431,42 +1499,8 @@
           <a:p>
             <a:r>
               <a:rPr lang="en-US" dirty="0"/>
-              <a:t>This is general structure</a:t>
-            </a:r>
-          </a:p>
-          <a:p>
-            <a:r>
-              <a:rPr lang="en-US" dirty="0"/>
-              <a:t>Personal story: Similar class immediately started with case studies</a:t>
-            </a:r>
-          </a:p>
-          <a:p>
-            <a:r>
-              <a:rPr lang="en-US" dirty="0"/>
-              <a:t>Interesting but did not </a:t>
-            </a:r>
-            <a:r>
-              <a:rPr lang="en-US" dirty="0" err="1"/>
-              <a:t>equipt</a:t>
-            </a:r>
-            <a:r>
-              <a:rPr lang="en-US" dirty="0"/>
-              <a:t> me with the knowledge of how its done</a:t>
-            </a:r>
-          </a:p>
-          <a:p>
-            <a:r>
-              <a:rPr lang="en-US" dirty="0"/>
-              <a:t>My aim is to go over the steps and then later discuss how this is applied </a:t>
-            </a:r>
-            <a:r>
-              <a:rPr lang="en-US" dirty="0" err="1"/>
-              <a:t>irl</a:t>
-            </a:r>
-            <a:endParaRPr lang="en-US" dirty="0"/>
-          </a:p>
-          <a:p>
-            <a:endParaRPr lang="en-US" dirty="0"/>
+              <a:t>Ultimately: statistics to identify trends in athletic performance.</a:t>
+            </a:r>
           </a:p>
         </p:txBody>
       </p:sp>
@@ -1488,6 +1522,127 @@
             <a:fld id="{1560C251-82B7-4253-A774-38D73C276BCE}" type="slidenum">
               <a:rPr lang="en-US" smtClean="0"/>
               <a:t>7</a:t>
+            </a:fld>
+            <a:endParaRPr lang="en-US" dirty="0"/>
+          </a:p>
+        </p:txBody>
+      </p:sp>
+    </p:spTree>
+    <p:extLst>
+      <p:ext uri="{BB962C8B-B14F-4D97-AF65-F5344CB8AC3E}">
+        <p14:creationId xmlns:p14="http://schemas.microsoft.com/office/powerpoint/2010/main" val="328982609"/>
+      </p:ext>
+    </p:extLst>
+  </p:cSld>
+  <p:clrMapOvr>
+    <a:masterClrMapping/>
+  </p:clrMapOvr>
+</p:notes>
+</file>
+
+<file path=ppt/notesSlides/notesSlide8.xml><?xml version="1.0" encoding="utf-8"?>
+<p:notes xmlns:a="http://schemas.openxmlformats.org/drawingml/2006/main" xmlns:r="http://schemas.openxmlformats.org/officeDocument/2006/relationships" xmlns:p="http://schemas.openxmlformats.org/presentationml/2006/main">
+  <p:cSld>
+    <p:spTree>
+      <p:nvGrpSpPr>
+        <p:cNvPr id="1" name=""/>
+        <p:cNvGrpSpPr/>
+        <p:nvPr/>
+      </p:nvGrpSpPr>
+      <p:grpSpPr>
+        <a:xfrm>
+          <a:off x="0" y="0"/>
+          <a:ext cx="0" cy="0"/>
+          <a:chOff x="0" y="0"/>
+          <a:chExt cx="0" cy="0"/>
+        </a:xfrm>
+      </p:grpSpPr>
+      <p:sp>
+        <p:nvSpPr>
+          <p:cNvPr id="2" name="Slide Image Placeholder 1"/>
+          <p:cNvSpPr>
+            <a:spLocks noGrp="1" noRot="1" noChangeAspect="1"/>
+          </p:cNvSpPr>
+          <p:nvPr>
+            <p:ph type="sldImg"/>
+          </p:nvPr>
+        </p:nvSpPr>
+        <p:spPr/>
+      </p:sp>
+      <p:sp>
+        <p:nvSpPr>
+          <p:cNvPr id="3" name="Notes Placeholder 2"/>
+          <p:cNvSpPr>
+            <a:spLocks noGrp="1"/>
+          </p:cNvSpPr>
+          <p:nvPr>
+            <p:ph type="body" idx="1"/>
+          </p:nvPr>
+        </p:nvSpPr>
+        <p:spPr/>
+        <p:txBody>
+          <a:bodyPr/>
+          <a:lstStyle/>
+          <a:p>
+            <a:r>
+              <a:rPr lang="en-US" dirty="0"/>
+              <a:t>This is general structure</a:t>
+            </a:r>
+          </a:p>
+          <a:p>
+            <a:r>
+              <a:rPr lang="en-US" dirty="0"/>
+              <a:t>Personal story: Similar class immediately started with case studies</a:t>
+            </a:r>
+          </a:p>
+          <a:p>
+            <a:r>
+              <a:rPr lang="en-US" dirty="0"/>
+              <a:t>Interesting but did not </a:t>
+            </a:r>
+            <a:r>
+              <a:rPr lang="en-US" dirty="0" err="1"/>
+              <a:t>equipt</a:t>
+            </a:r>
+            <a:r>
+              <a:rPr lang="en-US" dirty="0"/>
+              <a:t> me with the knowledge of how its done</a:t>
+            </a:r>
+          </a:p>
+          <a:p>
+            <a:r>
+              <a:rPr lang="en-US" dirty="0"/>
+              <a:t>My aim is to go over the steps and then later discuss how this is applied </a:t>
+            </a:r>
+            <a:r>
+              <a:rPr lang="en-US" dirty="0" err="1"/>
+              <a:t>irl</a:t>
+            </a:r>
+            <a:endParaRPr lang="en-US" dirty="0"/>
+          </a:p>
+          <a:p>
+            <a:endParaRPr lang="en-US" dirty="0"/>
+          </a:p>
+        </p:txBody>
+      </p:sp>
+      <p:sp>
+        <p:nvSpPr>
+          <p:cNvPr id="4" name="Slide Number Placeholder 3"/>
+          <p:cNvSpPr>
+            <a:spLocks noGrp="1"/>
+          </p:cNvSpPr>
+          <p:nvPr>
+            <p:ph type="sldNum" sz="quarter" idx="5"/>
+          </p:nvPr>
+        </p:nvSpPr>
+        <p:spPr/>
+        <p:txBody>
+          <a:bodyPr/>
+          <a:lstStyle/>
+          <a:p>
+            <a:fld id="{1560C251-82B7-4253-A774-38D73C276BCE}" type="slidenum">
+              <a:rPr lang="en-US" smtClean="0"/>
+              <a:t>8</a:t>
             </a:fld>
             <a:endParaRPr lang="en-US" dirty="0"/>
           </a:p>
@@ -1506,7 +1661,7 @@
 </p:notes>
 </file>
 
-<file path=ppt/notesSlides/notesSlide8.xml><?xml version="1.0" encoding="utf-8"?>
+<file path=ppt/notesSlides/notesSlide9.xml><?xml version="1.0" encoding="utf-8"?>
 <p:notes xmlns:a="http://schemas.openxmlformats.org/drawingml/2006/main" xmlns:r="http://schemas.openxmlformats.org/officeDocument/2006/relationships" xmlns:p="http://schemas.openxmlformats.org/presentationml/2006/main">
   <p:cSld>
     <p:spTree>
@@ -1651,7 +1806,7 @@
           <a:p>
             <a:fld id="{1560C251-82B7-4253-A774-38D73C276BCE}" type="slidenum">
               <a:rPr lang="en-US" smtClean="0"/>
-              <a:t>12</a:t>
+              <a:t>13</a:t>
             </a:fld>
             <a:endParaRPr lang="en-US" dirty="0"/>
           </a:p>
@@ -1661,104 +1816,6 @@
     <p:extLst>
       <p:ext uri="{BB962C8B-B14F-4D97-AF65-F5344CB8AC3E}">
         <p14:creationId xmlns:p14="http://schemas.microsoft.com/office/powerpoint/2010/main" val="3038081930"/>
-      </p:ext>
-    </p:extLst>
-  </p:cSld>
-  <p:clrMapOvr>
-    <a:masterClrMapping/>
-  </p:clrMapOvr>
-</p:notes>
-</file>
-
-<file path=ppt/notesSlides/notesSlide9.xml><?xml version="1.0" encoding="utf-8"?>
-<p:notes xmlns:a="http://schemas.openxmlformats.org/drawingml/2006/main" xmlns:r="http://schemas.openxmlformats.org/officeDocument/2006/relationships" xmlns:p="http://schemas.openxmlformats.org/presentationml/2006/main">
-  <p:cSld>
-    <p:spTree>
-      <p:nvGrpSpPr>
-        <p:cNvPr id="1" name=""/>
-        <p:cNvGrpSpPr/>
-        <p:nvPr/>
-      </p:nvGrpSpPr>
-      <p:grpSpPr>
-        <a:xfrm>
-          <a:off x="0" y="0"/>
-          <a:ext cx="0" cy="0"/>
-          <a:chOff x="0" y="0"/>
-          <a:chExt cx="0" cy="0"/>
-        </a:xfrm>
-      </p:grpSpPr>
-      <p:sp>
-        <p:nvSpPr>
-          <p:cNvPr id="2" name="Slide Image Placeholder 1"/>
-          <p:cNvSpPr>
-            <a:spLocks noGrp="1" noRot="1" noChangeAspect="1"/>
-          </p:cNvSpPr>
-          <p:nvPr>
-            <p:ph type="sldImg"/>
-          </p:nvPr>
-        </p:nvSpPr>
-        <p:spPr/>
-      </p:sp>
-      <p:sp>
-        <p:nvSpPr>
-          <p:cNvPr id="3" name="Notes Placeholder 2"/>
-          <p:cNvSpPr>
-            <a:spLocks noGrp="1"/>
-          </p:cNvSpPr>
-          <p:nvPr>
-            <p:ph type="body" idx="1"/>
-          </p:nvPr>
-        </p:nvSpPr>
-        <p:spPr/>
-        <p:txBody>
-          <a:bodyPr/>
-          <a:lstStyle/>
-          <a:p>
-            <a:r>
-              <a:rPr lang="en-US" dirty="0"/>
-              <a:t>Point </a:t>
-            </a:r>
-            <a:r>
-              <a:rPr lang="en-US" dirty="0" err="1"/>
-              <a:t>disctibution</a:t>
-            </a:r>
-            <a:endParaRPr lang="en-US" dirty="0"/>
-          </a:p>
-          <a:p>
-            <a:r>
-              <a:rPr lang="en-US" dirty="0"/>
-              <a:t>Available in syllabus</a:t>
-            </a:r>
-          </a:p>
-        </p:txBody>
-      </p:sp>
-      <p:sp>
-        <p:nvSpPr>
-          <p:cNvPr id="4" name="Slide Number Placeholder 3"/>
-          <p:cNvSpPr>
-            <a:spLocks noGrp="1"/>
-          </p:cNvSpPr>
-          <p:nvPr>
-            <p:ph type="sldNum" sz="quarter" idx="5"/>
-          </p:nvPr>
-        </p:nvSpPr>
-        <p:spPr/>
-        <p:txBody>
-          <a:bodyPr/>
-          <a:lstStyle/>
-          <a:p>
-            <a:fld id="{1560C251-82B7-4253-A774-38D73C276BCE}" type="slidenum">
-              <a:rPr lang="en-US" smtClean="0"/>
-              <a:t>13</a:t>
-            </a:fld>
-            <a:endParaRPr lang="en-US" dirty="0"/>
-          </a:p>
-        </p:txBody>
-      </p:sp>
-    </p:spTree>
-    <p:extLst>
-      <p:ext uri="{BB962C8B-B14F-4D97-AF65-F5344CB8AC3E}">
-        <p14:creationId xmlns:p14="http://schemas.microsoft.com/office/powerpoint/2010/main" val="2870696525"/>
       </p:ext>
     </p:extLst>
   </p:cSld>
@@ -1925,7 +1982,7 @@
           <a:p>
             <a:fld id="{1BF61C71-767E-B84C-BFB3-7B18856D27F4}" type="datetimeFigureOut">
               <a:rPr lang="en-US" smtClean="0"/>
-              <a:t>8/25/26</a:t>
+              <a:t>8/25/2026</a:t>
             </a:fld>
             <a:endParaRPr lang="en-US"/>
           </a:p>
@@ -2133,7 +2190,7 @@
           <a:p>
             <a:fld id="{1BF61C71-767E-B84C-BFB3-7B18856D27F4}" type="datetimeFigureOut">
               <a:rPr lang="en-US" smtClean="0"/>
-              <a:t>8/25/26</a:t>
+              <a:t>8/25/2026</a:t>
             </a:fld>
             <a:endParaRPr lang="en-US"/>
           </a:p>
@@ -2351,7 +2408,7 @@
           <a:p>
             <a:fld id="{1BF61C71-767E-B84C-BFB3-7B18856D27F4}" type="datetimeFigureOut">
               <a:rPr lang="en-US" smtClean="0"/>
-              <a:t>8/25/26</a:t>
+              <a:t>8/25/2026</a:t>
             </a:fld>
             <a:endParaRPr lang="en-US"/>
           </a:p>
@@ -2559,7 +2616,7 @@
           <a:p>
             <a:fld id="{1BF61C71-767E-B84C-BFB3-7B18856D27F4}" type="datetimeFigureOut">
               <a:rPr lang="en-US" smtClean="0"/>
-              <a:t>8/25/26</a:t>
+              <a:t>8/25/2026</a:t>
             </a:fld>
             <a:endParaRPr lang="en-US"/>
           </a:p>
@@ -2843,7 +2900,7 @@
           <a:p>
             <a:fld id="{1BF61C71-767E-B84C-BFB3-7B18856D27F4}" type="datetimeFigureOut">
               <a:rPr lang="en-US" smtClean="0"/>
-              <a:t>8/25/26</a:t>
+              <a:t>8/25/2026</a:t>
             </a:fld>
             <a:endParaRPr lang="en-US"/>
           </a:p>
@@ -3119,7 +3176,7 @@
           <a:p>
             <a:fld id="{1BF61C71-767E-B84C-BFB3-7B18856D27F4}" type="datetimeFigureOut">
               <a:rPr lang="en-US" smtClean="0"/>
-              <a:t>8/25/26</a:t>
+              <a:t>8/25/2026</a:t>
             </a:fld>
             <a:endParaRPr lang="en-US"/>
           </a:p>
@@ -3542,7 +3599,7 @@
           <a:p>
             <a:fld id="{1BF61C71-767E-B84C-BFB3-7B18856D27F4}" type="datetimeFigureOut">
               <a:rPr lang="en-US" smtClean="0"/>
-              <a:t>8/25/26</a:t>
+              <a:t>8/25/2026</a:t>
             </a:fld>
             <a:endParaRPr lang="en-US"/>
           </a:p>
@@ -3692,7 +3749,7 @@
           <a:p>
             <a:fld id="{1BF61C71-767E-B84C-BFB3-7B18856D27F4}" type="datetimeFigureOut">
               <a:rPr lang="en-US" smtClean="0"/>
-              <a:t>8/25/26</a:t>
+              <a:t>8/25/2026</a:t>
             </a:fld>
             <a:endParaRPr lang="en-US"/>
           </a:p>
@@ -3813,7 +3870,7 @@
           <a:p>
             <a:fld id="{1BF61C71-767E-B84C-BFB3-7B18856D27F4}" type="datetimeFigureOut">
               <a:rPr lang="en-US" smtClean="0"/>
-              <a:t>8/25/26</a:t>
+              <a:t>8/25/2026</a:t>
             </a:fld>
             <a:endParaRPr lang="en-US"/>
           </a:p>
@@ -4134,7 +4191,7 @@
           <a:p>
             <a:fld id="{1BF61C71-767E-B84C-BFB3-7B18856D27F4}" type="datetimeFigureOut">
               <a:rPr lang="en-US" smtClean="0"/>
-              <a:t>8/25/26</a:t>
+              <a:t>8/25/2026</a:t>
             </a:fld>
             <a:endParaRPr lang="en-US"/>
           </a:p>
@@ -4431,7 +4488,7 @@
           <a:p>
             <a:fld id="{1BF61C71-767E-B84C-BFB3-7B18856D27F4}" type="datetimeFigureOut">
               <a:rPr lang="en-US" smtClean="0"/>
-              <a:t>8/25/26</a:t>
+              <a:t>8/25/2026</a:t>
             </a:fld>
             <a:endParaRPr lang="en-US"/>
           </a:p>
@@ -4685,7 +4742,7 @@
           <a:p>
             <a:fld id="{1BF61C71-767E-B84C-BFB3-7B18856D27F4}" type="datetimeFigureOut">
               <a:rPr lang="en-US" smtClean="0"/>
-              <a:t>8/25/26</a:t>
+              <a:t>8/25/2026</a:t>
             </a:fld>
             <a:endParaRPr lang="en-US"/>
           </a:p>
@@ -5210,6 +5267,537 @@
           <p:cNvPr id="2" name="Title 1">
             <a:extLst>
               <a:ext uri="{FF2B5EF4-FFF2-40B4-BE49-F238E27FC236}">
+                <a16:creationId xmlns:a16="http://schemas.microsoft.com/office/drawing/2014/main" id="{8C0CA267-07EE-A8C6-7CAD-A0096AFA34D4}"/>
+              </a:ext>
+            </a:extLst>
+          </p:cNvPr>
+          <p:cNvSpPr>
+            <a:spLocks noGrp="1"/>
+          </p:cNvSpPr>
+          <p:nvPr>
+            <p:ph type="title"/>
+          </p:nvPr>
+        </p:nvSpPr>
+        <p:spPr/>
+        <p:txBody>
+          <a:bodyPr>
+            <a:normAutofit/>
+          </a:bodyPr>
+          <a:lstStyle/>
+          <a:p>
+            <a:r>
+              <a:rPr lang="en-GB" dirty="0"/>
+              <a:t>Brainstorming Activity</a:t>
+            </a:r>
+            <a:endParaRPr lang="en-US" dirty="0"/>
+          </a:p>
+        </p:txBody>
+      </p:sp>
+      <p:sp>
+        <p:nvSpPr>
+          <p:cNvPr id="3" name="Content Placeholder 2">
+            <a:extLst>
+              <a:ext uri="{FF2B5EF4-FFF2-40B4-BE49-F238E27FC236}">
+                <a16:creationId xmlns:a16="http://schemas.microsoft.com/office/drawing/2014/main" id="{403D231D-5BDE-94C3-09E5-7361D0985BEB}"/>
+              </a:ext>
+            </a:extLst>
+          </p:cNvPr>
+          <p:cNvSpPr>
+            <a:spLocks noGrp="1"/>
+          </p:cNvSpPr>
+          <p:nvPr>
+            <p:ph idx="1"/>
+          </p:nvPr>
+        </p:nvSpPr>
+        <p:spPr/>
+        <p:txBody>
+          <a:bodyPr>
+            <a:normAutofit/>
+          </a:bodyPr>
+          <a:lstStyle/>
+          <a:p>
+            <a:pPr marL="0" indent="0">
+              <a:buNone/>
+            </a:pPr>
+            <a:r>
+              <a:rPr lang="en-GB" dirty="0"/>
+              <a:t>List a few example of data or analytics being used in sports.</a:t>
+            </a:r>
+          </a:p>
+          <a:p>
+            <a:pPr marL="0" indent="0">
+              <a:buNone/>
+            </a:pPr>
+            <a:endParaRPr lang="en-GB" dirty="0"/>
+          </a:p>
+          <a:p>
+            <a:pPr marL="0" indent="0">
+              <a:buNone/>
+            </a:pPr>
+            <a:r>
+              <a:rPr lang="en-GB" dirty="0"/>
+              <a:t>In pairs</a:t>
+            </a:r>
+          </a:p>
+          <a:p>
+            <a:pPr marL="514350" lvl="0" indent="-514350">
+              <a:buFont typeface="+mj-lt"/>
+              <a:buAutoNum type="arabicPeriod"/>
+            </a:pPr>
+            <a:r>
+              <a:rPr lang="en-GB" dirty="0"/>
+              <a:t>Give each person an opportunity to share.</a:t>
+            </a:r>
+          </a:p>
+          <a:p>
+            <a:pPr marL="514350" lvl="0" indent="-514350">
+              <a:buFont typeface="+mj-lt"/>
+              <a:buAutoNum type="arabicPeriod"/>
+            </a:pPr>
+            <a:r>
+              <a:rPr lang="en-GB" dirty="0"/>
+              <a:t>Select one or two ideas to discuss further.</a:t>
+            </a:r>
+          </a:p>
+          <a:p>
+            <a:pPr marL="514350" indent="-514350">
+              <a:buFont typeface="+mj-lt"/>
+              <a:buAutoNum type="arabicPeriod"/>
+            </a:pPr>
+            <a:r>
+              <a:rPr lang="en-GB" dirty="0"/>
+              <a:t>For each selected idea, consider:</a:t>
+            </a:r>
+          </a:p>
+          <a:p>
+            <a:pPr lvl="1"/>
+            <a:r>
+              <a:rPr lang="en-GB" dirty="0"/>
+              <a:t>What information was being collected or presented? </a:t>
+            </a:r>
+          </a:p>
+          <a:p>
+            <a:pPr lvl="1"/>
+            <a:r>
+              <a:rPr lang="en-GB" dirty="0"/>
+              <a:t>What was it being used for? To understand? To decide? </a:t>
+            </a:r>
+          </a:p>
+          <a:p>
+            <a:pPr lvl="1"/>
+            <a:r>
+              <a:rPr lang="en-GB" dirty="0"/>
+              <a:t>Did you find it useful, convincing, or questionable?</a:t>
+            </a:r>
+          </a:p>
+        </p:txBody>
+      </p:sp>
+    </p:spTree>
+    <p:extLst>
+      <p:ext uri="{BB962C8B-B14F-4D97-AF65-F5344CB8AC3E}">
+        <p14:creationId xmlns:p14="http://schemas.microsoft.com/office/powerpoint/2010/main" val="256497114"/>
+      </p:ext>
+    </p:extLst>
+  </p:cSld>
+  <p:clrMapOvr>
+    <a:masterClrMapping/>
+  </p:clrMapOvr>
+  <p:timing>
+    <p:tnLst>
+      <p:par>
+        <p:cTn id="1" dur="indefinite" restart="never" nodeType="tmRoot">
+          <p:childTnLst>
+            <p:seq concurrent="1" nextAc="seek">
+              <p:cTn id="2" dur="indefinite" nodeType="mainSeq">
+                <p:childTnLst>
+                  <p:par>
+                    <p:cTn id="3" fill="hold">
+                      <p:stCondLst>
+                        <p:cond delay="indefinite"/>
+                      </p:stCondLst>
+                      <p:childTnLst>
+                        <p:par>
+                          <p:cTn id="4" fill="hold">
+                            <p:stCondLst>
+                              <p:cond delay="0"/>
+                            </p:stCondLst>
+                            <p:childTnLst>
+                              <p:par>
+                                <p:cTn id="5" presetID="1" presetClass="entr" presetSubtype="0" fill="hold" grpId="0" nodeType="clickEffect">
+                                  <p:stCondLst>
+                                    <p:cond delay="0"/>
+                                  </p:stCondLst>
+                                  <p:childTnLst>
+                                    <p:set>
+                                      <p:cBhvr>
+                                        <p:cTn id="6" dur="1" fill="hold">
+                                          <p:stCondLst>
+                                            <p:cond delay="0"/>
+                                          </p:stCondLst>
+                                        </p:cTn>
+                                        <p:tgtEl>
+                                          <p:spTgt spid="3">
+                                            <p:txEl>
+                                              <p:pRg st="0" end="0"/>
+                                            </p:txEl>
+                                          </p:spTgt>
+                                        </p:tgtEl>
+                                        <p:attrNameLst>
+                                          <p:attrName>style.visibility</p:attrName>
+                                        </p:attrNameLst>
+                                      </p:cBhvr>
+                                      <p:to>
+                                        <p:strVal val="visible"/>
+                                      </p:to>
+                                    </p:set>
+                                  </p:childTnLst>
+                                </p:cTn>
+                              </p:par>
+                            </p:childTnLst>
+                          </p:cTn>
+                        </p:par>
+                      </p:childTnLst>
+                    </p:cTn>
+                  </p:par>
+                  <p:par>
+                    <p:cTn id="7" fill="hold">
+                      <p:stCondLst>
+                        <p:cond delay="indefinite"/>
+                      </p:stCondLst>
+                      <p:childTnLst>
+                        <p:par>
+                          <p:cTn id="8" fill="hold">
+                            <p:stCondLst>
+                              <p:cond delay="0"/>
+                            </p:stCondLst>
+                            <p:childTnLst>
+                              <p:par>
+                                <p:cTn id="9" presetID="1" presetClass="entr" presetSubtype="0" fill="hold" grpId="0" nodeType="clickEffect">
+                                  <p:stCondLst>
+                                    <p:cond delay="0"/>
+                                  </p:stCondLst>
+                                  <p:childTnLst>
+                                    <p:set>
+                                      <p:cBhvr>
+                                        <p:cTn id="10" dur="1" fill="hold">
+                                          <p:stCondLst>
+                                            <p:cond delay="0"/>
+                                          </p:stCondLst>
+                                        </p:cTn>
+                                        <p:tgtEl>
+                                          <p:spTgt spid="3">
+                                            <p:txEl>
+                                              <p:pRg st="2" end="2"/>
+                                            </p:txEl>
+                                          </p:spTgt>
+                                        </p:tgtEl>
+                                        <p:attrNameLst>
+                                          <p:attrName>style.visibility</p:attrName>
+                                        </p:attrNameLst>
+                                      </p:cBhvr>
+                                      <p:to>
+                                        <p:strVal val="visible"/>
+                                      </p:to>
+                                    </p:set>
+                                  </p:childTnLst>
+                                </p:cTn>
+                              </p:par>
+                            </p:childTnLst>
+                          </p:cTn>
+                        </p:par>
+                      </p:childTnLst>
+                    </p:cTn>
+                  </p:par>
+                  <p:par>
+                    <p:cTn id="11" fill="hold">
+                      <p:stCondLst>
+                        <p:cond delay="indefinite"/>
+                      </p:stCondLst>
+                      <p:childTnLst>
+                        <p:par>
+                          <p:cTn id="12" fill="hold">
+                            <p:stCondLst>
+                              <p:cond delay="0"/>
+                            </p:stCondLst>
+                            <p:childTnLst>
+                              <p:par>
+                                <p:cTn id="13" presetID="1" presetClass="entr" presetSubtype="0" fill="hold" grpId="0" nodeType="clickEffect">
+                                  <p:stCondLst>
+                                    <p:cond delay="0"/>
+                                  </p:stCondLst>
+                                  <p:childTnLst>
+                                    <p:set>
+                                      <p:cBhvr>
+                                        <p:cTn id="14" dur="1" fill="hold">
+                                          <p:stCondLst>
+                                            <p:cond delay="0"/>
+                                          </p:stCondLst>
+                                        </p:cTn>
+                                        <p:tgtEl>
+                                          <p:spTgt spid="3">
+                                            <p:txEl>
+                                              <p:pRg st="3" end="3"/>
+                                            </p:txEl>
+                                          </p:spTgt>
+                                        </p:tgtEl>
+                                        <p:attrNameLst>
+                                          <p:attrName>style.visibility</p:attrName>
+                                        </p:attrNameLst>
+                                      </p:cBhvr>
+                                      <p:to>
+                                        <p:strVal val="visible"/>
+                                      </p:to>
+                                    </p:set>
+                                  </p:childTnLst>
+                                </p:cTn>
+                              </p:par>
+                            </p:childTnLst>
+                          </p:cTn>
+                        </p:par>
+                      </p:childTnLst>
+                    </p:cTn>
+                  </p:par>
+                  <p:par>
+                    <p:cTn id="15" fill="hold">
+                      <p:stCondLst>
+                        <p:cond delay="indefinite"/>
+                      </p:stCondLst>
+                      <p:childTnLst>
+                        <p:par>
+                          <p:cTn id="16" fill="hold">
+                            <p:stCondLst>
+                              <p:cond delay="0"/>
+                            </p:stCondLst>
+                            <p:childTnLst>
+                              <p:par>
+                                <p:cTn id="17" presetID="1" presetClass="entr" presetSubtype="0" fill="hold" grpId="0" nodeType="clickEffect">
+                                  <p:stCondLst>
+                                    <p:cond delay="0"/>
+                                  </p:stCondLst>
+                                  <p:childTnLst>
+                                    <p:set>
+                                      <p:cBhvr>
+                                        <p:cTn id="18" dur="1" fill="hold">
+                                          <p:stCondLst>
+                                            <p:cond delay="0"/>
+                                          </p:stCondLst>
+                                        </p:cTn>
+                                        <p:tgtEl>
+                                          <p:spTgt spid="3">
+                                            <p:txEl>
+                                              <p:pRg st="4" end="4"/>
+                                            </p:txEl>
+                                          </p:spTgt>
+                                        </p:tgtEl>
+                                        <p:attrNameLst>
+                                          <p:attrName>style.visibility</p:attrName>
+                                        </p:attrNameLst>
+                                      </p:cBhvr>
+                                      <p:to>
+                                        <p:strVal val="visible"/>
+                                      </p:to>
+                                    </p:set>
+                                  </p:childTnLst>
+                                </p:cTn>
+                              </p:par>
+                            </p:childTnLst>
+                          </p:cTn>
+                        </p:par>
+                      </p:childTnLst>
+                    </p:cTn>
+                  </p:par>
+                  <p:par>
+                    <p:cTn id="19" fill="hold">
+                      <p:stCondLst>
+                        <p:cond delay="indefinite"/>
+                      </p:stCondLst>
+                      <p:childTnLst>
+                        <p:par>
+                          <p:cTn id="20" fill="hold">
+                            <p:stCondLst>
+                              <p:cond delay="0"/>
+                            </p:stCondLst>
+                            <p:childTnLst>
+                              <p:par>
+                                <p:cTn id="21" presetID="1" presetClass="entr" presetSubtype="0" fill="hold" grpId="0" nodeType="clickEffect">
+                                  <p:stCondLst>
+                                    <p:cond delay="0"/>
+                                  </p:stCondLst>
+                                  <p:childTnLst>
+                                    <p:set>
+                                      <p:cBhvr>
+                                        <p:cTn id="22" dur="1" fill="hold">
+                                          <p:stCondLst>
+                                            <p:cond delay="0"/>
+                                          </p:stCondLst>
+                                        </p:cTn>
+                                        <p:tgtEl>
+                                          <p:spTgt spid="3">
+                                            <p:txEl>
+                                              <p:pRg st="5" end="5"/>
+                                            </p:txEl>
+                                          </p:spTgt>
+                                        </p:tgtEl>
+                                        <p:attrNameLst>
+                                          <p:attrName>style.visibility</p:attrName>
+                                        </p:attrNameLst>
+                                      </p:cBhvr>
+                                      <p:to>
+                                        <p:strVal val="visible"/>
+                                      </p:to>
+                                    </p:set>
+                                  </p:childTnLst>
+                                </p:cTn>
+                              </p:par>
+                              <p:par>
+                                <p:cTn id="23" presetID="1" presetClass="entr" presetSubtype="0" fill="hold" grpId="0" nodeType="withEffect">
+                                  <p:stCondLst>
+                                    <p:cond delay="0"/>
+                                  </p:stCondLst>
+                                  <p:childTnLst>
+                                    <p:set>
+                                      <p:cBhvr>
+                                        <p:cTn id="24" dur="1" fill="hold">
+                                          <p:stCondLst>
+                                            <p:cond delay="0"/>
+                                          </p:stCondLst>
+                                        </p:cTn>
+                                        <p:tgtEl>
+                                          <p:spTgt spid="3">
+                                            <p:txEl>
+                                              <p:pRg st="6" end="6"/>
+                                            </p:txEl>
+                                          </p:spTgt>
+                                        </p:tgtEl>
+                                        <p:attrNameLst>
+                                          <p:attrName>style.visibility</p:attrName>
+                                        </p:attrNameLst>
+                                      </p:cBhvr>
+                                      <p:to>
+                                        <p:strVal val="visible"/>
+                                      </p:to>
+                                    </p:set>
+                                  </p:childTnLst>
+                                </p:cTn>
+                              </p:par>
+                              <p:par>
+                                <p:cTn id="25" presetID="1" presetClass="entr" presetSubtype="0" fill="hold" grpId="0" nodeType="withEffect">
+                                  <p:stCondLst>
+                                    <p:cond delay="0"/>
+                                  </p:stCondLst>
+                                  <p:childTnLst>
+                                    <p:set>
+                                      <p:cBhvr>
+                                        <p:cTn id="26" dur="1" fill="hold">
+                                          <p:stCondLst>
+                                            <p:cond delay="0"/>
+                                          </p:stCondLst>
+                                        </p:cTn>
+                                        <p:tgtEl>
+                                          <p:spTgt spid="3">
+                                            <p:txEl>
+                                              <p:pRg st="7" end="7"/>
+                                            </p:txEl>
+                                          </p:spTgt>
+                                        </p:tgtEl>
+                                        <p:attrNameLst>
+                                          <p:attrName>style.visibility</p:attrName>
+                                        </p:attrNameLst>
+                                      </p:cBhvr>
+                                      <p:to>
+                                        <p:strVal val="visible"/>
+                                      </p:to>
+                                    </p:set>
+                                  </p:childTnLst>
+                                </p:cTn>
+                              </p:par>
+                              <p:par>
+                                <p:cTn id="27" presetID="1" presetClass="entr" presetSubtype="0" fill="hold" grpId="0" nodeType="withEffect">
+                                  <p:stCondLst>
+                                    <p:cond delay="0"/>
+                                  </p:stCondLst>
+                                  <p:childTnLst>
+                                    <p:set>
+                                      <p:cBhvr>
+                                        <p:cTn id="28" dur="1" fill="hold">
+                                          <p:stCondLst>
+                                            <p:cond delay="0"/>
+                                          </p:stCondLst>
+                                        </p:cTn>
+                                        <p:tgtEl>
+                                          <p:spTgt spid="3">
+                                            <p:txEl>
+                                              <p:pRg st="8" end="8"/>
+                                            </p:txEl>
+                                          </p:spTgt>
+                                        </p:tgtEl>
+                                        <p:attrNameLst>
+                                          <p:attrName>style.visibility</p:attrName>
+                                        </p:attrNameLst>
+                                      </p:cBhvr>
+                                      <p:to>
+                                        <p:strVal val="visible"/>
+                                      </p:to>
+                                    </p:set>
+                                  </p:childTnLst>
+                                </p:cTn>
+                              </p:par>
+                            </p:childTnLst>
+                          </p:cTn>
+                        </p:par>
+                      </p:childTnLst>
+                    </p:cTn>
+                  </p:par>
+                </p:childTnLst>
+              </p:cTn>
+              <p:prevCondLst>
+                <p:cond evt="onPrev" delay="0">
+                  <p:tgtEl>
+                    <p:sldTgt/>
+                  </p:tgtEl>
+                </p:cond>
+              </p:prevCondLst>
+              <p:nextCondLst>
+                <p:cond evt="onNext" delay="0">
+                  <p:tgtEl>
+                    <p:sldTgt/>
+                  </p:tgtEl>
+                </p:cond>
+              </p:nextCondLst>
+            </p:seq>
+          </p:childTnLst>
+        </p:cTn>
+      </p:par>
+    </p:tnLst>
+    <p:bldLst>
+      <p:bldP spid="3" grpId="0" build="p"/>
+    </p:bldLst>
+  </p:timing>
+</p:sld>
+</file>
+
+<file path=ppt/slides/slide11.xml><?xml version="1.0" encoding="utf-8"?>
+<p:sld xmlns:a="http://schemas.openxmlformats.org/drawingml/2006/main" xmlns:r="http://schemas.openxmlformats.org/officeDocument/2006/relationships" xmlns:p="http://schemas.openxmlformats.org/presentationml/2006/main">
+  <p:cSld>
+    <p:spTree>
+      <p:nvGrpSpPr>
+        <p:cNvPr id="1" name=""/>
+        <p:cNvGrpSpPr/>
+        <p:nvPr/>
+      </p:nvGrpSpPr>
+      <p:grpSpPr>
+        <a:xfrm>
+          <a:off x="0" y="0"/>
+          <a:ext cx="0" cy="0"/>
+          <a:chOff x="0" y="0"/>
+          <a:chExt cx="0" cy="0"/>
+        </a:xfrm>
+      </p:grpSpPr>
+      <p:sp>
+        <p:nvSpPr>
+          <p:cNvPr id="2" name="Title 1">
+            <a:extLst>
+              <a:ext uri="{FF2B5EF4-FFF2-40B4-BE49-F238E27FC236}">
                 <a16:creationId xmlns:a16="http://schemas.microsoft.com/office/drawing/2014/main" id="{B17A3450-844C-8DC4-E986-2ACD49B2FB8D}"/>
               </a:ext>
             </a:extLst>
@@ -5574,7 +6162,7 @@
 </p:sld>
 </file>
 
-<file path=ppt/slides/slide11.xml><?xml version="1.0" encoding="utf-8"?>
+<file path=ppt/slides/slide12.xml><?xml version="1.0" encoding="utf-8"?>
 <p:sld xmlns:a="http://schemas.openxmlformats.org/drawingml/2006/main" xmlns:r="http://schemas.openxmlformats.org/officeDocument/2006/relationships" xmlns:p="http://schemas.openxmlformats.org/presentationml/2006/main">
   <p:cSld>
     <p:spTree>
@@ -5657,7 +6245,7 @@
 </p:sld>
 </file>
 
-<file path=ppt/slides/slide12.xml><?xml version="1.0" encoding="utf-8"?>
+<file path=ppt/slides/slide13.xml><?xml version="1.0" encoding="utf-8"?>
 <p:sld xmlns:a="http://schemas.openxmlformats.org/drawingml/2006/main" xmlns:r="http://schemas.openxmlformats.org/officeDocument/2006/relationships" xmlns:p="http://schemas.openxmlformats.org/presentationml/2006/main">
   <p:cSld>
     <p:spTree>
@@ -5727,7 +6315,7 @@
         <p:spPr/>
         <p:txBody>
           <a:bodyPr>
-            <a:normAutofit fontScale="92500" lnSpcReduction="10000"/>
+            <a:normAutofit/>
           </a:bodyPr>
           <a:lstStyle/>
           <a:p>
@@ -5778,20 +6366,6 @@
             <a:r>
               <a:rPr lang="en-GB" dirty="0"/>
               <a:t>Interpret data, evaluate methods, visualize findings, and reflect on analytical choices.</a:t>
-            </a:r>
-          </a:p>
-          <a:p>
-            <a:pPr lvl="0"/>
-            <a:r>
-              <a:rPr lang="en-GB" dirty="0"/>
-              <a:t>Journal article discussion: </a:t>
-            </a:r>
-          </a:p>
-          <a:p>
-            <a:pPr lvl="1"/>
-            <a:r>
-              <a:rPr lang="en-GB" dirty="0"/>
-              <a:t>Present and discuss peer-reviewed sport analytics research.</a:t>
             </a:r>
           </a:p>
           <a:p>
@@ -5834,7 +6408,7 @@
             <a:fld id="{45C00377-489B-40EC-B059-26BDDD2E89B9}" type="slidenum">
               <a:rPr lang="en-US" smtClean="0"/>
               <a:pPr/>
-              <a:t>12</a:t>
+              <a:t>13</a:t>
             </a:fld>
             <a:endParaRPr lang="en-US" dirty="0"/>
           </a:p>
@@ -6209,86 +6783,6 @@
                       </p:childTnLst>
                     </p:cTn>
                   </p:par>
-                  <p:par>
-                    <p:cTn id="29" fill="hold">
-                      <p:stCondLst>
-                        <p:cond delay="indefinite"/>
-                      </p:stCondLst>
-                      <p:childTnLst>
-                        <p:par>
-                          <p:cTn id="30" fill="hold">
-                            <p:stCondLst>
-                              <p:cond delay="0"/>
-                            </p:stCondLst>
-                            <p:childTnLst>
-                              <p:par>
-                                <p:cTn id="31" presetID="1" presetClass="entr" presetSubtype="0" fill="hold" grpId="0" nodeType="clickEffect">
-                                  <p:stCondLst>
-                                    <p:cond delay="0"/>
-                                  </p:stCondLst>
-                                  <p:childTnLst>
-                                    <p:set>
-                                      <p:cBhvr>
-                                        <p:cTn id="32" dur="1" fill="hold">
-                                          <p:stCondLst>
-                                            <p:cond delay="0"/>
-                                          </p:stCondLst>
-                                        </p:cTn>
-                                        <p:tgtEl>
-                                          <p:spTgt spid="3">
-                                            <p:txEl>
-                                              <p:pRg st="9" end="9"/>
-                                            </p:txEl>
-                                          </p:spTgt>
-                                        </p:tgtEl>
-                                        <p:attrNameLst>
-                                          <p:attrName>style.visibility</p:attrName>
-                                        </p:attrNameLst>
-                                      </p:cBhvr>
-                                      <p:to>
-                                        <p:strVal val="visible"/>
-                                      </p:to>
-                                    </p:set>
-                                  </p:childTnLst>
-                                </p:cTn>
-                              </p:par>
-                              <p:par>
-                                <p:cTn id="33" presetID="1" presetClass="entr" presetSubtype="0" fill="hold" grpId="0" nodeType="withEffect">
-                                  <p:stCondLst>
-                                    <p:cond delay="0"/>
-                                  </p:stCondLst>
-                                  <p:childTnLst>
-                                    <p:set>
-                                      <p:cBhvr>
-                                        <p:cTn id="34" dur="1" fill="hold">
-                                          <p:stCondLst>
-                                            <p:cond delay="0"/>
-                                          </p:stCondLst>
-                                        </p:cTn>
-                                        <p:tgtEl>
-                                          <p:spTgt spid="3">
-                                            <p:txEl>
-                                              <p:pRg st="10" end="10"/>
-                                            </p:txEl>
-                                          </p:spTgt>
-                                        </p:tgtEl>
-                                        <p:attrNameLst>
-                                          <p:attrName>style.visibility</p:attrName>
-                                        </p:attrNameLst>
-                                      </p:cBhvr>
-                                      <p:to>
-                                        <p:strVal val="visible"/>
-                                      </p:to>
-                                    </p:set>
-                                  </p:childTnLst>
-                                </p:cTn>
-                              </p:par>
-                            </p:childTnLst>
-                          </p:cTn>
-                        </p:par>
-                      </p:childTnLst>
-                    </p:cTn>
-                  </p:par>
                 </p:childTnLst>
               </p:cTn>
               <p:prevCondLst>
@@ -6317,7 +6811,7 @@
 </p:sld>
 </file>
 
-<file path=ppt/slides/slide13.xml><?xml version="1.0" encoding="utf-8"?>
+<file path=ppt/slides/slide14.xml><?xml version="1.0" encoding="utf-8"?>
 <p:sld xmlns:a="http://schemas.openxmlformats.org/drawingml/2006/main" xmlns:r="http://schemas.openxmlformats.org/officeDocument/2006/relationships" xmlns:p="http://schemas.openxmlformats.org/presentationml/2006/main">
   <p:cSld>
     <p:spTree>
@@ -6386,7 +6880,7 @@
             <a:fld id="{45C00377-489B-40EC-B059-26BDDD2E89B9}" type="slidenum">
               <a:rPr lang="en-US" smtClean="0"/>
               <a:pPr/>
-              <a:t>13</a:t>
+              <a:t>14</a:t>
             </a:fld>
             <a:endParaRPr lang="en-US" dirty="0"/>
           </a:p>
@@ -6408,14 +6902,14 @@
             <p:ph idx="1"/>
             <p:extLst>
               <p:ext uri="{D42A27DB-BD31-4B8C-83A1-F6EECF244321}">
-                <p14:modId xmlns:p14="http://schemas.microsoft.com/office/powerpoint/2010/main" val="2608199997"/>
+                <p14:modId xmlns:p14="http://schemas.microsoft.com/office/powerpoint/2010/main" val="558006189"/>
               </p:ext>
             </p:extLst>
           </p:nvPr>
         </p:nvGraphicFramePr>
         <p:xfrm>
           <a:off x="2624447" y="1650669"/>
-          <a:ext cx="6757059" cy="3538848"/>
+          <a:ext cx="5438608" cy="3096492"/>
         </p:xfrm>
         <a:graphic>
           <a:graphicData uri="http://schemas.openxmlformats.org/drawingml/2006/table">
@@ -6435,13 +6929,6 @@
                   <a:extLst>
                     <a:ext uri="{9D8B030D-6E8A-4147-A177-3AD203B41FA5}">
                       <a16:colId xmlns:a16="http://schemas.microsoft.com/office/drawing/2014/main" val="2661739713"/>
-                    </a:ext>
-                  </a:extLst>
-                </a:gridCol>
-                <a:gridCol w="1318451">
-                  <a:extLst>
-                    <a:ext uri="{9D8B030D-6E8A-4147-A177-3AD203B41FA5}">
-                      <a16:colId xmlns:a16="http://schemas.microsoft.com/office/drawing/2014/main" val="3816361369"/>
                     </a:ext>
                   </a:extLst>
                 </a:gridCol>
@@ -6489,32 +6976,6 @@
                           <a:effectLst/>
                         </a:rPr>
                         <a:t>Points</a:t>
-                      </a:r>
-                      <a:endParaRPr lang="en-GB" sz="1800" kern="100">
-                        <a:effectLst/>
-                        <a:latin typeface="Times New Roman" panose="02020603050405020304" pitchFamily="18" charset="0"/>
-                        <a:ea typeface="Times New Roman" panose="02020603050405020304" pitchFamily="18" charset="0"/>
-                      </a:endParaRPr>
-                    </a:p>
-                  </a:txBody>
-                  <a:tcPr marL="68580" marR="68580" marT="0" marB="0" anchor="ctr"/>
-                </a:tc>
-                <a:tc>
-                  <a:txBody>
-                    <a:bodyPr/>
-                    <a:lstStyle/>
-                    <a:p>
-                      <a:pPr algn="ctr">
-                        <a:lnSpc>
-                          <a:spcPct val="115000"/>
-                        </a:lnSpc>
-                        <a:buNone/>
-                      </a:pPr>
-                      <a:r>
-                        <a:rPr lang="en-US" sz="1800" kern="100">
-                          <a:effectLst/>
-                        </a:rPr>
-                        <a:t>Weight</a:t>
                       </a:r>
                       <a:endParaRPr lang="en-GB" sz="1800" kern="100">
                         <a:effectLst/>
@@ -6584,32 +7045,6 @@
                   </a:txBody>
                   <a:tcPr marL="68580" marR="68580" marT="0" marB="0" anchor="ctr"/>
                 </a:tc>
-                <a:tc>
-                  <a:txBody>
-                    <a:bodyPr/>
-                    <a:lstStyle/>
-                    <a:p>
-                      <a:pPr algn="ctr">
-                        <a:lnSpc>
-                          <a:spcPct val="115000"/>
-                        </a:lnSpc>
-                        <a:buNone/>
-                      </a:pPr>
-                      <a:r>
-                        <a:rPr lang="en-US" sz="1800" kern="100">
-                          <a:effectLst/>
-                        </a:rPr>
-                        <a:t>.20</a:t>
-                      </a:r>
-                      <a:endParaRPr lang="en-GB" sz="1800" kern="100">
-                        <a:effectLst/>
-                        <a:latin typeface="Times New Roman" panose="02020603050405020304" pitchFamily="18" charset="0"/>
-                        <a:ea typeface="Times New Roman" panose="02020603050405020304" pitchFamily="18" charset="0"/>
-                      </a:endParaRPr>
-                    </a:p>
-                  </a:txBody>
-                  <a:tcPr marL="68580" marR="68580" marT="0" marB="0" anchor="ctr"/>
-                </a:tc>
                 <a:extLst>
                   <a:ext uri="{0D108BD9-81ED-4DB2-BD59-A6C34878D82A}">
                     <a16:rowId xmlns:a16="http://schemas.microsoft.com/office/drawing/2014/main" val="2122959447"/>
@@ -6669,32 +7104,6 @@
                   </a:txBody>
                   <a:tcPr marL="68580" marR="68580" marT="0" marB="0" anchor="ctr"/>
                 </a:tc>
-                <a:tc>
-                  <a:txBody>
-                    <a:bodyPr/>
-                    <a:lstStyle/>
-                    <a:p>
-                      <a:pPr algn="ctr">
-                        <a:lnSpc>
-                          <a:spcPct val="115000"/>
-                        </a:lnSpc>
-                        <a:buNone/>
-                      </a:pPr>
-                      <a:r>
-                        <a:rPr lang="en-US" sz="1800" kern="100">
-                          <a:effectLst/>
-                        </a:rPr>
-                        <a:t>.02</a:t>
-                      </a:r>
-                      <a:endParaRPr lang="en-GB" sz="1800" kern="100">
-                        <a:effectLst/>
-                        <a:latin typeface="Times New Roman" panose="02020603050405020304" pitchFamily="18" charset="0"/>
-                        <a:ea typeface="Times New Roman" panose="02020603050405020304" pitchFamily="18" charset="0"/>
-                      </a:endParaRPr>
-                    </a:p>
-                  </a:txBody>
-                  <a:tcPr marL="68580" marR="68580" marT="0" marB="0" anchor="ctr"/>
-                </a:tc>
                 <a:extLst>
                   <a:ext uri="{0D108BD9-81ED-4DB2-BD59-A6C34878D82A}">
                     <a16:rowId xmlns:a16="http://schemas.microsoft.com/office/drawing/2014/main" val="839403633"/>
@@ -6714,95 +7123,10 @@
                         <a:buNone/>
                       </a:pPr>
                       <a:r>
-                        <a:rPr lang="en-US" sz="1800" kern="100">
+                        <a:rPr lang="en-US" sz="1800" kern="100" dirty="0">
                           <a:effectLst/>
                         </a:rPr>
                         <a:t>Case study (4)</a:t>
-                      </a:r>
-                      <a:endParaRPr lang="en-GB" sz="1800" kern="100">
-                        <a:effectLst/>
-                        <a:latin typeface="Times New Roman" panose="02020603050405020304" pitchFamily="18" charset="0"/>
-                        <a:ea typeface="Times New Roman" panose="02020603050405020304" pitchFamily="18" charset="0"/>
-                      </a:endParaRPr>
-                    </a:p>
-                  </a:txBody>
-                  <a:tcPr marL="68580" marR="68580" marT="0" marB="0" anchor="ctr"/>
-                </a:tc>
-                <a:tc>
-                  <a:txBody>
-                    <a:bodyPr/>
-                    <a:lstStyle/>
-                    <a:p>
-                      <a:pPr algn="ctr">
-                        <a:lnSpc>
-                          <a:spcPct val="115000"/>
-                        </a:lnSpc>
-                        <a:buNone/>
-                      </a:pPr>
-                      <a:r>
-                        <a:rPr lang="en-US" sz="1800" kern="100">
-                          <a:effectLst/>
-                        </a:rPr>
-                        <a:t>80</a:t>
-                      </a:r>
-                      <a:endParaRPr lang="en-GB" sz="1800" kern="100">
-                        <a:effectLst/>
-                        <a:latin typeface="Times New Roman" panose="02020603050405020304" pitchFamily="18" charset="0"/>
-                        <a:ea typeface="Times New Roman" panose="02020603050405020304" pitchFamily="18" charset="0"/>
-                      </a:endParaRPr>
-                    </a:p>
-                  </a:txBody>
-                  <a:tcPr marL="68580" marR="68580" marT="0" marB="0" anchor="ctr"/>
-                </a:tc>
-                <a:tc>
-                  <a:txBody>
-                    <a:bodyPr/>
-                    <a:lstStyle/>
-                    <a:p>
-                      <a:pPr algn="ctr">
-                        <a:lnSpc>
-                          <a:spcPct val="115000"/>
-                        </a:lnSpc>
-                        <a:buNone/>
-                      </a:pPr>
-                      <a:r>
-                        <a:rPr lang="en-US" sz="1800" kern="100">
-                          <a:effectLst/>
-                        </a:rPr>
-                        <a:t>.16</a:t>
-                      </a:r>
-                      <a:endParaRPr lang="en-GB" sz="1800" kern="100">
-                        <a:effectLst/>
-                        <a:latin typeface="Times New Roman" panose="02020603050405020304" pitchFamily="18" charset="0"/>
-                        <a:ea typeface="Times New Roman" panose="02020603050405020304" pitchFamily="18" charset="0"/>
-                      </a:endParaRPr>
-                    </a:p>
-                  </a:txBody>
-                  <a:tcPr marL="68580" marR="68580" marT="0" marB="0" anchor="ctr"/>
-                </a:tc>
-                <a:extLst>
-                  <a:ext uri="{0D108BD9-81ED-4DB2-BD59-A6C34878D82A}">
-                    <a16:rowId xmlns:a16="http://schemas.microsoft.com/office/drawing/2014/main" val="3793675591"/>
-                  </a:ext>
-                </a:extLst>
-              </a:tr>
-              <a:tr h="442356">
-                <a:tc>
-                  <a:txBody>
-                    <a:bodyPr/>
-                    <a:lstStyle/>
-                    <a:p>
-                      <a:pPr algn="ctr">
-                        <a:lnSpc>
-                          <a:spcPct val="115000"/>
-                        </a:lnSpc>
-                        <a:buNone/>
-                      </a:pPr>
-                      <a:r>
-                        <a:rPr lang="en-US" sz="1800" kern="100" dirty="0">
-                          <a:effectLst/>
-                        </a:rPr>
-                        <a:t>Journal article discussion</a:t>
                       </a:r>
                       <a:endParaRPr lang="en-GB" sz="1800" kern="100" dirty="0">
                         <a:effectLst/>
@@ -6825,38 +7149,12 @@
                         <a:buNone/>
                       </a:pPr>
                       <a:r>
-                        <a:rPr lang="en-US" sz="1800" kern="100">
+                        <a:rPr lang="en-US" sz="1800" kern="100" dirty="0">
                           <a:effectLst/>
                         </a:rPr>
-                        <a:t>10</a:t>
+                        <a:t>100</a:t>
                       </a:r>
-                      <a:endParaRPr lang="en-GB" sz="1800" kern="100">
-                        <a:effectLst/>
-                        <a:latin typeface="Times New Roman" panose="02020603050405020304" pitchFamily="18" charset="0"/>
-                        <a:ea typeface="Times New Roman" panose="02020603050405020304" pitchFamily="18" charset="0"/>
-                      </a:endParaRPr>
-                    </a:p>
-                  </a:txBody>
-                  <a:tcPr marL="68580" marR="68580" marT="0" marB="0" anchor="ctr"/>
-                </a:tc>
-                <a:tc>
-                  <a:txBody>
-                    <a:bodyPr/>
-                    <a:lstStyle/>
-                    <a:p>
-                      <a:pPr algn="ctr">
-                        <a:lnSpc>
-                          <a:spcPct val="115000"/>
-                        </a:lnSpc>
-                        <a:buNone/>
-                      </a:pPr>
-                      <a:r>
-                        <a:rPr lang="en-US" sz="1800" kern="100">
-                          <a:effectLst/>
-                        </a:rPr>
-                        <a:t>.02</a:t>
-                      </a:r>
-                      <a:endParaRPr lang="en-GB" sz="1800" kern="100">
+                      <a:endParaRPr lang="en-GB" sz="1800" kern="100" dirty="0">
                         <a:effectLst/>
                         <a:latin typeface="Times New Roman" panose="02020603050405020304" pitchFamily="18" charset="0"/>
                         <a:ea typeface="Times New Roman" panose="02020603050405020304" pitchFamily="18" charset="0"/>
@@ -6867,7 +7165,7 @@
                 </a:tc>
                 <a:extLst>
                   <a:ext uri="{0D108BD9-81ED-4DB2-BD59-A6C34878D82A}">
-                    <a16:rowId xmlns:a16="http://schemas.microsoft.com/office/drawing/2014/main" val="3820934620"/>
+                    <a16:rowId xmlns:a16="http://schemas.microsoft.com/office/drawing/2014/main" val="3793675591"/>
                   </a:ext>
                 </a:extLst>
               </a:tr>
@@ -6910,38 +7208,12 @@
                         <a:buNone/>
                       </a:pPr>
                       <a:r>
-                        <a:rPr lang="en-US" sz="1800" kern="100">
+                        <a:rPr lang="en-US" sz="1800" kern="100" dirty="0">
                           <a:effectLst/>
                         </a:rPr>
                         <a:t>100</a:t>
                       </a:r>
-                      <a:endParaRPr lang="en-GB" sz="1800" kern="100">
-                        <a:effectLst/>
-                        <a:latin typeface="Times New Roman" panose="02020603050405020304" pitchFamily="18" charset="0"/>
-                        <a:ea typeface="Times New Roman" panose="02020603050405020304" pitchFamily="18" charset="0"/>
-                      </a:endParaRPr>
-                    </a:p>
-                  </a:txBody>
-                  <a:tcPr marL="68580" marR="68580" marT="0" marB="0" anchor="ctr"/>
-                </a:tc>
-                <a:tc>
-                  <a:txBody>
-                    <a:bodyPr/>
-                    <a:lstStyle/>
-                    <a:p>
-                      <a:pPr algn="ctr">
-                        <a:lnSpc>
-                          <a:spcPct val="115000"/>
-                        </a:lnSpc>
-                        <a:buNone/>
-                      </a:pPr>
-                      <a:r>
-                        <a:rPr lang="en-US" sz="1800" kern="100">
-                          <a:effectLst/>
-                        </a:rPr>
-                        <a:t>.2 </a:t>
-                      </a:r>
-                      <a:endParaRPr lang="en-GB" sz="1800" kern="100">
+                      <a:endParaRPr lang="en-GB" sz="1800" kern="100" dirty="0">
                         <a:effectLst/>
                         <a:latin typeface="Times New Roman" panose="02020603050405020304" pitchFamily="18" charset="0"/>
                         <a:ea typeface="Times New Roman" panose="02020603050405020304" pitchFamily="18" charset="0"/>
@@ -6995,38 +7267,12 @@
                         <a:buNone/>
                       </a:pPr>
                       <a:r>
-                        <a:rPr lang="en-US" sz="1800" kern="100">
+                        <a:rPr lang="en-US" sz="1800" kern="100" dirty="0">
                           <a:effectLst/>
                         </a:rPr>
                         <a:t>200</a:t>
                       </a:r>
-                      <a:endParaRPr lang="en-GB" sz="1800" kern="100">
-                        <a:effectLst/>
-                        <a:latin typeface="Times New Roman" panose="02020603050405020304" pitchFamily="18" charset="0"/>
-                        <a:ea typeface="Times New Roman" panose="02020603050405020304" pitchFamily="18" charset="0"/>
-                      </a:endParaRPr>
-                    </a:p>
-                  </a:txBody>
-                  <a:tcPr marL="68580" marR="68580" marT="0" marB="0" anchor="ctr"/>
-                </a:tc>
-                <a:tc>
-                  <a:txBody>
-                    <a:bodyPr/>
-                    <a:lstStyle/>
-                    <a:p>
-                      <a:pPr algn="ctr">
-                        <a:lnSpc>
-                          <a:spcPct val="115000"/>
-                        </a:lnSpc>
-                        <a:buNone/>
-                      </a:pPr>
-                      <a:r>
-                        <a:rPr lang="en-US" sz="1800" kern="100">
-                          <a:effectLst/>
-                        </a:rPr>
-                        <a:t>.4</a:t>
-                      </a:r>
-                      <a:endParaRPr lang="en-GB" sz="1800" kern="100">
+                      <a:endParaRPr lang="en-GB" sz="1800" kern="100" dirty="0">
                         <a:effectLst/>
                         <a:latin typeface="Times New Roman" panose="02020603050405020304" pitchFamily="18" charset="0"/>
                         <a:ea typeface="Times New Roman" panose="02020603050405020304" pitchFamily="18" charset="0"/>
@@ -7080,36 +7326,10 @@
                         <a:buNone/>
                       </a:pPr>
                       <a:r>
-                        <a:rPr lang="en-US" sz="1800" kern="100">
-                          <a:effectLst/>
-                        </a:rPr>
-                        <a:t>500</a:t>
-                      </a:r>
-                      <a:endParaRPr lang="en-GB" sz="1800" kern="100">
-                        <a:effectLst/>
-                        <a:latin typeface="Times New Roman" panose="02020603050405020304" pitchFamily="18" charset="0"/>
-                        <a:ea typeface="Times New Roman" panose="02020603050405020304" pitchFamily="18" charset="0"/>
-                      </a:endParaRPr>
-                    </a:p>
-                  </a:txBody>
-                  <a:tcPr marL="68580" marR="68580" marT="0" marB="0" anchor="ctr"/>
-                </a:tc>
-                <a:tc>
-                  <a:txBody>
-                    <a:bodyPr/>
-                    <a:lstStyle/>
-                    <a:p>
-                      <a:pPr algn="ctr">
-                        <a:lnSpc>
-                          <a:spcPct val="115000"/>
-                        </a:lnSpc>
-                        <a:buNone/>
-                      </a:pPr>
-                      <a:r>
                         <a:rPr lang="en-US" sz="1800" kern="100" dirty="0">
                           <a:effectLst/>
                         </a:rPr>
-                        <a:t> </a:t>
+                        <a:t>510</a:t>
                       </a:r>
                       <a:endParaRPr lang="en-GB" sz="1800" kern="100" dirty="0">
                         <a:effectLst/>
@@ -7143,7 +7363,7 @@
 </p:sld>
 </file>
 
-<file path=ppt/slides/slide14.xml><?xml version="1.0" encoding="utf-8"?>
+<file path=ppt/slides/slide15.xml><?xml version="1.0" encoding="utf-8"?>
 <p:sld xmlns:a="http://schemas.openxmlformats.org/drawingml/2006/main" xmlns:r="http://schemas.openxmlformats.org/officeDocument/2006/relationships" xmlns:p="http://schemas.openxmlformats.org/presentationml/2006/main">
   <p:cSld>
     <p:spTree>
@@ -7255,6 +7475,15 @@
               <a:rPr lang="en-GB" dirty="0"/>
               <a:t>Other late work loses 10% per day unless arranged in advance.</a:t>
             </a:r>
+          </a:p>
+          <a:p>
+            <a:r>
+              <a:rPr lang="en-GB" dirty="0"/>
+              <a:t>AI:</a:t>
+            </a:r>
+          </a:p>
+          <a:p>
+            <a:pPr lvl="1"/>
             <a:endParaRPr lang="en-US" dirty="0"/>
           </a:p>
         </p:txBody>
@@ -7283,7 +7512,7 @@
             <a:fld id="{45C00377-489B-40EC-B059-26BDDD2E89B9}" type="slidenum">
               <a:rPr lang="en-US" smtClean="0"/>
               <a:pPr/>
-              <a:t>14</a:t>
+              <a:t>15</a:t>
             </a:fld>
             <a:endParaRPr lang="en-US" dirty="0"/>
           </a:p>
@@ -7567,6 +7796,55 @@
                       </p:childTnLst>
                     </p:cTn>
                   </p:par>
+                  <p:par>
+                    <p:cTn id="19" fill="hold">
+                      <p:stCondLst>
+                        <p:cond delay="indefinite"/>
+                      </p:stCondLst>
+                      <p:childTnLst>
+                        <p:par>
+                          <p:cTn id="20" fill="hold">
+                            <p:stCondLst>
+                              <p:cond delay="0"/>
+                            </p:stCondLst>
+                            <p:childTnLst>
+                              <p:par>
+                                <p:cTn id="21" presetID="1" presetClass="entr" presetSubtype="0" fill="hold" grpId="0" nodeType="clickEffect">
+                                  <p:stCondLst>
+                                    <p:cond delay="0"/>
+                                  </p:stCondLst>
+                                  <p:childTnLst>
+                                    <p:set>
+                                      <p:cBhvr>
+                                        <p:cTn id="22" dur="1" fill="hold">
+                                          <p:stCondLst>
+                                            <p:cond delay="0"/>
+                                          </p:stCondLst>
+                                        </p:cTn>
+                                        <p:tgtEl>
+                                          <p:spTgt spid="3">
+                                            <p:txEl>
+                                              <p:pRg st="6" end="6"/>
+                                            </p:txEl>
+                                          </p:spTgt>
+                                        </p:tgtEl>
+                                        <p:attrNameLst>
+                                          <p:attrName>style.visibility</p:attrName>
+                                        </p:attrNameLst>
+                                      </p:cBhvr>
+                                      <p:to>
+                                        <p:strVal val="visible"/>
+                                      </p:to>
+                                    </p:set>
+                                  </p:childTnLst>
+                                </p:cTn>
+                              </p:par>
+                            </p:childTnLst>
+                          </p:cTn>
+                        </p:par>
+                      </p:childTnLst>
+                    </p:cTn>
+                  </p:par>
                 </p:childTnLst>
               </p:cTn>
               <p:prevCondLst>
@@ -7595,7 +7873,7 @@
 </p:sld>
 </file>
 
-<file path=ppt/slides/slide15.xml><?xml version="1.0" encoding="utf-8"?>
+<file path=ppt/slides/slide16.xml><?xml version="1.0" encoding="utf-8"?>
 <p:sld xmlns:a="http://schemas.openxmlformats.org/drawingml/2006/main" xmlns:r="http://schemas.openxmlformats.org/officeDocument/2006/relationships" xmlns:p="http://schemas.openxmlformats.org/presentationml/2006/main">
   <p:cSld>
     <p:spTree>
@@ -7806,7 +8084,7 @@
             <a:fld id="{45C00377-489B-40EC-B059-26BDDD2E89B9}" type="slidenum">
               <a:rPr lang="en-US" smtClean="0"/>
               <a:pPr/>
-              <a:t>15</a:t>
+              <a:t>16</a:t>
             </a:fld>
             <a:endParaRPr lang="en-US" dirty="0"/>
           </a:p>
@@ -8222,7 +8500,7 @@
 </p:sld>
 </file>
 
-<file path=ppt/slides/slide16.xml><?xml version="1.0" encoding="utf-8"?>
+<file path=ppt/slides/slide17.xml><?xml version="1.0" encoding="utf-8"?>
 <p:sld xmlns:a="http://schemas.openxmlformats.org/drawingml/2006/main" xmlns:r="http://schemas.openxmlformats.org/officeDocument/2006/relationships" xmlns:p="http://schemas.openxmlformats.org/presentationml/2006/main">
   <p:cSld>
     <p:spTree>
@@ -8341,7 +8619,7 @@
 </p:sld>
 </file>
 
-<file path=ppt/slides/slide17.xml><?xml version="1.0" encoding="utf-8"?>
+<file path=ppt/slides/slide18.xml><?xml version="1.0" encoding="utf-8"?>
 <p:sld xmlns:a="http://schemas.openxmlformats.org/drawingml/2006/main" xmlns:r="http://schemas.openxmlformats.org/officeDocument/2006/relationships" xmlns:p="http://schemas.openxmlformats.org/presentationml/2006/main" show="0">
   <p:cSld>
     <p:spTree>
@@ -8501,7 +8779,7 @@
 </p:sld>
 </file>
 
-<file path=ppt/slides/slide18.xml><?xml version="1.0" encoding="utf-8"?>
+<file path=ppt/slides/slide19.xml><?xml version="1.0" encoding="utf-8"?>
 <p:sld xmlns:a="http://schemas.openxmlformats.org/drawingml/2006/main" xmlns:r="http://schemas.openxmlformats.org/officeDocument/2006/relationships" xmlns:p="http://schemas.openxmlformats.org/presentationml/2006/main" show="0">
   <p:cSld>
     <p:spTree>
@@ -9417,6 +9695,422 @@
   <p:clrMapOvr>
     <a:masterClrMapping/>
   </p:clrMapOvr>
+  <p:timing>
+    <p:tnLst>
+      <p:par>
+        <p:cTn id="1" dur="indefinite" restart="never" nodeType="tmRoot">
+          <p:childTnLst>
+            <p:seq concurrent="1" nextAc="seek">
+              <p:cTn id="2" dur="indefinite" nodeType="mainSeq">
+                <p:childTnLst>
+                  <p:par>
+                    <p:cTn id="3" fill="hold">
+                      <p:stCondLst>
+                        <p:cond delay="indefinite"/>
+                      </p:stCondLst>
+                      <p:childTnLst>
+                        <p:par>
+                          <p:cTn id="4" fill="hold">
+                            <p:stCondLst>
+                              <p:cond delay="0"/>
+                            </p:stCondLst>
+                            <p:childTnLst>
+                              <p:par>
+                                <p:cTn id="5" presetID="1" presetClass="entr" presetSubtype="0" fill="hold" grpId="0" nodeType="clickEffect">
+                                  <p:stCondLst>
+                                    <p:cond delay="0"/>
+                                  </p:stCondLst>
+                                  <p:childTnLst>
+                                    <p:set>
+                                      <p:cBhvr>
+                                        <p:cTn id="6" dur="1" fill="hold">
+                                          <p:stCondLst>
+                                            <p:cond delay="0"/>
+                                          </p:stCondLst>
+                                        </p:cTn>
+                                        <p:tgtEl>
+                                          <p:spTgt spid="3">
+                                            <p:txEl>
+                                              <p:pRg st="0" end="0"/>
+                                            </p:txEl>
+                                          </p:spTgt>
+                                        </p:tgtEl>
+                                        <p:attrNameLst>
+                                          <p:attrName>style.visibility</p:attrName>
+                                        </p:attrNameLst>
+                                      </p:cBhvr>
+                                      <p:to>
+                                        <p:strVal val="visible"/>
+                                      </p:to>
+                                    </p:set>
+                                  </p:childTnLst>
+                                </p:cTn>
+                              </p:par>
+                              <p:par>
+                                <p:cTn id="7" presetID="1" presetClass="entr" presetSubtype="0" fill="hold" grpId="0" nodeType="withEffect">
+                                  <p:stCondLst>
+                                    <p:cond delay="0"/>
+                                  </p:stCondLst>
+                                  <p:childTnLst>
+                                    <p:set>
+                                      <p:cBhvr>
+                                        <p:cTn id="8" dur="1" fill="hold">
+                                          <p:stCondLst>
+                                            <p:cond delay="0"/>
+                                          </p:stCondLst>
+                                        </p:cTn>
+                                        <p:tgtEl>
+                                          <p:spTgt spid="3">
+                                            <p:txEl>
+                                              <p:pRg st="1" end="1"/>
+                                            </p:txEl>
+                                          </p:spTgt>
+                                        </p:tgtEl>
+                                        <p:attrNameLst>
+                                          <p:attrName>style.visibility</p:attrName>
+                                        </p:attrNameLst>
+                                      </p:cBhvr>
+                                      <p:to>
+                                        <p:strVal val="visible"/>
+                                      </p:to>
+                                    </p:set>
+                                  </p:childTnLst>
+                                </p:cTn>
+                              </p:par>
+                              <p:par>
+                                <p:cTn id="9" presetID="1" presetClass="entr" presetSubtype="0" fill="hold" grpId="0" nodeType="withEffect">
+                                  <p:stCondLst>
+                                    <p:cond delay="0"/>
+                                  </p:stCondLst>
+                                  <p:childTnLst>
+                                    <p:set>
+                                      <p:cBhvr>
+                                        <p:cTn id="10" dur="1" fill="hold">
+                                          <p:stCondLst>
+                                            <p:cond delay="0"/>
+                                          </p:stCondLst>
+                                        </p:cTn>
+                                        <p:tgtEl>
+                                          <p:spTgt spid="3">
+                                            <p:txEl>
+                                              <p:pRg st="2" end="2"/>
+                                            </p:txEl>
+                                          </p:spTgt>
+                                        </p:tgtEl>
+                                        <p:attrNameLst>
+                                          <p:attrName>style.visibility</p:attrName>
+                                        </p:attrNameLst>
+                                      </p:cBhvr>
+                                      <p:to>
+                                        <p:strVal val="visible"/>
+                                      </p:to>
+                                    </p:set>
+                                  </p:childTnLst>
+                                </p:cTn>
+                              </p:par>
+                              <p:par>
+                                <p:cTn id="11" presetID="1" presetClass="entr" presetSubtype="0" fill="hold" grpId="0" nodeType="withEffect">
+                                  <p:stCondLst>
+                                    <p:cond delay="0"/>
+                                  </p:stCondLst>
+                                  <p:childTnLst>
+                                    <p:set>
+                                      <p:cBhvr>
+                                        <p:cTn id="12" dur="1" fill="hold">
+                                          <p:stCondLst>
+                                            <p:cond delay="0"/>
+                                          </p:stCondLst>
+                                        </p:cTn>
+                                        <p:tgtEl>
+                                          <p:spTgt spid="3">
+                                            <p:txEl>
+                                              <p:pRg st="3" end="3"/>
+                                            </p:txEl>
+                                          </p:spTgt>
+                                        </p:tgtEl>
+                                        <p:attrNameLst>
+                                          <p:attrName>style.visibility</p:attrName>
+                                        </p:attrNameLst>
+                                      </p:cBhvr>
+                                      <p:to>
+                                        <p:strVal val="visible"/>
+                                      </p:to>
+                                    </p:set>
+                                  </p:childTnLst>
+                                </p:cTn>
+                              </p:par>
+                            </p:childTnLst>
+                          </p:cTn>
+                        </p:par>
+                      </p:childTnLst>
+                    </p:cTn>
+                  </p:par>
+                  <p:par>
+                    <p:cTn id="13" fill="hold">
+                      <p:stCondLst>
+                        <p:cond delay="indefinite"/>
+                      </p:stCondLst>
+                      <p:childTnLst>
+                        <p:par>
+                          <p:cTn id="14" fill="hold">
+                            <p:stCondLst>
+                              <p:cond delay="0"/>
+                            </p:stCondLst>
+                            <p:childTnLst>
+                              <p:par>
+                                <p:cTn id="15" presetID="1" presetClass="entr" presetSubtype="0" fill="hold" grpId="0" nodeType="clickEffect">
+                                  <p:stCondLst>
+                                    <p:cond delay="0"/>
+                                  </p:stCondLst>
+                                  <p:childTnLst>
+                                    <p:set>
+                                      <p:cBhvr>
+                                        <p:cTn id="16" dur="1" fill="hold">
+                                          <p:stCondLst>
+                                            <p:cond delay="0"/>
+                                          </p:stCondLst>
+                                        </p:cTn>
+                                        <p:tgtEl>
+                                          <p:spTgt spid="3">
+                                            <p:txEl>
+                                              <p:pRg st="4" end="4"/>
+                                            </p:txEl>
+                                          </p:spTgt>
+                                        </p:tgtEl>
+                                        <p:attrNameLst>
+                                          <p:attrName>style.visibility</p:attrName>
+                                        </p:attrNameLst>
+                                      </p:cBhvr>
+                                      <p:to>
+                                        <p:strVal val="visible"/>
+                                      </p:to>
+                                    </p:set>
+                                  </p:childTnLst>
+                                </p:cTn>
+                              </p:par>
+                              <p:par>
+                                <p:cTn id="17" presetID="1" presetClass="entr" presetSubtype="0" fill="hold" grpId="0" nodeType="withEffect">
+                                  <p:stCondLst>
+                                    <p:cond delay="0"/>
+                                  </p:stCondLst>
+                                  <p:childTnLst>
+                                    <p:set>
+                                      <p:cBhvr>
+                                        <p:cTn id="18" dur="1" fill="hold">
+                                          <p:stCondLst>
+                                            <p:cond delay="0"/>
+                                          </p:stCondLst>
+                                        </p:cTn>
+                                        <p:tgtEl>
+                                          <p:spTgt spid="3">
+                                            <p:txEl>
+                                              <p:pRg st="5" end="5"/>
+                                            </p:txEl>
+                                          </p:spTgt>
+                                        </p:tgtEl>
+                                        <p:attrNameLst>
+                                          <p:attrName>style.visibility</p:attrName>
+                                        </p:attrNameLst>
+                                      </p:cBhvr>
+                                      <p:to>
+                                        <p:strVal val="visible"/>
+                                      </p:to>
+                                    </p:set>
+                                  </p:childTnLst>
+                                </p:cTn>
+                              </p:par>
+                              <p:par>
+                                <p:cTn id="19" presetID="1" presetClass="entr" presetSubtype="0" fill="hold" grpId="0" nodeType="withEffect">
+                                  <p:stCondLst>
+                                    <p:cond delay="0"/>
+                                  </p:stCondLst>
+                                  <p:childTnLst>
+                                    <p:set>
+                                      <p:cBhvr>
+                                        <p:cTn id="20" dur="1" fill="hold">
+                                          <p:stCondLst>
+                                            <p:cond delay="0"/>
+                                          </p:stCondLst>
+                                        </p:cTn>
+                                        <p:tgtEl>
+                                          <p:spTgt spid="3">
+                                            <p:txEl>
+                                              <p:pRg st="6" end="6"/>
+                                            </p:txEl>
+                                          </p:spTgt>
+                                        </p:tgtEl>
+                                        <p:attrNameLst>
+                                          <p:attrName>style.visibility</p:attrName>
+                                        </p:attrNameLst>
+                                      </p:cBhvr>
+                                      <p:to>
+                                        <p:strVal val="visible"/>
+                                      </p:to>
+                                    </p:set>
+                                  </p:childTnLst>
+                                </p:cTn>
+                              </p:par>
+                              <p:par>
+                                <p:cTn id="21" presetID="1" presetClass="entr" presetSubtype="0" fill="hold" grpId="0" nodeType="withEffect">
+                                  <p:stCondLst>
+                                    <p:cond delay="0"/>
+                                  </p:stCondLst>
+                                  <p:childTnLst>
+                                    <p:set>
+                                      <p:cBhvr>
+                                        <p:cTn id="22" dur="1" fill="hold">
+                                          <p:stCondLst>
+                                            <p:cond delay="0"/>
+                                          </p:stCondLst>
+                                        </p:cTn>
+                                        <p:tgtEl>
+                                          <p:spTgt spid="3">
+                                            <p:txEl>
+                                              <p:pRg st="7" end="7"/>
+                                            </p:txEl>
+                                          </p:spTgt>
+                                        </p:tgtEl>
+                                        <p:attrNameLst>
+                                          <p:attrName>style.visibility</p:attrName>
+                                        </p:attrNameLst>
+                                      </p:cBhvr>
+                                      <p:to>
+                                        <p:strVal val="visible"/>
+                                      </p:to>
+                                    </p:set>
+                                  </p:childTnLst>
+                                </p:cTn>
+                              </p:par>
+                            </p:childTnLst>
+                          </p:cTn>
+                        </p:par>
+                      </p:childTnLst>
+                    </p:cTn>
+                  </p:par>
+                  <p:par>
+                    <p:cTn id="23" fill="hold">
+                      <p:stCondLst>
+                        <p:cond delay="indefinite"/>
+                      </p:stCondLst>
+                      <p:childTnLst>
+                        <p:par>
+                          <p:cTn id="24" fill="hold">
+                            <p:stCondLst>
+                              <p:cond delay="0"/>
+                            </p:stCondLst>
+                            <p:childTnLst>
+                              <p:par>
+                                <p:cTn id="25" presetID="1" presetClass="entr" presetSubtype="0" fill="hold" nodeType="clickEffect">
+                                  <p:stCondLst>
+                                    <p:cond delay="0"/>
+                                  </p:stCondLst>
+                                  <p:childTnLst>
+                                    <p:set>
+                                      <p:cBhvr>
+                                        <p:cTn id="26" dur="1" fill="hold">
+                                          <p:stCondLst>
+                                            <p:cond delay="0"/>
+                                          </p:stCondLst>
+                                        </p:cTn>
+                                        <p:tgtEl>
+                                          <p:spTgt spid="7"/>
+                                        </p:tgtEl>
+                                        <p:attrNameLst>
+                                          <p:attrName>style.visibility</p:attrName>
+                                        </p:attrNameLst>
+                                      </p:cBhvr>
+                                      <p:to>
+                                        <p:strVal val="visible"/>
+                                      </p:to>
+                                    </p:set>
+                                  </p:childTnLst>
+                                </p:cTn>
+                              </p:par>
+                              <p:par>
+                                <p:cTn id="27" presetID="1" presetClass="entr" presetSubtype="0" fill="hold" nodeType="withEffect">
+                                  <p:stCondLst>
+                                    <p:cond delay="0"/>
+                                  </p:stCondLst>
+                                  <p:childTnLst>
+                                    <p:set>
+                                      <p:cBhvr>
+                                        <p:cTn id="28" dur="1" fill="hold">
+                                          <p:stCondLst>
+                                            <p:cond delay="0"/>
+                                          </p:stCondLst>
+                                        </p:cTn>
+                                        <p:tgtEl>
+                                          <p:spTgt spid="8"/>
+                                        </p:tgtEl>
+                                        <p:attrNameLst>
+                                          <p:attrName>style.visibility</p:attrName>
+                                        </p:attrNameLst>
+                                      </p:cBhvr>
+                                      <p:to>
+                                        <p:strVal val="visible"/>
+                                      </p:to>
+                                    </p:set>
+                                  </p:childTnLst>
+                                </p:cTn>
+                              </p:par>
+                              <p:par>
+                                <p:cTn id="29" presetID="1" presetClass="entr" presetSubtype="0" fill="hold" nodeType="withEffect">
+                                  <p:stCondLst>
+                                    <p:cond delay="0"/>
+                                  </p:stCondLst>
+                                  <p:childTnLst>
+                                    <p:set>
+                                      <p:cBhvr>
+                                        <p:cTn id="30" dur="1" fill="hold">
+                                          <p:stCondLst>
+                                            <p:cond delay="0"/>
+                                          </p:stCondLst>
+                                        </p:cTn>
+                                        <p:tgtEl>
+                                          <p:spTgt spid="4101"/>
+                                        </p:tgtEl>
+                                        <p:attrNameLst>
+                                          <p:attrName>style.visibility</p:attrName>
+                                        </p:attrNameLst>
+                                      </p:cBhvr>
+                                      <p:to>
+                                        <p:strVal val="visible"/>
+                                      </p:to>
+                                    </p:set>
+                                  </p:childTnLst>
+                                </p:cTn>
+                              </p:par>
+                            </p:childTnLst>
+                          </p:cTn>
+                        </p:par>
+                      </p:childTnLst>
+                    </p:cTn>
+                  </p:par>
+                </p:childTnLst>
+              </p:cTn>
+              <p:prevCondLst>
+                <p:cond evt="onPrev" delay="0">
+                  <p:tgtEl>
+                    <p:sldTgt/>
+                  </p:tgtEl>
+                </p:cond>
+              </p:prevCondLst>
+              <p:nextCondLst>
+                <p:cond evt="onNext" delay="0">
+                  <p:tgtEl>
+                    <p:sldTgt/>
+                  </p:tgtEl>
+                </p:cond>
+              </p:nextCondLst>
+            </p:seq>
+          </p:childTnLst>
+        </p:cTn>
+      </p:par>
+    </p:tnLst>
+    <p:bldLst>
+      <p:bldP spid="3" grpId="0" build="p"/>
+    </p:bldLst>
+  </p:timing>
 </p:sld>
 </file>
 
@@ -9571,6 +10265,230 @@
   <p:clrMapOvr>
     <a:masterClrMapping/>
   </p:clrMapOvr>
+  <p:timing>
+    <p:tnLst>
+      <p:par>
+        <p:cTn id="1" dur="indefinite" restart="never" nodeType="tmRoot">
+          <p:childTnLst>
+            <p:seq concurrent="1" nextAc="seek">
+              <p:cTn id="2" dur="indefinite" nodeType="mainSeq">
+                <p:childTnLst>
+                  <p:par>
+                    <p:cTn id="3" fill="hold">
+                      <p:stCondLst>
+                        <p:cond delay="indefinite"/>
+                      </p:stCondLst>
+                      <p:childTnLst>
+                        <p:par>
+                          <p:cTn id="4" fill="hold">
+                            <p:stCondLst>
+                              <p:cond delay="0"/>
+                            </p:stCondLst>
+                            <p:childTnLst>
+                              <p:par>
+                                <p:cTn id="5" presetID="1" presetClass="entr" presetSubtype="0" fill="hold" grpId="0" nodeType="clickEffect">
+                                  <p:stCondLst>
+                                    <p:cond delay="0"/>
+                                  </p:stCondLst>
+                                  <p:childTnLst>
+                                    <p:set>
+                                      <p:cBhvr>
+                                        <p:cTn id="6" dur="1" fill="hold">
+                                          <p:stCondLst>
+                                            <p:cond delay="0"/>
+                                          </p:stCondLst>
+                                        </p:cTn>
+                                        <p:tgtEl>
+                                          <p:spTgt spid="3">
+                                            <p:txEl>
+                                              <p:pRg st="0" end="0"/>
+                                            </p:txEl>
+                                          </p:spTgt>
+                                        </p:tgtEl>
+                                        <p:attrNameLst>
+                                          <p:attrName>style.visibility</p:attrName>
+                                        </p:attrNameLst>
+                                      </p:cBhvr>
+                                      <p:to>
+                                        <p:strVal val="visible"/>
+                                      </p:to>
+                                    </p:set>
+                                  </p:childTnLst>
+                                </p:cTn>
+                              </p:par>
+                            </p:childTnLst>
+                          </p:cTn>
+                        </p:par>
+                      </p:childTnLst>
+                    </p:cTn>
+                  </p:par>
+                  <p:par>
+                    <p:cTn id="7" fill="hold">
+                      <p:stCondLst>
+                        <p:cond delay="indefinite"/>
+                      </p:stCondLst>
+                      <p:childTnLst>
+                        <p:par>
+                          <p:cTn id="8" fill="hold">
+                            <p:stCondLst>
+                              <p:cond delay="0"/>
+                            </p:stCondLst>
+                            <p:childTnLst>
+                              <p:par>
+                                <p:cTn id="9" presetID="1" presetClass="entr" presetSubtype="0" fill="hold" grpId="0" nodeType="clickEffect">
+                                  <p:stCondLst>
+                                    <p:cond delay="0"/>
+                                  </p:stCondLst>
+                                  <p:childTnLst>
+                                    <p:set>
+                                      <p:cBhvr>
+                                        <p:cTn id="10" dur="1" fill="hold">
+                                          <p:stCondLst>
+                                            <p:cond delay="0"/>
+                                          </p:stCondLst>
+                                        </p:cTn>
+                                        <p:tgtEl>
+                                          <p:spTgt spid="3">
+                                            <p:txEl>
+                                              <p:pRg st="1" end="1"/>
+                                            </p:txEl>
+                                          </p:spTgt>
+                                        </p:tgtEl>
+                                        <p:attrNameLst>
+                                          <p:attrName>style.visibility</p:attrName>
+                                        </p:attrNameLst>
+                                      </p:cBhvr>
+                                      <p:to>
+                                        <p:strVal val="visible"/>
+                                      </p:to>
+                                    </p:set>
+                                  </p:childTnLst>
+                                </p:cTn>
+                              </p:par>
+                              <p:par>
+                                <p:cTn id="11" presetID="1" presetClass="entr" presetSubtype="0" fill="hold" grpId="0" nodeType="withEffect">
+                                  <p:stCondLst>
+                                    <p:cond delay="0"/>
+                                  </p:stCondLst>
+                                  <p:childTnLst>
+                                    <p:set>
+                                      <p:cBhvr>
+                                        <p:cTn id="12" dur="1" fill="hold">
+                                          <p:stCondLst>
+                                            <p:cond delay="0"/>
+                                          </p:stCondLst>
+                                        </p:cTn>
+                                        <p:tgtEl>
+                                          <p:spTgt spid="3">
+                                            <p:txEl>
+                                              <p:pRg st="2" end="2"/>
+                                            </p:txEl>
+                                          </p:spTgt>
+                                        </p:tgtEl>
+                                        <p:attrNameLst>
+                                          <p:attrName>style.visibility</p:attrName>
+                                        </p:attrNameLst>
+                                      </p:cBhvr>
+                                      <p:to>
+                                        <p:strVal val="visible"/>
+                                      </p:to>
+                                    </p:set>
+                                  </p:childTnLst>
+                                </p:cTn>
+                              </p:par>
+                              <p:par>
+                                <p:cTn id="13" presetID="1" presetClass="entr" presetSubtype="0" fill="hold" grpId="0" nodeType="withEffect">
+                                  <p:stCondLst>
+                                    <p:cond delay="0"/>
+                                  </p:stCondLst>
+                                  <p:childTnLst>
+                                    <p:set>
+                                      <p:cBhvr>
+                                        <p:cTn id="14" dur="1" fill="hold">
+                                          <p:stCondLst>
+                                            <p:cond delay="0"/>
+                                          </p:stCondLst>
+                                        </p:cTn>
+                                        <p:tgtEl>
+                                          <p:spTgt spid="3">
+                                            <p:txEl>
+                                              <p:pRg st="3" end="3"/>
+                                            </p:txEl>
+                                          </p:spTgt>
+                                        </p:tgtEl>
+                                        <p:attrNameLst>
+                                          <p:attrName>style.visibility</p:attrName>
+                                        </p:attrNameLst>
+                                      </p:cBhvr>
+                                      <p:to>
+                                        <p:strVal val="visible"/>
+                                      </p:to>
+                                    </p:set>
+                                  </p:childTnLst>
+                                </p:cTn>
+                              </p:par>
+                              <p:par>
+                                <p:cTn id="15" presetID="1" presetClass="entr" presetSubtype="0" fill="hold" grpId="0" nodeType="withEffect">
+                                  <p:stCondLst>
+                                    <p:cond delay="0"/>
+                                  </p:stCondLst>
+                                  <p:childTnLst>
+                                    <p:set>
+                                      <p:cBhvr>
+                                        <p:cTn id="16" dur="1" fill="hold">
+                                          <p:stCondLst>
+                                            <p:cond delay="0"/>
+                                          </p:stCondLst>
+                                        </p:cTn>
+                                        <p:tgtEl>
+                                          <p:spTgt spid="3">
+                                            <p:txEl>
+                                              <p:pRg st="4" end="4"/>
+                                            </p:txEl>
+                                          </p:spTgt>
+                                        </p:tgtEl>
+                                        <p:attrNameLst>
+                                          <p:attrName>style.visibility</p:attrName>
+                                        </p:attrNameLst>
+                                      </p:cBhvr>
+                                      <p:to>
+                                        <p:strVal val="visible"/>
+                                      </p:to>
+                                    </p:set>
+                                  </p:childTnLst>
+                                </p:cTn>
+                              </p:par>
+                            </p:childTnLst>
+                          </p:cTn>
+                        </p:par>
+                      </p:childTnLst>
+                    </p:cTn>
+                  </p:par>
+                </p:childTnLst>
+              </p:cTn>
+              <p:prevCondLst>
+                <p:cond evt="onPrev" delay="0">
+                  <p:tgtEl>
+                    <p:sldTgt/>
+                  </p:tgtEl>
+                </p:cond>
+              </p:prevCondLst>
+              <p:nextCondLst>
+                <p:cond evt="onNext" delay="0">
+                  <p:tgtEl>
+                    <p:sldTgt/>
+                  </p:tgtEl>
+                </p:cond>
+              </p:nextCondLst>
+            </p:seq>
+          </p:childTnLst>
+        </p:cTn>
+      </p:par>
+    </p:tnLst>
+    <p:bldLst>
+      <p:bldP spid="3" grpId="0" build="p"/>
+    </p:bldLst>
+  </p:timing>
 </p:sld>
 </file>
 
@@ -10851,6 +11769,169 @@
           <p:cNvPr id="2" name="Title 1">
             <a:extLst>
               <a:ext uri="{FF2B5EF4-FFF2-40B4-BE49-F238E27FC236}">
+                <a16:creationId xmlns:a16="http://schemas.microsoft.com/office/drawing/2014/main" id="{F014D088-3050-867F-B3E5-9E16612D0D3A}"/>
+              </a:ext>
+            </a:extLst>
+          </p:cNvPr>
+          <p:cNvSpPr>
+            <a:spLocks noGrp="1"/>
+          </p:cNvSpPr>
+          <p:nvPr>
+            <p:ph type="title"/>
+          </p:nvPr>
+        </p:nvSpPr>
+        <p:spPr/>
+        <p:txBody>
+          <a:bodyPr/>
+          <a:lstStyle/>
+          <a:p>
+            <a:r>
+              <a:rPr lang="en-US" dirty="0"/>
+              <a:t>Working Definition for This Course</a:t>
+            </a:r>
+          </a:p>
+        </p:txBody>
+      </p:sp>
+      <p:sp>
+        <p:nvSpPr>
+          <p:cNvPr id="3" name="Content Placeholder 2">
+            <a:extLst>
+              <a:ext uri="{FF2B5EF4-FFF2-40B4-BE49-F238E27FC236}">
+                <a16:creationId xmlns:a16="http://schemas.microsoft.com/office/drawing/2014/main" id="{381EBCA9-1C5D-5F91-D1E8-E1CB478395B7}"/>
+              </a:ext>
+            </a:extLst>
+          </p:cNvPr>
+          <p:cNvSpPr>
+            <a:spLocks noGrp="1"/>
+          </p:cNvSpPr>
+          <p:nvPr>
+            <p:ph idx="1"/>
+          </p:nvPr>
+        </p:nvSpPr>
+        <p:spPr/>
+        <p:txBody>
+          <a:bodyPr/>
+          <a:lstStyle/>
+          <a:p>
+            <a:r>
+              <a:rPr lang="en-US" b="1" dirty="0"/>
+              <a:t>Sports Performance Analytics:</a:t>
+            </a:r>
+            <a:endParaRPr lang="en-US" dirty="0"/>
+          </a:p>
+          <a:p>
+            <a:pPr lvl="1"/>
+            <a:r>
+              <a:rPr lang="en-US" dirty="0"/>
+              <a:t>Management of structured</a:t>
+            </a:r>
+            <a:r>
+              <a:rPr lang="en-US" b="1" dirty="0"/>
+              <a:t> performance data</a:t>
+            </a:r>
+            <a:endParaRPr lang="en-US" dirty="0"/>
+          </a:p>
+          <a:p>
+            <a:pPr lvl="1"/>
+            <a:r>
+              <a:rPr lang="en-US" b="1" dirty="0"/>
+              <a:t>Application</a:t>
+            </a:r>
+            <a:r>
+              <a:rPr lang="en-US" dirty="0"/>
+              <a:t> of analytic models</a:t>
+            </a:r>
+          </a:p>
+          <a:p>
+            <a:pPr lvl="1"/>
+            <a:r>
+              <a:rPr lang="en-US" dirty="0"/>
+              <a:t>Inform </a:t>
+            </a:r>
+            <a:r>
+              <a:rPr lang="en-US" b="1" dirty="0"/>
+              <a:t>decision makers </a:t>
+            </a:r>
+          </a:p>
+          <a:p>
+            <a:pPr lvl="1"/>
+            <a:r>
+              <a:rPr lang="en-US" dirty="0"/>
+              <a:t>Gaining a </a:t>
+            </a:r>
+            <a:r>
+              <a:rPr lang="en-US" b="1" dirty="0"/>
+              <a:t>competitive advantage</a:t>
+            </a:r>
+            <a:endParaRPr lang="en-US" dirty="0"/>
+          </a:p>
+        </p:txBody>
+      </p:sp>
+      <p:sp>
+        <p:nvSpPr>
+          <p:cNvPr id="4" name="Slide Number Placeholder 3">
+            <a:extLst>
+              <a:ext uri="{FF2B5EF4-FFF2-40B4-BE49-F238E27FC236}">
+                <a16:creationId xmlns:a16="http://schemas.microsoft.com/office/drawing/2014/main" id="{6640E4C6-546A-788D-ECA4-04ECCF397FDD}"/>
+              </a:ext>
+            </a:extLst>
+          </p:cNvPr>
+          <p:cNvSpPr>
+            <a:spLocks noGrp="1"/>
+          </p:cNvSpPr>
+          <p:nvPr>
+            <p:ph type="sldNum" sz="quarter" idx="12"/>
+          </p:nvPr>
+        </p:nvSpPr>
+        <p:spPr/>
+        <p:txBody>
+          <a:bodyPr/>
+          <a:lstStyle/>
+          <a:p>
+            <a:fld id="{45C00377-489B-40EC-B059-26BDDD2E89B9}" type="slidenum">
+              <a:rPr lang="en-US" smtClean="0"/>
+              <a:pPr/>
+              <a:t>7</a:t>
+            </a:fld>
+            <a:endParaRPr lang="en-US" dirty="0"/>
+          </a:p>
+        </p:txBody>
+      </p:sp>
+    </p:spTree>
+    <p:extLst>
+      <p:ext uri="{BB962C8B-B14F-4D97-AF65-F5344CB8AC3E}">
+        <p14:creationId xmlns:p14="http://schemas.microsoft.com/office/powerpoint/2010/main" val="1930584826"/>
+      </p:ext>
+    </p:extLst>
+  </p:cSld>
+  <p:clrMapOvr>
+    <a:masterClrMapping/>
+  </p:clrMapOvr>
+</p:sld>
+</file>
+
+<file path=ppt/slides/slide8.xml><?xml version="1.0" encoding="utf-8"?>
+<p:sld xmlns:a="http://schemas.openxmlformats.org/drawingml/2006/main" xmlns:r="http://schemas.openxmlformats.org/officeDocument/2006/relationships" xmlns:p="http://schemas.openxmlformats.org/presentationml/2006/main">
+  <p:cSld>
+    <p:spTree>
+      <p:nvGrpSpPr>
+        <p:cNvPr id="1" name=""/>
+        <p:cNvGrpSpPr/>
+        <p:nvPr/>
+      </p:nvGrpSpPr>
+      <p:grpSpPr>
+        <a:xfrm>
+          <a:off x="0" y="0"/>
+          <a:ext cx="0" cy="0"/>
+          <a:chOff x="0" y="0"/>
+          <a:chExt cx="0" cy="0"/>
+        </a:xfrm>
+      </p:grpSpPr>
+      <p:sp>
+        <p:nvSpPr>
+          <p:cNvPr id="2" name="Title 1">
+            <a:extLst>
+              <a:ext uri="{FF2B5EF4-FFF2-40B4-BE49-F238E27FC236}">
                 <a16:creationId xmlns:a16="http://schemas.microsoft.com/office/drawing/2014/main" id="{1B9BBDF3-3F2B-46C8-EBB9-E76680C30537}"/>
               </a:ext>
             </a:extLst>
@@ -11052,7 +12133,7 @@
             <a:fld id="{45C00377-489B-40EC-B059-26BDDD2E89B9}" type="slidenum">
               <a:rPr lang="en-US" smtClean="0"/>
               <a:pPr/>
-              <a:t>7</a:t>
+              <a:t>8</a:t>
             </a:fld>
             <a:endParaRPr lang="en-US" dirty="0"/>
           </a:p>
@@ -11664,7 +12745,7 @@
 </p:sld>
 </file>
 
-<file path=ppt/slides/slide8.xml><?xml version="1.0" encoding="utf-8"?>
+<file path=ppt/slides/slide9.xml><?xml version="1.0" encoding="utf-8"?>
 <p:sld xmlns:a="http://schemas.openxmlformats.org/drawingml/2006/main" xmlns:r="http://schemas.openxmlformats.org/officeDocument/2006/relationships" xmlns:p="http://schemas.openxmlformats.org/presentationml/2006/main">
   <p:cSld>
     <p:spTree>
@@ -12072,537 +13153,6 @@
                                     <p:set>
                                       <p:cBhvr>
                                         <p:cTn id="22" dur="1" fill="hold">
-                                          <p:stCondLst>
-                                            <p:cond delay="0"/>
-                                          </p:stCondLst>
-                                        </p:cTn>
-                                        <p:tgtEl>
-                                          <p:spTgt spid="3">
-                                            <p:txEl>
-                                              <p:pRg st="8" end="8"/>
-                                            </p:txEl>
-                                          </p:spTgt>
-                                        </p:tgtEl>
-                                        <p:attrNameLst>
-                                          <p:attrName>style.visibility</p:attrName>
-                                        </p:attrNameLst>
-                                      </p:cBhvr>
-                                      <p:to>
-                                        <p:strVal val="visible"/>
-                                      </p:to>
-                                    </p:set>
-                                  </p:childTnLst>
-                                </p:cTn>
-                              </p:par>
-                            </p:childTnLst>
-                          </p:cTn>
-                        </p:par>
-                      </p:childTnLst>
-                    </p:cTn>
-                  </p:par>
-                </p:childTnLst>
-              </p:cTn>
-              <p:prevCondLst>
-                <p:cond evt="onPrev" delay="0">
-                  <p:tgtEl>
-                    <p:sldTgt/>
-                  </p:tgtEl>
-                </p:cond>
-              </p:prevCondLst>
-              <p:nextCondLst>
-                <p:cond evt="onNext" delay="0">
-                  <p:tgtEl>
-                    <p:sldTgt/>
-                  </p:tgtEl>
-                </p:cond>
-              </p:nextCondLst>
-            </p:seq>
-          </p:childTnLst>
-        </p:cTn>
-      </p:par>
-    </p:tnLst>
-    <p:bldLst>
-      <p:bldP spid="3" grpId="0" build="p"/>
-    </p:bldLst>
-  </p:timing>
-</p:sld>
-</file>
-
-<file path=ppt/slides/slide9.xml><?xml version="1.0" encoding="utf-8"?>
-<p:sld xmlns:a="http://schemas.openxmlformats.org/drawingml/2006/main" xmlns:r="http://schemas.openxmlformats.org/officeDocument/2006/relationships" xmlns:p="http://schemas.openxmlformats.org/presentationml/2006/main">
-  <p:cSld>
-    <p:spTree>
-      <p:nvGrpSpPr>
-        <p:cNvPr id="1" name=""/>
-        <p:cNvGrpSpPr/>
-        <p:nvPr/>
-      </p:nvGrpSpPr>
-      <p:grpSpPr>
-        <a:xfrm>
-          <a:off x="0" y="0"/>
-          <a:ext cx="0" cy="0"/>
-          <a:chOff x="0" y="0"/>
-          <a:chExt cx="0" cy="0"/>
-        </a:xfrm>
-      </p:grpSpPr>
-      <p:sp>
-        <p:nvSpPr>
-          <p:cNvPr id="2" name="Title 1">
-            <a:extLst>
-              <a:ext uri="{FF2B5EF4-FFF2-40B4-BE49-F238E27FC236}">
-                <a16:creationId xmlns:a16="http://schemas.microsoft.com/office/drawing/2014/main" id="{8C0CA267-07EE-A8C6-7CAD-A0096AFA34D4}"/>
-              </a:ext>
-            </a:extLst>
-          </p:cNvPr>
-          <p:cNvSpPr>
-            <a:spLocks noGrp="1"/>
-          </p:cNvSpPr>
-          <p:nvPr>
-            <p:ph type="title"/>
-          </p:nvPr>
-        </p:nvSpPr>
-        <p:spPr/>
-        <p:txBody>
-          <a:bodyPr>
-            <a:normAutofit/>
-          </a:bodyPr>
-          <a:lstStyle/>
-          <a:p>
-            <a:r>
-              <a:rPr lang="en-GB" dirty="0"/>
-              <a:t>Brainstorming Activity</a:t>
-            </a:r>
-            <a:endParaRPr lang="en-US" dirty="0"/>
-          </a:p>
-        </p:txBody>
-      </p:sp>
-      <p:sp>
-        <p:nvSpPr>
-          <p:cNvPr id="3" name="Content Placeholder 2">
-            <a:extLst>
-              <a:ext uri="{FF2B5EF4-FFF2-40B4-BE49-F238E27FC236}">
-                <a16:creationId xmlns:a16="http://schemas.microsoft.com/office/drawing/2014/main" id="{403D231D-5BDE-94C3-09E5-7361D0985BEB}"/>
-              </a:ext>
-            </a:extLst>
-          </p:cNvPr>
-          <p:cNvSpPr>
-            <a:spLocks noGrp="1"/>
-          </p:cNvSpPr>
-          <p:nvPr>
-            <p:ph idx="1"/>
-          </p:nvPr>
-        </p:nvSpPr>
-        <p:spPr/>
-        <p:txBody>
-          <a:bodyPr>
-            <a:normAutofit/>
-          </a:bodyPr>
-          <a:lstStyle/>
-          <a:p>
-            <a:pPr marL="0" indent="0">
-              <a:buNone/>
-            </a:pPr>
-            <a:r>
-              <a:rPr lang="en-GB" dirty="0"/>
-              <a:t>List a few example of data or analytics being used in sports.</a:t>
-            </a:r>
-          </a:p>
-          <a:p>
-            <a:pPr marL="0" indent="0">
-              <a:buNone/>
-            </a:pPr>
-            <a:endParaRPr lang="en-GB" dirty="0"/>
-          </a:p>
-          <a:p>
-            <a:pPr marL="0" indent="0">
-              <a:buNone/>
-            </a:pPr>
-            <a:r>
-              <a:rPr lang="en-GB" dirty="0"/>
-              <a:t>In pairs</a:t>
-            </a:r>
-          </a:p>
-          <a:p>
-            <a:pPr marL="514350" lvl="0" indent="-514350">
-              <a:buFont typeface="+mj-lt"/>
-              <a:buAutoNum type="arabicPeriod"/>
-            </a:pPr>
-            <a:r>
-              <a:rPr lang="en-GB" dirty="0"/>
-              <a:t>Give each person an opportunity to share.</a:t>
-            </a:r>
-          </a:p>
-          <a:p>
-            <a:pPr marL="514350" lvl="0" indent="-514350">
-              <a:buFont typeface="+mj-lt"/>
-              <a:buAutoNum type="arabicPeriod"/>
-            </a:pPr>
-            <a:r>
-              <a:rPr lang="en-GB" dirty="0"/>
-              <a:t>Select one or two ideas to discuss further.</a:t>
-            </a:r>
-          </a:p>
-          <a:p>
-            <a:pPr marL="514350" indent="-514350">
-              <a:buFont typeface="+mj-lt"/>
-              <a:buAutoNum type="arabicPeriod"/>
-            </a:pPr>
-            <a:r>
-              <a:rPr lang="en-GB" dirty="0"/>
-              <a:t>For each selected idea, consider:</a:t>
-            </a:r>
-          </a:p>
-          <a:p>
-            <a:pPr lvl="1"/>
-            <a:r>
-              <a:rPr lang="en-GB" dirty="0"/>
-              <a:t>What information was being collected or presented? </a:t>
-            </a:r>
-          </a:p>
-          <a:p>
-            <a:pPr lvl="1"/>
-            <a:r>
-              <a:rPr lang="en-GB" dirty="0"/>
-              <a:t>What was it being used for? To understand? To decide? </a:t>
-            </a:r>
-          </a:p>
-          <a:p>
-            <a:pPr lvl="1"/>
-            <a:r>
-              <a:rPr lang="en-GB" dirty="0"/>
-              <a:t>Did you find it useful, convincing, or questionable?</a:t>
-            </a:r>
-          </a:p>
-        </p:txBody>
-      </p:sp>
-    </p:spTree>
-    <p:extLst>
-      <p:ext uri="{BB962C8B-B14F-4D97-AF65-F5344CB8AC3E}">
-        <p14:creationId xmlns:p14="http://schemas.microsoft.com/office/powerpoint/2010/main" val="256497114"/>
-      </p:ext>
-    </p:extLst>
-  </p:cSld>
-  <p:clrMapOvr>
-    <a:masterClrMapping/>
-  </p:clrMapOvr>
-  <p:timing>
-    <p:tnLst>
-      <p:par>
-        <p:cTn id="1" dur="indefinite" restart="never" nodeType="tmRoot">
-          <p:childTnLst>
-            <p:seq concurrent="1" nextAc="seek">
-              <p:cTn id="2" dur="indefinite" nodeType="mainSeq">
-                <p:childTnLst>
-                  <p:par>
-                    <p:cTn id="3" fill="hold">
-                      <p:stCondLst>
-                        <p:cond delay="indefinite"/>
-                      </p:stCondLst>
-                      <p:childTnLst>
-                        <p:par>
-                          <p:cTn id="4" fill="hold">
-                            <p:stCondLst>
-                              <p:cond delay="0"/>
-                            </p:stCondLst>
-                            <p:childTnLst>
-                              <p:par>
-                                <p:cTn id="5" presetID="1" presetClass="entr" presetSubtype="0" fill="hold" grpId="0" nodeType="clickEffect">
-                                  <p:stCondLst>
-                                    <p:cond delay="0"/>
-                                  </p:stCondLst>
-                                  <p:childTnLst>
-                                    <p:set>
-                                      <p:cBhvr>
-                                        <p:cTn id="6" dur="1" fill="hold">
-                                          <p:stCondLst>
-                                            <p:cond delay="0"/>
-                                          </p:stCondLst>
-                                        </p:cTn>
-                                        <p:tgtEl>
-                                          <p:spTgt spid="3">
-                                            <p:txEl>
-                                              <p:pRg st="0" end="0"/>
-                                            </p:txEl>
-                                          </p:spTgt>
-                                        </p:tgtEl>
-                                        <p:attrNameLst>
-                                          <p:attrName>style.visibility</p:attrName>
-                                        </p:attrNameLst>
-                                      </p:cBhvr>
-                                      <p:to>
-                                        <p:strVal val="visible"/>
-                                      </p:to>
-                                    </p:set>
-                                  </p:childTnLst>
-                                </p:cTn>
-                              </p:par>
-                            </p:childTnLst>
-                          </p:cTn>
-                        </p:par>
-                      </p:childTnLst>
-                    </p:cTn>
-                  </p:par>
-                  <p:par>
-                    <p:cTn id="7" fill="hold">
-                      <p:stCondLst>
-                        <p:cond delay="indefinite"/>
-                      </p:stCondLst>
-                      <p:childTnLst>
-                        <p:par>
-                          <p:cTn id="8" fill="hold">
-                            <p:stCondLst>
-                              <p:cond delay="0"/>
-                            </p:stCondLst>
-                            <p:childTnLst>
-                              <p:par>
-                                <p:cTn id="9" presetID="1" presetClass="entr" presetSubtype="0" fill="hold" grpId="0" nodeType="clickEffect">
-                                  <p:stCondLst>
-                                    <p:cond delay="0"/>
-                                  </p:stCondLst>
-                                  <p:childTnLst>
-                                    <p:set>
-                                      <p:cBhvr>
-                                        <p:cTn id="10" dur="1" fill="hold">
-                                          <p:stCondLst>
-                                            <p:cond delay="0"/>
-                                          </p:stCondLst>
-                                        </p:cTn>
-                                        <p:tgtEl>
-                                          <p:spTgt spid="3">
-                                            <p:txEl>
-                                              <p:pRg st="2" end="2"/>
-                                            </p:txEl>
-                                          </p:spTgt>
-                                        </p:tgtEl>
-                                        <p:attrNameLst>
-                                          <p:attrName>style.visibility</p:attrName>
-                                        </p:attrNameLst>
-                                      </p:cBhvr>
-                                      <p:to>
-                                        <p:strVal val="visible"/>
-                                      </p:to>
-                                    </p:set>
-                                  </p:childTnLst>
-                                </p:cTn>
-                              </p:par>
-                            </p:childTnLst>
-                          </p:cTn>
-                        </p:par>
-                      </p:childTnLst>
-                    </p:cTn>
-                  </p:par>
-                  <p:par>
-                    <p:cTn id="11" fill="hold">
-                      <p:stCondLst>
-                        <p:cond delay="indefinite"/>
-                      </p:stCondLst>
-                      <p:childTnLst>
-                        <p:par>
-                          <p:cTn id="12" fill="hold">
-                            <p:stCondLst>
-                              <p:cond delay="0"/>
-                            </p:stCondLst>
-                            <p:childTnLst>
-                              <p:par>
-                                <p:cTn id="13" presetID="1" presetClass="entr" presetSubtype="0" fill="hold" grpId="0" nodeType="clickEffect">
-                                  <p:stCondLst>
-                                    <p:cond delay="0"/>
-                                  </p:stCondLst>
-                                  <p:childTnLst>
-                                    <p:set>
-                                      <p:cBhvr>
-                                        <p:cTn id="14" dur="1" fill="hold">
-                                          <p:stCondLst>
-                                            <p:cond delay="0"/>
-                                          </p:stCondLst>
-                                        </p:cTn>
-                                        <p:tgtEl>
-                                          <p:spTgt spid="3">
-                                            <p:txEl>
-                                              <p:pRg st="3" end="3"/>
-                                            </p:txEl>
-                                          </p:spTgt>
-                                        </p:tgtEl>
-                                        <p:attrNameLst>
-                                          <p:attrName>style.visibility</p:attrName>
-                                        </p:attrNameLst>
-                                      </p:cBhvr>
-                                      <p:to>
-                                        <p:strVal val="visible"/>
-                                      </p:to>
-                                    </p:set>
-                                  </p:childTnLst>
-                                </p:cTn>
-                              </p:par>
-                            </p:childTnLst>
-                          </p:cTn>
-                        </p:par>
-                      </p:childTnLst>
-                    </p:cTn>
-                  </p:par>
-                  <p:par>
-                    <p:cTn id="15" fill="hold">
-                      <p:stCondLst>
-                        <p:cond delay="indefinite"/>
-                      </p:stCondLst>
-                      <p:childTnLst>
-                        <p:par>
-                          <p:cTn id="16" fill="hold">
-                            <p:stCondLst>
-                              <p:cond delay="0"/>
-                            </p:stCondLst>
-                            <p:childTnLst>
-                              <p:par>
-                                <p:cTn id="17" presetID="1" presetClass="entr" presetSubtype="0" fill="hold" grpId="0" nodeType="clickEffect">
-                                  <p:stCondLst>
-                                    <p:cond delay="0"/>
-                                  </p:stCondLst>
-                                  <p:childTnLst>
-                                    <p:set>
-                                      <p:cBhvr>
-                                        <p:cTn id="18" dur="1" fill="hold">
-                                          <p:stCondLst>
-                                            <p:cond delay="0"/>
-                                          </p:stCondLst>
-                                        </p:cTn>
-                                        <p:tgtEl>
-                                          <p:spTgt spid="3">
-                                            <p:txEl>
-                                              <p:pRg st="4" end="4"/>
-                                            </p:txEl>
-                                          </p:spTgt>
-                                        </p:tgtEl>
-                                        <p:attrNameLst>
-                                          <p:attrName>style.visibility</p:attrName>
-                                        </p:attrNameLst>
-                                      </p:cBhvr>
-                                      <p:to>
-                                        <p:strVal val="visible"/>
-                                      </p:to>
-                                    </p:set>
-                                  </p:childTnLst>
-                                </p:cTn>
-                              </p:par>
-                            </p:childTnLst>
-                          </p:cTn>
-                        </p:par>
-                      </p:childTnLst>
-                    </p:cTn>
-                  </p:par>
-                  <p:par>
-                    <p:cTn id="19" fill="hold">
-                      <p:stCondLst>
-                        <p:cond delay="indefinite"/>
-                      </p:stCondLst>
-                      <p:childTnLst>
-                        <p:par>
-                          <p:cTn id="20" fill="hold">
-                            <p:stCondLst>
-                              <p:cond delay="0"/>
-                            </p:stCondLst>
-                            <p:childTnLst>
-                              <p:par>
-                                <p:cTn id="21" presetID="1" presetClass="entr" presetSubtype="0" fill="hold" grpId="0" nodeType="clickEffect">
-                                  <p:stCondLst>
-                                    <p:cond delay="0"/>
-                                  </p:stCondLst>
-                                  <p:childTnLst>
-                                    <p:set>
-                                      <p:cBhvr>
-                                        <p:cTn id="22" dur="1" fill="hold">
-                                          <p:stCondLst>
-                                            <p:cond delay="0"/>
-                                          </p:stCondLst>
-                                        </p:cTn>
-                                        <p:tgtEl>
-                                          <p:spTgt spid="3">
-                                            <p:txEl>
-                                              <p:pRg st="5" end="5"/>
-                                            </p:txEl>
-                                          </p:spTgt>
-                                        </p:tgtEl>
-                                        <p:attrNameLst>
-                                          <p:attrName>style.visibility</p:attrName>
-                                        </p:attrNameLst>
-                                      </p:cBhvr>
-                                      <p:to>
-                                        <p:strVal val="visible"/>
-                                      </p:to>
-                                    </p:set>
-                                  </p:childTnLst>
-                                </p:cTn>
-                              </p:par>
-                              <p:par>
-                                <p:cTn id="23" presetID="1" presetClass="entr" presetSubtype="0" fill="hold" grpId="0" nodeType="withEffect">
-                                  <p:stCondLst>
-                                    <p:cond delay="0"/>
-                                  </p:stCondLst>
-                                  <p:childTnLst>
-                                    <p:set>
-                                      <p:cBhvr>
-                                        <p:cTn id="24" dur="1" fill="hold">
-                                          <p:stCondLst>
-                                            <p:cond delay="0"/>
-                                          </p:stCondLst>
-                                        </p:cTn>
-                                        <p:tgtEl>
-                                          <p:spTgt spid="3">
-                                            <p:txEl>
-                                              <p:pRg st="6" end="6"/>
-                                            </p:txEl>
-                                          </p:spTgt>
-                                        </p:tgtEl>
-                                        <p:attrNameLst>
-                                          <p:attrName>style.visibility</p:attrName>
-                                        </p:attrNameLst>
-                                      </p:cBhvr>
-                                      <p:to>
-                                        <p:strVal val="visible"/>
-                                      </p:to>
-                                    </p:set>
-                                  </p:childTnLst>
-                                </p:cTn>
-                              </p:par>
-                              <p:par>
-                                <p:cTn id="25" presetID="1" presetClass="entr" presetSubtype="0" fill="hold" grpId="0" nodeType="withEffect">
-                                  <p:stCondLst>
-                                    <p:cond delay="0"/>
-                                  </p:stCondLst>
-                                  <p:childTnLst>
-                                    <p:set>
-                                      <p:cBhvr>
-                                        <p:cTn id="26" dur="1" fill="hold">
-                                          <p:stCondLst>
-                                            <p:cond delay="0"/>
-                                          </p:stCondLst>
-                                        </p:cTn>
-                                        <p:tgtEl>
-                                          <p:spTgt spid="3">
-                                            <p:txEl>
-                                              <p:pRg st="7" end="7"/>
-                                            </p:txEl>
-                                          </p:spTgt>
-                                        </p:tgtEl>
-                                        <p:attrNameLst>
-                                          <p:attrName>style.visibility</p:attrName>
-                                        </p:attrNameLst>
-                                      </p:cBhvr>
-                                      <p:to>
-                                        <p:strVal val="visible"/>
-                                      </p:to>
-                                    </p:set>
-                                  </p:childTnLst>
-                                </p:cTn>
-                              </p:par>
-                              <p:par>
-                                <p:cTn id="27" presetID="1" presetClass="entr" presetSubtype="0" fill="hold" grpId="0" nodeType="withEffect">
-                                  <p:stCondLst>
-                                    <p:cond delay="0"/>
-                                  </p:stCondLst>
-                                  <p:childTnLst>
-                                    <p:set>
-                                      <p:cBhvr>
-                                        <p:cTn id="28" dur="1" fill="hold">
                                           <p:stCondLst>
                                             <p:cond delay="0"/>
                                           </p:stCondLst>
